--- a/Mandat_VTB.pptx
+++ b/Mandat_VTB.pptx
@@ -133,7 +133,7 @@
   <p:extLst>
     <p:ext uri="{521415D9-36F7-43E2-AB2F-B90AF26B5E84}">
       <p14:sectionLst xmlns:p14="http://schemas.microsoft.com/office/powerpoint/2010/main">
-        <p14:section name="Питч · 5 минут" id="{42bae044-a584-5d99-1150-1916476af08d}">
+        <p14:section name="Питч · 5 минут" id="{d1c3bb42-218e-f111-ed0f-c5e5a2436fd5}">
           <p14:sldIdLst>
             <p14:sldId id="256"/>
             <p14:sldId id="257"/>
@@ -151,7 +151,7 @@
             <p14:sldId id="269"/>
           </p14:sldIdLst>
         </p14:section>
-        <p14:section name="Приложение для вопросов жюри" id="{915f319b-a27a-5ca8-bd48-0efbac920bde}">
+        <p14:section name="Приложение для вопросов жюри" id="{31ed96b4-6521-7f77-ee4a-352d8d4fc437}">
           <p14:sldIdLst>
             <p14:sldId id="270"/>
             <p14:sldId id="271"/>
@@ -5947,7 +5947,7 @@
                   <a:schemeClr val="bg1"/>
                 </a:solidFill>
               </a:rPr>
-              <a:t>корпоративных клиентов ВТБ (МСФО за 1П 2026) — у каждого есть подписанты и представители, которые меняются</a:t>
+              <a:t>предприятий и предпринимателей у ВТБ (по пресс-релизу к МСФО за 1П 2026) — у каждого есть подписанты и представители, которые меняются</a:t>
             </a:r>
             <a:endParaRPr lang="en-US" sz="1500" dirty="0"/>
           </a:p>
@@ -33473,7 +33473,7 @@
                   <a:schemeClr val="accent4"/>
                 </a:solidFill>
               </a:rPr>
-              <a:t>Источники: ВТБ, МСФО за 1П 2026 (≈1,8 млн корпоративных клиентов; altapress.ru, 29.07.2026); Банк России, I кв. 2026. Доли и минуты — допущения команды; расчёт: python scripts/effect_model.py --scenarios</a:t>
+              <a:t>Источники: ВТБ, МСФО за 1П 2026 (≈1,8 млн предприятий и предпринимателей; пересказ пресс-релиза, altapress.ru, 29.07.2026; первичный источник не открыт); Банк России, I кв. 2026. Доли и минуты — допущения команды; расчёт: python scripts/effect_model.py --scenarios</a:t>
             </a:r>
             <a:endParaRPr lang="en-US" sz="1000" dirty="0"/>
           </a:p>
@@ -33559,7 +33559,7 @@
                   <a:schemeClr val="accent4"/>
                 </a:solidFill>
               </a:rPr>
-              <a:t>≈1,8 млн корпоративных клиентов × доля с событием представительства (10 / 15 / 25%) × сэкономленные минуты на кейс, включая разбор (20 / 30 / 40) ÷ 60 ÷ 1 800 ч на ставку</a:t>
+              <a:t>≈1,8 млн предприятий и ИП × доля с событием представительства (10 / 15 / 25%) × сэкономленные минуты на кейс, включая разбор (20 / 30 / 40) ÷ 60 ÷ 1 800 ч на ставку</a:t>
             </a:r>
             <a:endParaRPr lang="en-US" sz="1300" dirty="0"/>
           </a:p>

--- a/Mandat_VTB.pptx
+++ b/Mandat_VTB.pptx
@@ -133,7 +133,7 @@
   <p:extLst>
     <p:ext uri="{521415D9-36F7-43E2-AB2F-B90AF26B5E84}">
       <p14:sectionLst xmlns:p14="http://schemas.microsoft.com/office/powerpoint/2010/main">
-        <p14:section name="Питч · 5 минут" id="{d1c3bb42-218e-f111-ed0f-c5e5a2436fd5}">
+        <p14:section name="Питч · 5 минут" id="{41e23d32-2cca-63e5-00fa-5c5ae68e3539}">
           <p14:sldIdLst>
             <p14:sldId id="256"/>
             <p14:sldId id="257"/>
@@ -151,7 +151,7 @@
             <p14:sldId id="269"/>
           </p14:sldIdLst>
         </p14:section>
-        <p14:section name="Приложение для вопросов жюри" id="{31ed96b4-6521-7f77-ee4a-352d8d4fc437}">
+        <p14:section name="Приложение для вопросов жюри" id="{491995d3-1f64-2e2c-832c-cc773ac3cca3}">
           <p14:sldIdLst>
             <p14:sldId id="270"/>
             <p14:sldId id="271"/>
@@ -3328,7 +3328,7 @@
           <a:p>
             <a:r>
               <a:rPr lang="en-US" dirty="0"/>
-              <a:t>[1:30–2:05] Так выглядит вердикт. Директор, выдавший доверенность, сменился полгода назад, но доверенность не отменена — по ГК она действует. «Мандат» подтверждает и ставит сигнал, а не отказывает. Каждая строка — с доказательством: ГРН записи ЕГРЮЛ, путь до поля МЧД, норма. Та же компания, но директор сменился 19 дней назад, — на разбор с приоритетом P1 и сроком четыре часа. А если отменили основную доверенность, передоверие теряет силу — опровергнуто.</a:t>
+              <a:t>[1:30–2:05] Так выглядит вердикт. Директор, выдавший доверенность, сменился полгода назад, но доверенность не отменена — по ГК она действует. Когда юрист отметил, что устав операцию не ограничивает, «Мандат» подтверждает и ставит сигнал, а не отказывает; в демо эта отметка синтетическая, без неё тот же кейс уходит на разбор. Каждая строка — с доказательством: ГРН записи ЕГРЮЛ, путь до поля МЧД, норма. Та же компания, но директор сменился 19 дней назад, — на разбор с приоритетом P1 и сроком четыре часа. А если отменили основную доверенность, передоверие теряет силу — опровергнуто.</a:t>
             </a:r>
             <a:endParaRPr lang="en-US" dirty="0"/>
           </a:p>
@@ -6093,7 +6093,7 @@
                   <a:schemeClr val="accent4"/>
                 </a:solidFill>
               </a:rPr>
-              <a:t>Источники: vtb.ru — «Комплект МЧД и КЭП» в «ВТБ Бизнес», 10.2026; репозиторий «Мандата» v0.3.0: 312 автотестов, evidence.json от 13.10.2026</a:t>
+              <a:t>Источники: vtb.ru — «Комплект МЧД и КЭП» в «ВТБ Бизнес», 10.2026; репозиторий «Мандата» v0.3.0: 322 автотеста, evidence.json от 13.10.2026</a:t>
             </a:r>
             <a:endParaRPr lang="en-US" sz="1000" dirty="0"/>
           </a:p>
@@ -6920,7 +6920,7 @@
                   <a:schemeClr val="bg1"/>
                 </a:solidFill>
               </a:rPr>
-              <a:t>36 правил, 13 демо-кейсов, CLI и HTTP API</a:t>
+              <a:t>36 правил, 14 демо-кейсов, CLI и HTTP API</a:t>
             </a:r>
             <a:endParaRPr lang="en-US" sz="1500" dirty="0"/>
           </a:p>
@@ -6956,7 +6956,7 @@
                   <a:schemeClr val="bg1"/>
                 </a:solidFill>
               </a:rPr>
-              <a:t>312 автотестов проходят, каждое число воспроизводится командой</a:t>
+              <a:t>322 автотеста проходят, каждое число воспроизводится командой</a:t>
             </a:r>
             <a:endParaRPr lang="en-US" sz="1500" dirty="0"/>
           </a:p>
@@ -22356,7 +22356,7 @@
                           <a:ea typeface="Calibri" pitchFamily="34" charset="-122"/>
                           <a:cs typeface="Calibri" pitchFamily="34" charset="-120"/>
                         </a:rPr>
-                        <a:t>Ядро, 36 правил, журнал, мониторинг, удостоверения. Заглушки — источники данных; каждый отчёт сам это показывает</a:t>
+                        <a:t>Ядро, 36 правил, журнал, мониторинг (Standard Webhooks), роли API, SBOM. Заглушки — реестр ФНС, ЕФРСБ, КЭП</a:t>
                       </a:r>
                       <a:endParaRPr lang="en-US" sz="1300" dirty="0">
                         <a:latin typeface="Calibri" charset="0"/>
@@ -22426,7 +22426,7 @@
                           <a:ea typeface="Calibri" pitchFamily="34" charset="-122"/>
                           <a:cs typeface="Calibri" pitchFamily="34" charset="-120"/>
                         </a:rPr>
-                        <a:t>Сколько «на разбор» получат сотрудники?</a:t>
+                        <a:t>Почему почти нет «подтверждено»?</a:t>
                       </a:r>
                       <a:endParaRPr lang="en-US" sz="1300" dirty="0">
                         <a:latin typeface="Calibri" charset="0"/>
@@ -22494,7 +22494,7 @@
                           <a:ea typeface="Calibri" pitchFamily="34" charset="-122"/>
                           <a:cs typeface="Calibri" pitchFamily="34" charset="-120"/>
                         </a:rPr>
-                        <a:t>На корпусе 61%, на реальном потоке — вторая метрика пилота с порогом банка</a:t>
+                        <a:t>«Да» — только если закрыт и устав; без разметки устава 61% корпуса уходит человеку</a:t>
                       </a:r>
                       <a:endParaRPr lang="en-US" sz="1300" dirty="0">
                         <a:latin typeface="Calibri" charset="0"/>
@@ -23636,7 +23636,7 @@
                           <a:ea typeface="Calibri" pitchFamily="34" charset="-122"/>
                           <a:cs typeface="Calibri" pitchFamily="34" charset="-120"/>
                         </a:rPr>
-                        <a:t>312 автотестов проходят (v0.3.0, evidence.json), независимая проверка на Cedar, реестр утверждений: каждое число воспроизводится командой</a:t>
+                        <a:t>322 автотеста проходят (v0.3.0, evidence.json), независимая проверка на Cedar, реестр утверждений: каждое число воспроизводится командой</a:t>
                       </a:r>
                       <a:endParaRPr lang="en-US" sz="1300" dirty="0">
                         <a:latin typeface="Calibri" charset="0"/>
@@ -29255,7 +29255,7 @@
                   <a:schemeClr val="accent4"/>
                 </a:solidFill>
               </a:rPr>
-              <a:t>Демо-кейсы 10, 05 и 11 из репозитория «Мандата»; данные вымышлены. Реестр МЧД и проверка КЭП в стенде — заглушки, это видно в каждом отчёте</a:t>
+              <a:t>Демо-кейсы 14, 05 и 11 из репозитория «Мандата»; данные вымышлены, отметка юриста об уставе в кейсе 14 синтетическая. Реестр МЧД и проверка КЭП в стенде — заглушки, это видно в каждом отчёте</a:t>
             </a:r>
             <a:endParaRPr lang="en-US" sz="1000" dirty="0"/>
           </a:p>
@@ -29325,7 +29325,7 @@
                   <a:schemeClr val="tx2"/>
                 </a:solidFill>
               </a:rPr>
-              <a:t>Кейс 10 · ООО «Ясная поляна» · синтетические данные</a:t>
+              <a:t>Кейс 14 · синтетическая отметка об уставе</a:t>
             </a:r>
             <a:endParaRPr lang="en-US" sz="1300" dirty="0"/>
           </a:p>

--- a/Mandat_VTB.pptx
+++ b/Mandat_VTB.pptx
@@ -133,7 +133,7 @@
   <p:extLst>
     <p:ext uri="{521415D9-36F7-43E2-AB2F-B90AF26B5E84}">
       <p14:sectionLst xmlns:p14="http://schemas.microsoft.com/office/powerpoint/2010/main">
-        <p14:section name="Питч · 5 минут" id="{41e23d32-2cca-63e5-00fa-5c5ae68e3539}">
+        <p14:section name="Питч · 5 минут" id="{dafa199d-4ecb-7b22-1ebd-69f42d177d0c}">
           <p14:sldIdLst>
             <p14:sldId id="256"/>
             <p14:sldId id="257"/>
@@ -151,7 +151,7 @@
             <p14:sldId id="269"/>
           </p14:sldIdLst>
         </p14:section>
-        <p14:section name="Приложение для вопросов жюри" id="{491995d3-1f64-2e2c-832c-cc773ac3cca3}">
+        <p14:section name="Приложение для вопросов жюри" id="{e50200b7-bd51-a77a-2e29-236081daeec0}">
           <p14:sldIdLst>
             <p14:sldId id="270"/>
             <p14:sldId id="271"/>
@@ -6093,7 +6093,7 @@
                   <a:schemeClr val="accent4"/>
                 </a:solidFill>
               </a:rPr>
-              <a:t>Источники: vtb.ru — «Комплект МЧД и КЭП» в «ВТБ Бизнес», 10.2026; репозиторий «Мандата» v0.3.0: 322 автотеста, evidence.json от 13.10.2026</a:t>
+              <a:t>Источники: vtb.ru — «Комплект МЧД и КЭП» в «ВТБ Бизнес», 10.2026; репозиторий «Мандата» v0.3.0: 584 автотеста, evidence.json от 13.10.2026</a:t>
             </a:r>
             <a:endParaRPr lang="en-US" sz="1000" dirty="0"/>
           </a:p>
@@ -6525,7 +6525,7 @@
                   <a:schemeClr val="bg1"/>
                 </a:solidFill>
               </a:rPr>
-              <a:t>36 правил с нормой</a:t>
+              <a:t>39 правил с нормой</a:t>
             </a:r>
             <a:endParaRPr lang="en-US" sz="1400" dirty="0"/>
           </a:p>
@@ -6920,7 +6920,7 @@
                   <a:schemeClr val="bg1"/>
                 </a:solidFill>
               </a:rPr>
-              <a:t>36 правил, 14 демо-кейсов, CLI и HTTP API</a:t>
+              <a:t>39 правил, 14 демо-кейсов, CLI и HTTP API</a:t>
             </a:r>
             <a:endParaRPr lang="en-US" sz="1500" dirty="0"/>
           </a:p>
@@ -6956,7 +6956,7 @@
                   <a:schemeClr val="bg1"/>
                 </a:solidFill>
               </a:rPr>
-              <a:t>322 автотеста проходят, каждое число воспроизводится командой</a:t>
+              <a:t>584 автотеста проходят, каждое число воспроизводится командой</a:t>
             </a:r>
             <a:endParaRPr lang="en-US" sz="1500" dirty="0"/>
           </a:p>
@@ -11693,7 +11693,7 @@
                   <a:schemeClr val="bg1"/>
                 </a:solidFill>
               </a:rPr>
-              <a:t>36 правил со ссылкой на норму: что они ловят</a:t>
+              <a:t>39 правил со ссылкой на норму: что они ловят</a:t>
             </a:r>
             <a:endParaRPr lang="en-US" sz="2800" dirty="0"/>
           </a:p>
@@ -21528,7 +21528,7 @@
                           <a:ea typeface="Calibri" pitchFamily="34" charset="-122"/>
                           <a:cs typeface="Calibri" pitchFamily="34" charset="-120"/>
                         </a:rPr>
-                        <a:t>Реестр отвечает «действует или отменена». Мы — покрывает ли МЧД эту операцию у этой компании на эту дату, с ЕГРЮЛ, уставом, передоверием и событиями. Статус реестра — одно из 36 правил</a:t>
+                        <a:t>Реестр отвечает «действует или отменена». Мы — покрывает ли МЧД эту операцию у этой компании на эту дату, с ЕГРЮЛ, уставом, передоверием и событиями. Статус реестра — одно из 39 правил</a:t>
                       </a:r>
                       <a:endParaRPr lang="en-US" sz="1300" dirty="0">
                         <a:latin typeface="Calibri" charset="0"/>
@@ -22356,7 +22356,7 @@
                           <a:ea typeface="Calibri" pitchFamily="34" charset="-122"/>
                           <a:cs typeface="Calibri" pitchFamily="34" charset="-120"/>
                         </a:rPr>
-                        <a:t>Ядро, 36 правил, журнал, мониторинг (Standard Webhooks), роли API, SBOM. Заглушки — реестр ФНС, ЕФРСБ, КЭП</a:t>
+                        <a:t>Ядро, 39 правил, журнал, мониторинг (Standard Webhooks), роли API, SBOM. Заглушки — реестр ФНС, ЕФРСБ, КЭП</a:t>
                       </a:r>
                       <a:endParaRPr lang="en-US" sz="1300" dirty="0">
                         <a:latin typeface="Calibri" charset="0"/>
@@ -23636,7 +23636,7 @@
                           <a:ea typeface="Calibri" pitchFamily="34" charset="-122"/>
                           <a:cs typeface="Calibri" pitchFamily="34" charset="-120"/>
                         </a:rPr>
-                        <a:t>322 автотеста проходят (v0.3.0, evidence.json), независимая проверка на Cedar, реестр утверждений: каждое число воспроизводится командой</a:t>
+                        <a:t>584 автотеста проходят (v0.3.0, evidence.json), независимая проверка на Cedar, реестр утверждений: каждое число воспроизводится командой</a:t>
                       </a:r>
                       <a:endParaRPr lang="en-US" sz="1300" dirty="0">
                         <a:latin typeface="Calibri" charset="0"/>
@@ -25735,7 +25735,7 @@
                   <a:schemeClr val="bg1"/>
                 </a:solidFill>
               </a:rPr>
-              <a:t>сверка формата с официальной XSD</a:t>
+              <a:t>сверка формата с официальной XSD ФНС (пока — с открытыми копиями)</a:t>
             </a:r>
             <a:endParaRPr lang="en-US" sz="1500" dirty="0"/>
           </a:p>
@@ -28965,7 +28965,7 @@
                   <a:schemeClr val="bg1"/>
                 </a:solidFill>
               </a:rPr>
-              <a:t>граф полномочий на дату, 36 правил с нормой</a:t>
+              <a:t>граф полномочий на дату, 39 правил с нормой</a:t>
             </a:r>
             <a:endParaRPr lang="en-US" sz="1400" dirty="0"/>
           </a:p>
@@ -32814,7 +32814,7 @@
                   <a:schemeClr val="bg1"/>
                 </a:solidFill>
               </a:rPr>
-              <a:t>36 правил с нормой</a:t>
+              <a:t>39 правил с нормой</a:t>
             </a:r>
             <a:endParaRPr lang="en-US" sz="1500" dirty="0"/>
           </a:p>

--- a/Mandat_VTB.pptx
+++ b/Mandat_VTB.pptx
@@ -133,7 +133,7 @@
   <p:extLst>
     <p:ext uri="{521415D9-36F7-43E2-AB2F-B90AF26B5E84}">
       <p14:sectionLst xmlns:p14="http://schemas.microsoft.com/office/powerpoint/2010/main">
-        <p14:section name="Питч · 5 минут" id="{dafa199d-4ecb-7b22-1ebd-69f42d177d0c}">
+        <p14:section name="Питч · 5 минут" id="{c676c9ee-fe05-524d-6924-e86738b3036c}">
           <p14:sldIdLst>
             <p14:sldId id="256"/>
             <p14:sldId id="257"/>
@@ -151,7 +151,7 @@
             <p14:sldId id="269"/>
           </p14:sldIdLst>
         </p14:section>
-        <p14:section name="Приложение для вопросов жюри" id="{e50200b7-bd51-a77a-2e29-236081daeec0}">
+        <p14:section name="Приложение для вопросов жюри" id="{b2623680-25d9-8a8e-7c62-e60e33e9473b}">
           <p14:sldIdLst>
             <p14:sldId id="270"/>
             <p14:sldId id="271"/>
@@ -6093,7 +6093,7 @@
                   <a:schemeClr val="accent4"/>
                 </a:solidFill>
               </a:rPr>
-              <a:t>Источники: vtb.ru — «Комплект МЧД и КЭП» в «ВТБ Бизнес», 10.2026; репозиторий «Мандата» v0.3.0: 584 автотеста, evidence.json от 13.10.2026</a:t>
+              <a:t>Источники: vtb.ru — «Комплект МЧД и КЭП» в «ВТБ Бизнес», 10.2026; репозиторий «Мандата» v0.3.0: 585 автотестов, evidence.json от 13.10.2026</a:t>
             </a:r>
             <a:endParaRPr lang="en-US" sz="1000" dirty="0"/>
           </a:p>
@@ -6956,7 +6956,7 @@
                   <a:schemeClr val="bg1"/>
                 </a:solidFill>
               </a:rPr>
-              <a:t>584 автотеста проходят, каждое число воспроизводится командой</a:t>
+              <a:t>585 автотестов проходят, каждое число воспроизводится командой</a:t>
             </a:r>
             <a:endParaRPr lang="en-US" sz="1500" dirty="0"/>
           </a:p>
@@ -23636,7 +23636,7 @@
                           <a:ea typeface="Calibri" pitchFamily="34" charset="-122"/>
                           <a:cs typeface="Calibri" pitchFamily="34" charset="-120"/>
                         </a:rPr>
-                        <a:t>584 автотеста проходят (v0.3.0, evidence.json), независимая проверка на Cedar, реестр утверждений: каждое число воспроизводится командой</a:t>
+                        <a:t>585 автотестов проходят (v0.3.0, evidence.json), независимая проверка на Cedar, реестр утверждений: каждое число воспроизводится командой</a:t>
                       </a:r>
                       <a:endParaRPr lang="en-US" sz="1300" dirty="0">
                         <a:latin typeface="Calibri" charset="0"/>

--- a/Mandat_VTB.pptx
+++ b/Mandat_VTB.pptx
@@ -133,7 +133,7 @@
   <p:extLst>
     <p:ext uri="{521415D9-36F7-43E2-AB2F-B90AF26B5E84}">
       <p14:sectionLst xmlns:p14="http://schemas.microsoft.com/office/powerpoint/2010/main">
-        <p14:section name="Питч · 5 минут" id="{1B3BA410-F50E-A210-E836-06FDBD208553}">
+        <p14:section name="Питч · 5 минут" id="{DDBDEC19-EA96-DEDF-74E8-F21AF0B0387A}">
           <p14:sldIdLst>
             <p14:sldId id="256"/>
             <p14:sldId id="257"/>
@@ -151,7 +151,7 @@
             <p14:sldId id="269"/>
           </p14:sldIdLst>
         </p14:section>
-        <p14:section name="Приложение для вопросов жюри" id="{DBB4B4C6-0388-8443-0633-9DA419060DFF}">
+        <p14:section name="Приложение для вопросов жюри" id="{B5D09980-A84E-AEC4-9140-3EBAE44C6E77}">
           <p14:sldIdLst>
             <p14:sldId id="270"/>
             <p14:sldId id="271"/>
@@ -199,7 +199,7 @@
               </a:defRPr>
             </a:pPr>
             <a:r>
-              <a:rPr lang="ru-RU" sz="1500" b="0" i="0" u="none" strike="noStrike">
+              <a:rPr sz="1500" b="0" i="0" u="none" strike="noStrike">
                 <a:solidFill>
                   <a:srgbClr val="F3F6F9"/>
                 </a:solidFill>
@@ -246,7 +246,7 @@
             <c:bubble3D val="0"/>
             <c:extLst>
               <c:ext xmlns:c16="http://schemas.microsoft.com/office/drawing/2014/chart" uri="{C3380CC4-5D6E-409C-BE32-E72D297353CC}">
-                <c16:uniqueId val="{00000001-F217-4256-878D-4EF3F2BA4377}"/>
+                <c16:uniqueId val="{00000001-CB2A-431E-BB98-8AE8627E2A35}"/>
               </c:ext>
             </c:extLst>
           </c:dPt>
@@ -262,7 +262,7 @@
             </c:spPr>
             <c:extLst>
               <c:ext xmlns:c16="http://schemas.microsoft.com/office/drawing/2014/chart" uri="{C3380CC4-5D6E-409C-BE32-E72D297353CC}">
-                <c16:uniqueId val="{00000003-F217-4256-878D-4EF3F2BA4377}"/>
+                <c16:uniqueId val="{00000003-CB2A-431E-BB98-8AE8627E2A35}"/>
               </c:ext>
             </c:extLst>
           </c:dPt>
@@ -278,7 +278,7 @@
             </c:spPr>
             <c:extLst>
               <c:ext xmlns:c16="http://schemas.microsoft.com/office/drawing/2014/chart" uri="{C3380CC4-5D6E-409C-BE32-E72D297353CC}">
-                <c16:uniqueId val="{00000005-F217-4256-878D-4EF3F2BA4377}"/>
+                <c16:uniqueId val="{00000005-CB2A-431E-BB98-8AE8627E2A35}"/>
               </c:ext>
             </c:extLst>
           </c:dPt>
@@ -294,7 +294,7 @@
             </c:spPr>
             <c:extLst>
               <c:ext xmlns:c16="http://schemas.microsoft.com/office/drawing/2014/chart" uri="{C3380CC4-5D6E-409C-BE32-E72D297353CC}">
-                <c16:uniqueId val="{00000007-F217-4256-878D-4EF3F2BA4377}"/>
+                <c16:uniqueId val="{00000007-CB2A-431E-BB98-8AE8627E2A35}"/>
               </c:ext>
             </c:extLst>
           </c:dPt>
@@ -378,7 +378,7 @@
           </c:val>
           <c:extLst>
             <c:ext xmlns:c16="http://schemas.microsoft.com/office/drawing/2014/chart" uri="{C3380CC4-5D6E-409C-BE32-E72D297353CC}">
-              <c16:uniqueId val="{00000008-F217-4256-878D-4EF3F2BA4377}"/>
+              <c16:uniqueId val="{00000008-CB2A-431E-BB98-8AE8627E2A35}"/>
             </c:ext>
           </c:extLst>
         </c:ser>
@@ -496,7 +496,7 @@
               </a:defRPr>
             </a:pPr>
             <a:r>
-              <a:rPr lang="ru-RU" sz="1500" b="0" i="0" u="none" strike="noStrike">
+              <a:rPr sz="1500" b="0" i="0" u="none" strike="noStrike">
                 <a:solidFill>
                   <a:srgbClr val="F3F6F9"/>
                 </a:solidFill>
@@ -611,7 +611,7 @@
           </c:val>
           <c:extLst>
             <c:ext xmlns:c16="http://schemas.microsoft.com/office/drawing/2014/chart" uri="{C3380CC4-5D6E-409C-BE32-E72D297353CC}">
-              <c16:uniqueId val="{00000000-9B47-4981-BFD7-90FC8339C0ED}"/>
+              <c16:uniqueId val="{00000000-CF01-4AB3-9AD8-984BF815EB40}"/>
             </c:ext>
           </c:extLst>
         </c:ser>
@@ -730,7 +730,7 @@
               </a:defRPr>
             </a:pPr>
             <a:r>
-              <a:rPr lang="ru-RU" sz="1500" b="0" i="0" u="none" strike="noStrike">
+              <a:rPr sz="1500" b="0" i="0" u="none" strike="noStrike">
                 <a:solidFill>
                   <a:srgbClr val="F3F6F9"/>
                 </a:solidFill>
@@ -845,7 +845,7 @@
           </c:val>
           <c:extLst>
             <c:ext xmlns:c16="http://schemas.microsoft.com/office/drawing/2014/chart" uri="{C3380CC4-5D6E-409C-BE32-E72D297353CC}">
-              <c16:uniqueId val="{00000000-9E17-4B55-8CC7-834AB03D16E4}"/>
+              <c16:uniqueId val="{00000000-9E5F-4A10-A33A-EE3CA865DBDD}"/>
             </c:ext>
           </c:extLst>
         </c:ser>
@@ -967,7 +967,7 @@
     </p:spTree>
     <p:extLst>
       <p:ext uri="{BB962C8B-B14F-4D97-AF65-F5344CB8AC3E}">
-        <p14:creationId xmlns:p14="http://schemas.microsoft.com/office/powerpoint/2010/main" val="3970828819"/>
+        <p14:creationId xmlns:p14="http://schemas.microsoft.com/office/powerpoint/2010/main" val="2623308708"/>
       </p:ext>
     </p:extLst>
   </p:cSld>
@@ -9132,7 +9132,7 @@
         </p:nvGraphicFramePr>
         <p:xfrm>
           <a:off x="548640" y="1325880"/>
-          <a:ext cx="11091672" cy="3621024"/>
+          <a:ext cx="11091672" cy="914400"/>
         </p:xfrm>
         <a:graphic>
           <a:graphicData uri="http://schemas.openxmlformats.org/drawingml/2006/table">
@@ -11497,7 +11497,7 @@
         </p:nvGraphicFramePr>
         <p:xfrm>
           <a:off x="548640" y="1325880"/>
-          <a:ext cx="11091672" cy="4389120"/>
+          <a:ext cx="11091672" cy="914400"/>
         </p:xfrm>
         <a:graphic>
           <a:graphicData uri="http://schemas.openxmlformats.org/drawingml/2006/table">
@@ -19255,7 +19255,7 @@
         </p:nvGraphicFramePr>
         <p:xfrm>
           <a:off x="548640" y="1325880"/>
-          <a:ext cx="11091672" cy="4224528"/>
+          <a:ext cx="11091672" cy="914400"/>
         </p:xfrm>
         <a:graphic>
           <a:graphicData uri="http://schemas.openxmlformats.org/drawingml/2006/table">
@@ -20909,7 +20909,7 @@
                   <a:schemeClr val="accent4"/>
                 </a:solidFill>
               </a:rPr>
-              <a:t>Источники: Банк России, I кв. 2026; ВТБ, МСФО за 1П 2026; Fenergo — опросы банков 2022 и 2025 (данные поставщика ПО)</a:t>
+              <a:t>Источники: Банк России, I кв. 2026; ВТБ, МСФО за 1П 2026; Fenergo — отраслевые опросы 2022 и 2025 гг.</a:t>
             </a:r>
             <a:endParaRPr lang="en-US" sz="1000" dirty="0"/>
           </a:p>
@@ -21183,7 +21183,7 @@
                   <a:schemeClr val="bg1"/>
                 </a:solidFill>
               </a:rPr>
-              <a:t>1 500–3 000 долл. США — стоимость проверки корпоративного клиента у 54% банков (опрос Fenergo, 2022; данные поставщика ПО)</a:t>
+              <a:t>1 500–3 000 долл. США — столько больше половины корпоративных банков тратят на одну KYC-проверку клиента (опрос Fenergo, 2022; данные поставщика ПО)</a:t>
             </a:r>
             <a:endParaRPr lang="en-US" sz="1500" dirty="0"/>
           </a:p>
@@ -21201,7 +21201,7 @@
                   <a:schemeClr val="bg1"/>
                 </a:solidFill>
               </a:rPr>
-              <a:t>70% банков теряли клиентов из-за медленного подключения в 2025 году (опрос Fenergo; данные поставщика ПО)</a:t>
+              <a:t>70% финансовых организаций (банки, управляющие активами, фонд-администраторы; Великобритания, США, Сингапур) за год до опроса теряли клиентов из-за медленного подключения (опрос Fenergo, август 2025; данные поставщика ПО)</a:t>
             </a:r>
             <a:endParaRPr lang="en-US" sz="1500" dirty="0"/>
           </a:p>
@@ -21469,7 +21469,7 @@
         </p:nvGraphicFramePr>
         <p:xfrm>
           <a:off x="548640" y="1325880"/>
-          <a:ext cx="11091672" cy="4937760"/>
+          <a:ext cx="11091672" cy="914400"/>
         </p:xfrm>
         <a:graphic>
           <a:graphicData uri="http://schemas.openxmlformats.org/drawingml/2006/table">
@@ -22948,7 +22948,7 @@
         </p:nvGraphicFramePr>
         <p:xfrm>
           <a:off x="548640" y="1325880"/>
-          <a:ext cx="11091672" cy="4536440"/>
+          <a:ext cx="11091672" cy="914400"/>
         </p:xfrm>
         <a:graphic>
           <a:graphicData uri="http://schemas.openxmlformats.org/drawingml/2006/table">
@@ -24284,7 +24284,7 @@
         </p:nvGraphicFramePr>
         <p:xfrm>
           <a:off x="548640" y="1325880"/>
-          <a:ext cx="11091672" cy="4828032"/>
+          <a:ext cx="11091672" cy="914400"/>
         </p:xfrm>
         <a:graphic>
           <a:graphicData uri="http://schemas.openxmlformats.org/drawingml/2006/table">

--- a/Mandat_VTB.pptx
+++ b/Mandat_VTB.pptx
@@ -4,9 +4,6 @@
   <p:sldMasterIdLst>
     <p:sldMasterId id="2147483648" r:id="rId1"/>
   </p:sldMasterIdLst>
-  <p:notesMasterIdLst>
-    <p:notesMasterId r:id="rId29"/>
-  </p:notesMasterIdLst>
   <p:sldIdLst>
     <p:sldId id="256" r:id="rId2"/>
     <p:sldId id="257" r:id="rId3"/>
@@ -36,6 +33,9 @@
     <p:sldId id="281" r:id="rId27"/>
     <p:sldId id="282" r:id="rId28"/>
   </p:sldIdLst>
+  <p:notesMasterIdLst>
+    <p:notesMasterId r:id="rId29"/>
+  </p:notesMasterIdLst>
   <p:sldSz cx="12192000" cy="6858000"/>
   <p:notesSz cx="6858000" cy="12192000"/>
   <p:defaultTextStyle>
@@ -133,7 +133,7 @@
   <p:extLst>
     <p:ext uri="{521415D9-36F7-43E2-AB2F-B90AF26B5E84}">
       <p14:sectionLst xmlns:p14="http://schemas.microsoft.com/office/powerpoint/2010/main">
-        <p14:section name="Питч · 5 минут" id="{DDBDEC19-EA96-DEDF-74E8-F21AF0B0387A}">
+        <p14:section name="Питч · 5 минут" id="{90137de3-f457-e778-371c-174fdfb7bd0b}">
           <p14:sldIdLst>
             <p14:sldId id="256"/>
             <p14:sldId id="257"/>
@@ -151,7 +151,7 @@
             <p14:sldId id="269"/>
           </p14:sldIdLst>
         </p14:section>
-        <p14:section name="Приложение для вопросов жюри" id="{B5D09980-A84E-AEC4-9140-3EBAE44C6E77}">
+        <p14:section name="Приложение для вопросов жюри" id="{5f7e4d2d-ec77-754e-ed88-9c60a8a5150a}">
           <p14:sldIdLst>
             <p14:sldId id="270"/>
             <p14:sldId id="271"/>
@@ -178,11 +178,9 @@
 </file>
 
 <file path=ppt/charts/chart1.xml><?xml version="1.0" encoding="utf-8"?>
-<c:chartSpace xmlns:c="http://schemas.openxmlformats.org/drawingml/2006/chart" xmlns:a="http://schemas.openxmlformats.org/drawingml/2006/main" xmlns:r="http://schemas.openxmlformats.org/officeDocument/2006/relationships" xmlns:c16r2="http://schemas.microsoft.com/office/drawing/2015/06/chart">
+<c:chartSpace xmlns:c="http://schemas.openxmlformats.org/drawingml/2006/chart" xmlns:a="http://schemas.openxmlformats.org/drawingml/2006/main" xmlns:r="http://schemas.openxmlformats.org/officeDocument/2006/relationships">
   <c:date1904 val="0"/>
-  <c:lang val="ru-RU"/>
   <c:roundedCorners val="1"/>
-  <c:style val="2"/>
   <c:chart>
     <c:title>
       <c:tx>
@@ -210,6 +208,7 @@
           </a:p>
         </c:rich>
       </c:tx>
+      <c:layout/>
       <c:overlay val="0"/>
     </c:title>
     <c:autoTitleDeleted val="0"/>
@@ -240,15 +239,40 @@
             <a:effectLst/>
           </c:spPr>
           <c:invertIfNegative val="0"/>
+          <c:dLbls>
+            <c:numFmt formatCode="#,##0" sourceLinked="0"/>
+            <c:txPr>
+              <a:bodyPr/>
+              <a:lstStyle/>
+              <a:p>
+                <a:pPr>
+                  <a:defRPr b="0" i="0" strike="noStrike" sz="1400" u="none">
+                    <a:solidFill>
+                      <a:srgbClr val="F3F6F9"/>
+                    </a:solidFill>
+                    <a:latin typeface="+mn-lt"/>
+                  </a:defRPr>
+                </a:pPr>
+              </a:p>
+            </c:txPr>
+            <c:showLegendKey val="0"/>
+            <c:showVal val="1"/>
+            <c:showCatName val="0"/>
+            <c:showSerName val="0"/>
+            <c:showPercent val="0"/>
+            <c:showBubbleSize val="0"/>
+            <c:showLeaderLines val="0"/>
+          </c:dLbls>
           <c:dPt>
             <c:idx val="0"/>
             <c:invertIfNegative val="0"/>
             <c:bubble3D val="0"/>
-            <c:extLst>
-              <c:ext xmlns:c16="http://schemas.microsoft.com/office/drawing/2014/chart" uri="{C3380CC4-5D6E-409C-BE32-E72D297353CC}">
-                <c16:uniqueId val="{00000001-CB2A-431E-BB98-8AE8627E2A35}"/>
-              </c:ext>
-            </c:extLst>
+            <c:spPr>
+              <a:solidFill>
+                <a:srgbClr val="8FD3A8"/>
+              </a:solidFill>
+              <a:effectLst/>
+            </c:spPr>
           </c:dPt>
           <c:dPt>
             <c:idx val="1"/>
@@ -260,11 +284,6 @@
               </a:solidFill>
               <a:effectLst/>
             </c:spPr>
-            <c:extLst>
-              <c:ext xmlns:c16="http://schemas.microsoft.com/office/drawing/2014/chart" uri="{C3380CC4-5D6E-409C-BE32-E72D297353CC}">
-                <c16:uniqueId val="{00000003-CB2A-431E-BB98-8AE8627E2A35}"/>
-              </c:ext>
-            </c:extLst>
           </c:dPt>
           <c:dPt>
             <c:idx val="2"/>
@@ -276,11 +295,6 @@
               </a:solidFill>
               <a:effectLst/>
             </c:spPr>
-            <c:extLst>
-              <c:ext xmlns:c16="http://schemas.microsoft.com/office/drawing/2014/chart" uri="{C3380CC4-5D6E-409C-BE32-E72D297353CC}">
-                <c16:uniqueId val="{00000005-CB2A-431E-BB98-8AE8627E2A35}"/>
-              </c:ext>
-            </c:extLst>
           </c:dPt>
           <c:dPt>
             <c:idx val="3"/>
@@ -292,68 +306,28 @@
               </a:solidFill>
               <a:effectLst/>
             </c:spPr>
-            <c:extLst>
-              <c:ext xmlns:c16="http://schemas.microsoft.com/office/drawing/2014/chart" uri="{C3380CC4-5D6E-409C-BE32-E72D297353CC}">
-                <c16:uniqueId val="{00000007-CB2A-431E-BB98-8AE8627E2A35}"/>
-              </c:ext>
-            </c:extLst>
           </c:dPt>
-          <c:dLbls>
-            <c:numFmt formatCode="#,##0" sourceLinked="0"/>
-            <c:spPr>
-              <a:noFill/>
-              <a:ln>
-                <a:noFill/>
-              </a:ln>
-              <a:effectLst/>
-            </c:spPr>
-            <c:txPr>
-              <a:bodyPr/>
-              <a:lstStyle/>
-              <a:p>
-                <a:pPr>
-                  <a:defRPr sz="1400" b="0" i="0" u="none" strike="noStrike">
-                    <a:solidFill>
-                      <a:srgbClr val="F3F6F9"/>
-                    </a:solidFill>
-                    <a:latin typeface="+mn-lt"/>
-                  </a:defRPr>
-                </a:pPr>
-                <a:endParaRPr lang="ru-RU"/>
-              </a:p>
-            </c:txPr>
-            <c:showLegendKey val="0"/>
-            <c:showVal val="1"/>
-            <c:showCatName val="0"/>
-            <c:showSerName val="0"/>
-            <c:showPercent val="0"/>
-            <c:showBubbleSize val="0"/>
-            <c:showLeaderLines val="0"/>
-            <c:extLst>
-              <c:ext xmlns:c15="http://schemas.microsoft.com/office/drawing/2012/chart" uri="{CE6537A1-D6FC-4f65-9D91-7224C49458BB}">
-                <c15:showLeaderLines val="0"/>
-              </c:ext>
-            </c:extLst>
-          </c:dLbls>
           <c:cat>
-            <c:strRef>
+            <c:multiLvlStrRef>
               <c:f>Sheet1!$A$2:$A$5</c:f>
-              <c:strCache>
+              <c:multiLvlStrCache>
                 <c:ptCount val="4"/>
-                <c:pt idx="0">
-                  <c:v>ПОДТВЕРЖДЕНО</c:v>
-                </c:pt>
-                <c:pt idx="1">
-                  <c:v>ОПРОВЕРГНУТО</c:v>
-                </c:pt>
-                <c:pt idx="2">
-                  <c:v>НА РАЗБОР</c:v>
-                </c:pt>
-                <c:pt idx="3">
-                  <c:v>НЕДОСТ. ДАННЫХ</c:v>
-                </c:pt>
-              </c:strCache>
-            </c:strRef>
+                <c:lvl>
+                  <c:pt idx="0">
+                    <c:v>ПОДТВЕРЖДЕНО</c:v>
+                  </c:pt>
+                  <c:pt idx="1">
+                    <c:v>ОПРОВЕРГНУТО</c:v>
+                  </c:pt>
+                  <c:pt idx="2">
+                    <c:v>НА РАЗБОР</c:v>
+                  </c:pt>
+                  <c:pt idx="3">
+                    <c:v>НЕДОСТ. ДАННЫХ</c:v>
+                  </c:pt>
+                </c:lvl>
+              </c:multiLvlStrCache>
+            </c:multiLvlStrRef>
           </c:cat>
           <c:val>
             <c:numRef>
@@ -376,23 +350,36 @@
               </c:numCache>
             </c:numRef>
           </c:val>
-          <c:extLst>
-            <c:ext xmlns:c16="http://schemas.microsoft.com/office/drawing/2014/chart" uri="{C3380CC4-5D6E-409C-BE32-E72D297353CC}">
-              <c16:uniqueId val="{00000008-CB2A-431E-BB98-8AE8627E2A35}"/>
-            </c:ext>
-          </c:extLst>
         </c:ser>
         <c:dLbls>
+          <c:numFmt formatCode="#,##0" sourceLinked="0"/>
+          <c:txPr>
+            <a:bodyPr/>
+            <a:lstStyle/>
+            <a:p>
+              <a:pPr>
+                <a:defRPr b="0" i="0" strike="noStrike" sz="1400" u="none">
+                  <a:solidFill>
+                    <a:srgbClr val="F3F6F9"/>
+                  </a:solidFill>
+                  <a:latin typeface="+mn-lt"/>
+                </a:defRPr>
+              </a:pPr>
+            </a:p>
+          </c:txPr>
           <c:showLegendKey val="0"/>
           <c:showVal val="1"/>
           <c:showCatName val="0"/>
           <c:showSerName val="0"/>
           <c:showPercent val="0"/>
           <c:showBubbleSize val="0"/>
+          <c:showLeaderLines val="0"/>
         </c:dLbls>
         <c:gapWidth val="60"/>
+        <c:overlap val="0"/>
         <c:axId val="2094734554"/>
         <c:axId val="2094734552"/>
+        <c:axId val="2094734556"/>
       </c:barChart>
       <c:catAx>
         <c:axId val="2094734554"/>
@@ -431,7 +418,6 @@
         <c:crosses val="autoZero"/>
         <c:auto val="1"/>
         <c:lblAlgn val="ctr"/>
-        <c:lblOffset val="100"/>
         <c:noMultiLvlLbl val="1"/>
       </c:catAx>
       <c:valAx>
@@ -440,11 +426,35 @@
           <c:orientation val="minMax"/>
         </c:scaling>
         <c:delete val="1"/>
-        <c:axPos val="t"/>
+        <c:axPos val="b"/>
         <c:numFmt formatCode="General" sourceLinked="0"/>
         <c:majorTickMark val="out"/>
         <c:minorTickMark val="none"/>
         <c:tickLblPos val="low"/>
+        <c:spPr>
+          <a:ln w="12700" cap="flat">
+            <a:solidFill>
+              <a:srgbClr val="888888"/>
+            </a:solidFill>
+            <a:prstDash val="solid"/>
+            <a:round/>
+          </a:ln>
+        </c:spPr>
+        <c:txPr>
+          <a:bodyPr/>
+          <a:lstStyle/>
+          <a:p>
+            <a:pPr>
+              <a:defRPr sz="1200" b="0" i="0" u="none" strike="noStrike">
+                <a:solidFill>
+                  <a:srgbClr val="000000"/>
+                </a:solidFill>
+                <a:latin typeface="Arial"/>
+              </a:defRPr>
+            </a:pPr>
+            <a:endParaRPr lang="en-US"/>
+          </a:p>
+        </c:txPr>
         <c:crossAx val="2094734554"/>
         <c:crosses val="autoZero"/>
         <c:crossBetween val="between"/>
@@ -459,7 +469,6 @@
     </c:plotArea>
     <c:plotVisOnly val="1"/>
     <c:dispBlanksAs val="span"/>
-    <c:showDLblsOverMax val="1"/>
   </c:chart>
   <c:spPr>
     <a:noFill/>
@@ -475,11 +484,9 @@
 </file>
 
 <file path=ppt/charts/chart2.xml><?xml version="1.0" encoding="utf-8"?>
-<c:chartSpace xmlns:c="http://schemas.openxmlformats.org/drawingml/2006/chart" xmlns:a="http://schemas.openxmlformats.org/drawingml/2006/main" xmlns:r="http://schemas.openxmlformats.org/officeDocument/2006/relationships" xmlns:c16r2="http://schemas.microsoft.com/office/drawing/2015/06/chart">
+<c:chartSpace xmlns:c="http://schemas.openxmlformats.org/drawingml/2006/chart" xmlns:a="http://schemas.openxmlformats.org/drawingml/2006/main" xmlns:r="http://schemas.openxmlformats.org/officeDocument/2006/relationships">
   <c:date1904 val="0"/>
-  <c:lang val="ru-RU"/>
   <c:roundedCorners val="1"/>
-  <c:style val="2"/>
   <c:chart>
     <c:title>
       <c:tx>
@@ -507,6 +514,7 @@
           </a:p>
         </c:rich>
       </c:tx>
+      <c:layout/>
       <c:overlay val="0"/>
     </c:title>
     <c:autoTitleDeleted val="0"/>
@@ -539,26 +547,18 @@
           <c:invertIfNegative val="0"/>
           <c:dLbls>
             <c:numFmt formatCode="#,##0" sourceLinked="0"/>
-            <c:spPr>
-              <a:noFill/>
-              <a:ln>
-                <a:noFill/>
-              </a:ln>
-              <a:effectLst/>
-            </c:spPr>
             <c:txPr>
               <a:bodyPr/>
               <a:lstStyle/>
               <a:p>
                 <a:pPr>
-                  <a:defRPr sz="1400" b="0" i="0" u="none" strike="noStrike">
+                  <a:defRPr b="0" i="0" strike="noStrike" sz="1400" u="none">
                     <a:solidFill>
                       <a:srgbClr val="F3F6F9"/>
                     </a:solidFill>
                     <a:latin typeface="+mn-lt"/>
                   </a:defRPr>
                 </a:pPr>
-                <a:endParaRPr lang="ru-RU"/>
               </a:p>
             </c:txPr>
             <c:showLegendKey val="0"/>
@@ -568,28 +568,25 @@
             <c:showPercent val="0"/>
             <c:showBubbleSize val="0"/>
             <c:showLeaderLines val="0"/>
-            <c:extLst>
-              <c:ext xmlns:c15="http://schemas.microsoft.com/office/drawing/2012/chart" uri="{CE6537A1-D6FC-4f65-9D91-7224C49458BB}">
-                <c15:showLeaderLines val="0"/>
-              </c:ext>
-            </c:extLst>
           </c:dLbls>
           <c:cat>
-            <c:strRef>
+            <c:multiLvlStrRef>
               <c:f>Sheet1!$A$2:$A$4</c:f>
-              <c:strCache>
+              <c:multiLvlStrCache>
                 <c:ptCount val="3"/>
-                <c:pt idx="0">
-                  <c:v>Консервативный</c:v>
-                </c:pt>
-                <c:pt idx="1">
-                  <c:v>Базовый</c:v>
-                </c:pt>
-                <c:pt idx="2">
-                  <c:v>Оптимистичный</c:v>
-                </c:pt>
-              </c:strCache>
-            </c:strRef>
+                <c:lvl>
+                  <c:pt idx="0">
+                    <c:v>Консервативный</c:v>
+                  </c:pt>
+                  <c:pt idx="1">
+                    <c:v>Базовый</c:v>
+                  </c:pt>
+                  <c:pt idx="2">
+                    <c:v>Оптимистичный</c:v>
+                  </c:pt>
+                </c:lvl>
+              </c:multiLvlStrCache>
+            </c:multiLvlStrRef>
           </c:cat>
           <c:val>
             <c:numRef>
@@ -609,23 +606,36 @@
               </c:numCache>
             </c:numRef>
           </c:val>
-          <c:extLst>
-            <c:ext xmlns:c16="http://schemas.microsoft.com/office/drawing/2014/chart" uri="{C3380CC4-5D6E-409C-BE32-E72D297353CC}">
-              <c16:uniqueId val="{00000000-CF01-4AB3-9AD8-984BF815EB40}"/>
-            </c:ext>
-          </c:extLst>
         </c:ser>
         <c:dLbls>
+          <c:numFmt formatCode="#,##0" sourceLinked="0"/>
+          <c:txPr>
+            <a:bodyPr/>
+            <a:lstStyle/>
+            <a:p>
+              <a:pPr>
+                <a:defRPr b="0" i="0" strike="noStrike" sz="1400" u="none">
+                  <a:solidFill>
+                    <a:srgbClr val="F3F6F9"/>
+                  </a:solidFill>
+                  <a:latin typeface="+mn-lt"/>
+                </a:defRPr>
+              </a:pPr>
+            </a:p>
+          </c:txPr>
           <c:showLegendKey val="0"/>
           <c:showVal val="1"/>
           <c:showCatName val="0"/>
           <c:showSerName val="0"/>
           <c:showPercent val="0"/>
           <c:showBubbleSize val="0"/>
+          <c:showLeaderLines val="0"/>
         </c:dLbls>
         <c:gapWidth val="70"/>
+        <c:overlap val="0"/>
         <c:axId val="2094734554"/>
         <c:axId val="2094734552"/>
+        <c:axId val="2094734556"/>
       </c:barChart>
       <c:catAx>
         <c:axId val="2094734554"/>
@@ -664,7 +674,6 @@
         <c:crosses val="autoZero"/>
         <c:auto val="1"/>
         <c:lblAlgn val="ctr"/>
-        <c:lblOffset val="100"/>
         <c:noMultiLvlLbl val="1"/>
       </c:catAx>
       <c:valAx>
@@ -679,6 +688,30 @@
         <c:majorTickMark val="out"/>
         <c:minorTickMark val="none"/>
         <c:tickLblPos val="nextTo"/>
+        <c:spPr>
+          <a:ln w="12700" cap="flat">
+            <a:solidFill>
+              <a:srgbClr val="888888"/>
+            </a:solidFill>
+            <a:prstDash val="solid"/>
+            <a:round/>
+          </a:ln>
+        </c:spPr>
+        <c:txPr>
+          <a:bodyPr/>
+          <a:lstStyle/>
+          <a:p>
+            <a:pPr>
+              <a:defRPr sz="1200" b="0" i="0" u="none" strike="noStrike">
+                <a:solidFill>
+                  <a:srgbClr val="000000"/>
+                </a:solidFill>
+                <a:latin typeface="Arial"/>
+              </a:defRPr>
+            </a:pPr>
+            <a:endParaRPr lang="en-US"/>
+          </a:p>
+        </c:txPr>
         <c:crossAx val="2094734554"/>
         <c:crosses val="autoZero"/>
         <c:crossBetween val="between"/>
@@ -693,7 +726,6 @@
     </c:plotArea>
     <c:plotVisOnly val="1"/>
     <c:dispBlanksAs val="span"/>
-    <c:showDLblsOverMax val="1"/>
   </c:chart>
   <c:spPr>
     <a:noFill/>
@@ -709,11 +741,9 @@
 </file>
 
 <file path=ppt/charts/chart3.xml><?xml version="1.0" encoding="utf-8"?>
-<c:chartSpace xmlns:c="http://schemas.openxmlformats.org/drawingml/2006/chart" xmlns:a="http://schemas.openxmlformats.org/drawingml/2006/main" xmlns:r="http://schemas.openxmlformats.org/officeDocument/2006/relationships" xmlns:c16r2="http://schemas.microsoft.com/office/drawing/2015/06/chart">
+<c:chartSpace xmlns:c="http://schemas.openxmlformats.org/drawingml/2006/chart" xmlns:a="http://schemas.openxmlformats.org/drawingml/2006/main" xmlns:r="http://schemas.openxmlformats.org/officeDocument/2006/relationships">
   <c:date1904 val="0"/>
-  <c:lang val="ru-RU"/>
   <c:roundedCorners val="1"/>
-  <c:style val="2"/>
   <c:chart>
     <c:title>
       <c:tx>
@@ -741,6 +771,7 @@
           </a:p>
         </c:rich>
       </c:tx>
+      <c:layout/>
       <c:overlay val="0"/>
     </c:title>
     <c:autoTitleDeleted val="0"/>
@@ -773,26 +804,18 @@
           <c:invertIfNegative val="0"/>
           <c:dLbls>
             <c:numFmt formatCode="#,##0" sourceLinked="0"/>
-            <c:spPr>
-              <a:noFill/>
-              <a:ln>
-                <a:noFill/>
-              </a:ln>
-              <a:effectLst/>
-            </c:spPr>
             <c:txPr>
               <a:bodyPr/>
               <a:lstStyle/>
               <a:p>
                 <a:pPr>
-                  <a:defRPr sz="1400" b="0" i="0" u="none" strike="noStrike">
+                  <a:defRPr b="0" i="0" strike="noStrike" sz="1400" u="none">
                     <a:solidFill>
                       <a:srgbClr val="F3F6F9"/>
                     </a:solidFill>
                     <a:latin typeface="+mn-lt"/>
                   </a:defRPr>
                 </a:pPr>
-                <a:endParaRPr lang="ru-RU"/>
               </a:p>
             </c:txPr>
             <c:showLegendKey val="0"/>
@@ -802,28 +825,25 @@
             <c:showPercent val="0"/>
             <c:showBubbleSize val="0"/>
             <c:showLeaderLines val="0"/>
-            <c:extLst>
-              <c:ext xmlns:c15="http://schemas.microsoft.com/office/drawing/2012/chart" uri="{CE6537A1-D6FC-4f65-9D91-7224C49458BB}">
-                <c15:showLeaderLines val="0"/>
-              </c:ext>
-            </c:extLst>
           </c:dLbls>
           <c:cat>
-            <c:strRef>
+            <c:multiLvlStrRef>
               <c:f>Sheet1!$A$2:$A$4</c:f>
-              <c:strCache>
+              <c:multiLvlStrCache>
                 <c:ptCount val="3"/>
-                <c:pt idx="0">
-                  <c:v>Консервативный</c:v>
-                </c:pt>
-                <c:pt idx="1">
-                  <c:v>Базовый</c:v>
-                </c:pt>
-                <c:pt idx="2">
-                  <c:v>Оптимистичный</c:v>
-                </c:pt>
-              </c:strCache>
-            </c:strRef>
+                <c:lvl>
+                  <c:pt idx="0">
+                    <c:v>Консервативный</c:v>
+                  </c:pt>
+                  <c:pt idx="1">
+                    <c:v>Базовый</c:v>
+                  </c:pt>
+                  <c:pt idx="2">
+                    <c:v>Оптимистичный</c:v>
+                  </c:pt>
+                </c:lvl>
+              </c:multiLvlStrCache>
+            </c:multiLvlStrRef>
           </c:cat>
           <c:val>
             <c:numRef>
@@ -843,23 +863,36 @@
               </c:numCache>
             </c:numRef>
           </c:val>
-          <c:extLst>
-            <c:ext xmlns:c16="http://schemas.microsoft.com/office/drawing/2014/chart" uri="{C3380CC4-5D6E-409C-BE32-E72D297353CC}">
-              <c16:uniqueId val="{00000000-9E5F-4A10-A33A-EE3CA865DBDD}"/>
-            </c:ext>
-          </c:extLst>
         </c:ser>
         <c:dLbls>
+          <c:numFmt formatCode="#,##0" sourceLinked="0"/>
+          <c:txPr>
+            <a:bodyPr/>
+            <a:lstStyle/>
+            <a:p>
+              <a:pPr>
+                <a:defRPr b="0" i="0" strike="noStrike" sz="1400" u="none">
+                  <a:solidFill>
+                    <a:srgbClr val="F3F6F9"/>
+                  </a:solidFill>
+                  <a:latin typeface="+mn-lt"/>
+                </a:defRPr>
+              </a:pPr>
+            </a:p>
+          </c:txPr>
           <c:showLegendKey val="0"/>
           <c:showVal val="1"/>
           <c:showCatName val="0"/>
           <c:showSerName val="0"/>
           <c:showPercent val="0"/>
           <c:showBubbleSize val="0"/>
+          <c:showLeaderLines val="0"/>
         </c:dLbls>
         <c:gapWidth val="70"/>
+        <c:overlap val="0"/>
         <c:axId val="2094734554"/>
         <c:axId val="2094734552"/>
+        <c:axId val="2094734556"/>
       </c:barChart>
       <c:catAx>
         <c:axId val="2094734554"/>
@@ -898,7 +931,6 @@
         <c:crosses val="autoZero"/>
         <c:auto val="1"/>
         <c:lblAlgn val="ctr"/>
-        <c:lblOffset val="100"/>
         <c:noMultiLvlLbl val="1"/>
       </c:catAx>
       <c:valAx>
@@ -913,6 +945,30 @@
         <c:majorTickMark val="out"/>
         <c:minorTickMark val="none"/>
         <c:tickLblPos val="nextTo"/>
+        <c:spPr>
+          <a:ln w="12700" cap="flat">
+            <a:solidFill>
+              <a:srgbClr val="888888"/>
+            </a:solidFill>
+            <a:prstDash val="solid"/>
+            <a:round/>
+          </a:ln>
+        </c:spPr>
+        <c:txPr>
+          <a:bodyPr/>
+          <a:lstStyle/>
+          <a:p>
+            <a:pPr>
+              <a:defRPr sz="1200" b="0" i="0" u="none" strike="noStrike">
+                <a:solidFill>
+                  <a:srgbClr val="000000"/>
+                </a:solidFill>
+                <a:latin typeface="Arial"/>
+              </a:defRPr>
+            </a:pPr>
+            <a:endParaRPr lang="en-US"/>
+          </a:p>
+        </c:txPr>
         <c:crossAx val="2094734554"/>
         <c:crosses val="autoZero"/>
         <c:crossBetween val="between"/>
@@ -927,7 +983,6 @@
     </c:plotArea>
     <c:plotVisOnly val="1"/>
     <c:dispBlanksAs val="span"/>
-    <c:showDLblsOverMax val="1"/>
   </c:chart>
   <c:spPr>
     <a:noFill/>
@@ -964,10 +1019,234 @@
           <a:chExt cx="0" cy="0"/>
         </a:xfrm>
       </p:grpSpPr>
+      <p:sp>
+        <p:nvSpPr>
+          <p:cNvPr id="2" name="Header Placeholder 1"/>
+          <p:cNvSpPr>
+            <a:spLocks noGrp="1"/>
+          </p:cNvSpPr>
+          <p:nvPr>
+            <p:ph type="hdr" sz="quarter"/>
+          </p:nvPr>
+        </p:nvSpPr>
+        <p:spPr>
+          <a:xfrm>
+            <a:off x="0" y="0"/>
+            <a:ext cx="2971800" cy="458788"/>
+          </a:xfrm>
+          <a:prstGeom prst="rect">
+            <a:avLst/>
+          </a:prstGeom>
+        </p:spPr>
+        <p:txBody>
+          <a:bodyPr vert="horz" lIns="91440" tIns="45720" rIns="91440" bIns="45720" rtlCol="0"/>
+          <a:lstStyle>
+            <a:lvl1pPr algn="l">
+              <a:defRPr sz="1200"/>
+            </a:lvl1pPr>
+          </a:lstStyle>
+          <a:p>
+            <a:endParaRPr lang="en-US"/>
+          </a:p>
+        </p:txBody>
+      </p:sp>
+      <p:sp>
+        <p:nvSpPr>
+          <p:cNvPr id="3" name="Date Placeholder 2"/>
+          <p:cNvSpPr>
+            <a:spLocks noGrp="1"/>
+          </p:cNvSpPr>
+          <p:nvPr>
+            <p:ph type="dt" idx="1"/>
+          </p:nvPr>
+        </p:nvSpPr>
+        <p:spPr>
+          <a:xfrm>
+            <a:off x="3884613" y="0"/>
+            <a:ext cx="2971800" cy="458788"/>
+          </a:xfrm>
+          <a:prstGeom prst="rect">
+            <a:avLst/>
+          </a:prstGeom>
+        </p:spPr>
+        <p:txBody>
+          <a:bodyPr vert="horz" lIns="91440" tIns="45720" rIns="91440" bIns="45720" rtlCol="0"/>
+          <a:lstStyle>
+            <a:lvl1pPr algn="r">
+              <a:defRPr sz="1200"/>
+            </a:lvl1pPr>
+          </a:lstStyle>
+          <a:p>
+            <a:fld id="{5282F153-3F37-0F45-9E97-73ACFA13230C}" type="datetimeFigureOut">
+              <a:rPr lang="en-US"/>
+              <a:t>7/23/19</a:t>
+            </a:fld>
+            <a:endParaRPr lang="en-US"/>
+          </a:p>
+        </p:txBody>
+      </p:sp>
+      <p:sp>
+        <p:nvSpPr>
+          <p:cNvPr id="4" name="Slide Image Placeholder 3"/>
+          <p:cNvSpPr>
+            <a:spLocks noGrp="1" noRot="1" noChangeAspect="1"/>
+          </p:cNvSpPr>
+          <p:nvPr>
+            <p:ph type="sldImg" idx="2"/>
+          </p:nvPr>
+        </p:nvSpPr>
+        <p:spPr>
+          <a:xfrm>
+            <a:off x="685800" y="1143000"/>
+            <a:ext cx="5486400" cy="3086100"/>
+          </a:xfrm>
+          <a:prstGeom prst="rect">
+            <a:avLst/>
+          </a:prstGeom>
+          <a:noFill/>
+          <a:ln w="12700">
+            <a:solidFill>
+              <a:prstClr val="black"/>
+            </a:solidFill>
+          </a:ln>
+        </p:spPr>
+        <p:txBody>
+          <a:bodyPr vert="horz" lIns="91440" tIns="45720" rIns="91440" bIns="45720" rtlCol="0" anchor="ctr"/>
+          <a:lstStyle/>
+          <a:p>
+            <a:endParaRPr lang="en-US"/>
+          </a:p>
+        </p:txBody>
+      </p:sp>
+      <p:sp>
+        <p:nvSpPr>
+          <p:cNvPr id="5" name="Notes Placeholder 4"/>
+          <p:cNvSpPr>
+            <a:spLocks noGrp="1"/>
+          </p:cNvSpPr>
+          <p:nvPr>
+            <p:ph type="body" sz="quarter" idx="3"/>
+          </p:nvPr>
+        </p:nvSpPr>
+        <p:spPr>
+          <a:xfrm>
+            <a:off x="685800" y="4400550"/>
+            <a:ext cx="5486400" cy="3600450"/>
+          </a:xfrm>
+          <a:prstGeom prst="rect">
+            <a:avLst/>
+          </a:prstGeom>
+        </p:spPr>
+        <p:txBody>
+          <a:bodyPr vert="horz" lIns="91440" tIns="45720" rIns="91440" bIns="45720" rtlCol="0"/>
+          <a:lstStyle/>
+          <a:p>
+            <a:pPr lvl="0"/>
+            <a:r>
+              <a:rPr lang="en-US"/>
+              <a:t>Click to edit Master text styles</a:t>
+            </a:r>
+          </a:p>
+          <a:p>
+            <a:pPr lvl="1"/>
+            <a:r>
+              <a:rPr lang="en-US"/>
+              <a:t>Second level</a:t>
+            </a:r>
+          </a:p>
+          <a:p>
+            <a:pPr lvl="2"/>
+            <a:r>
+              <a:rPr lang="en-US"/>
+              <a:t>Third level</a:t>
+            </a:r>
+          </a:p>
+          <a:p>
+            <a:pPr lvl="3"/>
+            <a:r>
+              <a:rPr lang="en-US"/>
+              <a:t>Fourth level</a:t>
+            </a:r>
+          </a:p>
+          <a:p>
+            <a:pPr lvl="4"/>
+            <a:r>
+              <a:rPr lang="en-US"/>
+              <a:t>Fifth level</a:t>
+            </a:r>
+          </a:p>
+        </p:txBody>
+      </p:sp>
+      <p:sp>
+        <p:nvSpPr>
+          <p:cNvPr id="6" name="Footer Placeholder 5"/>
+          <p:cNvSpPr>
+            <a:spLocks noGrp="1"/>
+          </p:cNvSpPr>
+          <p:nvPr>
+            <p:ph type="ftr" sz="quarter" idx="4"/>
+          </p:nvPr>
+        </p:nvSpPr>
+        <p:spPr>
+          <a:xfrm>
+            <a:off x="0" y="8685213"/>
+            <a:ext cx="2971800" cy="458787"/>
+          </a:xfrm>
+          <a:prstGeom prst="rect">
+            <a:avLst/>
+          </a:prstGeom>
+        </p:spPr>
+        <p:txBody>
+          <a:bodyPr vert="horz" lIns="91440" tIns="45720" rIns="91440" bIns="45720" rtlCol="0" anchor="b"/>
+          <a:lstStyle>
+            <a:lvl1pPr algn="l">
+              <a:defRPr sz="1200"/>
+            </a:lvl1pPr>
+          </a:lstStyle>
+          <a:p>
+            <a:endParaRPr lang="en-US"/>
+          </a:p>
+        </p:txBody>
+      </p:sp>
+      <p:sp>
+        <p:nvSpPr>
+          <p:cNvPr id="7" name="Slide Number Placeholder 6"/>
+          <p:cNvSpPr>
+            <a:spLocks noGrp="1"/>
+          </p:cNvSpPr>
+          <p:nvPr>
+            <p:ph type="sldNum" sz="quarter" idx="5"/>
+          </p:nvPr>
+        </p:nvSpPr>
+        <p:spPr>
+          <a:xfrm>
+            <a:off x="3884613" y="8685213"/>
+            <a:ext cx="2971800" cy="458787"/>
+          </a:xfrm>
+          <a:prstGeom prst="rect">
+            <a:avLst/>
+          </a:prstGeom>
+        </p:spPr>
+        <p:txBody>
+          <a:bodyPr vert="horz" lIns="91440" tIns="45720" rIns="91440" bIns="45720" rtlCol="0" anchor="b"/>
+          <a:lstStyle>
+            <a:lvl1pPr algn="r">
+              <a:defRPr sz="1200"/>
+            </a:lvl1pPr>
+          </a:lstStyle>
+          <a:p>
+            <a:fld id="{CE5E9CC1-C706-0F49-92D6-E571CC5EEA8F}" type="slidenum">
+              <a:rPr lang="en-US"/>
+              <a:t>‹#›</a:t>
+            </a:fld>
+            <a:endParaRPr lang="en-US"/>
+          </a:p>
+        </p:txBody>
+      </p:sp>
     </p:spTree>
     <p:extLst>
       <p:ext uri="{BB962C8B-B14F-4D97-AF65-F5344CB8AC3E}">
-        <p14:creationId xmlns:p14="http://schemas.microsoft.com/office/powerpoint/2010/main" val="2623308708"/>
+        <p14:creationId xmlns:p14="http://schemas.microsoft.com/office/powerpoint/2010/main" val="1024086991"/>
       </p:ext>
     </p:extLst>
   </p:cSld>
@@ -1115,6 +1394,7 @@
               <a:rPr lang="en-US" dirty="0"/>
               <a:t>[0:00–0:15] Здравствуйте, мы — команда «Мандат». В задаче трека ВТБ «Финтех без границ» первым направлением для бизнеса названы онбординг и проверка полномочий. Мы сделали движок, который за миллисекунды отвечает, вправе ли человек провести операцию от имени компании на конкретную дату, и показывает доказательство до поля документа.</a:t>
             </a:r>
+            <a:endParaRPr lang="en-US" dirty="0"/>
           </a:p>
         </p:txBody>
       </p:sp>
@@ -1202,6 +1482,7 @@
               <a:rPr lang="en-US" dirty="0"/>
               <a:t>[4:00–4:20] Почему сейчас. МЧД стали обязательными в сентябре 2024 года, и за неполные два года их стало втрое больше — уже более пяти с половиной миллионов. С февраля действуют новые реквизиты, Банк России обновил признаки операций без согласия клиента, а с сентября 2027 года единая форма МЧД станет универсальной. Банку нужен движок, в котором нормы меняются данными, а не релизом.</a:t>
             </a:r>
+            <a:endParaRPr lang="en-US" dirty="0"/>
           </a:p>
         </p:txBody>
       </p:sp>
@@ -1289,6 +1570,7 @@
               <a:rPr lang="en-US" dirty="0"/>
               <a:t>[4:20–4:35] Встройка. ВТБ уже продаёт комплект МЧД и КЭП в «ВТБ Бизнес», значит, поток представителей по доверенностям уже есть. «Мандат» встаёт в контур on-prem: ядро, правила, журнал и мониторинг работают сегодня, а реестр, ЕГРЮЛ, ЕФРСБ и проверку подписи подключаем к пилоту через готовые порты.</a:t>
             </a:r>
+            <a:endParaRPr lang="en-US" dirty="0"/>
           </a:p>
         </p:txBody>
       </p:sp>
@@ -1376,6 +1658,7 @@
               <a:rPr lang="en-US" dirty="0"/>
               <a:t>[4:35–4:50] Наш запрос конкретный: шестинедельный теневой пилот на одной операции — праве подписи платёжных поручений по МЧД. «Мандат» работает рядом с сотрудниками и ни на что не влияет. Стоп-критерий — ноль ложных подтверждений на всех кейсах пилота. От банка — владелец процесса, регламент, обезличенные пакеты и юрист.</a:t>
             </a:r>
+            <a:endParaRPr lang="en-US" dirty="0"/>
           </a:p>
         </p:txBody>
       </p:sp>
@@ -1461,8 +1744,9 @@
           <a:p>
             <a:r>
               <a:rPr lang="en-US" dirty="0"/>
-              <a:t>[4:50–5:00] Команда: я отвечаю за архитектуру и правила, Елена — за методику измерения и качество, Николай — за исследование и процесс, Алексей — за правовые нормы. Спасибо, готовы к вопросам.</a:t>
-            </a:r>
+              <a:t>[4:50–5:00] Команда: я отвечаю за архитектуру и правила, Елена — за методику измерения и качество. Юридическую проверку правил планируем с юристом банка на пилоте. Спасибо, готовы к вопросам.</a:t>
+            </a:r>
+            <a:endParaRPr lang="en-US" dirty="0"/>
           </a:p>
         </p:txBody>
       </p:sp>
@@ -1550,6 +1834,7 @@
               <a:rPr lang="en-US" dirty="0"/>
               <a:t>Спасибо. Сейчас для нас важнее всего поговорить с теми, кто в ВТБ отвечает за добавление представителей юрлиц: это сделает гипотезы проверяемыми уже в первом спринте.</a:t>
             </a:r>
+            <a:endParaRPr lang="en-US" dirty="0"/>
           </a:p>
         </p:txBody>
       </p:sp>
@@ -1633,6 +1918,10 @@
           <a:bodyPr/>
           <a:lstStyle/>
           <a:p>
+            <a:r>
+              <a:rPr lang="en-US" dirty="0"/>
+              <a:t/>
+            </a:r>
             <a:endParaRPr lang="en-US" dirty="0"/>
           </a:p>
         </p:txBody>
@@ -1717,6 +2006,10 @@
           <a:bodyPr/>
           <a:lstStyle/>
           <a:p>
+            <a:r>
+              <a:rPr lang="en-US" dirty="0"/>
+              <a:t/>
+            </a:r>
             <a:endParaRPr lang="en-US" dirty="0"/>
           </a:p>
         </p:txBody>
@@ -1801,6 +2094,10 @@
           <a:bodyPr/>
           <a:lstStyle/>
           <a:p>
+            <a:r>
+              <a:rPr lang="en-US" dirty="0"/>
+              <a:t/>
+            </a:r>
             <a:endParaRPr lang="en-US" dirty="0"/>
           </a:p>
         </p:txBody>
@@ -1885,6 +2182,10 @@
           <a:bodyPr/>
           <a:lstStyle/>
           <a:p>
+            <a:r>
+              <a:rPr lang="en-US" dirty="0"/>
+              <a:t/>
+            </a:r>
             <a:endParaRPr lang="en-US" dirty="0"/>
           </a:p>
         </p:txBody>
@@ -1969,6 +2270,10 @@
           <a:bodyPr/>
           <a:lstStyle/>
           <a:p>
+            <a:r>
+              <a:rPr lang="en-US" dirty="0"/>
+              <a:t/>
+            </a:r>
             <a:endParaRPr lang="en-US" dirty="0"/>
           </a:p>
         </p:txBody>
@@ -2057,6 +2362,7 @@
               <a:rPr lang="en-US" dirty="0"/>
               <a:t>[0:15–0:40] Почему это важно банку. По данным Банка России, в первом квартале 2026 года у юрлиц было 818 операций без согласия на 573 миллиона рублей — в среднем около 0,7 миллиона на операцию. Средняя операция по всем клиентам — около 15 тысяч. Компании теряют редко, но крупно, а возмещают им лишь 15,9 процента по счетам и 2,4 процента через СБП. При этом ответ на вопрос о полномочиях складывается из трёх документов и меняется со временем.</a:t>
             </a:r>
+            <a:endParaRPr lang="en-US" dirty="0"/>
           </a:p>
         </p:txBody>
       </p:sp>
@@ -2140,6 +2446,10 @@
           <a:bodyPr/>
           <a:lstStyle/>
           <a:p>
+            <a:r>
+              <a:rPr lang="en-US" dirty="0"/>
+              <a:t/>
+            </a:r>
             <a:endParaRPr lang="en-US" dirty="0"/>
           </a:p>
         </p:txBody>
@@ -2224,6 +2534,10 @@
           <a:bodyPr/>
           <a:lstStyle/>
           <a:p>
+            <a:r>
+              <a:rPr lang="en-US" dirty="0"/>
+              <a:t/>
+            </a:r>
             <a:endParaRPr lang="en-US" dirty="0"/>
           </a:p>
         </p:txBody>
@@ -2308,6 +2622,10 @@
           <a:bodyPr/>
           <a:lstStyle/>
           <a:p>
+            <a:r>
+              <a:rPr lang="en-US" dirty="0"/>
+              <a:t/>
+            </a:r>
             <a:endParaRPr lang="en-US" dirty="0"/>
           </a:p>
         </p:txBody>
@@ -2392,6 +2710,10 @@
           <a:bodyPr/>
           <a:lstStyle/>
           <a:p>
+            <a:r>
+              <a:rPr lang="en-US" dirty="0"/>
+              <a:t/>
+            </a:r>
             <a:endParaRPr lang="en-US" dirty="0"/>
           </a:p>
         </p:txBody>
@@ -2476,6 +2798,10 @@
           <a:bodyPr/>
           <a:lstStyle/>
           <a:p>
+            <a:r>
+              <a:rPr lang="en-US" dirty="0"/>
+              <a:t/>
+            </a:r>
             <a:endParaRPr lang="en-US" dirty="0"/>
           </a:p>
         </p:txBody>
@@ -2560,6 +2886,10 @@
           <a:bodyPr/>
           <a:lstStyle/>
           <a:p>
+            <a:r>
+              <a:rPr lang="en-US" dirty="0"/>
+              <a:t/>
+            </a:r>
             <a:endParaRPr lang="en-US" dirty="0"/>
           </a:p>
         </p:txBody>
@@ -2644,6 +2974,10 @@
           <a:bodyPr/>
           <a:lstStyle/>
           <a:p>
+            <a:r>
+              <a:rPr lang="en-US" dirty="0"/>
+              <a:t/>
+            </a:r>
             <a:endParaRPr lang="en-US" dirty="0"/>
           </a:p>
         </p:txBody>
@@ -2728,6 +3062,10 @@
           <a:bodyPr/>
           <a:lstStyle/>
           <a:p>
+            <a:r>
+              <a:rPr lang="en-US" dirty="0"/>
+              <a:t/>
+            </a:r>
             <a:endParaRPr lang="en-US" dirty="0"/>
           </a:p>
         </p:txBody>
@@ -2816,6 +3154,7 @@
               <a:rPr lang="en-US" dirty="0"/>
               <a:t>[0:40–1:05] Как работает захват. Мошенник подаёт заявление о смене директора, через пять рабочих дней в ЕГРЮЛ новый директор, дальше новая доверенность, заявка в банк и платёж. Сверка «на сегодня» не видит, что происходит между обращениями клиента. И есть ловушка: смена директора по закону доверенность не прекращает. Откажете по старой МЧД — потеряете клиента, пропустите свежую смену — откроете дверь захвату. Нужен ответ на дату и с контекстом событий.</a:t>
             </a:r>
+            <a:endParaRPr lang="en-US" dirty="0"/>
           </a:p>
         </p:txBody>
       </p:sp>
@@ -2903,6 +3242,7 @@
               <a:rPr lang="en-US" dirty="0"/>
               <a:t>[1:05–1:30] Решение — один вопрос и четыре ответа. Подтверждено — с рекомендацией роли. Опровергнуто — с нормой и звеном цепочки. На разбор — человеку с готовым досье. Недостаточно данных — список недостающего. Главное правило: неизвестное никогда не становится «да». Недоступный реестр — это не «действует», а «недостаточно данных».</a:t>
             </a:r>
+            <a:endParaRPr lang="en-US" dirty="0"/>
           </a:p>
         </p:txBody>
       </p:sp>
@@ -2990,6 +3330,7 @@
               <a:rPr lang="en-US" dirty="0"/>
               <a:t>[1:30–2:05] Так выглядит вердикт. Директор, выдавший доверенность, сменился полгода назад, но доверенность не отменена — по ГК она действует. Когда юрист отметил, что устав операцию не ограничивает, «Мандат» подтверждает и ставит сигнал, а не отказывает; в демо эта отметка синтетическая, без неё тот же кейс уходит на разбор. Каждая строка — с доказательством: ГРН записи ЕГРЮЛ, путь до поля МЧД, норма. Та же компания, но директор сменился 19 дней назад, — на разбор с приоритетом P1 и сроком четыре часа. А если отменили основную доверенность, передоверие теряет силу — опровергнуто.</a:t>
             </a:r>
+            <a:endParaRPr lang="en-US" dirty="0"/>
           </a:p>
         </p:txBody>
       </p:sp>
@@ -3077,6 +3418,7 @@
               <a:rPr lang="en-US" dirty="0"/>
               <a:t>[2:05–2:40] Вторая половина продукта — постоянный контроль. Демо: за три часа смена директора, новая доверенность и заявка на смену реквизитов. «Мандат» связывает три события в тревогу «возможный захват»: рекомендует приостановить автоматическую выдачу прав и передать кейс в антифрод, а сам переводит удостоверения компании в статус «приостановлено». Если отменили основную доверенность, удостоверения по всей цепочке отзываются, а банк получает рекомендацию приостановить права. Здесь включаем запись демо.</a:t>
             </a:r>
+            <a:endParaRPr lang="en-US" dirty="0"/>
           </a:p>
         </p:txBody>
       </p:sp>
@@ -3164,6 +3506,7 @@
               <a:rPr lang="en-US" dirty="0"/>
               <a:t>[2:40–3:10] Качество. Главная ошибка, которую нельзя допускать, — ложное «подтверждено». На 288 синтетических кейсах, где подтверждать нельзя, таких ошибок ноль, верхняя граница 95% — 1,3%. Ключевое свойство — передоверие не расширяет полномочия — проверено на 384 цепочках и совпало с независимой реализацией на Cedar. Это синтетика, проверка логики правил. Точность на реальных пакетах измерит пилот.</a:t>
             </a:r>
+            <a:endParaRPr lang="en-US" dirty="0"/>
           </a:p>
         </p:txBody>
       </p:sp>
@@ -3251,6 +3594,7 @@
               <a:rPr lang="en-US" dirty="0"/>
               <a:t>[3:10–3:35] Про ИИ. Модель только предлагает факт из устава, и только с дословной цитатой. Нет цитаты — нет факта. Вердикт выносят правила со ссылкой на норму, спорное решает человек, а клиент может оспорить автоматический вердикт. Это логика Кодекса этики в сфере ИИ на финансовом рынке; по данным CNews, ВТБ присоединился к нему в августе.</a:t>
             </a:r>
+            <a:endParaRPr lang="en-US" dirty="0"/>
           </a:p>
         </p:txBody>
       </p:sp>
@@ -3338,6 +3682,7 @@
               <a:rPr lang="en-US" dirty="0"/>
               <a:t>[3:35–4:00] Эффект в двух валютах. Операционный: при 1,8 миллиона клиентов ВТБ — предприятий и предпринимателей — от 33 до 167 ставок в год. Риск: от 34 до 229 миллионов рублей предотвращённого ущерба в год. Обе формулы на слайде, все допущения подписаны. Это сценарии, а не обещание: первые две недели пилота заменяют допущения фактами банка.</a:t>
             </a:r>
+            <a:endParaRPr lang="en-US" dirty="0"/>
           </a:p>
         </p:txBody>
       </p:sp>
@@ -3413,7 +3758,7 @@
     <p:bg>
       <p:bgPr>
         <a:blipFill dpi="0" rotWithShape="1">
-          <a:blip r:embed="rId2">
+          <a:blip r:embed="rId1">
             <a:lum/>
           </a:blip>
           <a:srcRect/>
@@ -3452,7 +3797,7 @@
     <p:bg>
       <p:bgPr>
         <a:blipFill dpi="0" rotWithShape="1">
-          <a:blip r:embed="rId2">
+          <a:blip r:embed="rId1">
             <a:lum/>
           </a:blip>
           <a:srcRect/>
@@ -3480,11 +3825,9 @@
       <p:sp>
         <p:nvSpPr>
           <p:cNvPr id="2" name="Text 0"/>
-          <p:cNvSpPr>
-            <a:spLocks noGrp="1"/>
-          </p:cNvSpPr>
+          <p:cNvSpPr/>
           <p:nvPr>
-            <p:ph type="title" idx="100" hasCustomPrompt="1"/>
+            <p:ph idx="100" type="title" hasCustomPrompt="1"/>
           </p:nvPr>
         </p:nvSpPr>
         <p:spPr>
@@ -3501,7 +3844,7 @@
         <p:txBody>
           <a:bodyPr wrap="square" rtlCol="0"/>
           <a:lstStyle>
-            <a:lvl1pPr marL="0" indent="0" algn="l">
+            <a:lvl1pPr algn="l" indent="0" marL="0">
               <a:buNone/>
               <a:defRPr lang="en-US" sz="2800" b="1" dirty="0">
                 <a:solidFill>
@@ -3511,7 +3854,7 @@
             </a:lvl1pPr>
           </a:lstStyle>
           <a:p>
-            <a:pPr marL="0" indent="0" algn="l">
+            <a:pPr algn="l" indent="0" marL="0">
               <a:buNone/>
             </a:pPr>
             <a:endParaRPr lang="en-US" sz="2800" dirty="0"/>
@@ -3521,11 +3864,9 @@
       <p:sp>
         <p:nvSpPr>
           <p:cNvPr id="3" name="Text 0"/>
-          <p:cNvSpPr>
-            <a:spLocks noGrp="1"/>
-          </p:cNvSpPr>
+          <p:cNvSpPr/>
           <p:nvPr>
-            <p:ph type="body" idx="101" hasCustomPrompt="1"/>
+            <p:ph idx="101" type="body" hasCustomPrompt="1"/>
           </p:nvPr>
         </p:nvSpPr>
         <p:spPr>
@@ -3542,7 +3883,7 @@
         <p:txBody>
           <a:bodyPr wrap="square" rtlCol="0"/>
           <a:lstStyle>
-            <a:lvl1pPr marL="0" indent="0" algn="l">
+            <a:lvl1pPr algn="l" indent="0" marL="0">
               <a:buNone/>
               <a:defRPr lang="en-US" sz="1000" dirty="0">
                 <a:solidFill>
@@ -3552,7 +3893,7 @@
             </a:lvl1pPr>
           </a:lstStyle>
           <a:p>
-            <a:pPr marL="0" indent="0" algn="l">
+            <a:pPr algn="l" indent="0" marL="0">
               <a:buNone/>
             </a:pPr>
             <a:endParaRPr lang="en-US" sz="1000" dirty="0"/>
@@ -3579,7 +3920,7 @@
           </a:prstGeom>
           <a:extLst>
             <a:ext uri="{C572A759-6A51-4108-AA02-DFA0A04FC94B}">
-              <ma14:wrappingTextBoxFlag xmlns:ma14="http://schemas.microsoft.com/office/mac/drawingml/2011/main" xmlns="" val="0"/>
+              <ma14:wrappingTextBoxFlag xmlns:ma14="http://schemas.microsoft.com/office/mac/drawingml/2011/main" val="0"/>
             </a:ext>
           </a:extLst>
         </p:spPr>
@@ -3597,8 +3938,8 @@
           <a:p>
             <a:pPr algn="r"/>
             <a:fld id="{F7021451-1387-4CA6-816F-3879F97B5CBC}" type="slidenum">
-              <a:rPr lang="en-US" b="0"/>
-              <a:t>‹#›</a:t>
+              <a:rPr b="0" lang="en-US"/>
+              <a:t>1003</a:t>
             </a:fld>
             <a:endParaRPr lang="en-US"/>
           </a:p>
@@ -3618,7 +3959,7 @@
     <p:bg>
       <p:bgPr>
         <a:blipFill dpi="0" rotWithShape="1">
-          <a:blip r:embed="rId2">
+          <a:blip r:embed="rId1">
             <a:lum/>
           </a:blip>
           <a:srcRect/>
@@ -3646,11 +3987,9 @@
       <p:sp>
         <p:nvSpPr>
           <p:cNvPr id="2" name="Text 0"/>
-          <p:cNvSpPr>
-            <a:spLocks noGrp="1"/>
-          </p:cNvSpPr>
+          <p:cNvSpPr/>
           <p:nvPr>
-            <p:ph type="title" idx="100" hasCustomPrompt="1"/>
+            <p:ph idx="100" type="title" hasCustomPrompt="1"/>
           </p:nvPr>
         </p:nvSpPr>
         <p:spPr>
@@ -3667,7 +4006,7 @@
         <p:txBody>
           <a:bodyPr wrap="square" rtlCol="0"/>
           <a:lstStyle>
-            <a:lvl1pPr marL="0" indent="0" algn="l">
+            <a:lvl1pPr algn="l" indent="0" marL="0">
               <a:buNone/>
               <a:defRPr lang="en-US" sz="4000" b="1" dirty="0">
                 <a:solidFill>
@@ -3677,7 +4016,7 @@
             </a:lvl1pPr>
           </a:lstStyle>
           <a:p>
-            <a:pPr marL="0" indent="0" algn="l">
+            <a:pPr algn="l" indent="0" marL="0">
               <a:buNone/>
             </a:pPr>
             <a:endParaRPr lang="en-US" sz="4000" dirty="0"/>
@@ -3687,11 +4026,9 @@
       <p:sp>
         <p:nvSpPr>
           <p:cNvPr id="3" name="Text 0"/>
-          <p:cNvSpPr>
-            <a:spLocks noGrp="1"/>
-          </p:cNvSpPr>
+          <p:cNvSpPr/>
           <p:nvPr>
-            <p:ph type="body" idx="101" hasCustomPrompt="1"/>
+            <p:ph idx="101" type="body" hasCustomPrompt="1"/>
           </p:nvPr>
         </p:nvSpPr>
         <p:spPr>
@@ -3708,7 +4045,7 @@
         <p:txBody>
           <a:bodyPr wrap="square" rtlCol="0"/>
           <a:lstStyle>
-            <a:lvl1pPr marL="0" indent="0" algn="l">
+            <a:lvl1pPr algn="l" indent="0" marL="0">
               <a:buNone/>
               <a:defRPr lang="en-US" sz="1800" dirty="0">
                 <a:solidFill>
@@ -3718,7 +4055,7 @@
             </a:lvl1pPr>
           </a:lstStyle>
           <a:p>
-            <a:pPr marL="0" indent="0" algn="l">
+            <a:pPr algn="l" indent="0" marL="0">
               <a:buNone/>
             </a:pPr>
             <a:endParaRPr lang="en-US" sz="1800" dirty="0"/>
@@ -3736,11 +4073,6 @@
 <file path=ppt/slideMasters/slideMaster1.xml><?xml version="1.0" encoding="utf-8"?>
 <p:sldMaster xmlns:a="http://schemas.openxmlformats.org/drawingml/2006/main" xmlns:r="http://schemas.openxmlformats.org/officeDocument/2006/relationships" xmlns:p="http://schemas.openxmlformats.org/presentationml/2006/main">
   <p:cSld>
-    <p:bg>
-      <p:bgRef idx="1001">
-        <a:schemeClr val="bg1"/>
-      </p:bgRef>
-    </p:bg>
     <p:spTree>
       <p:nvGrpSpPr>
         <p:cNvPr id="1" name=""/>
@@ -3775,7 +4107,7 @@
           </a:prstGeom>
           <a:extLst>
             <a:ext uri="{C572A759-6A51-4108-AA02-DFA0A04FC94B}">
-              <ma14:wrappingTextBoxFlag xmlns:ma14="http://schemas.microsoft.com/office/mac/drawingml/2011/main" xmlns="" val="0"/>
+              <ma14:wrappingTextBoxFlag xmlns:ma14="http://schemas.microsoft.com/office/mac/drawingml/2011/main" val="0"/>
             </a:ext>
           </a:extLst>
         </p:spPr>
@@ -3793,8 +4125,8 @@
           <a:p>
             <a:pPr algn="r"/>
             <a:fld id="{F7021451-1387-4CA6-816F-3879F97B5CBC}" type="slidenum">
-              <a:rPr lang="en-US" b="0"/>
-              <a:t>‹#›</a:t>
+              <a:rPr b="0" lang="en-US"/>
+              <a:t>null</a:t>
             </a:fld>
             <a:endParaRPr lang="en-US"/>
           </a:p>
@@ -4101,7 +4433,7 @@
           <a:bodyPr wrap="square" lIns="0" tIns="0" rIns="0" bIns="0" rtlCol="0" anchor="t"/>
           <a:lstStyle/>
           <a:p>
-            <a:pPr marL="0" indent="0" algn="l">
+            <a:pPr algn="l" indent="0" marL="0">
               <a:buNone/>
             </a:pPr>
             <a:r>
@@ -4137,7 +4469,7 @@
           <a:bodyPr wrap="square" lIns="0" tIns="0" rIns="0" bIns="0" rtlCol="0" anchor="t"/>
           <a:lstStyle/>
           <a:p>
-            <a:pPr marL="0" indent="0" algn="l">
+            <a:pPr algn="l" indent="0" marL="0">
               <a:buNone/>
             </a:pPr>
             <a:r>
@@ -4173,7 +4505,7 @@
           <a:bodyPr wrap="square" lIns="0" tIns="0" rIns="0" bIns="0" rtlCol="0" anchor="t"/>
           <a:lstStyle/>
           <a:p>
-            <a:pPr marL="0" indent="0" algn="l">
+            <a:pPr algn="l" indent="0" marL="0">
               <a:buNone/>
             </a:pPr>
             <a:r>
@@ -4209,7 +4541,7 @@
           <a:bodyPr wrap="square" lIns="0" tIns="0" rIns="0" bIns="0" rtlCol="0" anchor="t"/>
           <a:lstStyle/>
           <a:p>
-            <a:pPr marL="0" indent="0" algn="l">
+            <a:pPr algn="l" indent="0" marL="0">
               <a:buNone/>
             </a:pPr>
             <a:r>
@@ -4272,7 +4604,7 @@
           <a:bodyPr wrap="square" lIns="0" tIns="0" rIns="0" bIns="0" rtlCol="0" anchor="ctr"/>
           <a:lstStyle/>
           <a:p>
-            <a:pPr marL="0" indent="0" algn="ctr">
+            <a:pPr algn="ctr" indent="0" marL="0">
               <a:buNone/>
             </a:pPr>
             <a:r>
@@ -4335,7 +4667,7 @@
           <a:bodyPr wrap="square" lIns="0" tIns="0" rIns="0" bIns="0" rtlCol="0" anchor="ctr"/>
           <a:lstStyle/>
           <a:p>
-            <a:pPr marL="0" indent="0" algn="ctr">
+            <a:pPr algn="ctr" indent="0" marL="0">
               <a:buNone/>
             </a:pPr>
             <a:r>
@@ -4398,7 +4730,7 @@
           <a:bodyPr wrap="square" lIns="0" tIns="0" rIns="0" bIns="0" rtlCol="0" anchor="ctr"/>
           <a:lstStyle/>
           <a:p>
-            <a:pPr marL="0" indent="0" algn="ctr">
+            <a:pPr algn="ctr" indent="0" marL="0">
               <a:buNone/>
             </a:pPr>
             <a:r>
@@ -4461,7 +4793,7 @@
           <a:bodyPr wrap="square" lIns="0" tIns="0" rIns="0" bIns="0" rtlCol="0" anchor="ctr"/>
           <a:lstStyle/>
           <a:p>
-            <a:pPr marL="0" indent="0" algn="ctr">
+            <a:pPr algn="ctr" indent="0" marL="0">
               <a:buNone/>
             </a:pPr>
             <a:r>
@@ -4497,7 +4829,7 @@
           <a:bodyPr wrap="square" lIns="0" tIns="0" rIns="0" bIns="0" rtlCol="0" anchor="t"/>
           <a:lstStyle/>
           <a:p>
-            <a:pPr marL="0" indent="0" algn="l">
+            <a:pPr algn="l" indent="0" marL="0">
               <a:buNone/>
             </a:pPr>
             <a:r>
@@ -4533,7 +4865,7 @@
           <a:bodyPr wrap="square" lIns="0" tIns="0" rIns="0" bIns="0" rtlCol="0" anchor="t"/>
           <a:lstStyle/>
           <a:p>
-            <a:pPr marL="0" indent="0" algn="l">
+            <a:pPr algn="l" indent="0" marL="0">
               <a:buNone/>
             </a:pPr>
             <a:r>
@@ -4550,14 +4882,14 @@
       </p:sp>
       <p:pic>
         <p:nvPicPr>
-          <p:cNvPr id="16" name="graph" descr="Схема: граф полномочий «Мандата»"/>
+          <p:cNvPr id="16" name="graph" descr="Схема: граф полномочий «Мандата»">    </p:cNvPr>
           <p:cNvPicPr>
             <a:picLocks noChangeAspect="1"/>
           </p:cNvPicPr>
           <p:nvPr/>
         </p:nvPicPr>
         <p:blipFill>
-          <a:blip r:embed="rId3"/>
+          <a:blip r:embed="rId1"/>
           <a:stretch>
             <a:fillRect/>
           </a:stretch>
@@ -4600,11 +4932,9 @@
       <p:sp>
         <p:nvSpPr>
           <p:cNvPr id="2" name="Text 0"/>
-          <p:cNvSpPr>
-            <a:spLocks noGrp="1"/>
-          </p:cNvSpPr>
+          <p:cNvSpPr/>
           <p:nvPr>
-            <p:ph type="title" idx="100" hasCustomPrompt="1"/>
+            <p:ph idx="100" type="title" hasCustomPrompt="1"/>
           </p:nvPr>
         </p:nvSpPr>
         <p:spPr>
@@ -4622,7 +4952,7 @@
           <a:bodyPr wrap="square" lIns="0" tIns="0" rIns="0" bIns="0" rtlCol="0" anchor="ctr"/>
           <a:lstStyle/>
           <a:p>
-            <a:pPr marL="0" indent="0" algn="l">
+            <a:pPr algn="l" indent="0" marL="0">
               <a:buNone/>
             </a:pPr>
             <a:r>
@@ -4640,11 +4970,9 @@
       <p:sp>
         <p:nvSpPr>
           <p:cNvPr id="3" name="Text 0"/>
-          <p:cNvSpPr>
-            <a:spLocks noGrp="1"/>
-          </p:cNvSpPr>
+          <p:cNvSpPr/>
           <p:nvPr>
-            <p:ph type="body" idx="101" hasCustomPrompt="1"/>
+            <p:ph idx="101" type="body" hasCustomPrompt="1"/>
           </p:nvPr>
         </p:nvSpPr>
         <p:spPr>
@@ -4662,7 +4990,7 @@
           <a:bodyPr wrap="square" lIns="0" tIns="0" rIns="0" bIns="0" rtlCol="0" anchor="ctr"/>
           <a:lstStyle/>
           <a:p>
-            <a:pPr marL="0" indent="0" algn="l">
+            <a:pPr algn="l" indent="0" marL="0">
               <a:buNone/>
             </a:pPr>
             <a:r>
@@ -4703,7 +5031,7 @@
             <a:prstDash val="solid"/>
           </a:ln>
           <a:effectLst>
-            <a:outerShdw blurRad="76200" dist="25400" dir="5400000" algn="bl" rotWithShape="0">
+            <a:outerShdw sx="100000" sy="100000" kx="0" ky="0" algn="bl" rotWithShape="0" blurRad="76200" dist="25400" dir="5400000">
               <a:srgbClr val="000000">
                 <a:alpha val="28000"/>
               </a:srgbClr>
@@ -4780,7 +5108,7 @@
           <a:bodyPr wrap="square" lIns="0" tIns="0" rIns="0" bIns="0" rtlCol="0" anchor="t"/>
           <a:lstStyle/>
           <a:p>
-            <a:pPr marL="0" indent="0" algn="r">
+            <a:pPr algn="r" indent="0" marL="0">
               <a:buNone/>
             </a:pPr>
             <a:r>
@@ -4816,7 +5144,7 @@
           <a:bodyPr wrap="square" lIns="0" tIns="0" rIns="0" bIns="0" rtlCol="0" anchor="t"/>
           <a:lstStyle/>
           <a:p>
-            <a:pPr marL="0" indent="0" algn="l">
+            <a:pPr algn="l" indent="0" marL="0">
               <a:buNone/>
             </a:pPr>
             <a:r>
@@ -4877,7 +5205,7 @@
           <a:bodyPr wrap="square" lIns="0" tIns="0" rIns="0" bIns="0" rtlCol="0" anchor="t"/>
           <a:lstStyle/>
           <a:p>
-            <a:pPr marL="0" indent="0" algn="r">
+            <a:pPr algn="r" indent="0" marL="0">
               <a:buNone/>
             </a:pPr>
             <a:r>
@@ -4913,7 +5241,7 @@
           <a:bodyPr wrap="square" lIns="0" tIns="0" rIns="0" bIns="0" rtlCol="0" anchor="t"/>
           <a:lstStyle/>
           <a:p>
-            <a:pPr marL="0" indent="0" algn="l">
+            <a:pPr algn="l" indent="0" marL="0">
               <a:buNone/>
             </a:pPr>
             <a:r>
@@ -4974,7 +5302,7 @@
           <a:bodyPr wrap="square" lIns="0" tIns="0" rIns="0" bIns="0" rtlCol="0" anchor="t"/>
           <a:lstStyle/>
           <a:p>
-            <a:pPr marL="0" indent="0" algn="r">
+            <a:pPr algn="r" indent="0" marL="0">
               <a:buNone/>
             </a:pPr>
             <a:r>
@@ -5010,7 +5338,7 @@
           <a:bodyPr wrap="square" lIns="0" tIns="0" rIns="0" bIns="0" rtlCol="0" anchor="t"/>
           <a:lstStyle/>
           <a:p>
-            <a:pPr marL="0" indent="0" algn="l">
+            <a:pPr algn="l" indent="0" marL="0">
               <a:buNone/>
             </a:pPr>
             <a:r>
@@ -5071,7 +5399,7 @@
           <a:bodyPr wrap="square" lIns="0" tIns="0" rIns="0" bIns="0" rtlCol="0" anchor="t"/>
           <a:lstStyle/>
           <a:p>
-            <a:pPr marL="0" indent="0" algn="r">
+            <a:pPr algn="r" indent="0" marL="0">
               <a:buNone/>
             </a:pPr>
             <a:r>
@@ -5107,7 +5435,7 @@
           <a:bodyPr wrap="square" lIns="0" tIns="0" rIns="0" bIns="0" rtlCol="0" anchor="t"/>
           <a:lstStyle/>
           <a:p>
-            <a:pPr marL="0" indent="0" algn="l">
+            <a:pPr algn="l" indent="0" marL="0">
               <a:buNone/>
             </a:pPr>
             <a:r>
@@ -5168,7 +5496,7 @@
           <a:bodyPr wrap="square" lIns="0" tIns="0" rIns="0" bIns="0" rtlCol="0" anchor="t"/>
           <a:lstStyle/>
           <a:p>
-            <a:pPr marL="0" indent="0" algn="r">
+            <a:pPr algn="r" indent="0" marL="0">
               <a:buNone/>
             </a:pPr>
             <a:r>
@@ -5204,7 +5532,7 @@
           <a:bodyPr wrap="square" lIns="0" tIns="0" rIns="0" bIns="0" rtlCol="0" anchor="t"/>
           <a:lstStyle/>
           <a:p>
-            <a:pPr marL="0" indent="0" algn="l">
+            <a:pPr algn="l" indent="0" marL="0">
               <a:buNone/>
             </a:pPr>
             <a:r>
@@ -5265,7 +5593,7 @@
           <a:bodyPr wrap="square" lIns="0" tIns="0" rIns="0" bIns="0" rtlCol="0" anchor="t"/>
           <a:lstStyle/>
           <a:p>
-            <a:pPr marL="0" indent="0" algn="r">
+            <a:pPr algn="r" indent="0" marL="0">
               <a:buNone/>
             </a:pPr>
             <a:r>
@@ -5301,7 +5629,7 @@
           <a:bodyPr wrap="square" lIns="0" tIns="0" rIns="0" bIns="0" rtlCol="0" anchor="t"/>
           <a:lstStyle/>
           <a:p>
-            <a:pPr marL="0" indent="0" algn="l">
+            <a:pPr algn="l" indent="0" marL="0">
               <a:buNone/>
             </a:pPr>
             <a:r>
@@ -5362,7 +5690,7 @@
           <a:bodyPr wrap="square" lIns="0" tIns="0" rIns="0" bIns="0" rtlCol="0" anchor="t"/>
           <a:lstStyle/>
           <a:p>
-            <a:pPr marL="0" indent="0" algn="r">
+            <a:pPr algn="r" indent="0" marL="0">
               <a:buNone/>
             </a:pPr>
             <a:r>
@@ -5398,7 +5726,7 @@
           <a:bodyPr wrap="square" lIns="0" tIns="0" rIns="0" bIns="0" rtlCol="0" anchor="t"/>
           <a:lstStyle/>
           <a:p>
-            <a:pPr marL="0" indent="0" algn="l">
+            <a:pPr algn="l" indent="0" marL="0">
               <a:buNone/>
             </a:pPr>
             <a:r>
@@ -5439,7 +5767,7 @@
             <a:prstDash val="solid"/>
           </a:ln>
           <a:effectLst>
-            <a:outerShdw blurRad="76200" dist="25400" dir="5400000" algn="bl" rotWithShape="0">
+            <a:outerShdw sx="100000" sy="100000" kx="0" ky="0" algn="bl" rotWithShape="0" blurRad="76200" dist="25400" dir="5400000">
               <a:srgbClr val="000000">
                 <a:alpha val="28000"/>
               </a:srgbClr>
@@ -5468,7 +5796,7 @@
           <a:bodyPr wrap="square" lIns="0" tIns="0" rIns="0" bIns="0" rtlCol="0" anchor="t"/>
           <a:lstStyle/>
           <a:p>
-            <a:pPr marL="0" indent="0" algn="l">
+            <a:pPr algn="l" indent="0" marL="0">
               <a:buNone/>
             </a:pPr>
             <a:r>
@@ -5504,7 +5832,7 @@
           <a:bodyPr wrap="square" lIns="0" tIns="0" rIns="0" bIns="0" rtlCol="0" anchor="t"/>
           <a:lstStyle/>
           <a:p>
-            <a:pPr marL="0" indent="0" algn="l">
+            <a:pPr algn="l" indent="0" marL="0">
               <a:buNone/>
             </a:pPr>
             <a:r>
@@ -5545,7 +5873,7 @@
             <a:prstDash val="solid"/>
           </a:ln>
           <a:effectLst>
-            <a:outerShdw blurRad="76200" dist="25400" dir="5400000" algn="bl" rotWithShape="0">
+            <a:outerShdw sx="100000" sy="100000" kx="0" ky="0" algn="bl" rotWithShape="0" blurRad="76200" dist="25400" dir="5400000">
               <a:srgbClr val="000000">
                 <a:alpha val="28000"/>
               </a:srgbClr>
@@ -5574,7 +5902,7 @@
           <a:bodyPr wrap="square" lIns="0" tIns="0" rIns="0" bIns="0" rtlCol="0" anchor="t"/>
           <a:lstStyle/>
           <a:p>
-            <a:pPr marL="0" indent="0" algn="l">
+            <a:pPr algn="l" indent="0" marL="0">
               <a:buNone/>
             </a:pPr>
             <a:r>
@@ -5610,7 +5938,7 @@
           <a:bodyPr wrap="square" lIns="0" tIns="0" rIns="0" bIns="0" rtlCol="0" anchor="t"/>
           <a:lstStyle/>
           <a:p>
-            <a:pPr marL="0" indent="0" algn="l">
+            <a:pPr algn="l" indent="0" marL="0">
               <a:buNone/>
             </a:pPr>
             <a:r>
@@ -5627,7 +5955,7 @@
       </p:sp>
       <p:sp>
         <p:nvSpPr>
-          <p:cNvPr id="33" name="Slide Number Placeholder 0"/>
+          <p:cNvPr id="25" name="Slide Number Placeholder 0"/>
           <p:cNvSpPr>
             <a:spLocks noGrp="1"/>
           </p:cNvSpPr>
@@ -5645,7 +5973,7 @@
           </a:prstGeom>
           <a:extLst>
             <a:ext uri="{C572A759-6A51-4108-AA02-DFA0A04FC94B}">
-              <ma14:wrappingTextBoxFlag xmlns:ma14="http://schemas.microsoft.com/office/mac/drawingml/2011/main" xmlns="" val="0"/>
+              <ma14:wrappingTextBoxFlag xmlns:ma14="http://schemas.microsoft.com/office/mac/drawingml/2011/main" val="0"/>
             </a:ext>
           </a:extLst>
         </p:spPr>
@@ -5663,7 +5991,7 @@
           <a:p>
             <a:pPr algn="r"/>
             <a:fld id="{F7021451-1387-4CA6-816F-3879F97B5CBC}" type="slidenum">
-              <a:rPr lang="en-US" b="0"/>
+              <a:rPr b="0" lang="en-US"/>
               <a:t>10</a:t>
             </a:fld>
             <a:endParaRPr lang="en-US"/>
@@ -5698,11 +6026,9 @@
       <p:sp>
         <p:nvSpPr>
           <p:cNvPr id="2" name="Text 0"/>
-          <p:cNvSpPr>
-            <a:spLocks noGrp="1"/>
-          </p:cNvSpPr>
+          <p:cNvSpPr/>
           <p:nvPr>
-            <p:ph type="title" idx="100" hasCustomPrompt="1"/>
+            <p:ph idx="100" type="title" hasCustomPrompt="1"/>
           </p:nvPr>
         </p:nvSpPr>
         <p:spPr>
@@ -5720,7 +6046,7 @@
           <a:bodyPr wrap="square" lIns="0" tIns="0" rIns="0" bIns="0" rtlCol="0" anchor="ctr"/>
           <a:lstStyle/>
           <a:p>
-            <a:pPr marL="0" indent="0" algn="l">
+            <a:pPr algn="l" indent="0" marL="0">
               <a:buNone/>
             </a:pPr>
             <a:r>
@@ -5738,11 +6064,9 @@
       <p:sp>
         <p:nvSpPr>
           <p:cNvPr id="3" name="Text 0"/>
-          <p:cNvSpPr>
-            <a:spLocks noGrp="1"/>
-          </p:cNvSpPr>
+          <p:cNvSpPr/>
           <p:nvPr>
-            <p:ph type="body" idx="101" hasCustomPrompt="1"/>
+            <p:ph idx="101" type="body" hasCustomPrompt="1"/>
           </p:nvPr>
         </p:nvSpPr>
         <p:spPr>
@@ -5760,7 +6084,7 @@
           <a:bodyPr wrap="square" lIns="0" tIns="0" rIns="0" bIns="0" rtlCol="0" anchor="ctr"/>
           <a:lstStyle/>
           <a:p>
-            <a:pPr marL="0" indent="0" algn="l">
+            <a:pPr algn="l" indent="0" marL="0">
               <a:buNone/>
             </a:pPr>
             <a:r>
@@ -5801,7 +6125,7 @@
             <a:prstDash val="solid"/>
           </a:ln>
           <a:effectLst>
-            <a:outerShdw blurRad="76200" dist="25400" dir="5400000" algn="bl" rotWithShape="0">
+            <a:outerShdw sx="100000" sy="100000" kx="0" ky="0" algn="bl" rotWithShape="0" blurRad="76200" dist="25400" dir="5400000">
               <a:srgbClr val="000000">
                 <a:alpha val="28000"/>
               </a:srgbClr>
@@ -5836,7 +6160,7 @@
       </p:sp>
       <p:pic>
         <p:nvPicPr>
-          <p:cNvPr id="6" name="icon">
+          <p:cNvPr id="6" name="icon" descr="">
             <a:extLst>
               <a:ext uri="{C183D7F6-B498-43B3-948B-1728B52AA6E4}">
                 <adec:decorative xmlns:adec="http://schemas.microsoft.com/office/drawing/2017/decorative" val="1"/>
@@ -5849,7 +6173,7 @@
           <p:nvPr/>
         </p:nvPicPr>
         <p:blipFill>
-          <a:blip r:embed="rId3"/>
+          <a:blip r:embed="rId1"/>
           <a:stretch>
             <a:fillRect/>
           </a:stretch>
@@ -5885,7 +6209,7 @@
           <a:bodyPr wrap="square" lIns="0" tIns="0" rIns="0" bIns="0" rtlCol="0" anchor="t"/>
           <a:lstStyle/>
           <a:p>
-            <a:pPr marL="0" indent="0" algn="l">
+            <a:pPr algn="l" indent="0" marL="0">
               <a:buNone/>
             </a:pPr>
             <a:r>
@@ -5996,7 +6320,7 @@
       </p:sp>
       <p:pic>
         <p:nvPicPr>
-          <p:cNvPr id="9" name="arrow">
+          <p:cNvPr id="9" name="arrow" descr="">
             <a:extLst>
               <a:ext uri="{C183D7F6-B498-43B3-948B-1728B52AA6E4}">
                 <adec:decorative xmlns:adec="http://schemas.microsoft.com/office/drawing/2017/decorative" val="1"/>
@@ -6009,7 +6333,7 @@
           <p:nvPr/>
         </p:nvPicPr>
         <p:blipFill>
-          <a:blip r:embed="rId4"/>
+          <a:blip r:embed="rId2"/>
           <a:stretch>
             <a:fillRect/>
           </a:stretch>
@@ -6050,7 +6374,7 @@
             <a:prstDash val="solid"/>
           </a:ln>
           <a:effectLst>
-            <a:outerShdw blurRad="76200" dist="25400" dir="5400000" algn="bl" rotWithShape="0">
+            <a:outerShdw sx="100000" sy="100000" kx="0" ky="0" algn="bl" rotWithShape="0" blurRad="76200" dist="25400" dir="5400000">
               <a:srgbClr val="000000">
                 <a:alpha val="28000"/>
               </a:srgbClr>
@@ -6085,7 +6409,7 @@
       </p:sp>
       <p:pic>
         <p:nvPicPr>
-          <p:cNvPr id="12" name="icon">
+          <p:cNvPr id="12" name="icon" descr="">
             <a:extLst>
               <a:ext uri="{C183D7F6-B498-43B3-948B-1728B52AA6E4}">
                 <adec:decorative xmlns:adec="http://schemas.microsoft.com/office/drawing/2017/decorative" val="1"/>
@@ -6098,7 +6422,7 @@
           <p:nvPr/>
         </p:nvPicPr>
         <p:blipFill>
-          <a:blip r:embed="rId5"/>
+          <a:blip r:embed="rId3"/>
           <a:stretch>
             <a:fillRect/>
           </a:stretch>
@@ -6134,7 +6458,7 @@
           <a:bodyPr wrap="square" lIns="0" tIns="0" rIns="0" bIns="0" rtlCol="0" anchor="t"/>
           <a:lstStyle/>
           <a:p>
-            <a:pPr marL="0" indent="0" algn="l">
+            <a:pPr algn="l" indent="0" marL="0">
               <a:buNone/>
             </a:pPr>
             <a:r>
@@ -6245,7 +6569,7 @@
       </p:sp>
       <p:pic>
         <p:nvPicPr>
-          <p:cNvPr id="15" name="arrow">
+          <p:cNvPr id="15" name="arrow" descr="">
             <a:extLst>
               <a:ext uri="{C183D7F6-B498-43B3-948B-1728B52AA6E4}">
                 <adec:decorative xmlns:adec="http://schemas.microsoft.com/office/drawing/2017/decorative" val="1"/>
@@ -6299,7 +6623,7 @@
             <a:prstDash val="solid"/>
           </a:ln>
           <a:effectLst>
-            <a:outerShdw blurRad="76200" dist="25400" dir="5400000" algn="bl" rotWithShape="0">
+            <a:outerShdw sx="100000" sy="100000" kx="0" ky="0" algn="bl" rotWithShape="0" blurRad="76200" dist="25400" dir="5400000">
               <a:srgbClr val="000000">
                 <a:alpha val="28000"/>
               </a:srgbClr>
@@ -6334,7 +6658,7 @@
       </p:sp>
       <p:pic>
         <p:nvPicPr>
-          <p:cNvPr id="18" name="icon">
+          <p:cNvPr id="18" name="icon" descr="">
             <a:extLst>
               <a:ext uri="{C183D7F6-B498-43B3-948B-1728B52AA6E4}">
                 <adec:decorative xmlns:adec="http://schemas.microsoft.com/office/drawing/2017/decorative" val="1"/>
@@ -6347,7 +6671,7 @@
           <p:nvPr/>
         </p:nvPicPr>
         <p:blipFill>
-          <a:blip r:embed="rId6"/>
+          <a:blip r:embed="rId5"/>
           <a:stretch>
             <a:fillRect/>
           </a:stretch>
@@ -6383,7 +6707,7 @@
           <a:bodyPr wrap="square" lIns="0" tIns="0" rIns="0" bIns="0" rtlCol="0" anchor="t"/>
           <a:lstStyle/>
           <a:p>
-            <a:pPr marL="0" indent="0" algn="l">
+            <a:pPr algn="l" indent="0" marL="0">
               <a:buNone/>
             </a:pPr>
             <a:r>
@@ -6518,7 +6842,7 @@
             <a:prstDash val="solid"/>
           </a:ln>
           <a:effectLst>
-            <a:outerShdw blurRad="76200" dist="25400" dir="5400000" algn="bl" rotWithShape="0">
+            <a:outerShdw sx="100000" sy="100000" kx="0" ky="0" algn="bl" rotWithShape="0" blurRad="76200" dist="25400" dir="5400000">
               <a:srgbClr val="000000">
                 <a:alpha val="28000"/>
               </a:srgbClr>
@@ -6547,7 +6871,7 @@
           <a:bodyPr wrap="square" lIns="0" tIns="0" rIns="0" bIns="0" rtlCol="0" anchor="t"/>
           <a:lstStyle/>
           <a:p>
-            <a:pPr marL="0" indent="0" algn="l">
+            <a:pPr algn="l" indent="0" marL="0">
               <a:buNone/>
             </a:pPr>
             <a:r>
@@ -6664,7 +6988,7 @@
             <a:prstDash val="solid"/>
           </a:ln>
           <a:effectLst>
-            <a:outerShdw blurRad="76200" dist="25400" dir="5400000" algn="bl" rotWithShape="0">
+            <a:outerShdw sx="100000" sy="100000" kx="0" ky="0" algn="bl" rotWithShape="0" blurRad="76200" dist="25400" dir="5400000">
               <a:srgbClr val="000000">
                 <a:alpha val="28000"/>
               </a:srgbClr>
@@ -6693,7 +7017,7 @@
           <a:bodyPr wrap="square" lIns="0" tIns="0" rIns="0" bIns="0" rtlCol="0" anchor="t"/>
           <a:lstStyle/>
           <a:p>
-            <a:pPr marL="0" indent="0" algn="l">
+            <a:pPr algn="l" indent="0" marL="0">
               <a:buNone/>
             </a:pPr>
             <a:r>
@@ -6786,7 +7110,7 @@
       </p:sp>
       <p:sp>
         <p:nvSpPr>
-          <p:cNvPr id="27" name="Slide Number Placeholder 0"/>
+          <p:cNvPr id="25" name="Slide Number Placeholder 0"/>
           <p:cNvSpPr>
             <a:spLocks noGrp="1"/>
           </p:cNvSpPr>
@@ -6804,7 +7128,7 @@
           </a:prstGeom>
           <a:extLst>
             <a:ext uri="{C572A759-6A51-4108-AA02-DFA0A04FC94B}">
-              <ma14:wrappingTextBoxFlag xmlns:ma14="http://schemas.microsoft.com/office/mac/drawingml/2011/main" xmlns="" val="0"/>
+              <ma14:wrappingTextBoxFlag xmlns:ma14="http://schemas.microsoft.com/office/mac/drawingml/2011/main" val="0"/>
             </a:ext>
           </a:extLst>
         </p:spPr>
@@ -6822,7 +7146,7 @@
           <a:p>
             <a:pPr algn="r"/>
             <a:fld id="{F7021451-1387-4CA6-816F-3879F97B5CBC}" type="slidenum">
-              <a:rPr lang="en-US" b="0"/>
+              <a:rPr b="0" lang="en-US"/>
               <a:t>11</a:t>
             </a:fld>
             <a:endParaRPr lang="en-US"/>
@@ -6857,11 +7181,9 @@
       <p:sp>
         <p:nvSpPr>
           <p:cNvPr id="2" name="Text 0"/>
-          <p:cNvSpPr>
-            <a:spLocks noGrp="1"/>
-          </p:cNvSpPr>
+          <p:cNvSpPr/>
           <p:nvPr>
-            <p:ph type="title" idx="100" hasCustomPrompt="1"/>
+            <p:ph idx="100" type="title" hasCustomPrompt="1"/>
           </p:nvPr>
         </p:nvSpPr>
         <p:spPr>
@@ -6879,7 +7201,7 @@
           <a:bodyPr wrap="square" lIns="0" tIns="0" rIns="0" bIns="0" rtlCol="0" anchor="ctr"/>
           <a:lstStyle/>
           <a:p>
-            <a:pPr marL="0" indent="0" algn="l">
+            <a:pPr algn="l" indent="0" marL="0">
               <a:buNone/>
             </a:pPr>
             <a:r>
@@ -6897,11 +7219,9 @@
       <p:sp>
         <p:nvSpPr>
           <p:cNvPr id="3" name="Text 0"/>
-          <p:cNvSpPr>
-            <a:spLocks noGrp="1"/>
-          </p:cNvSpPr>
+          <p:cNvSpPr/>
           <p:nvPr>
-            <p:ph type="body" idx="101" hasCustomPrompt="1"/>
+            <p:ph idx="101" type="body" hasCustomPrompt="1"/>
           </p:nvPr>
         </p:nvSpPr>
         <p:spPr>
@@ -6919,7 +7239,7 @@
           <a:bodyPr wrap="square" lIns="0" tIns="0" rIns="0" bIns="0" rtlCol="0" anchor="ctr"/>
           <a:lstStyle/>
           <a:p>
-            <a:pPr marL="0" indent="0" algn="l">
+            <a:pPr algn="l" indent="0" marL="0">
               <a:buNone/>
             </a:pPr>
             <a:r>
@@ -6960,7 +7280,7 @@
             <a:prstDash val="solid"/>
           </a:ln>
           <a:effectLst>
-            <a:outerShdw blurRad="76200" dist="25400" dir="5400000" algn="bl" rotWithShape="0">
+            <a:outerShdw sx="100000" sy="100000" kx="0" ky="0" algn="bl" rotWithShape="0" blurRad="76200" dist="25400" dir="5400000">
               <a:srgbClr val="000000">
                 <a:alpha val="28000"/>
               </a:srgbClr>
@@ -6989,7 +7309,7 @@
           <a:bodyPr wrap="square" lIns="0" tIns="0" rIns="0" bIns="0" rtlCol="0" anchor="t"/>
           <a:lstStyle/>
           <a:p>
-            <a:pPr marL="0" indent="0" algn="l">
+            <a:pPr algn="l" indent="0" marL="0">
               <a:buNone/>
             </a:pPr>
             <a:r>
@@ -7025,7 +7345,7 @@
           <a:bodyPr wrap="square" lIns="0" tIns="0" rIns="0" bIns="0" rtlCol="0" anchor="t"/>
           <a:lstStyle/>
           <a:p>
-            <a:pPr marL="0" indent="0" algn="l">
+            <a:pPr algn="l" indent="0" marL="0">
               <a:buNone/>
             </a:pPr>
             <a:r>
@@ -7066,7 +7386,7 @@
             <a:prstDash val="solid"/>
           </a:ln>
           <a:effectLst>
-            <a:outerShdw blurRad="76200" dist="25400" dir="5400000" algn="bl" rotWithShape="0">
+            <a:outerShdw sx="100000" sy="100000" kx="0" ky="0" algn="bl" rotWithShape="0" blurRad="76200" dist="25400" dir="5400000">
               <a:srgbClr val="000000">
                 <a:alpha val="28000"/>
               </a:srgbClr>
@@ -7095,7 +7415,7 @@
           <a:bodyPr wrap="square" lIns="0" tIns="0" rIns="0" bIns="0" rtlCol="0" anchor="t"/>
           <a:lstStyle/>
           <a:p>
-            <a:pPr marL="0" indent="0" algn="l">
+            <a:pPr algn="l" indent="0" marL="0">
               <a:buNone/>
             </a:pPr>
             <a:r>
@@ -7131,7 +7451,7 @@
           <a:bodyPr wrap="square" lIns="0" tIns="0" rIns="0" bIns="0" rtlCol="0" anchor="t"/>
           <a:lstStyle/>
           <a:p>
-            <a:pPr marL="0" indent="0" algn="l">
+            <a:pPr algn="l" indent="0" marL="0">
               <a:buNone/>
             </a:pPr>
             <a:r>
@@ -7172,7 +7492,7 @@
             <a:prstDash val="solid"/>
           </a:ln>
           <a:effectLst>
-            <a:outerShdw blurRad="76200" dist="25400" dir="5400000" algn="bl" rotWithShape="0">
+            <a:outerShdw sx="100000" sy="100000" kx="0" ky="0" algn="bl" rotWithShape="0" blurRad="76200" dist="25400" dir="5400000">
               <a:srgbClr val="000000">
                 <a:alpha val="28000"/>
               </a:srgbClr>
@@ -7201,7 +7521,7 @@
           <a:bodyPr wrap="square" lIns="0" tIns="0" rIns="0" bIns="0" rtlCol="0" anchor="t"/>
           <a:lstStyle/>
           <a:p>
-            <a:pPr marL="0" indent="0" algn="l">
+            <a:pPr algn="l" indent="0" marL="0">
               <a:buNone/>
             </a:pPr>
             <a:r>
@@ -7237,7 +7557,7 @@
           <a:bodyPr wrap="square" lIns="0" tIns="0" rIns="0" bIns="0" rtlCol="0" anchor="t"/>
           <a:lstStyle/>
           <a:p>
-            <a:pPr marL="0" indent="0" algn="l">
+            <a:pPr algn="l" indent="0" marL="0">
               <a:buNone/>
             </a:pPr>
             <a:r>
@@ -7278,7 +7598,7 @@
             <a:prstDash val="solid"/>
           </a:ln>
           <a:effectLst>
-            <a:outerShdw blurRad="76200" dist="25400" dir="5400000" algn="bl" rotWithShape="0">
+            <a:outerShdw sx="100000" sy="100000" kx="0" ky="0" algn="bl" rotWithShape="0" blurRad="76200" dist="25400" dir="5400000">
               <a:srgbClr val="000000">
                 <a:alpha val="28000"/>
               </a:srgbClr>
@@ -7313,7 +7633,7 @@
       </p:sp>
       <p:pic>
         <p:nvPicPr>
-          <p:cNvPr id="15" name="icon">
+          <p:cNvPr id="15" name="icon" descr="">
             <a:extLst>
               <a:ext uri="{C183D7F6-B498-43B3-948B-1728B52AA6E4}">
                 <adec:decorative xmlns:adec="http://schemas.microsoft.com/office/drawing/2017/decorative" val="1"/>
@@ -7326,7 +7646,7 @@
           <p:nvPr/>
         </p:nvPicPr>
         <p:blipFill>
-          <a:blip r:embed="rId3"/>
+          <a:blip r:embed="rId1"/>
           <a:stretch>
             <a:fillRect/>
           </a:stretch>
@@ -7362,7 +7682,7 @@
           <a:bodyPr wrap="square" lIns="0" tIns="0" rIns="0" bIns="0" rtlCol="0" anchor="t"/>
           <a:lstStyle/>
           <a:p>
-            <a:pPr marL="0" indent="0" algn="l">
+            <a:pPr algn="l" indent="0" marL="0">
               <a:buNone/>
             </a:pPr>
             <a:r>
@@ -7497,7 +7817,7 @@
             <a:prstDash val="solid"/>
           </a:ln>
           <a:effectLst>
-            <a:outerShdw blurRad="76200" dist="25400" dir="5400000" algn="bl" rotWithShape="0">
+            <a:outerShdw sx="100000" sy="100000" kx="0" ky="0" algn="bl" rotWithShape="0" blurRad="76200" dist="25400" dir="5400000">
               <a:srgbClr val="000000">
                 <a:alpha val="28000"/>
               </a:srgbClr>
@@ -7532,7 +7852,7 @@
       </p:sp>
       <p:pic>
         <p:nvPicPr>
-          <p:cNvPr id="20" name="icon">
+          <p:cNvPr id="20" name="icon" descr="">
             <a:extLst>
               <a:ext uri="{C183D7F6-B498-43B3-948B-1728B52AA6E4}">
                 <adec:decorative xmlns:adec="http://schemas.microsoft.com/office/drawing/2017/decorative" val="1"/>
@@ -7545,7 +7865,7 @@
           <p:nvPr/>
         </p:nvPicPr>
         <p:blipFill>
-          <a:blip r:embed="rId4"/>
+          <a:blip r:embed="rId2"/>
           <a:stretch>
             <a:fillRect/>
           </a:stretch>
@@ -7581,7 +7901,7 @@
           <a:bodyPr wrap="square" lIns="0" tIns="0" rIns="0" bIns="0" rtlCol="0" anchor="t"/>
           <a:lstStyle/>
           <a:p>
-            <a:pPr marL="0" indent="0" algn="l">
+            <a:pPr algn="l" indent="0" marL="0">
               <a:buNone/>
             </a:pPr>
             <a:r>
@@ -7716,7 +8036,7 @@
             <a:prstDash val="solid"/>
           </a:ln>
           <a:effectLst>
-            <a:outerShdw blurRad="76200" dist="25400" dir="5400000" algn="bl" rotWithShape="0">
+            <a:outerShdw sx="100000" sy="100000" kx="0" ky="0" algn="bl" rotWithShape="0" blurRad="76200" dist="25400" dir="5400000">
               <a:srgbClr val="000000">
                 <a:alpha val="28000"/>
               </a:srgbClr>
@@ -7745,7 +8065,7 @@
           <a:bodyPr wrap="square" lIns="0" tIns="0" rIns="0" bIns="0" rtlCol="0" anchor="ctr"/>
           <a:lstStyle/>
           <a:p>
-            <a:pPr marL="0" indent="0" algn="l">
+            <a:pPr algn="l" indent="0" marL="0">
               <a:buNone/>
             </a:pPr>
             <a:r>
@@ -7780,7 +8100,7 @@
           </a:prstGeom>
           <a:extLst>
             <a:ext uri="{C572A759-6A51-4108-AA02-DFA0A04FC94B}">
-              <ma14:wrappingTextBoxFlag xmlns:ma14="http://schemas.microsoft.com/office/mac/drawingml/2011/main" xmlns="" val="0"/>
+              <ma14:wrappingTextBoxFlag xmlns:ma14="http://schemas.microsoft.com/office/mac/drawingml/2011/main" val="0"/>
             </a:ext>
           </a:extLst>
         </p:spPr>
@@ -7798,7 +8118,7 @@
           <a:p>
             <a:pPr algn="r"/>
             <a:fld id="{F7021451-1387-4CA6-816F-3879F97B5CBC}" type="slidenum">
-              <a:rPr lang="en-US" b="0"/>
+              <a:rPr b="0" lang="en-US"/>
               <a:t>12</a:t>
             </a:fld>
             <a:endParaRPr lang="en-US"/>
@@ -7833,11 +8153,9 @@
       <p:sp>
         <p:nvSpPr>
           <p:cNvPr id="2" name="Text 0"/>
-          <p:cNvSpPr>
-            <a:spLocks noGrp="1"/>
-          </p:cNvSpPr>
+          <p:cNvSpPr/>
           <p:nvPr>
-            <p:ph type="title" idx="100" hasCustomPrompt="1"/>
+            <p:ph idx="100" type="title" hasCustomPrompt="1"/>
           </p:nvPr>
         </p:nvSpPr>
         <p:spPr>
@@ -7855,7 +8173,7 @@
           <a:bodyPr wrap="square" lIns="0" tIns="0" rIns="0" bIns="0" rtlCol="0" anchor="ctr"/>
           <a:lstStyle/>
           <a:p>
-            <a:pPr marL="0" indent="0" algn="l">
+            <a:pPr algn="l" indent="0" marL="0">
               <a:buNone/>
             </a:pPr>
             <a:r>
@@ -7864,7 +8182,7 @@
                   <a:schemeClr val="bg1"/>
                 </a:solidFill>
               </a:rPr>
-              <a:t>Команда: правила, измерение, процесс и право</a:t>
+              <a:t>Команда: правила и измерение</a:t>
             </a:r>
             <a:endParaRPr lang="en-US" sz="2800" dirty="0"/>
           </a:p>
@@ -7873,11 +8191,9 @@
       <p:sp>
         <p:nvSpPr>
           <p:cNvPr id="3" name="Text 0"/>
-          <p:cNvSpPr>
-            <a:spLocks noGrp="1"/>
-          </p:cNvSpPr>
+          <p:cNvSpPr/>
           <p:nvPr>
-            <p:ph type="body" idx="101" hasCustomPrompt="1"/>
+            <p:ph idx="101" type="body" hasCustomPrompt="1"/>
           </p:nvPr>
         </p:nvSpPr>
         <p:spPr>
@@ -7895,7 +8211,7 @@
           <a:bodyPr wrap="square" lIns="0" tIns="0" rIns="0" bIns="0" rtlCol="0" anchor="ctr"/>
           <a:lstStyle/>
           <a:p>
-            <a:pPr marL="0" indent="0" algn="l">
+            <a:pPr algn="l" indent="0" marL="0">
               <a:buNone/>
             </a:pPr>
             <a:r>
@@ -7918,12 +8234,12 @@
         </p:nvSpPr>
         <p:spPr>
           <a:xfrm>
-            <a:off x="548640" y="1325880"/>
-            <a:ext cx="5431536" cy="2286000"/>
+            <a:off x="882396" y="1645920"/>
+            <a:ext cx="5029200" cy="3108960"/>
           </a:xfrm>
           <a:prstGeom prst="roundRect">
             <a:avLst>
-              <a:gd name="adj" fmla="val 3200"/>
+              <a:gd name="adj" fmla="val 2353"/>
             </a:avLst>
           </a:prstGeom>
           <a:solidFill>
@@ -7936,7 +8252,7 @@
             <a:prstDash val="solid"/>
           </a:ln>
           <a:effectLst>
-            <a:outerShdw blurRad="76200" dist="25400" dir="5400000" algn="bl" rotWithShape="0">
+            <a:outerShdw sx="100000" sy="100000" kx="0" ky="0" algn="bl" rotWithShape="0" blurRad="76200" dist="25400" dir="5400000">
               <a:srgbClr val="000000">
                 <a:alpha val="28000"/>
               </a:srgbClr>
@@ -7946,22 +8262,22 @@
       </p:sp>
       <p:pic>
         <p:nvPicPr>
-          <p:cNvPr id="5" name="photo" descr="Фото: Коньков Дмитрий"/>
+          <p:cNvPr id="5" name="photo" descr="Фото: Коньков Дмитрий">    </p:cNvPr>
           <p:cNvPicPr>
             <a:picLocks noChangeAspect="1"/>
           </p:cNvPicPr>
           <p:nvPr/>
         </p:nvPicPr>
         <p:blipFill>
-          <a:blip r:embed="rId3"/>
+          <a:blip r:embed="rId1"/>
           <a:stretch>
             <a:fillRect/>
           </a:stretch>
         </p:blipFill>
         <p:spPr>
           <a:xfrm>
-            <a:off x="822960" y="1600200"/>
-            <a:ext cx="1737360" cy="1737360"/>
+            <a:off x="1156716" y="1920240"/>
+            <a:ext cx="1828800" cy="1828800"/>
           </a:xfrm>
           <a:prstGeom prst="rect">
             <a:avLst/>
@@ -7976,8 +8292,8 @@
         </p:nvSpPr>
         <p:spPr>
           <a:xfrm>
-            <a:off x="2834640" y="1600200"/>
-            <a:ext cx="2871216" cy="411480"/>
+            <a:off x="3214116" y="1920240"/>
+            <a:ext cx="2468880" cy="457200"/>
           </a:xfrm>
           <a:prstGeom prst="rect">
             <a:avLst/>
@@ -7989,18 +8305,18 @@
           <a:bodyPr wrap="square" lIns="0" tIns="0" rIns="0" bIns="0" rtlCol="0" anchor="t"/>
           <a:lstStyle/>
           <a:p>
-            <a:pPr marL="0" indent="0" algn="l">
+            <a:pPr algn="l" indent="0" marL="0">
               <a:buNone/>
             </a:pPr>
             <a:r>
-              <a:rPr lang="en-US" sz="1900" b="1" dirty="0">
+              <a:rPr lang="en-US" sz="2000" b="1" dirty="0">
                 <a:solidFill>
                   <a:schemeClr val="bg1"/>
                 </a:solidFill>
               </a:rPr>
               <a:t>Коньков Дмитрий</a:t>
             </a:r>
-            <a:endParaRPr lang="en-US" sz="1900" dirty="0"/>
+            <a:endParaRPr lang="en-US" sz="2000" dirty="0"/>
           </a:p>
         </p:txBody>
       </p:sp>
@@ -8012,8 +8328,8 @@
         </p:nvSpPr>
         <p:spPr>
           <a:xfrm>
-            <a:off x="2834640" y="2039112"/>
-            <a:ext cx="2871216" cy="548640"/>
+            <a:off x="3214116" y="2423160"/>
+            <a:ext cx="2468880" cy="822960"/>
           </a:xfrm>
           <a:prstGeom prst="rect">
             <a:avLst/>
@@ -8025,18 +8341,18 @@
           <a:bodyPr wrap="square" lIns="0" tIns="0" rIns="0" bIns="0" rtlCol="0" anchor="t"/>
           <a:lstStyle/>
           <a:p>
-            <a:pPr marL="0" indent="0" algn="l">
+            <a:pPr algn="l" indent="0" marL="0">
               <a:buNone/>
             </a:pPr>
             <a:r>
-              <a:rPr lang="en-US" sz="1400" b="1" dirty="0">
+              <a:rPr lang="en-US" sz="1500" b="1" dirty="0">
                 <a:solidFill>
                   <a:schemeClr val="accent1"/>
                 </a:solidFill>
               </a:rPr>
               <a:t>Капитан · архитектура и правила</a:t>
             </a:r>
-            <a:endParaRPr lang="en-US" sz="1400" dirty="0"/>
+            <a:endParaRPr lang="en-US" sz="1500" dirty="0"/>
           </a:p>
         </p:txBody>
       </p:sp>
@@ -8048,8 +8364,8 @@
         </p:nvSpPr>
         <p:spPr>
           <a:xfrm>
-            <a:off x="2834640" y="2606040"/>
-            <a:ext cx="2871216" cy="914400"/>
+            <a:off x="1156716" y="3886200"/>
+            <a:ext cx="4480560" cy="777240"/>
           </a:xfrm>
           <a:prstGeom prst="rect">
             <a:avLst/>
@@ -8061,7 +8377,7 @@
           <a:bodyPr wrap="square" lIns="0" tIns="0" rIns="0" bIns="0" rtlCol="0" anchor="t"/>
           <a:lstStyle/>
           <a:p>
-            <a:pPr marL="0" indent="0" algn="l">
+            <a:pPr algn="l" indent="0" marL="0">
               <a:buNone/>
             </a:pPr>
             <a:r>
@@ -8084,12 +8400,12 @@
         </p:nvSpPr>
         <p:spPr>
           <a:xfrm>
-            <a:off x="6208776" y="1325880"/>
-            <a:ext cx="5431536" cy="2286000"/>
+            <a:off x="6277356" y="1645920"/>
+            <a:ext cx="5029200" cy="3108960"/>
           </a:xfrm>
           <a:prstGeom prst="roundRect">
             <a:avLst>
-              <a:gd name="adj" fmla="val 3200"/>
+              <a:gd name="adj" fmla="val 2353"/>
             </a:avLst>
           </a:prstGeom>
           <a:solidFill>
@@ -8102,7 +8418,7 @@
             <a:prstDash val="solid"/>
           </a:ln>
           <a:effectLst>
-            <a:outerShdw blurRad="76200" dist="25400" dir="5400000" algn="bl" rotWithShape="0">
+            <a:outerShdw sx="100000" sy="100000" kx="0" ky="0" algn="bl" rotWithShape="0" blurRad="76200" dist="25400" dir="5400000">
               <a:srgbClr val="000000">
                 <a:alpha val="28000"/>
               </a:srgbClr>
@@ -8112,22 +8428,22 @@
       </p:sp>
       <p:pic>
         <p:nvPicPr>
-          <p:cNvPr id="10" name="photo" descr="Фото: Конькова Елена"/>
+          <p:cNvPr id="10" name="photo" descr="Фото: Конькова Елена">    </p:cNvPr>
           <p:cNvPicPr>
             <a:picLocks noChangeAspect="1"/>
           </p:cNvPicPr>
           <p:nvPr/>
         </p:nvPicPr>
         <p:blipFill>
-          <a:blip r:embed="rId4"/>
+          <a:blip r:embed="rId2"/>
           <a:stretch>
             <a:fillRect/>
           </a:stretch>
         </p:blipFill>
         <p:spPr>
           <a:xfrm>
-            <a:off x="6483096" y="1600200"/>
-            <a:ext cx="1737360" cy="1737360"/>
+            <a:off x="6551676" y="1920240"/>
+            <a:ext cx="1828800" cy="1828800"/>
           </a:xfrm>
           <a:prstGeom prst="rect">
             <a:avLst/>
@@ -8142,8 +8458,8 @@
         </p:nvSpPr>
         <p:spPr>
           <a:xfrm>
-            <a:off x="8494776" y="1600200"/>
-            <a:ext cx="2871216" cy="411480"/>
+            <a:off x="8609076" y="1920240"/>
+            <a:ext cx="2468880" cy="457200"/>
           </a:xfrm>
           <a:prstGeom prst="rect">
             <a:avLst/>
@@ -8155,18 +8471,18 @@
           <a:bodyPr wrap="square" lIns="0" tIns="0" rIns="0" bIns="0" rtlCol="0" anchor="t"/>
           <a:lstStyle/>
           <a:p>
-            <a:pPr marL="0" indent="0" algn="l">
+            <a:pPr algn="l" indent="0" marL="0">
               <a:buNone/>
             </a:pPr>
             <a:r>
-              <a:rPr lang="en-US" sz="1900" b="1" dirty="0">
+              <a:rPr lang="en-US" sz="2000" b="1" dirty="0">
                 <a:solidFill>
                   <a:schemeClr val="bg1"/>
                 </a:solidFill>
               </a:rPr>
               <a:t>Конькова Елена</a:t>
             </a:r>
-            <a:endParaRPr lang="en-US" sz="1900" dirty="0"/>
+            <a:endParaRPr lang="en-US" sz="2000" dirty="0"/>
           </a:p>
         </p:txBody>
       </p:sp>
@@ -8178,8 +8494,8 @@
         </p:nvSpPr>
         <p:spPr>
           <a:xfrm>
-            <a:off x="8494776" y="2039112"/>
-            <a:ext cx="2871216" cy="548640"/>
+            <a:off x="8609076" y="2423160"/>
+            <a:ext cx="2468880" cy="822960"/>
           </a:xfrm>
           <a:prstGeom prst="rect">
             <a:avLst/>
@@ -8191,18 +8507,18 @@
           <a:bodyPr wrap="square" lIns="0" tIns="0" rIns="0" bIns="0" rtlCol="0" anchor="t"/>
           <a:lstStyle/>
           <a:p>
-            <a:pPr marL="0" indent="0" algn="l">
+            <a:pPr algn="l" indent="0" marL="0">
               <a:buNone/>
             </a:pPr>
             <a:r>
-              <a:rPr lang="en-US" sz="1400" b="1" dirty="0">
+              <a:rPr lang="en-US" sz="1500" b="1" dirty="0">
                 <a:solidFill>
                   <a:schemeClr val="accent1"/>
                 </a:solidFill>
               </a:rPr>
               <a:t>Системный инженер · измерение и качество</a:t>
             </a:r>
-            <a:endParaRPr lang="en-US" sz="1400" dirty="0"/>
+            <a:endParaRPr lang="en-US" sz="1500" dirty="0"/>
           </a:p>
         </p:txBody>
       </p:sp>
@@ -8214,8 +8530,8 @@
         </p:nvSpPr>
         <p:spPr>
           <a:xfrm>
-            <a:off x="8494776" y="2606040"/>
-            <a:ext cx="2871216" cy="914400"/>
+            <a:off x="6551676" y="3886200"/>
+            <a:ext cx="4480560" cy="777240"/>
           </a:xfrm>
           <a:prstGeom prst="rect">
             <a:avLst/>
@@ -8227,7 +8543,7 @@
           <a:bodyPr wrap="square" lIns="0" tIns="0" rIns="0" bIns="0" rtlCol="0" anchor="t"/>
           <a:lstStyle/>
           <a:p>
-            <a:pPr marL="0" indent="0" algn="l">
+            <a:pPr algn="l" indent="0" marL="0">
               <a:buNone/>
             </a:pPr>
             <a:r>
@@ -8237,338 +8553,6 @@
                 </a:solidFill>
               </a:rPr>
               <a:t>Методика оценки, корпус и разметка, воспроизводимость сборки, протокол пилота</a:t>
-            </a:r>
-            <a:endParaRPr lang="en-US" sz="1400" dirty="0"/>
-          </a:p>
-        </p:txBody>
-      </p:sp>
-      <p:sp>
-        <p:nvSpPr>
-          <p:cNvPr id="14" name="card"/>
-          <p:cNvSpPr/>
-          <p:nvPr/>
-        </p:nvSpPr>
-        <p:spPr>
-          <a:xfrm>
-            <a:off x="548640" y="3886200"/>
-            <a:ext cx="5431536" cy="2286000"/>
-          </a:xfrm>
-          <a:prstGeom prst="roundRect">
-            <a:avLst>
-              <a:gd name="adj" fmla="val 3200"/>
-            </a:avLst>
-          </a:prstGeom>
-          <a:solidFill>
-            <a:schemeClr val="accent6"/>
-          </a:solidFill>
-          <a:ln w="12700">
-            <a:solidFill>
-              <a:schemeClr val="tx2"/>
-            </a:solidFill>
-            <a:prstDash val="solid"/>
-          </a:ln>
-          <a:effectLst>
-            <a:outerShdw blurRad="76200" dist="25400" dir="5400000" algn="bl" rotWithShape="0">
-              <a:srgbClr val="000000">
-                <a:alpha val="28000"/>
-              </a:srgbClr>
-            </a:outerShdw>
-          </a:effectLst>
-        </p:spPr>
-      </p:sp>
-      <p:pic>
-        <p:nvPicPr>
-          <p:cNvPr id="15" name="photo" descr="Фото: Ляхов Николай"/>
-          <p:cNvPicPr>
-            <a:picLocks noChangeAspect="1"/>
-          </p:cNvPicPr>
-          <p:nvPr/>
-        </p:nvPicPr>
-        <p:blipFill>
-          <a:blip r:embed="rId5"/>
-          <a:stretch>
-            <a:fillRect/>
-          </a:stretch>
-        </p:blipFill>
-        <p:spPr>
-          <a:xfrm>
-            <a:off x="822960" y="4160520"/>
-            <a:ext cx="1737360" cy="1737360"/>
-          </a:xfrm>
-          <a:prstGeom prst="rect">
-            <a:avLst/>
-          </a:prstGeom>
-        </p:spPr>
-      </p:pic>
-      <p:sp>
-        <p:nvSpPr>
-          <p:cNvPr id="16" name="Text 11"/>
-          <p:cNvSpPr txBox="1"/>
-          <p:nvPr/>
-        </p:nvSpPr>
-        <p:spPr>
-          <a:xfrm>
-            <a:off x="2834640" y="4160520"/>
-            <a:ext cx="2871216" cy="411480"/>
-          </a:xfrm>
-          <a:prstGeom prst="rect">
-            <a:avLst/>
-          </a:prstGeom>
-          <a:noFill/>
-          <a:ln/>
-        </p:spPr>
-        <p:txBody>
-          <a:bodyPr wrap="square" lIns="0" tIns="0" rIns="0" bIns="0" rtlCol="0" anchor="t"/>
-          <a:lstStyle/>
-          <a:p>
-            <a:pPr marL="0" indent="0" algn="l">
-              <a:buNone/>
-            </a:pPr>
-            <a:r>
-              <a:rPr lang="en-US" sz="1900" b="1" dirty="0">
-                <a:solidFill>
-                  <a:schemeClr val="bg1"/>
-                </a:solidFill>
-              </a:rPr>
-              <a:t>Ляхов Николай</a:t>
-            </a:r>
-            <a:endParaRPr lang="en-US" sz="1900" dirty="0"/>
-          </a:p>
-        </p:txBody>
-      </p:sp>
-      <p:sp>
-        <p:nvSpPr>
-          <p:cNvPr id="17" name="Text 12"/>
-          <p:cNvSpPr txBox="1"/>
-          <p:nvPr/>
-        </p:nvSpPr>
-        <p:spPr>
-          <a:xfrm>
-            <a:off x="2834640" y="4599432"/>
-            <a:ext cx="2871216" cy="548640"/>
-          </a:xfrm>
-          <a:prstGeom prst="rect">
-            <a:avLst/>
-          </a:prstGeom>
-          <a:noFill/>
-          <a:ln/>
-        </p:spPr>
-        <p:txBody>
-          <a:bodyPr wrap="square" lIns="0" tIns="0" rIns="0" bIns="0" rtlCol="0" anchor="t"/>
-          <a:lstStyle/>
-          <a:p>
-            <a:pPr marL="0" indent="0" algn="l">
-              <a:buNone/>
-            </a:pPr>
-            <a:r>
-              <a:rPr lang="en-US" sz="1400" b="1" dirty="0">
-                <a:solidFill>
-                  <a:schemeClr val="accent1"/>
-                </a:solidFill>
-              </a:rPr>
-              <a:t>Владелец продукта и исследователь</a:t>
-            </a:r>
-            <a:endParaRPr lang="en-US" sz="1400" dirty="0"/>
-          </a:p>
-        </p:txBody>
-      </p:sp>
-      <p:sp>
-        <p:nvSpPr>
-          <p:cNvPr id="18" name="Text 13"/>
-          <p:cNvSpPr txBox="1"/>
-          <p:nvPr/>
-        </p:nvSpPr>
-        <p:spPr>
-          <a:xfrm>
-            <a:off x="2834640" y="5166360"/>
-            <a:ext cx="2871216" cy="914400"/>
-          </a:xfrm>
-          <a:prstGeom prst="rect">
-            <a:avLst/>
-          </a:prstGeom>
-          <a:noFill/>
-          <a:ln/>
-        </p:spPr>
-        <p:txBody>
-          <a:bodyPr wrap="square" lIns="0" tIns="0" rIns="0" bIns="0" rtlCol="0" anchor="t"/>
-          <a:lstStyle/>
-          <a:p>
-            <a:pPr marL="0" indent="0" algn="l">
-              <a:buNone/>
-            </a:pPr>
-            <a:r>
-              <a:rPr lang="en-US" sz="1400" dirty="0">
-                <a:solidFill>
-                  <a:schemeClr val="accent4"/>
-                </a:solidFill>
-              </a:rPr>
-              <a:t>Интервью, опрос, карта процесса, питч</a:t>
-            </a:r>
-            <a:endParaRPr lang="en-US" sz="1400" dirty="0"/>
-          </a:p>
-        </p:txBody>
-      </p:sp>
-      <p:sp>
-        <p:nvSpPr>
-          <p:cNvPr id="19" name="card"/>
-          <p:cNvSpPr/>
-          <p:nvPr/>
-        </p:nvSpPr>
-        <p:spPr>
-          <a:xfrm>
-            <a:off x="6208776" y="3886200"/>
-            <a:ext cx="5431536" cy="2286000"/>
-          </a:xfrm>
-          <a:prstGeom prst="roundRect">
-            <a:avLst>
-              <a:gd name="adj" fmla="val 3200"/>
-            </a:avLst>
-          </a:prstGeom>
-          <a:solidFill>
-            <a:schemeClr val="accent6"/>
-          </a:solidFill>
-          <a:ln w="12700">
-            <a:solidFill>
-              <a:schemeClr val="tx2"/>
-            </a:solidFill>
-            <a:prstDash val="solid"/>
-          </a:ln>
-          <a:effectLst>
-            <a:outerShdw blurRad="76200" dist="25400" dir="5400000" algn="bl" rotWithShape="0">
-              <a:srgbClr val="000000">
-                <a:alpha val="28000"/>
-              </a:srgbClr>
-            </a:outerShdw>
-          </a:effectLst>
-        </p:spPr>
-      </p:sp>
-      <p:pic>
-        <p:nvPicPr>
-          <p:cNvPr id="20" name="photo" descr="Фото: Кузнецов Алексей"/>
-          <p:cNvPicPr>
-            <a:picLocks noChangeAspect="1"/>
-          </p:cNvPicPr>
-          <p:nvPr/>
-        </p:nvPicPr>
-        <p:blipFill>
-          <a:blip r:embed="rId6"/>
-          <a:stretch>
-            <a:fillRect/>
-          </a:stretch>
-        </p:blipFill>
-        <p:spPr>
-          <a:xfrm>
-            <a:off x="6483096" y="4160520"/>
-            <a:ext cx="1737360" cy="1737360"/>
-          </a:xfrm>
-          <a:prstGeom prst="rect">
-            <a:avLst/>
-          </a:prstGeom>
-        </p:spPr>
-      </p:pic>
-      <p:sp>
-        <p:nvSpPr>
-          <p:cNvPr id="21" name="Text 15"/>
-          <p:cNvSpPr txBox="1"/>
-          <p:nvPr/>
-        </p:nvSpPr>
-        <p:spPr>
-          <a:xfrm>
-            <a:off x="8494776" y="4160520"/>
-            <a:ext cx="2871216" cy="411480"/>
-          </a:xfrm>
-          <a:prstGeom prst="rect">
-            <a:avLst/>
-          </a:prstGeom>
-          <a:noFill/>
-          <a:ln/>
-        </p:spPr>
-        <p:txBody>
-          <a:bodyPr wrap="square" lIns="0" tIns="0" rIns="0" bIns="0" rtlCol="0" anchor="t"/>
-          <a:lstStyle/>
-          <a:p>
-            <a:pPr marL="0" indent="0" algn="l">
-              <a:buNone/>
-            </a:pPr>
-            <a:r>
-              <a:rPr lang="en-US" sz="1900" b="1" dirty="0">
-                <a:solidFill>
-                  <a:schemeClr val="bg1"/>
-                </a:solidFill>
-              </a:rPr>
-              <a:t>Кузнецов Алексей</a:t>
-            </a:r>
-            <a:endParaRPr lang="en-US" sz="1900" dirty="0"/>
-          </a:p>
-        </p:txBody>
-      </p:sp>
-      <p:sp>
-        <p:nvSpPr>
-          <p:cNvPr id="22" name="Text 16"/>
-          <p:cNvSpPr txBox="1"/>
-          <p:nvPr/>
-        </p:nvSpPr>
-        <p:spPr>
-          <a:xfrm>
-            <a:off x="8494776" y="4599432"/>
-            <a:ext cx="2871216" cy="548640"/>
-          </a:xfrm>
-          <a:prstGeom prst="rect">
-            <a:avLst/>
-          </a:prstGeom>
-          <a:noFill/>
-          <a:ln/>
-        </p:spPr>
-        <p:txBody>
-          <a:bodyPr wrap="square" lIns="0" tIns="0" rIns="0" bIns="0" rtlCol="0" anchor="t"/>
-          <a:lstStyle/>
-          <a:p>
-            <a:pPr marL="0" indent="0" algn="l">
-              <a:buNone/>
-            </a:pPr>
-            <a:r>
-              <a:rPr lang="en-US" sz="1400" b="1" dirty="0">
-                <a:solidFill>
-                  <a:schemeClr val="accent1"/>
-                </a:solidFill>
-              </a:rPr>
-              <a:t>Юрист</a:t>
-            </a:r>
-            <a:endParaRPr lang="en-US" sz="1400" dirty="0"/>
-          </a:p>
-        </p:txBody>
-      </p:sp>
-      <p:sp>
-        <p:nvSpPr>
-          <p:cNvPr id="23" name="Text 17"/>
-          <p:cNvSpPr txBox="1"/>
-          <p:nvPr/>
-        </p:nvSpPr>
-        <p:spPr>
-          <a:xfrm>
-            <a:off x="8494776" y="5166360"/>
-            <a:ext cx="2871216" cy="914400"/>
-          </a:xfrm>
-          <a:prstGeom prst="rect">
-            <a:avLst/>
-          </a:prstGeom>
-          <a:noFill/>
-          <a:ln/>
-        </p:spPr>
-        <p:txBody>
-          <a:bodyPr wrap="square" lIns="0" tIns="0" rIns="0" bIns="0" rtlCol="0" anchor="t"/>
-          <a:lstStyle/>
-          <a:p>
-            <a:pPr marL="0" indent="0" algn="l">
-              <a:buNone/>
-            </a:pPr>
-            <a:r>
-              <a:rPr lang="en-US" sz="1400" dirty="0">
-                <a:solidFill>
-                  <a:schemeClr val="accent4"/>
-                </a:solidFill>
-              </a:rPr>
-              <a:t>Правила и нормы, разметка корпуса, юридические эффекты</a:t>
             </a:r>
             <a:endParaRPr lang="en-US" sz="1400" dirty="0"/>
           </a:p>
@@ -8594,7 +8578,7 @@
           </a:prstGeom>
           <a:extLst>
             <a:ext uri="{C572A759-6A51-4108-AA02-DFA0A04FC94B}">
-              <ma14:wrappingTextBoxFlag xmlns:ma14="http://schemas.microsoft.com/office/mac/drawingml/2011/main" xmlns="" val="0"/>
+              <ma14:wrappingTextBoxFlag xmlns:ma14="http://schemas.microsoft.com/office/mac/drawingml/2011/main" val="0"/>
             </a:ext>
           </a:extLst>
         </p:spPr>
@@ -8612,7 +8596,7 @@
           <a:p>
             <a:pPr algn="r"/>
             <a:fld id="{F7021451-1387-4CA6-816F-3879F97B5CBC}" type="slidenum">
-              <a:rPr lang="en-US" b="0"/>
+              <a:rPr b="0" lang="en-US"/>
               <a:t>13</a:t>
             </a:fld>
             <a:endParaRPr lang="en-US"/>
@@ -8665,7 +8649,7 @@
           <a:bodyPr wrap="square" lIns="0" tIns="0" rIns="0" bIns="0" rtlCol="0" anchor="t"/>
           <a:lstStyle/>
           <a:p>
-            <a:pPr marL="0" indent="0" algn="l">
+            <a:pPr algn="l" indent="0" marL="0">
               <a:buNone/>
             </a:pPr>
             <a:r>
@@ -8701,7 +8685,7 @@
           <a:bodyPr wrap="square" lIns="0" tIns="0" rIns="0" bIns="0" rtlCol="0" anchor="t"/>
           <a:lstStyle/>
           <a:p>
-            <a:pPr marL="0" indent="0" algn="l">
+            <a:pPr algn="l" indent="0" marL="0">
               <a:buNone/>
             </a:pPr>
             <a:r>
@@ -8737,7 +8721,7 @@
           <a:bodyPr wrap="square" lIns="0" tIns="0" rIns="0" bIns="0" rtlCol="0" anchor="t"/>
           <a:lstStyle/>
           <a:p>
-            <a:pPr marL="0" indent="0" algn="l">
+            <a:pPr algn="l" indent="0" marL="0">
               <a:spcAft>
                 <a:spcPts val="800"/>
               </a:spcAft>
@@ -8754,7 +8738,7 @@
             <a:endParaRPr lang="en-US" sz="1600" dirty="0"/>
           </a:p>
           <a:p>
-            <a:pPr marL="0" indent="0" algn="l">
+            <a:pPr algn="l" indent="0" marL="0">
               <a:spcAft>
                 <a:spcPts val="800"/>
               </a:spcAft>
@@ -8771,7 +8755,7 @@
             <a:endParaRPr lang="en-US" sz="1600" dirty="0"/>
           </a:p>
           <a:p>
-            <a:pPr marL="0" indent="0" algn="l">
+            <a:pPr algn="l" indent="0" marL="0">
               <a:spcAft>
                 <a:spcPts val="800"/>
               </a:spcAft>
@@ -8785,12 +8769,18 @@
               </a:rPr>
               <a:t>Код: </a:t>
             </a:r>
+            <a:pPr algn="l" indent="0" marL="0">
+              <a:spcAft>
+                <a:spcPts val="800"/>
+              </a:spcAft>
+              <a:buNone/>
+            </a:pPr>
             <a:r>
               <a:rPr lang="en-US" sz="1600" u="sng" dirty="0">
                 <a:solidFill>
                   <a:schemeClr val="accent1"/>
                 </a:solidFill>
-                <a:hlinkClick r:id="rId3">
+                <a:hlinkClick r:id="rId1" invalidUrl="" action="" tgtFrame="" tooltip="" history="1" highlightClick="0" endSnd="0">
                   <a:extLst>
                     <a:ext uri="{A12FA001-AC4F-418D-AE19-62706E023703}">
                       <ahyp:hlinkClr xmlns:ahyp="http://schemas.microsoft.com/office/drawing/2018/hyperlinkcolor" val="tx"/>
@@ -8800,6 +8790,12 @@
               </a:rPr>
               <a:t>github.com/KonkovDV/Mandat</a:t>
             </a:r>
+            <a:pPr algn="l" indent="0" marL="0">
+              <a:spcAft>
+                <a:spcPts val="800"/>
+              </a:spcAft>
+              <a:buNone/>
+            </a:pPr>
             <a:r>
               <a:rPr lang="en-US" sz="1600" dirty="0">
                 <a:solidFill>
@@ -8838,7 +8834,7 @@
             <a:prstDash val="solid"/>
           </a:ln>
           <a:effectLst>
-            <a:outerShdw blurRad="76200" dist="25400" dir="5400000" algn="bl" rotWithShape="0">
+            <a:outerShdw sx="100000" sy="100000" kx="0" ky="0" algn="bl" rotWithShape="0" blurRad="76200" dist="25400" dir="5400000">
               <a:srgbClr val="000000">
                 <a:alpha val="28000"/>
               </a:srgbClr>
@@ -8867,7 +8863,7 @@
           <a:bodyPr wrap="square" lIns="0" tIns="0" rIns="0" bIns="0" rtlCol="0" anchor="ctr"/>
           <a:lstStyle/>
           <a:p>
-            <a:pPr marL="0" indent="0" algn="l">
+            <a:pPr algn="l" indent="0" marL="0">
               <a:buNone/>
             </a:pPr>
             <a:r>
@@ -8884,14 +8880,14 @@
       </p:sp>
       <p:pic>
         <p:nvPicPr>
-          <p:cNvPr id="7" name="graph" descr="Схема: граф полномочий «Мандата»"/>
+          <p:cNvPr id="7" name="graph" descr="Схема: граф полномочий «Мандата»">    </p:cNvPr>
           <p:cNvPicPr>
             <a:picLocks noChangeAspect="1"/>
           </p:cNvPicPr>
           <p:nvPr/>
         </p:nvPicPr>
         <p:blipFill>
-          <a:blip r:embed="rId4"/>
+          <a:blip r:embed="rId2"/>
           <a:stretch>
             <a:fillRect/>
           </a:stretch>
@@ -8934,11 +8930,9 @@
       <p:sp>
         <p:nvSpPr>
           <p:cNvPr id="2" name="Text 0"/>
-          <p:cNvSpPr>
-            <a:spLocks noGrp="1"/>
-          </p:cNvSpPr>
+          <p:cNvSpPr/>
           <p:nvPr>
-            <p:ph type="title" idx="100" hasCustomPrompt="1"/>
+            <p:ph idx="100" type="title" hasCustomPrompt="1"/>
           </p:nvPr>
         </p:nvSpPr>
         <p:spPr>
@@ -8956,7 +8950,7 @@
           <a:bodyPr wrap="square" lIns="0" tIns="0" rIns="0" bIns="0" rtlCol="0" anchor="ctr"/>
           <a:lstStyle/>
           <a:p>
-            <a:pPr marL="0" indent="0" algn="l">
+            <a:pPr algn="l" indent="0" marL="0">
               <a:buNone/>
             </a:pPr>
             <a:r>
@@ -8974,11 +8968,9 @@
       <p:sp>
         <p:nvSpPr>
           <p:cNvPr id="3" name="Text 0"/>
-          <p:cNvSpPr>
-            <a:spLocks noGrp="1"/>
-          </p:cNvSpPr>
+          <p:cNvSpPr/>
           <p:nvPr>
-            <p:ph type="body" idx="101" hasCustomPrompt="1"/>
+            <p:ph idx="101" type="body" hasCustomPrompt="1"/>
           </p:nvPr>
         </p:nvSpPr>
         <p:spPr>
@@ -8996,7 +8988,7 @@
           <a:bodyPr wrap="square" lIns="0" tIns="0" rIns="0" bIns="0" rtlCol="0" anchor="t"/>
           <a:lstStyle/>
           <a:p>
-            <a:pPr marL="0" indent="0" algn="l">
+            <a:pPr algn="l" indent="0" marL="0">
               <a:buNone/>
             </a:pPr>
             <a:r>
@@ -9039,11 +9031,9 @@
       <p:sp>
         <p:nvSpPr>
           <p:cNvPr id="2" name="Text 0"/>
-          <p:cNvSpPr>
-            <a:spLocks noGrp="1"/>
-          </p:cNvSpPr>
+          <p:cNvSpPr/>
           <p:nvPr>
-            <p:ph type="title" idx="100" hasCustomPrompt="1"/>
+            <p:ph idx="100" type="title" hasCustomPrompt="1"/>
           </p:nvPr>
         </p:nvSpPr>
         <p:spPr>
@@ -9061,7 +9051,7 @@
           <a:bodyPr wrap="square" lIns="0" tIns="0" rIns="0" bIns="0" rtlCol="0" anchor="ctr"/>
           <a:lstStyle/>
           <a:p>
-            <a:pPr marL="0" indent="0" algn="l">
+            <a:pPr algn="l" indent="0" marL="0">
               <a:buNone/>
             </a:pPr>
             <a:r>
@@ -9079,11 +9069,9 @@
       <p:sp>
         <p:nvSpPr>
           <p:cNvPr id="3" name="Text 0"/>
-          <p:cNvSpPr>
-            <a:spLocks noGrp="1"/>
-          </p:cNvSpPr>
+          <p:cNvSpPr/>
           <p:nvPr>
-            <p:ph type="body" idx="101" hasCustomPrompt="1"/>
+            <p:ph idx="101" type="body" hasCustomPrompt="1"/>
           </p:nvPr>
         </p:nvSpPr>
         <p:spPr>
@@ -9101,7 +9089,7 @@
           <a:bodyPr wrap="square" lIns="0" tIns="0" rIns="0" bIns="0" rtlCol="0" anchor="ctr"/>
           <a:lstStyle/>
           <a:p>
-            <a:pPr marL="0" indent="0" algn="l">
+            <a:pPr algn="l" indent="0" marL="0">
               <a:buNone/>
             </a:pPr>
             <a:r>
@@ -9139,41 +9127,11 @@
             <a:tbl>
               <a:tblPr/>
               <a:tblGrid>
-                <a:gridCol w="2103120">
-                  <a:extLst>
-                    <a:ext uri="{9D8B030D-6E8A-4147-A177-3AD203B41FA5}">
-                      <a16:colId xmlns:a16="http://schemas.microsoft.com/office/drawing/2014/main" val="20000"/>
-                    </a:ext>
-                  </a:extLst>
-                </a:gridCol>
-                <a:gridCol w="2103120">
-                  <a:extLst>
-                    <a:ext uri="{9D8B030D-6E8A-4147-A177-3AD203B41FA5}">
-                      <a16:colId xmlns:a16="http://schemas.microsoft.com/office/drawing/2014/main" val="20001"/>
-                    </a:ext>
-                  </a:extLst>
-                </a:gridCol>
-                <a:gridCol w="2331720">
-                  <a:extLst>
-                    <a:ext uri="{9D8B030D-6E8A-4147-A177-3AD203B41FA5}">
-                      <a16:colId xmlns:a16="http://schemas.microsoft.com/office/drawing/2014/main" val="20002"/>
-                    </a:ext>
-                  </a:extLst>
-                </a:gridCol>
-                <a:gridCol w="1783080">
-                  <a:extLst>
-                    <a:ext uri="{9D8B030D-6E8A-4147-A177-3AD203B41FA5}">
-                      <a16:colId xmlns:a16="http://schemas.microsoft.com/office/drawing/2014/main" val="20003"/>
-                    </a:ext>
-                  </a:extLst>
-                </a:gridCol>
-                <a:gridCol w="2770632">
-                  <a:extLst>
-                    <a:ext uri="{9D8B030D-6E8A-4147-A177-3AD203B41FA5}">
-                      <a16:colId xmlns:a16="http://schemas.microsoft.com/office/drawing/2014/main" val="20004"/>
-                    </a:ext>
-                  </a:extLst>
-                </a:gridCol>
+                <a:gridCol w="2103120"/>
+                <a:gridCol w="2103120"/>
+                <a:gridCol w="2331720"/>
+                <a:gridCol w="1783080"/>
+                <a:gridCol w="2770632"/>
               </a:tblGrid>
               <a:tr h="603504">
                 <a:tc>
@@ -9181,7 +9139,7 @@
                     <a:bodyPr/>
                     <a:lstStyle/>
                     <a:p>
-                      <a:pPr marL="0" indent="0">
+                      <a:pPr indent="0" marL="0">
                         <a:buNone/>
                       </a:pPr>
                       <a:r>
@@ -9249,7 +9207,7 @@
                     <a:bodyPr/>
                     <a:lstStyle/>
                     <a:p>
-                      <a:pPr marL="0" indent="0">
+                      <a:pPr indent="0" marL="0">
                         <a:buNone/>
                       </a:pPr>
                       <a:r>
@@ -9317,7 +9275,7 @@
                     <a:bodyPr/>
                     <a:lstStyle/>
                     <a:p>
-                      <a:pPr marL="0" indent="0">
+                      <a:pPr indent="0" marL="0">
                         <a:buNone/>
                       </a:pPr>
                       <a:r>
@@ -9385,7 +9343,7 @@
                     <a:bodyPr/>
                     <a:lstStyle/>
                     <a:p>
-                      <a:pPr marL="0" indent="0">
+                      <a:pPr indent="0" marL="0">
                         <a:buNone/>
                       </a:pPr>
                       <a:r>
@@ -9453,7 +9411,7 @@
                     <a:bodyPr/>
                     <a:lstStyle/>
                     <a:p>
-                      <a:pPr marL="0" indent="0">
+                      <a:pPr indent="0" marL="0">
                         <a:buNone/>
                       </a:pPr>
                       <a:r>
@@ -9516,11 +9474,6 @@
                     </a:solidFill>
                   </a:tcPr>
                 </a:tc>
-                <a:extLst>
-                  <a:ext uri="{0D108BD9-81ED-4DB2-BD59-A6C34878D82A}">
-                    <a16:rowId xmlns:a16="http://schemas.microsoft.com/office/drawing/2014/main" val="10000"/>
-                  </a:ext>
-                </a:extLst>
               </a:tr>
               <a:tr h="603504">
                 <a:tc>
@@ -9528,7 +9481,7 @@
                     <a:bodyPr/>
                     <a:lstStyle/>
                     <a:p>
-                      <a:pPr marL="0" indent="0">
+                      <a:pPr indent="0" marL="0">
                         <a:buNone/>
                       </a:pPr>
                       <a:r>
@@ -9596,7 +9549,7 @@
                     <a:bodyPr/>
                     <a:lstStyle/>
                     <a:p>
-                      <a:pPr marL="0" indent="0">
+                      <a:pPr indent="0" marL="0">
                         <a:buNone/>
                       </a:pPr>
                       <a:r>
@@ -9664,7 +9617,7 @@
                     <a:bodyPr/>
                     <a:lstStyle/>
                     <a:p>
-                      <a:pPr marL="0" indent="0">
+                      <a:pPr indent="0" marL="0">
                         <a:buNone/>
                       </a:pPr>
                       <a:r>
@@ -9732,7 +9685,7 @@
                     <a:bodyPr/>
                     <a:lstStyle/>
                     <a:p>
-                      <a:pPr marL="0" indent="0">
+                      <a:pPr indent="0" marL="0">
                         <a:buNone/>
                       </a:pPr>
                       <a:r>
@@ -9800,7 +9753,7 @@
                     <a:bodyPr/>
                     <a:lstStyle/>
                     <a:p>
-                      <a:pPr marL="0" indent="0">
+                      <a:pPr indent="0" marL="0">
                         <a:buNone/>
                       </a:pPr>
                       <a:r>
@@ -9863,11 +9816,6 @@
                     </a:solidFill>
                   </a:tcPr>
                 </a:tc>
-                <a:extLst>
-                  <a:ext uri="{0D108BD9-81ED-4DB2-BD59-A6C34878D82A}">
-                    <a16:rowId xmlns:a16="http://schemas.microsoft.com/office/drawing/2014/main" val="10001"/>
-                  </a:ext>
-                </a:extLst>
               </a:tr>
               <a:tr h="603504">
                 <a:tc>
@@ -9875,7 +9823,7 @@
                     <a:bodyPr/>
                     <a:lstStyle/>
                     <a:p>
-                      <a:pPr marL="0" indent="0">
+                      <a:pPr indent="0" marL="0">
                         <a:buNone/>
                       </a:pPr>
                       <a:r>
@@ -9943,7 +9891,7 @@
                     <a:bodyPr/>
                     <a:lstStyle/>
                     <a:p>
-                      <a:pPr marL="0" indent="0">
+                      <a:pPr indent="0" marL="0">
                         <a:buNone/>
                       </a:pPr>
                       <a:r>
@@ -10011,7 +9959,7 @@
                     <a:bodyPr/>
                     <a:lstStyle/>
                     <a:p>
-                      <a:pPr marL="0" indent="0">
+                      <a:pPr indent="0" marL="0">
                         <a:buNone/>
                       </a:pPr>
                       <a:r>
@@ -10079,7 +10027,7 @@
                     <a:bodyPr/>
                     <a:lstStyle/>
                     <a:p>
-                      <a:pPr marL="0" indent="0">
+                      <a:pPr indent="0" marL="0">
                         <a:buNone/>
                       </a:pPr>
                       <a:r>
@@ -10147,7 +10095,7 @@
                     <a:bodyPr/>
                     <a:lstStyle/>
                     <a:p>
-                      <a:pPr marL="0" indent="0">
+                      <a:pPr indent="0" marL="0">
                         <a:buNone/>
                       </a:pPr>
                       <a:r>
@@ -10210,11 +10158,6 @@
                     </a:solidFill>
                   </a:tcPr>
                 </a:tc>
-                <a:extLst>
-                  <a:ext uri="{0D108BD9-81ED-4DB2-BD59-A6C34878D82A}">
-                    <a16:rowId xmlns:a16="http://schemas.microsoft.com/office/drawing/2014/main" val="10002"/>
-                  </a:ext>
-                </a:extLst>
               </a:tr>
               <a:tr h="603504">
                 <a:tc>
@@ -10222,7 +10165,7 @@
                     <a:bodyPr/>
                     <a:lstStyle/>
                     <a:p>
-                      <a:pPr marL="0" indent="0">
+                      <a:pPr indent="0" marL="0">
                         <a:buNone/>
                       </a:pPr>
                       <a:r>
@@ -10290,7 +10233,7 @@
                     <a:bodyPr/>
                     <a:lstStyle/>
                     <a:p>
-                      <a:pPr marL="0" indent="0">
+                      <a:pPr indent="0" marL="0">
                         <a:buNone/>
                       </a:pPr>
                       <a:r>
@@ -10358,7 +10301,7 @@
                     <a:bodyPr/>
                     <a:lstStyle/>
                     <a:p>
-                      <a:pPr marL="0" indent="0">
+                      <a:pPr indent="0" marL="0">
                         <a:buNone/>
                       </a:pPr>
                       <a:r>
@@ -10426,7 +10369,7 @@
                     <a:bodyPr/>
                     <a:lstStyle/>
                     <a:p>
-                      <a:pPr marL="0" indent="0">
+                      <a:pPr indent="0" marL="0">
                         <a:buNone/>
                       </a:pPr>
                       <a:r>
@@ -10494,7 +10437,7 @@
                     <a:bodyPr/>
                     <a:lstStyle/>
                     <a:p>
-                      <a:pPr marL="0" indent="0">
+                      <a:pPr indent="0" marL="0">
                         <a:buNone/>
                       </a:pPr>
                       <a:r>
@@ -10557,11 +10500,6 @@
                     </a:solidFill>
                   </a:tcPr>
                 </a:tc>
-                <a:extLst>
-                  <a:ext uri="{0D108BD9-81ED-4DB2-BD59-A6C34878D82A}">
-                    <a16:rowId xmlns:a16="http://schemas.microsoft.com/office/drawing/2014/main" val="10003"/>
-                  </a:ext>
-                </a:extLst>
               </a:tr>
               <a:tr h="603504">
                 <a:tc>
@@ -10569,7 +10507,7 @@
                     <a:bodyPr/>
                     <a:lstStyle/>
                     <a:p>
-                      <a:pPr marL="0" indent="0">
+                      <a:pPr indent="0" marL="0">
                         <a:buNone/>
                       </a:pPr>
                       <a:r>
@@ -10637,7 +10575,7 @@
                     <a:bodyPr/>
                     <a:lstStyle/>
                     <a:p>
-                      <a:pPr marL="0" indent="0">
+                      <a:pPr indent="0" marL="0">
                         <a:buNone/>
                       </a:pPr>
                       <a:r>
@@ -10705,7 +10643,7 @@
                     <a:bodyPr/>
                     <a:lstStyle/>
                     <a:p>
-                      <a:pPr marL="0" indent="0">
+                      <a:pPr indent="0" marL="0">
                         <a:buNone/>
                       </a:pPr>
                       <a:r>
@@ -10773,7 +10711,7 @@
                     <a:bodyPr/>
                     <a:lstStyle/>
                     <a:p>
-                      <a:pPr marL="0" indent="0">
+                      <a:pPr indent="0" marL="0">
                         <a:buNone/>
                       </a:pPr>
                       <a:r>
@@ -10841,7 +10779,7 @@
                     <a:bodyPr/>
                     <a:lstStyle/>
                     <a:p>
-                      <a:pPr marL="0" indent="0">
+                      <a:pPr indent="0" marL="0">
                         <a:buNone/>
                       </a:pPr>
                       <a:r>
@@ -10904,11 +10842,6 @@
                     </a:solidFill>
                   </a:tcPr>
                 </a:tc>
-                <a:extLst>
-                  <a:ext uri="{0D108BD9-81ED-4DB2-BD59-A6C34878D82A}">
-                    <a16:rowId xmlns:a16="http://schemas.microsoft.com/office/drawing/2014/main" val="10004"/>
-                  </a:ext>
-                </a:extLst>
               </a:tr>
               <a:tr h="603504">
                 <a:tc>
@@ -10916,7 +10849,7 @@
                     <a:bodyPr/>
                     <a:lstStyle/>
                     <a:p>
-                      <a:pPr marL="0" indent="0">
+                      <a:pPr indent="0" marL="0">
                         <a:buNone/>
                       </a:pPr>
                       <a:r>
@@ -10984,7 +10917,7 @@
                     <a:bodyPr/>
                     <a:lstStyle/>
                     <a:p>
-                      <a:pPr marL="0" indent="0">
+                      <a:pPr indent="0" marL="0">
                         <a:buNone/>
                       </a:pPr>
                       <a:r>
@@ -11052,7 +10985,7 @@
                     <a:bodyPr/>
                     <a:lstStyle/>
                     <a:p>
-                      <a:pPr marL="0" indent="0">
+                      <a:pPr indent="0" marL="0">
                         <a:buNone/>
                       </a:pPr>
                       <a:r>
@@ -11120,7 +11053,7 @@
                     <a:bodyPr/>
                     <a:lstStyle/>
                     <a:p>
-                      <a:pPr marL="0" indent="0">
+                      <a:pPr indent="0" marL="0">
                         <a:buNone/>
                       </a:pPr>
                       <a:r>
@@ -11188,7 +11121,7 @@
                     <a:bodyPr/>
                     <a:lstStyle/>
                     <a:p>
-                      <a:pPr marL="0" indent="0">
+                      <a:pPr indent="0" marL="0">
                         <a:buNone/>
                       </a:pPr>
                       <a:r>
@@ -11251,11 +11184,6 @@
                     </a:solidFill>
                   </a:tcPr>
                 </a:tc>
-                <a:extLst>
-                  <a:ext uri="{0D108BD9-81ED-4DB2-BD59-A6C34878D82A}">
-                    <a16:rowId xmlns:a16="http://schemas.microsoft.com/office/drawing/2014/main" val="10005"/>
-                  </a:ext>
-                </a:extLst>
               </a:tr>
             </a:tbl>
           </a:graphicData>
@@ -11287,7 +11215,7 @@
             <a:prstDash val="solid"/>
           </a:ln>
           <a:effectLst>
-            <a:outerShdw blurRad="76200" dist="25400" dir="5400000" algn="bl" rotWithShape="0">
+            <a:outerShdw sx="100000" sy="100000" kx="0" ky="0" algn="bl" rotWithShape="0" blurRad="76200" dist="25400" dir="5400000">
               <a:srgbClr val="000000">
                 <a:alpha val="28000"/>
               </a:srgbClr>
@@ -11316,7 +11244,7 @@
           <a:bodyPr wrap="square" lIns="0" tIns="0" rIns="0" bIns="0" rtlCol="0" anchor="ctr"/>
           <a:lstStyle/>
           <a:p>
-            <a:pPr marL="0" indent="0" algn="l">
+            <a:pPr algn="l" indent="0" marL="0">
               <a:buNone/>
             </a:pPr>
             <a:r>
@@ -11351,7 +11279,7 @@
           </a:prstGeom>
           <a:extLst>
             <a:ext uri="{C572A759-6A51-4108-AA02-DFA0A04FC94B}">
-              <ma14:wrappingTextBoxFlag xmlns:ma14="http://schemas.microsoft.com/office/mac/drawingml/2011/main" xmlns="" val="0"/>
+              <ma14:wrappingTextBoxFlag xmlns:ma14="http://schemas.microsoft.com/office/mac/drawingml/2011/main" val="0"/>
             </a:ext>
           </a:extLst>
         </p:spPr>
@@ -11369,7 +11297,7 @@
           <a:p>
             <a:pPr algn="r"/>
             <a:fld id="{F7021451-1387-4CA6-816F-3879F97B5CBC}" type="slidenum">
-              <a:rPr lang="en-US" b="0"/>
+              <a:rPr b="0" lang="en-US"/>
               <a:t>16</a:t>
             </a:fld>
             <a:endParaRPr lang="en-US"/>
@@ -11404,11 +11332,9 @@
       <p:sp>
         <p:nvSpPr>
           <p:cNvPr id="2" name="Text 0"/>
-          <p:cNvSpPr>
-            <a:spLocks noGrp="1"/>
-          </p:cNvSpPr>
+          <p:cNvSpPr/>
           <p:nvPr>
-            <p:ph type="title" idx="100" hasCustomPrompt="1"/>
+            <p:ph idx="100" type="title" hasCustomPrompt="1"/>
           </p:nvPr>
         </p:nvSpPr>
         <p:spPr>
@@ -11426,7 +11352,7 @@
           <a:bodyPr wrap="square" lIns="0" tIns="0" rIns="0" bIns="0" rtlCol="0" anchor="ctr"/>
           <a:lstStyle/>
           <a:p>
-            <a:pPr marL="0" indent="0" algn="l">
+            <a:pPr algn="l" indent="0" marL="0">
               <a:buNone/>
             </a:pPr>
             <a:r>
@@ -11444,11 +11370,9 @@
       <p:sp>
         <p:nvSpPr>
           <p:cNvPr id="3" name="Text 0"/>
-          <p:cNvSpPr>
-            <a:spLocks noGrp="1"/>
-          </p:cNvSpPr>
+          <p:cNvSpPr/>
           <p:nvPr>
-            <p:ph type="body" idx="101" hasCustomPrompt="1"/>
+            <p:ph idx="101" type="body" hasCustomPrompt="1"/>
           </p:nvPr>
         </p:nvSpPr>
         <p:spPr>
@@ -11466,7 +11390,7 @@
           <a:bodyPr wrap="square" lIns="0" tIns="0" rIns="0" bIns="0" rtlCol="0" anchor="ctr"/>
           <a:lstStyle/>
           <a:p>
-            <a:pPr marL="0" indent="0" algn="l">
+            <a:pPr algn="l" indent="0" marL="0">
               <a:buNone/>
             </a:pPr>
             <a:r>
@@ -11504,27 +11428,9 @@
             <a:tbl>
               <a:tblPr/>
               <a:tblGrid>
-                <a:gridCol w="1920240">
-                  <a:extLst>
-                    <a:ext uri="{9D8B030D-6E8A-4147-A177-3AD203B41FA5}">
-                      <a16:colId xmlns:a16="http://schemas.microsoft.com/office/drawing/2014/main" val="20000"/>
-                    </a:ext>
-                  </a:extLst>
-                </a:gridCol>
-                <a:gridCol w="2834640">
-                  <a:extLst>
-                    <a:ext uri="{9D8B030D-6E8A-4147-A177-3AD203B41FA5}">
-                      <a16:colId xmlns:a16="http://schemas.microsoft.com/office/drawing/2014/main" val="20001"/>
-                    </a:ext>
-                  </a:extLst>
-                </a:gridCol>
-                <a:gridCol w="6336792">
-                  <a:extLst>
-                    <a:ext uri="{9D8B030D-6E8A-4147-A177-3AD203B41FA5}">
-                      <a16:colId xmlns:a16="http://schemas.microsoft.com/office/drawing/2014/main" val="20002"/>
-                    </a:ext>
-                  </a:extLst>
-                </a:gridCol>
+                <a:gridCol w="1920240"/>
+                <a:gridCol w="2834640"/>
+                <a:gridCol w="6336792"/>
               </a:tblGrid>
               <a:tr h="548640">
                 <a:tc>
@@ -11532,7 +11438,7 @@
                     <a:bodyPr/>
                     <a:lstStyle/>
                     <a:p>
-                      <a:pPr marL="0" indent="0">
+                      <a:pPr indent="0" marL="0">
                         <a:buNone/>
                       </a:pPr>
                       <a:r>
@@ -11600,7 +11506,7 @@
                     <a:bodyPr/>
                     <a:lstStyle/>
                     <a:p>
-                      <a:pPr marL="0" indent="0">
+                      <a:pPr indent="0" marL="0">
                         <a:buNone/>
                       </a:pPr>
                       <a:r>
@@ -11668,7 +11574,7 @@
                     <a:bodyPr/>
                     <a:lstStyle/>
                     <a:p>
-                      <a:pPr marL="0" indent="0">
+                      <a:pPr indent="0" marL="0">
                         <a:buNone/>
                       </a:pPr>
                       <a:r>
@@ -11731,11 +11637,6 @@
                     </a:solidFill>
                   </a:tcPr>
                 </a:tc>
-                <a:extLst>
-                  <a:ext uri="{0D108BD9-81ED-4DB2-BD59-A6C34878D82A}">
-                    <a16:rowId xmlns:a16="http://schemas.microsoft.com/office/drawing/2014/main" val="10000"/>
-                  </a:ext>
-                </a:extLst>
               </a:tr>
               <a:tr h="548640">
                 <a:tc>
@@ -11743,7 +11644,7 @@
                     <a:bodyPr/>
                     <a:lstStyle/>
                     <a:p>
-                      <a:pPr marL="0" indent="0">
+                      <a:pPr indent="0" marL="0">
                         <a:buNone/>
                       </a:pPr>
                       <a:r>
@@ -11811,7 +11712,7 @@
                     <a:bodyPr/>
                     <a:lstStyle/>
                     <a:p>
-                      <a:pPr marL="0" indent="0">
+                      <a:pPr indent="0" marL="0">
                         <a:buNone/>
                       </a:pPr>
                       <a:r>
@@ -11879,7 +11780,7 @@
                     <a:bodyPr/>
                     <a:lstStyle/>
                     <a:p>
-                      <a:pPr marL="0" indent="0">
+                      <a:pPr indent="0" marL="0">
                         <a:buNone/>
                       </a:pPr>
                       <a:r>
@@ -11942,11 +11843,6 @@
                     </a:solidFill>
                   </a:tcPr>
                 </a:tc>
-                <a:extLst>
-                  <a:ext uri="{0D108BD9-81ED-4DB2-BD59-A6C34878D82A}">
-                    <a16:rowId xmlns:a16="http://schemas.microsoft.com/office/drawing/2014/main" val="10001"/>
-                  </a:ext>
-                </a:extLst>
               </a:tr>
               <a:tr h="548640">
                 <a:tc>
@@ -11954,7 +11850,7 @@
                     <a:bodyPr/>
                     <a:lstStyle/>
                     <a:p>
-                      <a:pPr marL="0" indent="0">
+                      <a:pPr indent="0" marL="0">
                         <a:buNone/>
                       </a:pPr>
                       <a:r>
@@ -12022,7 +11918,7 @@
                     <a:bodyPr/>
                     <a:lstStyle/>
                     <a:p>
-                      <a:pPr marL="0" indent="0">
+                      <a:pPr indent="0" marL="0">
                         <a:buNone/>
                       </a:pPr>
                       <a:r>
@@ -12090,7 +11986,7 @@
                     <a:bodyPr/>
                     <a:lstStyle/>
                     <a:p>
-                      <a:pPr marL="0" indent="0">
+                      <a:pPr indent="0" marL="0">
                         <a:buNone/>
                       </a:pPr>
                       <a:r>
@@ -12153,11 +12049,6 @@
                     </a:solidFill>
                   </a:tcPr>
                 </a:tc>
-                <a:extLst>
-                  <a:ext uri="{0D108BD9-81ED-4DB2-BD59-A6C34878D82A}">
-                    <a16:rowId xmlns:a16="http://schemas.microsoft.com/office/drawing/2014/main" val="10002"/>
-                  </a:ext>
-                </a:extLst>
               </a:tr>
               <a:tr h="548640">
                 <a:tc>
@@ -12165,7 +12056,7 @@
                     <a:bodyPr/>
                     <a:lstStyle/>
                     <a:p>
-                      <a:pPr marL="0" indent="0">
+                      <a:pPr indent="0" marL="0">
                         <a:buNone/>
                       </a:pPr>
                       <a:r>
@@ -12233,7 +12124,7 @@
                     <a:bodyPr/>
                     <a:lstStyle/>
                     <a:p>
-                      <a:pPr marL="0" indent="0">
+                      <a:pPr indent="0" marL="0">
                         <a:buNone/>
                       </a:pPr>
                       <a:r>
@@ -12301,7 +12192,7 @@
                     <a:bodyPr/>
                     <a:lstStyle/>
                     <a:p>
-                      <a:pPr marL="0" indent="0">
+                      <a:pPr indent="0" marL="0">
                         <a:buNone/>
                       </a:pPr>
                       <a:r>
@@ -12364,11 +12255,6 @@
                     </a:solidFill>
                   </a:tcPr>
                 </a:tc>
-                <a:extLst>
-                  <a:ext uri="{0D108BD9-81ED-4DB2-BD59-A6C34878D82A}">
-                    <a16:rowId xmlns:a16="http://schemas.microsoft.com/office/drawing/2014/main" val="10003"/>
-                  </a:ext>
-                </a:extLst>
               </a:tr>
               <a:tr h="548640">
                 <a:tc>
@@ -12376,7 +12262,7 @@
                     <a:bodyPr/>
                     <a:lstStyle/>
                     <a:p>
-                      <a:pPr marL="0" indent="0">
+                      <a:pPr indent="0" marL="0">
                         <a:buNone/>
                       </a:pPr>
                       <a:r>
@@ -12444,7 +12330,7 @@
                     <a:bodyPr/>
                     <a:lstStyle/>
                     <a:p>
-                      <a:pPr marL="0" indent="0">
+                      <a:pPr indent="0" marL="0">
                         <a:buNone/>
                       </a:pPr>
                       <a:r>
@@ -12512,7 +12398,7 @@
                     <a:bodyPr/>
                     <a:lstStyle/>
                     <a:p>
-                      <a:pPr marL="0" indent="0">
+                      <a:pPr indent="0" marL="0">
                         <a:buNone/>
                       </a:pPr>
                       <a:r>
@@ -12575,11 +12461,6 @@
                     </a:solidFill>
                   </a:tcPr>
                 </a:tc>
-                <a:extLst>
-                  <a:ext uri="{0D108BD9-81ED-4DB2-BD59-A6C34878D82A}">
-                    <a16:rowId xmlns:a16="http://schemas.microsoft.com/office/drawing/2014/main" val="10004"/>
-                  </a:ext>
-                </a:extLst>
               </a:tr>
               <a:tr h="548640">
                 <a:tc>
@@ -12587,7 +12468,7 @@
                     <a:bodyPr/>
                     <a:lstStyle/>
                     <a:p>
-                      <a:pPr marL="0" indent="0">
+                      <a:pPr indent="0" marL="0">
                         <a:buNone/>
                       </a:pPr>
                       <a:r>
@@ -12655,7 +12536,7 @@
                     <a:bodyPr/>
                     <a:lstStyle/>
                     <a:p>
-                      <a:pPr marL="0" indent="0">
+                      <a:pPr indent="0" marL="0">
                         <a:buNone/>
                       </a:pPr>
                       <a:r>
@@ -12723,7 +12604,7 @@
                     <a:bodyPr/>
                     <a:lstStyle/>
                     <a:p>
-                      <a:pPr marL="0" indent="0">
+                      <a:pPr indent="0" marL="0">
                         <a:buNone/>
                       </a:pPr>
                       <a:r>
@@ -12786,11 +12667,6 @@
                     </a:solidFill>
                   </a:tcPr>
                 </a:tc>
-                <a:extLst>
-                  <a:ext uri="{0D108BD9-81ED-4DB2-BD59-A6C34878D82A}">
-                    <a16:rowId xmlns:a16="http://schemas.microsoft.com/office/drawing/2014/main" val="10005"/>
-                  </a:ext>
-                </a:extLst>
               </a:tr>
               <a:tr h="548640">
                 <a:tc>
@@ -12798,7 +12674,7 @@
                     <a:bodyPr/>
                     <a:lstStyle/>
                     <a:p>
-                      <a:pPr marL="0" indent="0">
+                      <a:pPr indent="0" marL="0">
                         <a:buNone/>
                       </a:pPr>
                       <a:r>
@@ -12866,7 +12742,7 @@
                     <a:bodyPr/>
                     <a:lstStyle/>
                     <a:p>
-                      <a:pPr marL="0" indent="0">
+                      <a:pPr indent="0" marL="0">
                         <a:buNone/>
                       </a:pPr>
                       <a:r>
@@ -12934,7 +12810,7 @@
                     <a:bodyPr/>
                     <a:lstStyle/>
                     <a:p>
-                      <a:pPr marL="0" indent="0">
+                      <a:pPr indent="0" marL="0">
                         <a:buNone/>
                       </a:pPr>
                       <a:r>
@@ -12997,11 +12873,6 @@
                     </a:solidFill>
                   </a:tcPr>
                 </a:tc>
-                <a:extLst>
-                  <a:ext uri="{0D108BD9-81ED-4DB2-BD59-A6C34878D82A}">
-                    <a16:rowId xmlns:a16="http://schemas.microsoft.com/office/drawing/2014/main" val="10006"/>
-                  </a:ext>
-                </a:extLst>
               </a:tr>
               <a:tr h="548640">
                 <a:tc>
@@ -13009,7 +12880,7 @@
                     <a:bodyPr/>
                     <a:lstStyle/>
                     <a:p>
-                      <a:pPr marL="0" indent="0">
+                      <a:pPr indent="0" marL="0">
                         <a:buNone/>
                       </a:pPr>
                       <a:r>
@@ -13077,7 +12948,7 @@
                     <a:bodyPr/>
                     <a:lstStyle/>
                     <a:p>
-                      <a:pPr marL="0" indent="0">
+                      <a:pPr indent="0" marL="0">
                         <a:buNone/>
                       </a:pPr>
                       <a:r>
@@ -13145,7 +13016,7 @@
                     <a:bodyPr/>
                     <a:lstStyle/>
                     <a:p>
-                      <a:pPr marL="0" indent="0">
+                      <a:pPr indent="0" marL="0">
                         <a:buNone/>
                       </a:pPr>
                       <a:r>
@@ -13208,11 +13079,6 @@
                     </a:solidFill>
                   </a:tcPr>
                 </a:tc>
-                <a:extLst>
-                  <a:ext uri="{0D108BD9-81ED-4DB2-BD59-A6C34878D82A}">
-                    <a16:rowId xmlns:a16="http://schemas.microsoft.com/office/drawing/2014/main" val="10007"/>
-                  </a:ext>
-                </a:extLst>
               </a:tr>
             </a:tbl>
           </a:graphicData>
@@ -13238,7 +13104,7 @@
           </a:prstGeom>
           <a:extLst>
             <a:ext uri="{C572A759-6A51-4108-AA02-DFA0A04FC94B}">
-              <ma14:wrappingTextBoxFlag xmlns:ma14="http://schemas.microsoft.com/office/mac/drawingml/2011/main" xmlns="" val="0"/>
+              <ma14:wrappingTextBoxFlag xmlns:ma14="http://schemas.microsoft.com/office/mac/drawingml/2011/main" val="0"/>
             </a:ext>
           </a:extLst>
         </p:spPr>
@@ -13256,7 +13122,7 @@
           <a:p>
             <a:pPr algn="r"/>
             <a:fld id="{F7021451-1387-4CA6-816F-3879F97B5CBC}" type="slidenum">
-              <a:rPr lang="en-US" b="0"/>
+              <a:rPr b="0" lang="en-US"/>
               <a:t>17</a:t>
             </a:fld>
             <a:endParaRPr lang="en-US"/>
@@ -13291,11 +13157,9 @@
       <p:sp>
         <p:nvSpPr>
           <p:cNvPr id="2" name="Text 0"/>
-          <p:cNvSpPr>
-            <a:spLocks noGrp="1"/>
-          </p:cNvSpPr>
+          <p:cNvSpPr/>
           <p:nvPr>
-            <p:ph type="title" idx="100" hasCustomPrompt="1"/>
+            <p:ph idx="100" type="title" hasCustomPrompt="1"/>
           </p:nvPr>
         </p:nvSpPr>
         <p:spPr>
@@ -13313,7 +13177,7 @@
           <a:bodyPr wrap="square" lIns="0" tIns="0" rIns="0" bIns="0" rtlCol="0" anchor="ctr"/>
           <a:lstStyle/>
           <a:p>
-            <a:pPr marL="0" indent="0" algn="l">
+            <a:pPr algn="l" indent="0" marL="0">
               <a:buNone/>
             </a:pPr>
             <a:r>
@@ -13331,11 +13195,9 @@
       <p:sp>
         <p:nvSpPr>
           <p:cNvPr id="3" name="Text 0"/>
-          <p:cNvSpPr>
-            <a:spLocks noGrp="1"/>
-          </p:cNvSpPr>
+          <p:cNvSpPr/>
           <p:nvPr>
-            <p:ph type="body" idx="101" hasCustomPrompt="1"/>
+            <p:ph idx="101" type="body" hasCustomPrompt="1"/>
           </p:nvPr>
         </p:nvSpPr>
         <p:spPr>
@@ -13353,7 +13215,7 @@
           <a:bodyPr wrap="square" lIns="0" tIns="0" rIns="0" bIns="0" rtlCol="0" anchor="ctr"/>
           <a:lstStyle/>
           <a:p>
-            <a:pPr marL="0" indent="0" algn="l">
+            <a:pPr algn="l" indent="0" marL="0">
               <a:buNone/>
             </a:pPr>
             <a:r>
@@ -13394,7 +13256,7 @@
             <a:prstDash val="solid"/>
           </a:ln>
           <a:effectLst>
-            <a:outerShdw blurRad="76200" dist="25400" dir="5400000" algn="bl" rotWithShape="0">
+            <a:outerShdw sx="100000" sy="100000" kx="0" ky="0" algn="bl" rotWithShape="0" blurRad="76200" dist="25400" dir="5400000">
               <a:srgbClr val="000000">
                 <a:alpha val="28000"/>
               </a:srgbClr>
@@ -13423,7 +13285,7 @@
           <a:bodyPr wrap="square" lIns="0" tIns="0" rIns="0" bIns="0" rtlCol="0" anchor="t"/>
           <a:lstStyle/>
           <a:p>
-            <a:pPr marL="0" indent="0" algn="l">
+            <a:pPr algn="l" indent="0" marL="0">
               <a:buNone/>
             </a:pPr>
             <a:r>
@@ -13459,7 +13321,7 @@
           <a:bodyPr wrap="square" lIns="0" tIns="0" rIns="0" bIns="0" rtlCol="0" anchor="t"/>
           <a:lstStyle/>
           <a:p>
-            <a:pPr marL="0" indent="0" algn="l">
+            <a:pPr algn="l" indent="0" marL="0">
               <a:buNone/>
             </a:pPr>
             <a:r>
@@ -13495,7 +13357,7 @@
           <a:bodyPr wrap="square" lIns="0" tIns="0" rIns="0" bIns="0" rtlCol="0" anchor="t"/>
           <a:lstStyle/>
           <a:p>
-            <a:pPr marL="0" indent="0" algn="l">
+            <a:pPr algn="l" indent="0" marL="0">
               <a:buNone/>
             </a:pPr>
             <a:r>
@@ -13558,7 +13420,7 @@
           <a:bodyPr wrap="square" lIns="0" tIns="0" rIns="0" bIns="0" rtlCol="0" anchor="ctr"/>
           <a:lstStyle/>
           <a:p>
-            <a:pPr marL="0" indent="0" algn="ctr">
+            <a:pPr algn="ctr" indent="0" marL="0">
               <a:buNone/>
             </a:pPr>
             <a:r>
@@ -13594,7 +13456,7 @@
           <a:bodyPr wrap="square" lIns="0" tIns="0" rIns="0" bIns="0" rtlCol="0" anchor="t"/>
           <a:lstStyle/>
           <a:p>
-            <a:pPr marL="0" indent="0" algn="l">
+            <a:pPr algn="l" indent="0" marL="0">
               <a:buNone/>
             </a:pPr>
             <a:r>
@@ -13635,7 +13497,7 @@
             <a:prstDash val="solid"/>
           </a:ln>
           <a:effectLst>
-            <a:outerShdw blurRad="76200" dist="25400" dir="5400000" algn="bl" rotWithShape="0">
+            <a:outerShdw sx="100000" sy="100000" kx="0" ky="0" algn="bl" rotWithShape="0" blurRad="76200" dist="25400" dir="5400000">
               <a:srgbClr val="000000">
                 <a:alpha val="28000"/>
               </a:srgbClr>
@@ -13664,7 +13526,7 @@
           <a:bodyPr wrap="square" lIns="0" tIns="0" rIns="0" bIns="0" rtlCol="0" anchor="t"/>
           <a:lstStyle/>
           <a:p>
-            <a:pPr marL="0" indent="0" algn="l">
+            <a:pPr algn="l" indent="0" marL="0">
               <a:buNone/>
             </a:pPr>
             <a:r>
@@ -13700,7 +13562,7 @@
           <a:bodyPr wrap="square" lIns="0" tIns="0" rIns="0" bIns="0" rtlCol="0" anchor="t"/>
           <a:lstStyle/>
           <a:p>
-            <a:pPr marL="0" indent="0" algn="l">
+            <a:pPr algn="l" indent="0" marL="0">
               <a:buNone/>
             </a:pPr>
             <a:r>
@@ -13736,7 +13598,7 @@
           <a:bodyPr wrap="square" lIns="0" tIns="0" rIns="0" bIns="0" rtlCol="0" anchor="t"/>
           <a:lstStyle/>
           <a:p>
-            <a:pPr marL="0" indent="0" algn="l">
+            <a:pPr algn="l" indent="0" marL="0">
               <a:buNone/>
             </a:pPr>
             <a:r>
@@ -13799,7 +13661,7 @@
           <a:bodyPr wrap="square" lIns="0" tIns="0" rIns="0" bIns="0" rtlCol="0" anchor="ctr"/>
           <a:lstStyle/>
           <a:p>
-            <a:pPr marL="0" indent="0" algn="ctr">
+            <a:pPr algn="ctr" indent="0" marL="0">
               <a:buNone/>
             </a:pPr>
             <a:r>
@@ -13835,7 +13697,7 @@
           <a:bodyPr wrap="square" lIns="0" tIns="0" rIns="0" bIns="0" rtlCol="0" anchor="t"/>
           <a:lstStyle/>
           <a:p>
-            <a:pPr marL="0" indent="0" algn="l">
+            <a:pPr algn="l" indent="0" marL="0">
               <a:buNone/>
             </a:pPr>
             <a:r>
@@ -13876,7 +13738,7 @@
             <a:prstDash val="solid"/>
           </a:ln>
           <a:effectLst>
-            <a:outerShdw blurRad="76200" dist="25400" dir="5400000" algn="bl" rotWithShape="0">
+            <a:outerShdw sx="100000" sy="100000" kx="0" ky="0" algn="bl" rotWithShape="0" blurRad="76200" dist="25400" dir="5400000">
               <a:srgbClr val="000000">
                 <a:alpha val="28000"/>
               </a:srgbClr>
@@ -13905,7 +13767,7 @@
           <a:bodyPr wrap="square" lIns="0" tIns="0" rIns="0" bIns="0" rtlCol="0" anchor="t"/>
           <a:lstStyle/>
           <a:p>
-            <a:pPr marL="0" indent="0" algn="l">
+            <a:pPr algn="l" indent="0" marL="0">
               <a:buNone/>
             </a:pPr>
             <a:r>
@@ -13941,7 +13803,7 @@
           <a:bodyPr wrap="square" lIns="0" tIns="0" rIns="0" bIns="0" rtlCol="0" anchor="t"/>
           <a:lstStyle/>
           <a:p>
-            <a:pPr marL="0" indent="0" algn="l">
+            <a:pPr algn="l" indent="0" marL="0">
               <a:buNone/>
             </a:pPr>
             <a:r>
@@ -13977,7 +13839,7 @@
           <a:bodyPr wrap="square" lIns="0" tIns="0" rIns="0" bIns="0" rtlCol="0" anchor="t"/>
           <a:lstStyle/>
           <a:p>
-            <a:pPr marL="0" indent="0" algn="l">
+            <a:pPr algn="l" indent="0" marL="0">
               <a:buNone/>
             </a:pPr>
             <a:r>
@@ -14040,7 +13902,7 @@
           <a:bodyPr wrap="square" lIns="0" tIns="0" rIns="0" bIns="0" rtlCol="0" anchor="ctr"/>
           <a:lstStyle/>
           <a:p>
-            <a:pPr marL="0" indent="0" algn="ctr">
+            <a:pPr algn="ctr" indent="0" marL="0">
               <a:buNone/>
             </a:pPr>
             <a:r>
@@ -14076,7 +13938,7 @@
           <a:bodyPr wrap="square" lIns="0" tIns="0" rIns="0" bIns="0" rtlCol="0" anchor="t"/>
           <a:lstStyle/>
           <a:p>
-            <a:pPr marL="0" indent="0" algn="l">
+            <a:pPr algn="l" indent="0" marL="0">
               <a:buNone/>
             </a:pPr>
             <a:r>
@@ -14117,7 +13979,7 @@
             <a:prstDash val="solid"/>
           </a:ln>
           <a:effectLst>
-            <a:outerShdw blurRad="76200" dist="25400" dir="5400000" algn="bl" rotWithShape="0">
+            <a:outerShdw sx="100000" sy="100000" kx="0" ky="0" algn="bl" rotWithShape="0" blurRad="76200" dist="25400" dir="5400000">
               <a:srgbClr val="000000">
                 <a:alpha val="28000"/>
               </a:srgbClr>
@@ -14146,7 +14008,7 @@
           <a:bodyPr wrap="square" lIns="0" tIns="0" rIns="0" bIns="0" rtlCol="0" anchor="t"/>
           <a:lstStyle/>
           <a:p>
-            <a:pPr marL="0" indent="0" algn="l">
+            <a:pPr algn="l" indent="0" marL="0">
               <a:buNone/>
             </a:pPr>
             <a:r>
@@ -14182,7 +14044,7 @@
           <a:bodyPr wrap="square" lIns="0" tIns="0" rIns="0" bIns="0" rtlCol="0" anchor="t"/>
           <a:lstStyle/>
           <a:p>
-            <a:pPr marL="0" indent="0" algn="l">
+            <a:pPr algn="l" indent="0" marL="0">
               <a:buNone/>
             </a:pPr>
             <a:r>
@@ -14218,7 +14080,7 @@
           <a:bodyPr wrap="square" lIns="0" tIns="0" rIns="0" bIns="0" rtlCol="0" anchor="t"/>
           <a:lstStyle/>
           <a:p>
-            <a:pPr marL="0" indent="0" algn="l">
+            <a:pPr algn="l" indent="0" marL="0">
               <a:buNone/>
             </a:pPr>
             <a:r>
@@ -14281,7 +14143,7 @@
           <a:bodyPr wrap="square" lIns="0" tIns="0" rIns="0" bIns="0" rtlCol="0" anchor="ctr"/>
           <a:lstStyle/>
           <a:p>
-            <a:pPr marL="0" indent="0" algn="ctr">
+            <a:pPr algn="ctr" indent="0" marL="0">
               <a:buNone/>
             </a:pPr>
             <a:r>
@@ -14317,7 +14179,7 @@
           <a:bodyPr wrap="square" lIns="0" tIns="0" rIns="0" bIns="0" rtlCol="0" anchor="t"/>
           <a:lstStyle/>
           <a:p>
-            <a:pPr marL="0" indent="0" algn="l">
+            <a:pPr algn="l" indent="0" marL="0">
               <a:buNone/>
             </a:pPr>
             <a:r>
@@ -14358,7 +14220,7 @@
             <a:prstDash val="solid"/>
           </a:ln>
           <a:effectLst>
-            <a:outerShdw blurRad="76200" dist="25400" dir="5400000" algn="bl" rotWithShape="0">
+            <a:outerShdw sx="100000" sy="100000" kx="0" ky="0" algn="bl" rotWithShape="0" blurRad="76200" dist="25400" dir="5400000">
               <a:srgbClr val="000000">
                 <a:alpha val="28000"/>
               </a:srgbClr>
@@ -14387,7 +14249,7 @@
           <a:bodyPr wrap="square" lIns="0" tIns="0" rIns="0" bIns="0" rtlCol="0" anchor="t"/>
           <a:lstStyle/>
           <a:p>
-            <a:pPr marL="0" indent="0" algn="l">
+            <a:pPr algn="l" indent="0" marL="0">
               <a:buNone/>
             </a:pPr>
             <a:r>
@@ -14423,7 +14285,7 @@
           <a:bodyPr wrap="square" lIns="0" tIns="0" rIns="0" bIns="0" rtlCol="0" anchor="t"/>
           <a:lstStyle/>
           <a:p>
-            <a:pPr marL="0" indent="0" algn="l">
+            <a:pPr algn="l" indent="0" marL="0">
               <a:buNone/>
             </a:pPr>
             <a:r>
@@ -14459,7 +14321,7 @@
           <a:bodyPr wrap="square" lIns="0" tIns="0" rIns="0" bIns="0" rtlCol="0" anchor="t"/>
           <a:lstStyle/>
           <a:p>
-            <a:pPr marL="0" indent="0" algn="l">
+            <a:pPr algn="l" indent="0" marL="0">
               <a:buNone/>
             </a:pPr>
             <a:r>
@@ -14522,7 +14384,7 @@
           <a:bodyPr wrap="square" lIns="0" tIns="0" rIns="0" bIns="0" rtlCol="0" anchor="ctr"/>
           <a:lstStyle/>
           <a:p>
-            <a:pPr marL="0" indent="0" algn="ctr">
+            <a:pPr algn="ctr" indent="0" marL="0">
               <a:buNone/>
             </a:pPr>
             <a:r>
@@ -14558,7 +14420,7 @@
           <a:bodyPr wrap="square" lIns="0" tIns="0" rIns="0" bIns="0" rtlCol="0" anchor="t"/>
           <a:lstStyle/>
           <a:p>
-            <a:pPr marL="0" indent="0" algn="l">
+            <a:pPr algn="l" indent="0" marL="0">
               <a:buNone/>
             </a:pPr>
             <a:r>
@@ -14599,7 +14461,7 @@
             <a:prstDash val="solid"/>
           </a:ln>
           <a:effectLst>
-            <a:outerShdw blurRad="76200" dist="25400" dir="5400000" algn="bl" rotWithShape="0">
+            <a:outerShdw sx="100000" sy="100000" kx="0" ky="0" algn="bl" rotWithShape="0" blurRad="76200" dist="25400" dir="5400000">
               <a:srgbClr val="000000">
                 <a:alpha val="28000"/>
               </a:srgbClr>
@@ -14628,7 +14490,7 @@
           <a:bodyPr wrap="square" lIns="0" tIns="0" rIns="0" bIns="0" rtlCol="0" anchor="ctr"/>
           <a:lstStyle/>
           <a:p>
-            <a:pPr marL="0" indent="0" algn="l">
+            <a:pPr algn="l" indent="0" marL="0">
               <a:buNone/>
             </a:pPr>
             <a:r>
@@ -14645,7 +14507,7 @@
       </p:sp>
       <p:sp>
         <p:nvSpPr>
-          <p:cNvPr id="41" name="Slide Number Placeholder 0"/>
+          <p:cNvPr id="25" name="Slide Number Placeholder 0"/>
           <p:cNvSpPr>
             <a:spLocks noGrp="1"/>
           </p:cNvSpPr>
@@ -14663,7 +14525,7 @@
           </a:prstGeom>
           <a:extLst>
             <a:ext uri="{C572A759-6A51-4108-AA02-DFA0A04FC94B}">
-              <ma14:wrappingTextBoxFlag xmlns:ma14="http://schemas.microsoft.com/office/mac/drawingml/2011/main" xmlns="" val="0"/>
+              <ma14:wrappingTextBoxFlag xmlns:ma14="http://schemas.microsoft.com/office/mac/drawingml/2011/main" val="0"/>
             </a:ext>
           </a:extLst>
         </p:spPr>
@@ -14681,7 +14543,7 @@
           <a:p>
             <a:pPr algn="r"/>
             <a:fld id="{F7021451-1387-4CA6-816F-3879F97B5CBC}" type="slidenum">
-              <a:rPr lang="en-US" b="0"/>
+              <a:rPr b="0" lang="en-US"/>
               <a:t>18</a:t>
             </a:fld>
             <a:endParaRPr lang="en-US"/>
@@ -14716,11 +14578,9 @@
       <p:sp>
         <p:nvSpPr>
           <p:cNvPr id="2" name="Text 0"/>
-          <p:cNvSpPr>
-            <a:spLocks noGrp="1"/>
-          </p:cNvSpPr>
+          <p:cNvSpPr/>
           <p:nvPr>
-            <p:ph type="title" idx="100" hasCustomPrompt="1"/>
+            <p:ph idx="100" type="title" hasCustomPrompt="1"/>
           </p:nvPr>
         </p:nvSpPr>
         <p:spPr>
@@ -14738,7 +14598,7 @@
           <a:bodyPr wrap="square" lIns="0" tIns="0" rIns="0" bIns="0" rtlCol="0" anchor="ctr"/>
           <a:lstStyle/>
           <a:p>
-            <a:pPr marL="0" indent="0" algn="l">
+            <a:pPr algn="l" indent="0" marL="0">
               <a:buNone/>
             </a:pPr>
             <a:r>
@@ -14756,11 +14616,9 @@
       <p:sp>
         <p:nvSpPr>
           <p:cNvPr id="3" name="Text 0"/>
-          <p:cNvSpPr>
-            <a:spLocks noGrp="1"/>
-          </p:cNvSpPr>
+          <p:cNvSpPr/>
           <p:nvPr>
-            <p:ph type="body" idx="101" hasCustomPrompt="1"/>
+            <p:ph idx="101" type="body" hasCustomPrompt="1"/>
           </p:nvPr>
         </p:nvSpPr>
         <p:spPr>
@@ -14778,7 +14636,7 @@
           <a:bodyPr wrap="square" lIns="0" tIns="0" rIns="0" bIns="0" rtlCol="0" anchor="ctr"/>
           <a:lstStyle/>
           <a:p>
-            <a:pPr marL="0" indent="0" algn="l">
+            <a:pPr algn="l" indent="0" marL="0">
               <a:buNone/>
             </a:pPr>
             <a:r>
@@ -14819,7 +14677,7 @@
             <a:prstDash val="solid"/>
           </a:ln>
           <a:effectLst>
-            <a:outerShdw blurRad="76200" dist="25400" dir="5400000" algn="bl" rotWithShape="0">
+            <a:outerShdw sx="100000" sy="100000" kx="0" ky="0" algn="bl" rotWithShape="0" blurRad="76200" dist="25400" dir="5400000">
               <a:srgbClr val="000000">
                 <a:alpha val="28000"/>
               </a:srgbClr>
@@ -14854,7 +14712,7 @@
       </p:sp>
       <p:pic>
         <p:nvPicPr>
-          <p:cNvPr id="6" name="icon">
+          <p:cNvPr id="6" name="icon" descr="">
             <a:extLst>
               <a:ext uri="{C183D7F6-B498-43B3-948B-1728B52AA6E4}">
                 <adec:decorative xmlns:adec="http://schemas.microsoft.com/office/drawing/2017/decorative" val="1"/>
@@ -14867,7 +14725,7 @@
           <p:nvPr/>
         </p:nvPicPr>
         <p:blipFill>
-          <a:blip r:embed="rId3"/>
+          <a:blip r:embed="rId1"/>
           <a:stretch>
             <a:fillRect/>
           </a:stretch>
@@ -14903,7 +14761,7 @@
           <a:bodyPr wrap="square" lIns="0" tIns="0" rIns="0" bIns="0" rtlCol="0" anchor="t"/>
           <a:lstStyle/>
           <a:p>
-            <a:pPr marL="0" indent="0" algn="l">
+            <a:pPr algn="l" indent="0" marL="0">
               <a:buNone/>
             </a:pPr>
             <a:r>
@@ -15020,7 +14878,7 @@
             <a:prstDash val="solid"/>
           </a:ln>
           <a:effectLst>
-            <a:outerShdw blurRad="76200" dist="25400" dir="5400000" algn="bl" rotWithShape="0">
+            <a:outerShdw sx="100000" sy="100000" kx="0" ky="0" algn="bl" rotWithShape="0" blurRad="76200" dist="25400" dir="5400000">
               <a:srgbClr val="000000">
                 <a:alpha val="28000"/>
               </a:srgbClr>
@@ -15055,7 +14913,7 @@
       </p:sp>
       <p:pic>
         <p:nvPicPr>
-          <p:cNvPr id="11" name="icon">
+          <p:cNvPr id="11" name="icon" descr="">
             <a:extLst>
               <a:ext uri="{C183D7F6-B498-43B3-948B-1728B52AA6E4}">
                 <adec:decorative xmlns:adec="http://schemas.microsoft.com/office/drawing/2017/decorative" val="1"/>
@@ -15068,7 +14926,7 @@
           <p:nvPr/>
         </p:nvPicPr>
         <p:blipFill>
-          <a:blip r:embed="rId4"/>
+          <a:blip r:embed="rId2"/>
           <a:stretch>
             <a:fillRect/>
           </a:stretch>
@@ -15104,7 +14962,7 @@
           <a:bodyPr wrap="square" lIns="0" tIns="0" rIns="0" bIns="0" rtlCol="0" anchor="t"/>
           <a:lstStyle/>
           <a:p>
-            <a:pPr marL="0" indent="0" algn="l">
+            <a:pPr algn="l" indent="0" marL="0">
               <a:buNone/>
             </a:pPr>
             <a:r>
@@ -15221,7 +15079,7 @@
             <a:prstDash val="solid"/>
           </a:ln>
           <a:effectLst>
-            <a:outerShdw blurRad="76200" dist="25400" dir="5400000" algn="bl" rotWithShape="0">
+            <a:outerShdw sx="100000" sy="100000" kx="0" ky="0" algn="bl" rotWithShape="0" blurRad="76200" dist="25400" dir="5400000">
               <a:srgbClr val="000000">
                 <a:alpha val="28000"/>
               </a:srgbClr>
@@ -15256,7 +15114,7 @@
       </p:sp>
       <p:pic>
         <p:nvPicPr>
-          <p:cNvPr id="16" name="icon">
+          <p:cNvPr id="16" name="icon" descr="">
             <a:extLst>
               <a:ext uri="{C183D7F6-B498-43B3-948B-1728B52AA6E4}">
                 <adec:decorative xmlns:adec="http://schemas.microsoft.com/office/drawing/2017/decorative" val="1"/>
@@ -15269,7 +15127,7 @@
           <p:nvPr/>
         </p:nvPicPr>
         <p:blipFill>
-          <a:blip r:embed="rId5"/>
+          <a:blip r:embed="rId3"/>
           <a:stretch>
             <a:fillRect/>
           </a:stretch>
@@ -15305,7 +15163,7 @@
           <a:bodyPr wrap="square" lIns="0" tIns="0" rIns="0" bIns="0" rtlCol="0" anchor="t"/>
           <a:lstStyle/>
           <a:p>
-            <a:pPr marL="0" indent="0" algn="l">
+            <a:pPr algn="l" indent="0" marL="0">
               <a:buNone/>
             </a:pPr>
             <a:r>
@@ -15422,7 +15280,7 @@
             <a:prstDash val="solid"/>
           </a:ln>
           <a:effectLst>
-            <a:outerShdw blurRad="76200" dist="25400" dir="5400000" algn="bl" rotWithShape="0">
+            <a:outerShdw sx="100000" sy="100000" kx="0" ky="0" algn="bl" rotWithShape="0" blurRad="76200" dist="25400" dir="5400000">
               <a:srgbClr val="000000">
                 <a:alpha val="28000"/>
               </a:srgbClr>
@@ -15451,7 +15309,7 @@
           <a:bodyPr wrap="square" lIns="0" tIns="0" rIns="0" bIns="0" rtlCol="0" anchor="ctr"/>
           <a:lstStyle/>
           <a:p>
-            <a:pPr marL="0" indent="0" algn="l">
+            <a:pPr algn="l" indent="0" marL="0">
               <a:buNone/>
             </a:pPr>
             <a:r>
@@ -15462,6 +15320,9 @@
               </a:rPr>
               <a:t>Сценарий: </a:t>
             </a:r>
+            <a:pPr algn="l" indent="0" marL="0">
+              <a:buNone/>
+            </a:pPr>
             <a:r>
               <a:rPr lang="en-US" sz="1600" dirty="0">
                 <a:solidFill>
@@ -15494,7 +15355,7 @@
           </a:prstGeom>
           <a:extLst>
             <a:ext uri="{C572A759-6A51-4108-AA02-DFA0A04FC94B}">
-              <ma14:wrappingTextBoxFlag xmlns:ma14="http://schemas.microsoft.com/office/mac/drawingml/2011/main" xmlns="" val="0"/>
+              <ma14:wrappingTextBoxFlag xmlns:ma14="http://schemas.microsoft.com/office/mac/drawingml/2011/main" val="0"/>
             </a:ext>
           </a:extLst>
         </p:spPr>
@@ -15512,7 +15373,7 @@
           <a:p>
             <a:pPr algn="r"/>
             <a:fld id="{F7021451-1387-4CA6-816F-3879F97B5CBC}" type="slidenum">
-              <a:rPr lang="en-US" b="0"/>
+              <a:rPr b="0" lang="en-US"/>
               <a:t>19</a:t>
             </a:fld>
             <a:endParaRPr lang="en-US"/>
@@ -15547,11 +15408,9 @@
       <p:sp>
         <p:nvSpPr>
           <p:cNvPr id="2" name="Text 0"/>
-          <p:cNvSpPr>
-            <a:spLocks noGrp="1"/>
-          </p:cNvSpPr>
+          <p:cNvSpPr/>
           <p:nvPr>
-            <p:ph type="title" idx="100" hasCustomPrompt="1"/>
+            <p:ph idx="100" type="title" hasCustomPrompt="1"/>
           </p:nvPr>
         </p:nvSpPr>
         <p:spPr>
@@ -15569,7 +15428,7 @@
           <a:bodyPr wrap="square" lIns="0" tIns="0" rIns="0" bIns="0" rtlCol="0" anchor="ctr"/>
           <a:lstStyle/>
           <a:p>
-            <a:pPr marL="0" indent="0" algn="l">
+            <a:pPr algn="l" indent="0" marL="0">
               <a:buNone/>
             </a:pPr>
             <a:r>
@@ -15587,11 +15446,9 @@
       <p:sp>
         <p:nvSpPr>
           <p:cNvPr id="3" name="Text 0"/>
-          <p:cNvSpPr>
-            <a:spLocks noGrp="1"/>
-          </p:cNvSpPr>
+          <p:cNvSpPr/>
           <p:nvPr>
-            <p:ph type="body" idx="101" hasCustomPrompt="1"/>
+            <p:ph idx="101" type="body" hasCustomPrompt="1"/>
           </p:nvPr>
         </p:nvSpPr>
         <p:spPr>
@@ -15609,7 +15466,7 @@
           <a:bodyPr wrap="square" lIns="0" tIns="0" rIns="0" bIns="0" rtlCol="0" anchor="ctr"/>
           <a:lstStyle/>
           <a:p>
-            <a:pPr marL="0" indent="0" algn="l">
+            <a:pPr algn="l" indent="0" marL="0">
               <a:buNone/>
             </a:pPr>
             <a:r>
@@ -15650,7 +15507,7 @@
             <a:prstDash val="solid"/>
           </a:ln>
           <a:effectLst>
-            <a:outerShdw blurRad="76200" dist="25400" dir="5400000" algn="bl" rotWithShape="0">
+            <a:outerShdw sx="100000" sy="100000" kx="0" ky="0" algn="bl" rotWithShape="0" blurRad="76200" dist="25400" dir="5400000">
               <a:srgbClr val="000000">
                 <a:alpha val="28000"/>
               </a:srgbClr>
@@ -15685,7 +15542,7 @@
       </p:sp>
       <p:pic>
         <p:nvPicPr>
-          <p:cNvPr id="6" name="icon">
+          <p:cNvPr id="6" name="icon" descr="">
             <a:extLst>
               <a:ext uri="{C183D7F6-B498-43B3-948B-1728B52AA6E4}">
                 <adec:decorative xmlns:adec="http://schemas.microsoft.com/office/drawing/2017/decorative" val="1"/>
@@ -15698,7 +15555,7 @@
           <p:nvPr/>
         </p:nvPicPr>
         <p:blipFill>
-          <a:blip r:embed="rId3"/>
+          <a:blip r:embed="rId1"/>
           <a:stretch>
             <a:fillRect/>
           </a:stretch>
@@ -15734,7 +15591,7 @@
           <a:bodyPr wrap="square" lIns="0" tIns="0" rIns="0" bIns="0" rtlCol="0" anchor="t"/>
           <a:lstStyle/>
           <a:p>
-            <a:pPr marL="0" indent="0" algn="l">
+            <a:pPr algn="l" indent="0" marL="0">
               <a:buNone/>
             </a:pPr>
             <a:r>
@@ -15770,7 +15627,7 @@
           <a:bodyPr wrap="square" lIns="0" tIns="0" rIns="0" bIns="0" rtlCol="0" anchor="t"/>
           <a:lstStyle/>
           <a:p>
-            <a:pPr marL="0" indent="0" algn="l">
+            <a:pPr algn="l" indent="0" marL="0">
               <a:buNone/>
             </a:pPr>
             <a:r>
@@ -15806,7 +15663,7 @@
           <a:bodyPr wrap="square" lIns="0" tIns="0" rIns="0" bIns="0" rtlCol="0" anchor="t"/>
           <a:lstStyle/>
           <a:p>
-            <a:pPr marL="0" indent="0" algn="l">
+            <a:pPr algn="l" indent="0" marL="0">
               <a:buNone/>
             </a:pPr>
             <a:r>
@@ -15847,7 +15704,7 @@
             <a:prstDash val="solid"/>
           </a:ln>
           <a:effectLst>
-            <a:outerShdw blurRad="76200" dist="25400" dir="5400000" algn="bl" rotWithShape="0">
+            <a:outerShdw sx="100000" sy="100000" kx="0" ky="0" algn="bl" rotWithShape="0" blurRad="76200" dist="25400" dir="5400000">
               <a:srgbClr val="000000">
                 <a:alpha val="28000"/>
               </a:srgbClr>
@@ -15876,7 +15733,7 @@
           <a:bodyPr wrap="square" lIns="0" tIns="0" rIns="0" bIns="0" rtlCol="0" anchor="t"/>
           <a:lstStyle/>
           <a:p>
-            <a:pPr marL="0" indent="0" algn="l">
+            <a:pPr algn="l" indent="0" marL="0">
               <a:buNone/>
             </a:pPr>
             <a:r>
@@ -15912,7 +15769,7 @@
           <a:bodyPr wrap="square" lIns="0" tIns="0" rIns="0" bIns="0" rtlCol="0" anchor="t"/>
           <a:lstStyle/>
           <a:p>
-            <a:pPr marL="0" indent="0" algn="l">
+            <a:pPr algn="l" indent="0" marL="0">
               <a:buNone/>
             </a:pPr>
             <a:r>
@@ -15948,7 +15805,7 @@
           <a:bodyPr wrap="square" lIns="0" tIns="0" rIns="0" bIns="0" rtlCol="0" anchor="t"/>
           <a:lstStyle/>
           <a:p>
-            <a:pPr marL="0" indent="0" algn="l">
+            <a:pPr algn="l" indent="0" marL="0">
               <a:buNone/>
             </a:pPr>
             <a:r>
@@ -16009,7 +15866,7 @@
           <a:bodyPr wrap="square" lIns="0" tIns="0" rIns="0" bIns="0" rtlCol="0" anchor="t"/>
           <a:lstStyle/>
           <a:p>
-            <a:pPr marL="0" indent="0" algn="l">
+            <a:pPr algn="l" indent="0" marL="0">
               <a:buNone/>
             </a:pPr>
             <a:r>
@@ -16070,7 +15927,7 @@
           <a:bodyPr wrap="square" lIns="0" tIns="0" rIns="0" bIns="0" rtlCol="0" anchor="t"/>
           <a:lstStyle/>
           <a:p>
-            <a:pPr marL="0" indent="0" algn="l">
+            <a:pPr algn="l" indent="0" marL="0">
               <a:buNone/>
             </a:pPr>
             <a:r>
@@ -16111,7 +15968,7 @@
             <a:prstDash val="solid"/>
           </a:ln>
           <a:effectLst>
-            <a:outerShdw blurRad="76200" dist="25400" dir="5400000" algn="bl" rotWithShape="0">
+            <a:outerShdw sx="100000" sy="100000" kx="0" ky="0" algn="bl" rotWithShape="0" blurRad="76200" dist="25400" dir="5400000">
               <a:srgbClr val="000000">
                 <a:alpha val="28000"/>
               </a:srgbClr>
@@ -16140,7 +15997,7 @@
           <a:bodyPr wrap="square" lIns="0" tIns="0" rIns="0" bIns="0" rtlCol="0" anchor="t"/>
           <a:lstStyle/>
           <a:p>
-            <a:pPr marL="0" indent="0" algn="l">
+            <a:pPr algn="l" indent="0" marL="0">
               <a:buNone/>
             </a:pPr>
             <a:r>
@@ -16176,7 +16033,7 @@
           <a:bodyPr wrap="square" lIns="0" tIns="0" rIns="0" bIns="0" rtlCol="0" anchor="t"/>
           <a:lstStyle/>
           <a:p>
-            <a:pPr marL="0" indent="0" algn="l">
+            <a:pPr algn="l" indent="0" marL="0">
               <a:buNone/>
             </a:pPr>
             <a:r>
@@ -16217,7 +16074,7 @@
             <a:prstDash val="solid"/>
           </a:ln>
           <a:effectLst>
-            <a:outerShdw blurRad="76200" dist="25400" dir="5400000" algn="bl" rotWithShape="0">
+            <a:outerShdw sx="100000" sy="100000" kx="0" ky="0" algn="bl" rotWithShape="0" blurRad="76200" dist="25400" dir="5400000">
               <a:srgbClr val="000000">
                 <a:alpha val="28000"/>
               </a:srgbClr>
@@ -16246,7 +16103,7 @@
           <a:bodyPr wrap="square" lIns="0" tIns="0" rIns="0" bIns="0" rtlCol="0" anchor="t"/>
           <a:lstStyle/>
           <a:p>
-            <a:pPr marL="0" indent="0" algn="l">
+            <a:pPr algn="l" indent="0" marL="0">
               <a:buNone/>
             </a:pPr>
             <a:r>
@@ -16282,7 +16139,7 @@
           <a:bodyPr wrap="square" lIns="0" tIns="0" rIns="0" bIns="0" rtlCol="0" anchor="t"/>
           <a:lstStyle/>
           <a:p>
-            <a:pPr marL="0" indent="0" algn="l">
+            <a:pPr algn="l" indent="0" marL="0">
               <a:buNone/>
             </a:pPr>
             <a:r>
@@ -16317,7 +16174,7 @@
           </a:prstGeom>
           <a:extLst>
             <a:ext uri="{C572A759-6A51-4108-AA02-DFA0A04FC94B}">
-              <ma14:wrappingTextBoxFlag xmlns:ma14="http://schemas.microsoft.com/office/mac/drawingml/2011/main" xmlns="" val="0"/>
+              <ma14:wrappingTextBoxFlag xmlns:ma14="http://schemas.microsoft.com/office/mac/drawingml/2011/main" val="0"/>
             </a:ext>
           </a:extLst>
         </p:spPr>
@@ -16335,7 +16192,7 @@
           <a:p>
             <a:pPr algn="r"/>
             <a:fld id="{F7021451-1387-4CA6-816F-3879F97B5CBC}" type="slidenum">
-              <a:rPr lang="en-US" b="0"/>
+              <a:rPr b="0" lang="en-US"/>
               <a:t>2</a:t>
             </a:fld>
             <a:endParaRPr lang="en-US"/>
@@ -16370,11 +16227,9 @@
       <p:sp>
         <p:nvSpPr>
           <p:cNvPr id="2" name="Text 0"/>
-          <p:cNvSpPr>
-            <a:spLocks noGrp="1"/>
-          </p:cNvSpPr>
+          <p:cNvSpPr/>
           <p:nvPr>
-            <p:ph type="title" idx="100" hasCustomPrompt="1"/>
+            <p:ph idx="100" type="title" hasCustomPrompt="1"/>
           </p:nvPr>
         </p:nvSpPr>
         <p:spPr>
@@ -16392,7 +16247,7 @@
           <a:bodyPr wrap="square" lIns="0" tIns="0" rIns="0" bIns="0" rtlCol="0" anchor="ctr"/>
           <a:lstStyle/>
           <a:p>
-            <a:pPr marL="0" indent="0" algn="l">
+            <a:pPr algn="l" indent="0" marL="0">
               <a:buNone/>
             </a:pPr>
             <a:r>
@@ -16410,11 +16265,9 @@
       <p:sp>
         <p:nvSpPr>
           <p:cNvPr id="3" name="Text 0"/>
-          <p:cNvSpPr>
-            <a:spLocks noGrp="1"/>
-          </p:cNvSpPr>
+          <p:cNvSpPr/>
           <p:nvPr>
-            <p:ph type="body" idx="101" hasCustomPrompt="1"/>
+            <p:ph idx="101" type="body" hasCustomPrompt="1"/>
           </p:nvPr>
         </p:nvSpPr>
         <p:spPr>
@@ -16432,7 +16285,7 @@
           <a:bodyPr wrap="square" lIns="0" tIns="0" rIns="0" bIns="0" rtlCol="0" anchor="ctr"/>
           <a:lstStyle/>
           <a:p>
-            <a:pPr marL="0" indent="0" algn="l">
+            <a:pPr algn="l" indent="0" marL="0">
               <a:buNone/>
             </a:pPr>
             <a:r>
@@ -16470,27 +16323,9 @@
             <a:tbl>
               <a:tblPr/>
               <a:tblGrid>
-                <a:gridCol w="2377440">
-                  <a:extLst>
-                    <a:ext uri="{9D8B030D-6E8A-4147-A177-3AD203B41FA5}">
-                      <a16:colId xmlns:a16="http://schemas.microsoft.com/office/drawing/2014/main" val="20000"/>
-                    </a:ext>
-                  </a:extLst>
-                </a:gridCol>
-                <a:gridCol w="4480560">
-                  <a:extLst>
-                    <a:ext uri="{9D8B030D-6E8A-4147-A177-3AD203B41FA5}">
-                      <a16:colId xmlns:a16="http://schemas.microsoft.com/office/drawing/2014/main" val="20001"/>
-                    </a:ext>
-                  </a:extLst>
-                </a:gridCol>
-                <a:gridCol w="4233672">
-                  <a:extLst>
-                    <a:ext uri="{9D8B030D-6E8A-4147-A177-3AD203B41FA5}">
-                      <a16:colId xmlns:a16="http://schemas.microsoft.com/office/drawing/2014/main" val="20002"/>
-                    </a:ext>
-                  </a:extLst>
-                </a:gridCol>
+                <a:gridCol w="2377440"/>
+                <a:gridCol w="4480560"/>
+                <a:gridCol w="4233672"/>
               </a:tblGrid>
               <a:tr h="603504">
                 <a:tc>
@@ -16498,7 +16333,7 @@
                     <a:bodyPr/>
                     <a:lstStyle/>
                     <a:p>
-                      <a:pPr marL="0" indent="0">
+                      <a:pPr indent="0" marL="0">
                         <a:buNone/>
                       </a:pPr>
                       <a:r>
@@ -16566,7 +16401,7 @@
                     <a:bodyPr/>
                     <a:lstStyle/>
                     <a:p>
-                      <a:pPr marL="0" indent="0">
+                      <a:pPr indent="0" marL="0">
                         <a:buNone/>
                       </a:pPr>
                       <a:r>
@@ -16634,7 +16469,7 @@
                     <a:bodyPr/>
                     <a:lstStyle/>
                     <a:p>
-                      <a:pPr marL="0" indent="0">
+                      <a:pPr indent="0" marL="0">
                         <a:buNone/>
                       </a:pPr>
                       <a:r>
@@ -16697,11 +16532,6 @@
                     </a:solidFill>
                   </a:tcPr>
                 </a:tc>
-                <a:extLst>
-                  <a:ext uri="{0D108BD9-81ED-4DB2-BD59-A6C34878D82A}">
-                    <a16:rowId xmlns:a16="http://schemas.microsoft.com/office/drawing/2014/main" val="10000"/>
-                  </a:ext>
-                </a:extLst>
               </a:tr>
               <a:tr h="603504">
                 <a:tc>
@@ -16709,7 +16539,7 @@
                     <a:bodyPr/>
                     <a:lstStyle/>
                     <a:p>
-                      <a:pPr marL="0" indent="0">
+                      <a:pPr indent="0" marL="0">
                         <a:buNone/>
                       </a:pPr>
                       <a:r>
@@ -16777,7 +16607,7 @@
                     <a:bodyPr/>
                     <a:lstStyle/>
                     <a:p>
-                      <a:pPr marL="0" indent="0">
+                      <a:pPr indent="0" marL="0">
                         <a:buNone/>
                       </a:pPr>
                       <a:r>
@@ -16845,7 +16675,7 @@
                     <a:bodyPr/>
                     <a:lstStyle/>
                     <a:p>
-                      <a:pPr marL="0" indent="0">
+                      <a:pPr indent="0" marL="0">
                         <a:buNone/>
                       </a:pPr>
                       <a:r>
@@ -16908,11 +16738,6 @@
                     </a:solidFill>
                   </a:tcPr>
                 </a:tc>
-                <a:extLst>
-                  <a:ext uri="{0D108BD9-81ED-4DB2-BD59-A6C34878D82A}">
-                    <a16:rowId xmlns:a16="http://schemas.microsoft.com/office/drawing/2014/main" val="10001"/>
-                  </a:ext>
-                </a:extLst>
               </a:tr>
               <a:tr h="603504">
                 <a:tc>
@@ -16920,7 +16745,7 @@
                     <a:bodyPr/>
                     <a:lstStyle/>
                     <a:p>
-                      <a:pPr marL="0" indent="0">
+                      <a:pPr indent="0" marL="0">
                         <a:buNone/>
                       </a:pPr>
                       <a:r>
@@ -16988,7 +16813,7 @@
                     <a:bodyPr/>
                     <a:lstStyle/>
                     <a:p>
-                      <a:pPr marL="0" indent="0">
+                      <a:pPr indent="0" marL="0">
                         <a:buNone/>
                       </a:pPr>
                       <a:r>
@@ -17056,7 +16881,7 @@
                     <a:bodyPr/>
                     <a:lstStyle/>
                     <a:p>
-                      <a:pPr marL="0" indent="0">
+                      <a:pPr indent="0" marL="0">
                         <a:buNone/>
                       </a:pPr>
                       <a:r>
@@ -17119,11 +16944,6 @@
                     </a:solidFill>
                   </a:tcPr>
                 </a:tc>
-                <a:extLst>
-                  <a:ext uri="{0D108BD9-81ED-4DB2-BD59-A6C34878D82A}">
-                    <a16:rowId xmlns:a16="http://schemas.microsoft.com/office/drawing/2014/main" val="10002"/>
-                  </a:ext>
-                </a:extLst>
               </a:tr>
               <a:tr h="603504">
                 <a:tc>
@@ -17131,7 +16951,7 @@
                     <a:bodyPr/>
                     <a:lstStyle/>
                     <a:p>
-                      <a:pPr marL="0" indent="0">
+                      <a:pPr indent="0" marL="0">
                         <a:buNone/>
                       </a:pPr>
                       <a:r>
@@ -17199,7 +17019,7 @@
                     <a:bodyPr/>
                     <a:lstStyle/>
                     <a:p>
-                      <a:pPr marL="0" indent="0">
+                      <a:pPr indent="0" marL="0">
                         <a:buNone/>
                       </a:pPr>
                       <a:r>
@@ -17267,7 +17087,7 @@
                     <a:bodyPr/>
                     <a:lstStyle/>
                     <a:p>
-                      <a:pPr marL="0" indent="0">
+                      <a:pPr indent="0" marL="0">
                         <a:buNone/>
                       </a:pPr>
                       <a:r>
@@ -17330,11 +17150,6 @@
                     </a:solidFill>
                   </a:tcPr>
                 </a:tc>
-                <a:extLst>
-                  <a:ext uri="{0D108BD9-81ED-4DB2-BD59-A6C34878D82A}">
-                    <a16:rowId xmlns:a16="http://schemas.microsoft.com/office/drawing/2014/main" val="10003"/>
-                  </a:ext>
-                </a:extLst>
               </a:tr>
               <a:tr h="603504">
                 <a:tc>
@@ -17342,7 +17157,7 @@
                     <a:bodyPr/>
                     <a:lstStyle/>
                     <a:p>
-                      <a:pPr marL="0" indent="0">
+                      <a:pPr indent="0" marL="0">
                         <a:buNone/>
                       </a:pPr>
                       <a:r>
@@ -17410,7 +17225,7 @@
                     <a:bodyPr/>
                     <a:lstStyle/>
                     <a:p>
-                      <a:pPr marL="0" indent="0">
+                      <a:pPr indent="0" marL="0">
                         <a:buNone/>
                       </a:pPr>
                       <a:r>
@@ -17478,7 +17293,7 @@
                     <a:bodyPr/>
                     <a:lstStyle/>
                     <a:p>
-                      <a:pPr marL="0" indent="0">
+                      <a:pPr indent="0" marL="0">
                         <a:buNone/>
                       </a:pPr>
                       <a:r>
@@ -17541,11 +17356,6 @@
                     </a:solidFill>
                   </a:tcPr>
                 </a:tc>
-                <a:extLst>
-                  <a:ext uri="{0D108BD9-81ED-4DB2-BD59-A6C34878D82A}">
-                    <a16:rowId xmlns:a16="http://schemas.microsoft.com/office/drawing/2014/main" val="10004"/>
-                  </a:ext>
-                </a:extLst>
               </a:tr>
               <a:tr h="603504">
                 <a:tc>
@@ -17553,7 +17363,7 @@
                     <a:bodyPr/>
                     <a:lstStyle/>
                     <a:p>
-                      <a:pPr marL="0" indent="0">
+                      <a:pPr indent="0" marL="0">
                         <a:buNone/>
                       </a:pPr>
                       <a:r>
@@ -17621,7 +17431,7 @@
                     <a:bodyPr/>
                     <a:lstStyle/>
                     <a:p>
-                      <a:pPr marL="0" indent="0">
+                      <a:pPr indent="0" marL="0">
                         <a:buNone/>
                       </a:pPr>
                       <a:r>
@@ -17689,7 +17499,7 @@
                     <a:bodyPr/>
                     <a:lstStyle/>
                     <a:p>
-                      <a:pPr marL="0" indent="0">
+                      <a:pPr indent="0" marL="0">
                         <a:buNone/>
                       </a:pPr>
                       <a:r>
@@ -17752,11 +17562,6 @@
                     </a:solidFill>
                   </a:tcPr>
                 </a:tc>
-                <a:extLst>
-                  <a:ext uri="{0D108BD9-81ED-4DB2-BD59-A6C34878D82A}">
-                    <a16:rowId xmlns:a16="http://schemas.microsoft.com/office/drawing/2014/main" val="10005"/>
-                  </a:ext>
-                </a:extLst>
               </a:tr>
               <a:tr h="603504">
                 <a:tc>
@@ -17764,7 +17569,7 @@
                     <a:bodyPr/>
                     <a:lstStyle/>
                     <a:p>
-                      <a:pPr marL="0" indent="0">
+                      <a:pPr indent="0" marL="0">
                         <a:buNone/>
                       </a:pPr>
                       <a:r>
@@ -17832,7 +17637,7 @@
                     <a:bodyPr/>
                     <a:lstStyle/>
                     <a:p>
-                      <a:pPr marL="0" indent="0">
+                      <a:pPr indent="0" marL="0">
                         <a:buNone/>
                       </a:pPr>
                       <a:r>
@@ -17900,7 +17705,7 @@
                     <a:bodyPr/>
                     <a:lstStyle/>
                     <a:p>
-                      <a:pPr marL="0" indent="0">
+                      <a:pPr indent="0" marL="0">
                         <a:buNone/>
                       </a:pPr>
                       <a:r>
@@ -17963,11 +17768,6 @@
                     </a:solidFill>
                   </a:tcPr>
                 </a:tc>
-                <a:extLst>
-                  <a:ext uri="{0D108BD9-81ED-4DB2-BD59-A6C34878D82A}">
-                    <a16:rowId xmlns:a16="http://schemas.microsoft.com/office/drawing/2014/main" val="10006"/>
-                  </a:ext>
-                </a:extLst>
               </a:tr>
             </a:tbl>
           </a:graphicData>
@@ -17993,7 +17793,7 @@
           </a:prstGeom>
           <a:extLst>
             <a:ext uri="{C572A759-6A51-4108-AA02-DFA0A04FC94B}">
-              <ma14:wrappingTextBoxFlag xmlns:ma14="http://schemas.microsoft.com/office/mac/drawingml/2011/main" xmlns="" val="0"/>
+              <ma14:wrappingTextBoxFlag xmlns:ma14="http://schemas.microsoft.com/office/mac/drawingml/2011/main" val="0"/>
             </a:ext>
           </a:extLst>
         </p:spPr>
@@ -18011,7 +17811,7 @@
           <a:p>
             <a:pPr algn="r"/>
             <a:fld id="{F7021451-1387-4CA6-816F-3879F97B5CBC}" type="slidenum">
-              <a:rPr lang="en-US" b="0"/>
+              <a:rPr b="0" lang="en-US"/>
               <a:t>20</a:t>
             </a:fld>
             <a:endParaRPr lang="en-US"/>
@@ -18046,11 +17846,9 @@
       <p:sp>
         <p:nvSpPr>
           <p:cNvPr id="2" name="Text 0"/>
-          <p:cNvSpPr>
-            <a:spLocks noGrp="1"/>
-          </p:cNvSpPr>
+          <p:cNvSpPr/>
           <p:nvPr>
-            <p:ph type="title" idx="100" hasCustomPrompt="1"/>
+            <p:ph idx="100" type="title" hasCustomPrompt="1"/>
           </p:nvPr>
         </p:nvSpPr>
         <p:spPr>
@@ -18068,7 +17866,7 @@
           <a:bodyPr wrap="square" lIns="0" tIns="0" rIns="0" bIns="0" rtlCol="0" anchor="ctr"/>
           <a:lstStyle/>
           <a:p>
-            <a:pPr marL="0" indent="0" algn="l">
+            <a:pPr algn="l" indent="0" marL="0">
               <a:buNone/>
             </a:pPr>
             <a:r>
@@ -18086,11 +17884,9 @@
       <p:sp>
         <p:nvSpPr>
           <p:cNvPr id="3" name="Text 0"/>
-          <p:cNvSpPr>
-            <a:spLocks noGrp="1"/>
-          </p:cNvSpPr>
+          <p:cNvSpPr/>
           <p:nvPr>
-            <p:ph type="body" idx="101" hasCustomPrompt="1"/>
+            <p:ph idx="101" type="body" hasCustomPrompt="1"/>
           </p:nvPr>
         </p:nvSpPr>
         <p:spPr>
@@ -18108,7 +17904,7 @@
           <a:bodyPr wrap="square" lIns="0" tIns="0" rIns="0" bIns="0" rtlCol="0" anchor="ctr"/>
           <a:lstStyle/>
           <a:p>
-            <a:pPr marL="0" indent="0" algn="l">
+            <a:pPr algn="l" indent="0" marL="0">
               <a:buNone/>
             </a:pPr>
             <a:r>
@@ -18149,7 +17945,7 @@
             <a:prstDash val="solid"/>
           </a:ln>
           <a:effectLst>
-            <a:outerShdw blurRad="76200" dist="25400" dir="5400000" algn="bl" rotWithShape="0">
+            <a:outerShdw sx="100000" sy="100000" kx="0" ky="0" algn="bl" rotWithShape="0" blurRad="76200" dist="25400" dir="5400000">
               <a:srgbClr val="000000">
                 <a:alpha val="28000"/>
               </a:srgbClr>
@@ -18184,7 +17980,7 @@
       </p:sp>
       <p:pic>
         <p:nvPicPr>
-          <p:cNvPr id="6" name="icon">
+          <p:cNvPr id="6" name="icon" descr="">
             <a:extLst>
               <a:ext uri="{C183D7F6-B498-43B3-948B-1728B52AA6E4}">
                 <adec:decorative xmlns:adec="http://schemas.microsoft.com/office/drawing/2017/decorative" val="1"/>
@@ -18197,7 +17993,7 @@
           <p:nvPr/>
         </p:nvPicPr>
         <p:blipFill>
-          <a:blip r:embed="rId3"/>
+          <a:blip r:embed="rId1"/>
           <a:stretch>
             <a:fillRect/>
           </a:stretch>
@@ -18233,7 +18029,7 @@
           <a:bodyPr wrap="square" lIns="0" tIns="0" rIns="0" bIns="0" rtlCol="0" anchor="t"/>
           <a:lstStyle/>
           <a:p>
-            <a:pPr marL="0" indent="0" algn="l">
+            <a:pPr algn="l" indent="0" marL="0">
               <a:buNone/>
             </a:pPr>
             <a:r>
@@ -18269,7 +18065,7 @@
           <a:bodyPr wrap="square" lIns="0" tIns="0" rIns="0" bIns="0" rtlCol="0" anchor="t"/>
           <a:lstStyle/>
           <a:p>
-            <a:pPr marL="0" indent="0" algn="l">
+            <a:pPr algn="l" indent="0" marL="0">
               <a:buNone/>
             </a:pPr>
             <a:r>
@@ -18310,7 +18106,7 @@
             <a:prstDash val="solid"/>
           </a:ln>
           <a:effectLst>
-            <a:outerShdw blurRad="76200" dist="25400" dir="5400000" algn="bl" rotWithShape="0">
+            <a:outerShdw sx="100000" sy="100000" kx="0" ky="0" algn="bl" rotWithShape="0" blurRad="76200" dist="25400" dir="5400000">
               <a:srgbClr val="000000">
                 <a:alpha val="28000"/>
               </a:srgbClr>
@@ -18345,7 +18141,7 @@
       </p:sp>
       <p:pic>
         <p:nvPicPr>
-          <p:cNvPr id="11" name="icon">
+          <p:cNvPr id="11" name="icon" descr="">
             <a:extLst>
               <a:ext uri="{C183D7F6-B498-43B3-948B-1728B52AA6E4}">
                 <adec:decorative xmlns:adec="http://schemas.microsoft.com/office/drawing/2017/decorative" val="1"/>
@@ -18358,7 +18154,7 @@
           <p:nvPr/>
         </p:nvPicPr>
         <p:blipFill>
-          <a:blip r:embed="rId4"/>
+          <a:blip r:embed="rId2"/>
           <a:stretch>
             <a:fillRect/>
           </a:stretch>
@@ -18394,7 +18190,7 @@
           <a:bodyPr wrap="square" lIns="0" tIns="0" rIns="0" bIns="0" rtlCol="0" anchor="t"/>
           <a:lstStyle/>
           <a:p>
-            <a:pPr marL="0" indent="0" algn="l">
+            <a:pPr algn="l" indent="0" marL="0">
               <a:buNone/>
             </a:pPr>
             <a:r>
@@ -18430,7 +18226,7 @@
           <a:bodyPr wrap="square" lIns="0" tIns="0" rIns="0" bIns="0" rtlCol="0" anchor="t"/>
           <a:lstStyle/>
           <a:p>
-            <a:pPr marL="0" indent="0" algn="l">
+            <a:pPr algn="l" indent="0" marL="0">
               <a:buNone/>
             </a:pPr>
             <a:r>
@@ -18471,7 +18267,7 @@
             <a:prstDash val="solid"/>
           </a:ln>
           <a:effectLst>
-            <a:outerShdw blurRad="76200" dist="25400" dir="5400000" algn="bl" rotWithShape="0">
+            <a:outerShdw sx="100000" sy="100000" kx="0" ky="0" algn="bl" rotWithShape="0" blurRad="76200" dist="25400" dir="5400000">
               <a:srgbClr val="000000">
                 <a:alpha val="28000"/>
               </a:srgbClr>
@@ -18506,7 +18302,7 @@
       </p:sp>
       <p:pic>
         <p:nvPicPr>
-          <p:cNvPr id="16" name="icon">
+          <p:cNvPr id="16" name="icon" descr="">
             <a:extLst>
               <a:ext uri="{C183D7F6-B498-43B3-948B-1728B52AA6E4}">
                 <adec:decorative xmlns:adec="http://schemas.microsoft.com/office/drawing/2017/decorative" val="1"/>
@@ -18519,7 +18315,7 @@
           <p:nvPr/>
         </p:nvPicPr>
         <p:blipFill>
-          <a:blip r:embed="rId5"/>
+          <a:blip r:embed="rId3"/>
           <a:stretch>
             <a:fillRect/>
           </a:stretch>
@@ -18555,7 +18351,7 @@
           <a:bodyPr wrap="square" lIns="0" tIns="0" rIns="0" bIns="0" rtlCol="0" anchor="t"/>
           <a:lstStyle/>
           <a:p>
-            <a:pPr marL="0" indent="0" algn="l">
+            <a:pPr algn="l" indent="0" marL="0">
               <a:buNone/>
             </a:pPr>
             <a:r>
@@ -18591,7 +18387,7 @@
           <a:bodyPr wrap="square" lIns="0" tIns="0" rIns="0" bIns="0" rtlCol="0" anchor="t"/>
           <a:lstStyle/>
           <a:p>
-            <a:pPr marL="0" indent="0" algn="l">
+            <a:pPr algn="l" indent="0" marL="0">
               <a:buNone/>
             </a:pPr>
             <a:r>
@@ -18632,7 +18428,7 @@
             <a:prstDash val="solid"/>
           </a:ln>
           <a:effectLst>
-            <a:outerShdw blurRad="76200" dist="25400" dir="5400000" algn="bl" rotWithShape="0">
+            <a:outerShdw sx="100000" sy="100000" kx="0" ky="0" algn="bl" rotWithShape="0" blurRad="76200" dist="25400" dir="5400000">
               <a:srgbClr val="000000">
                 <a:alpha val="28000"/>
               </a:srgbClr>
@@ -18667,7 +18463,7 @@
       </p:sp>
       <p:pic>
         <p:nvPicPr>
-          <p:cNvPr id="21" name="icon">
+          <p:cNvPr id="21" name="icon" descr="">
             <a:extLst>
               <a:ext uri="{C183D7F6-B498-43B3-948B-1728B52AA6E4}">
                 <adec:decorative xmlns:adec="http://schemas.microsoft.com/office/drawing/2017/decorative" val="1"/>
@@ -18680,7 +18476,7 @@
           <p:nvPr/>
         </p:nvPicPr>
         <p:blipFill>
-          <a:blip r:embed="rId6"/>
+          <a:blip r:embed="rId4"/>
           <a:stretch>
             <a:fillRect/>
           </a:stretch>
@@ -18716,7 +18512,7 @@
           <a:bodyPr wrap="square" lIns="0" tIns="0" rIns="0" bIns="0" rtlCol="0" anchor="t"/>
           <a:lstStyle/>
           <a:p>
-            <a:pPr marL="0" indent="0" algn="l">
+            <a:pPr algn="l" indent="0" marL="0">
               <a:buNone/>
             </a:pPr>
             <a:r>
@@ -18752,7 +18548,7 @@
           <a:bodyPr wrap="square" lIns="0" tIns="0" rIns="0" bIns="0" rtlCol="0" anchor="t"/>
           <a:lstStyle/>
           <a:p>
-            <a:pPr marL="0" indent="0" algn="l">
+            <a:pPr algn="l" indent="0" marL="0">
               <a:buNone/>
             </a:pPr>
             <a:r>
@@ -18793,7 +18589,7 @@
             <a:prstDash val="solid"/>
           </a:ln>
           <a:effectLst>
-            <a:outerShdw blurRad="76200" dist="25400" dir="5400000" algn="bl" rotWithShape="0">
+            <a:outerShdw sx="100000" sy="100000" kx="0" ky="0" algn="bl" rotWithShape="0" blurRad="76200" dist="25400" dir="5400000">
               <a:srgbClr val="000000">
                 <a:alpha val="28000"/>
               </a:srgbClr>
@@ -18828,7 +18624,7 @@
       </p:sp>
       <p:pic>
         <p:nvPicPr>
-          <p:cNvPr id="26" name="icon">
+          <p:cNvPr id="26" name="icon" descr="">
             <a:extLst>
               <a:ext uri="{C183D7F6-B498-43B3-948B-1728B52AA6E4}">
                 <adec:decorative xmlns:adec="http://schemas.microsoft.com/office/drawing/2017/decorative" val="1"/>
@@ -18841,7 +18637,7 @@
           <p:nvPr/>
         </p:nvPicPr>
         <p:blipFill>
-          <a:blip r:embed="rId7"/>
+          <a:blip r:embed="rId5"/>
           <a:stretch>
             <a:fillRect/>
           </a:stretch>
@@ -18877,7 +18673,7 @@
           <a:bodyPr wrap="square" lIns="0" tIns="0" rIns="0" bIns="0" rtlCol="0" anchor="t"/>
           <a:lstStyle/>
           <a:p>
-            <a:pPr marL="0" indent="0" algn="l">
+            <a:pPr algn="l" indent="0" marL="0">
               <a:buNone/>
             </a:pPr>
             <a:r>
@@ -18913,7 +18709,7 @@
           <a:bodyPr wrap="square" lIns="0" tIns="0" rIns="0" bIns="0" rtlCol="0" anchor="t"/>
           <a:lstStyle/>
           <a:p>
-            <a:pPr marL="0" indent="0" algn="l">
+            <a:pPr algn="l" indent="0" marL="0">
               <a:buNone/>
             </a:pPr>
             <a:r>
@@ -18954,7 +18750,7 @@
             <a:prstDash val="solid"/>
           </a:ln>
           <a:effectLst>
-            <a:outerShdw blurRad="76200" dist="25400" dir="5400000" algn="bl" rotWithShape="0">
+            <a:outerShdw sx="100000" sy="100000" kx="0" ky="0" algn="bl" rotWithShape="0" blurRad="76200" dist="25400" dir="5400000">
               <a:srgbClr val="000000">
                 <a:alpha val="28000"/>
               </a:srgbClr>
@@ -18989,7 +18785,7 @@
       </p:sp>
       <p:pic>
         <p:nvPicPr>
-          <p:cNvPr id="31" name="icon">
+          <p:cNvPr id="31" name="icon" descr="">
             <a:extLst>
               <a:ext uri="{C183D7F6-B498-43B3-948B-1728B52AA6E4}">
                 <adec:decorative xmlns:adec="http://schemas.microsoft.com/office/drawing/2017/decorative" val="1"/>
@@ -19002,7 +18798,7 @@
           <p:nvPr/>
         </p:nvPicPr>
         <p:blipFill>
-          <a:blip r:embed="rId8"/>
+          <a:blip r:embed="rId6"/>
           <a:stretch>
             <a:fillRect/>
           </a:stretch>
@@ -19038,7 +18834,7 @@
           <a:bodyPr wrap="square" lIns="0" tIns="0" rIns="0" bIns="0" rtlCol="0" anchor="t"/>
           <a:lstStyle/>
           <a:p>
-            <a:pPr marL="0" indent="0" algn="l">
+            <a:pPr algn="l" indent="0" marL="0">
               <a:buNone/>
             </a:pPr>
             <a:r>
@@ -19074,7 +18870,7 @@
           <a:bodyPr wrap="square" lIns="0" tIns="0" rIns="0" bIns="0" rtlCol="0" anchor="t"/>
           <a:lstStyle/>
           <a:p>
-            <a:pPr marL="0" indent="0" algn="l">
+            <a:pPr algn="l" indent="0" marL="0">
               <a:buNone/>
             </a:pPr>
             <a:r>
@@ -19091,7 +18887,7 @@
       </p:sp>
       <p:sp>
         <p:nvSpPr>
-          <p:cNvPr id="34" name="Slide Number Placeholder 0"/>
+          <p:cNvPr id="25" name="Slide Number Placeholder 0"/>
           <p:cNvSpPr>
             <a:spLocks noGrp="1"/>
           </p:cNvSpPr>
@@ -19109,7 +18905,7 @@
           </a:prstGeom>
           <a:extLst>
             <a:ext uri="{C572A759-6A51-4108-AA02-DFA0A04FC94B}">
-              <ma14:wrappingTextBoxFlag xmlns:ma14="http://schemas.microsoft.com/office/mac/drawingml/2011/main" xmlns="" val="0"/>
+              <ma14:wrappingTextBoxFlag xmlns:ma14="http://schemas.microsoft.com/office/mac/drawingml/2011/main" val="0"/>
             </a:ext>
           </a:extLst>
         </p:spPr>
@@ -19127,7 +18923,7 @@
           <a:p>
             <a:pPr algn="r"/>
             <a:fld id="{F7021451-1387-4CA6-816F-3879F97B5CBC}" type="slidenum">
-              <a:rPr lang="en-US" b="0"/>
+              <a:rPr b="0" lang="en-US"/>
               <a:t>21</a:t>
             </a:fld>
             <a:endParaRPr lang="en-US"/>
@@ -19162,11 +18958,9 @@
       <p:sp>
         <p:nvSpPr>
           <p:cNvPr id="2" name="Text 0"/>
-          <p:cNvSpPr>
-            <a:spLocks noGrp="1"/>
-          </p:cNvSpPr>
+          <p:cNvSpPr/>
           <p:nvPr>
-            <p:ph type="title" idx="100" hasCustomPrompt="1"/>
+            <p:ph idx="100" type="title" hasCustomPrompt="1"/>
           </p:nvPr>
         </p:nvSpPr>
         <p:spPr>
@@ -19184,7 +18978,7 @@
           <a:bodyPr wrap="square" lIns="0" tIns="0" rIns="0" bIns="0" rtlCol="0" anchor="ctr"/>
           <a:lstStyle/>
           <a:p>
-            <a:pPr marL="0" indent="0" algn="l">
+            <a:pPr algn="l" indent="0" marL="0">
               <a:buNone/>
             </a:pPr>
             <a:r>
@@ -19202,11 +18996,9 @@
       <p:sp>
         <p:nvSpPr>
           <p:cNvPr id="3" name="Text 0"/>
-          <p:cNvSpPr>
-            <a:spLocks noGrp="1"/>
-          </p:cNvSpPr>
+          <p:cNvSpPr/>
           <p:nvPr>
-            <p:ph type="body" idx="101" hasCustomPrompt="1"/>
+            <p:ph idx="101" type="body" hasCustomPrompt="1"/>
           </p:nvPr>
         </p:nvSpPr>
         <p:spPr>
@@ -19224,7 +19016,7 @@
           <a:bodyPr wrap="square" lIns="0" tIns="0" rIns="0" bIns="0" rtlCol="0" anchor="ctr"/>
           <a:lstStyle/>
           <a:p>
-            <a:pPr marL="0" indent="0" algn="l">
+            <a:pPr algn="l" indent="0" marL="0">
               <a:buNone/>
             </a:pPr>
             <a:r>
@@ -19262,27 +19054,9 @@
             <a:tbl>
               <a:tblPr/>
               <a:tblGrid>
-                <a:gridCol w="2560320">
-                  <a:extLst>
-                    <a:ext uri="{9D8B030D-6E8A-4147-A177-3AD203B41FA5}">
-                      <a16:colId xmlns:a16="http://schemas.microsoft.com/office/drawing/2014/main" val="20000"/>
-                    </a:ext>
-                  </a:extLst>
-                </a:gridCol>
-                <a:gridCol w="4754880">
-                  <a:extLst>
-                    <a:ext uri="{9D8B030D-6E8A-4147-A177-3AD203B41FA5}">
-                      <a16:colId xmlns:a16="http://schemas.microsoft.com/office/drawing/2014/main" val="20001"/>
-                    </a:ext>
-                  </a:extLst>
-                </a:gridCol>
-                <a:gridCol w="3776472">
-                  <a:extLst>
-                    <a:ext uri="{9D8B030D-6E8A-4147-A177-3AD203B41FA5}">
-                      <a16:colId xmlns:a16="http://schemas.microsoft.com/office/drawing/2014/main" val="20002"/>
-                    </a:ext>
-                  </a:extLst>
-                </a:gridCol>
+                <a:gridCol w="2560320"/>
+                <a:gridCol w="4754880"/>
+                <a:gridCol w="3776472"/>
               </a:tblGrid>
               <a:tr h="603504">
                 <a:tc>
@@ -19290,7 +19064,7 @@
                     <a:bodyPr/>
                     <a:lstStyle/>
                     <a:p>
-                      <a:pPr marL="0" indent="0">
+                      <a:pPr indent="0" marL="0">
                         <a:buNone/>
                       </a:pPr>
                       <a:r>
@@ -19358,7 +19132,7 @@
                     <a:bodyPr/>
                     <a:lstStyle/>
                     <a:p>
-                      <a:pPr marL="0" indent="0">
+                      <a:pPr indent="0" marL="0">
                         <a:buNone/>
                       </a:pPr>
                       <a:r>
@@ -19426,7 +19200,7 @@
                     <a:bodyPr/>
                     <a:lstStyle/>
                     <a:p>
-                      <a:pPr marL="0" indent="0">
+                      <a:pPr indent="0" marL="0">
                         <a:buNone/>
                       </a:pPr>
                       <a:r>
@@ -19489,11 +19263,6 @@
                     </a:solidFill>
                   </a:tcPr>
                 </a:tc>
-                <a:extLst>
-                  <a:ext uri="{0D108BD9-81ED-4DB2-BD59-A6C34878D82A}">
-                    <a16:rowId xmlns:a16="http://schemas.microsoft.com/office/drawing/2014/main" val="10000"/>
-                  </a:ext>
-                </a:extLst>
               </a:tr>
               <a:tr h="603504">
                 <a:tc>
@@ -19501,7 +19270,7 @@
                     <a:bodyPr/>
                     <a:lstStyle/>
                     <a:p>
-                      <a:pPr marL="0" indent="0">
+                      <a:pPr indent="0" marL="0">
                         <a:buNone/>
                       </a:pPr>
                       <a:r>
@@ -19569,7 +19338,7 @@
                     <a:bodyPr/>
                     <a:lstStyle/>
                     <a:p>
-                      <a:pPr marL="0" indent="0">
+                      <a:pPr indent="0" marL="0">
                         <a:buNone/>
                       </a:pPr>
                       <a:r>
@@ -19637,7 +19406,7 @@
                     <a:bodyPr/>
                     <a:lstStyle/>
                     <a:p>
-                      <a:pPr marL="0" indent="0">
+                      <a:pPr indent="0" marL="0">
                         <a:buNone/>
                       </a:pPr>
                       <a:r>
@@ -19700,11 +19469,6 @@
                     </a:solidFill>
                   </a:tcPr>
                 </a:tc>
-                <a:extLst>
-                  <a:ext uri="{0D108BD9-81ED-4DB2-BD59-A6C34878D82A}">
-                    <a16:rowId xmlns:a16="http://schemas.microsoft.com/office/drawing/2014/main" val="10001"/>
-                  </a:ext>
-                </a:extLst>
               </a:tr>
               <a:tr h="603504">
                 <a:tc>
@@ -19712,7 +19476,7 @@
                     <a:bodyPr/>
                     <a:lstStyle/>
                     <a:p>
-                      <a:pPr marL="0" indent="0">
+                      <a:pPr indent="0" marL="0">
                         <a:buNone/>
                       </a:pPr>
                       <a:r>
@@ -19780,7 +19544,7 @@
                     <a:bodyPr/>
                     <a:lstStyle/>
                     <a:p>
-                      <a:pPr marL="0" indent="0">
+                      <a:pPr indent="0" marL="0">
                         <a:buNone/>
                       </a:pPr>
                       <a:r>
@@ -19848,7 +19612,7 @@
                     <a:bodyPr/>
                     <a:lstStyle/>
                     <a:p>
-                      <a:pPr marL="0" indent="0">
+                      <a:pPr indent="0" marL="0">
                         <a:buNone/>
                       </a:pPr>
                       <a:r>
@@ -19911,11 +19675,6 @@
                     </a:solidFill>
                   </a:tcPr>
                 </a:tc>
-                <a:extLst>
-                  <a:ext uri="{0D108BD9-81ED-4DB2-BD59-A6C34878D82A}">
-                    <a16:rowId xmlns:a16="http://schemas.microsoft.com/office/drawing/2014/main" val="10002"/>
-                  </a:ext>
-                </a:extLst>
               </a:tr>
               <a:tr h="603504">
                 <a:tc>
@@ -19923,7 +19682,7 @@
                     <a:bodyPr/>
                     <a:lstStyle/>
                     <a:p>
-                      <a:pPr marL="0" indent="0">
+                      <a:pPr indent="0" marL="0">
                         <a:buNone/>
                       </a:pPr>
                       <a:r>
@@ -19991,7 +19750,7 @@
                     <a:bodyPr/>
                     <a:lstStyle/>
                     <a:p>
-                      <a:pPr marL="0" indent="0">
+                      <a:pPr indent="0" marL="0">
                         <a:buNone/>
                       </a:pPr>
                       <a:r>
@@ -20059,7 +19818,7 @@
                     <a:bodyPr/>
                     <a:lstStyle/>
                     <a:p>
-                      <a:pPr marL="0" indent="0">
+                      <a:pPr indent="0" marL="0">
                         <a:buNone/>
                       </a:pPr>
                       <a:r>
@@ -20122,11 +19881,6 @@
                     </a:solidFill>
                   </a:tcPr>
                 </a:tc>
-                <a:extLst>
-                  <a:ext uri="{0D108BD9-81ED-4DB2-BD59-A6C34878D82A}">
-                    <a16:rowId xmlns:a16="http://schemas.microsoft.com/office/drawing/2014/main" val="10003"/>
-                  </a:ext>
-                </a:extLst>
               </a:tr>
               <a:tr h="603504">
                 <a:tc>
@@ -20134,7 +19888,7 @@
                     <a:bodyPr/>
                     <a:lstStyle/>
                     <a:p>
-                      <a:pPr marL="0" indent="0">
+                      <a:pPr indent="0" marL="0">
                         <a:buNone/>
                       </a:pPr>
                       <a:r>
@@ -20202,7 +19956,7 @@
                     <a:bodyPr/>
                     <a:lstStyle/>
                     <a:p>
-                      <a:pPr marL="0" indent="0">
+                      <a:pPr indent="0" marL="0">
                         <a:buNone/>
                       </a:pPr>
                       <a:r>
@@ -20270,7 +20024,7 @@
                     <a:bodyPr/>
                     <a:lstStyle/>
                     <a:p>
-                      <a:pPr marL="0" indent="0">
+                      <a:pPr indent="0" marL="0">
                         <a:buNone/>
                       </a:pPr>
                       <a:r>
@@ -20333,11 +20087,6 @@
                     </a:solidFill>
                   </a:tcPr>
                 </a:tc>
-                <a:extLst>
-                  <a:ext uri="{0D108BD9-81ED-4DB2-BD59-A6C34878D82A}">
-                    <a16:rowId xmlns:a16="http://schemas.microsoft.com/office/drawing/2014/main" val="10004"/>
-                  </a:ext>
-                </a:extLst>
               </a:tr>
               <a:tr h="603504">
                 <a:tc>
@@ -20345,7 +20094,7 @@
                     <a:bodyPr/>
                     <a:lstStyle/>
                     <a:p>
-                      <a:pPr marL="0" indent="0">
+                      <a:pPr indent="0" marL="0">
                         <a:buNone/>
                       </a:pPr>
                       <a:r>
@@ -20413,7 +20162,7 @@
                     <a:bodyPr/>
                     <a:lstStyle/>
                     <a:p>
-                      <a:pPr marL="0" indent="0">
+                      <a:pPr indent="0" marL="0">
                         <a:buNone/>
                       </a:pPr>
                       <a:r>
@@ -20481,7 +20230,7 @@
                     <a:bodyPr/>
                     <a:lstStyle/>
                     <a:p>
-                      <a:pPr marL="0" indent="0">
+                      <a:pPr indent="0" marL="0">
                         <a:buNone/>
                       </a:pPr>
                       <a:r>
@@ -20544,11 +20293,6 @@
                     </a:solidFill>
                   </a:tcPr>
                 </a:tc>
-                <a:extLst>
-                  <a:ext uri="{0D108BD9-81ED-4DB2-BD59-A6C34878D82A}">
-                    <a16:rowId xmlns:a16="http://schemas.microsoft.com/office/drawing/2014/main" val="10005"/>
-                  </a:ext>
-                </a:extLst>
               </a:tr>
               <a:tr h="603504">
                 <a:tc>
@@ -20556,7 +20300,7 @@
                     <a:bodyPr/>
                     <a:lstStyle/>
                     <a:p>
-                      <a:pPr marL="0" indent="0">
+                      <a:pPr indent="0" marL="0">
                         <a:buNone/>
                       </a:pPr>
                       <a:r>
@@ -20624,7 +20368,7 @@
                     <a:bodyPr/>
                     <a:lstStyle/>
                     <a:p>
-                      <a:pPr marL="0" indent="0">
+                      <a:pPr indent="0" marL="0">
                         <a:buNone/>
                       </a:pPr>
                       <a:r>
@@ -20692,7 +20436,7 @@
                     <a:bodyPr/>
                     <a:lstStyle/>
                     <a:p>
-                      <a:pPr marL="0" indent="0">
+                      <a:pPr indent="0" marL="0">
                         <a:buNone/>
                       </a:pPr>
                       <a:r>
@@ -20755,11 +20499,6 @@
                     </a:solidFill>
                   </a:tcPr>
                 </a:tc>
-                <a:extLst>
-                  <a:ext uri="{0D108BD9-81ED-4DB2-BD59-A6C34878D82A}">
-                    <a16:rowId xmlns:a16="http://schemas.microsoft.com/office/drawing/2014/main" val="10006"/>
-                  </a:ext>
-                </a:extLst>
               </a:tr>
             </a:tbl>
           </a:graphicData>
@@ -20785,7 +20524,7 @@
           </a:prstGeom>
           <a:extLst>
             <a:ext uri="{C572A759-6A51-4108-AA02-DFA0A04FC94B}">
-              <ma14:wrappingTextBoxFlag xmlns:ma14="http://schemas.microsoft.com/office/mac/drawingml/2011/main" xmlns="" val="0"/>
+              <ma14:wrappingTextBoxFlag xmlns:ma14="http://schemas.microsoft.com/office/mac/drawingml/2011/main" val="0"/>
             </a:ext>
           </a:extLst>
         </p:spPr>
@@ -20803,7 +20542,7 @@
           <a:p>
             <a:pPr algn="r"/>
             <a:fld id="{F7021451-1387-4CA6-816F-3879F97B5CBC}" type="slidenum">
-              <a:rPr lang="en-US" b="0"/>
+              <a:rPr b="0" lang="en-US"/>
               <a:t>22</a:t>
             </a:fld>
             <a:endParaRPr lang="en-US"/>
@@ -20838,11 +20577,9 @@
       <p:sp>
         <p:nvSpPr>
           <p:cNvPr id="2" name="Text 0"/>
-          <p:cNvSpPr>
-            <a:spLocks noGrp="1"/>
-          </p:cNvSpPr>
+          <p:cNvSpPr/>
           <p:nvPr>
-            <p:ph type="title" idx="100" hasCustomPrompt="1"/>
+            <p:ph idx="100" type="title" hasCustomPrompt="1"/>
           </p:nvPr>
         </p:nvSpPr>
         <p:spPr>
@@ -20860,7 +20597,7 @@
           <a:bodyPr wrap="square" lIns="0" tIns="0" rIns="0" bIns="0" rtlCol="0" anchor="ctr"/>
           <a:lstStyle/>
           <a:p>
-            <a:pPr marL="0" indent="0" algn="l">
+            <a:pPr algn="l" indent="0" marL="0">
               <a:buNone/>
             </a:pPr>
             <a:r>
@@ -20878,11 +20615,9 @@
       <p:sp>
         <p:nvSpPr>
           <p:cNvPr id="3" name="Text 0"/>
-          <p:cNvSpPr>
-            <a:spLocks noGrp="1"/>
-          </p:cNvSpPr>
+          <p:cNvSpPr/>
           <p:nvPr>
-            <p:ph type="body" idx="101" hasCustomPrompt="1"/>
+            <p:ph idx="101" type="body" hasCustomPrompt="1"/>
           </p:nvPr>
         </p:nvSpPr>
         <p:spPr>
@@ -20900,7 +20635,7 @@
           <a:bodyPr wrap="square" lIns="0" tIns="0" rIns="0" bIns="0" rtlCol="0" anchor="ctr"/>
           <a:lstStyle/>
           <a:p>
-            <a:pPr marL="0" indent="0" algn="l">
+            <a:pPr algn="l" indent="0" marL="0">
               <a:buNone/>
             </a:pPr>
             <a:r>
@@ -20941,7 +20676,7 @@
             <a:prstDash val="solid"/>
           </a:ln>
           <a:effectLst>
-            <a:outerShdw blurRad="76200" dist="25400" dir="5400000" algn="bl" rotWithShape="0">
+            <a:outerShdw sx="100000" sy="100000" kx="0" ky="0" algn="bl" rotWithShape="0" blurRad="76200" dist="25400" dir="5400000">
               <a:srgbClr val="000000">
                 <a:alpha val="28000"/>
               </a:srgbClr>
@@ -20970,7 +20705,7 @@
           <a:bodyPr wrap="square" lIns="0" tIns="0" rIns="0" bIns="0" rtlCol="0" anchor="t"/>
           <a:lstStyle/>
           <a:p>
-            <a:pPr marL="0" indent="0" algn="l">
+            <a:pPr algn="l" indent="0" marL="0">
               <a:buNone/>
             </a:pPr>
             <a:r>
@@ -21105,7 +20840,7 @@
             <a:prstDash val="solid"/>
           </a:ln>
           <a:effectLst>
-            <a:outerShdw blurRad="76200" dist="25400" dir="5400000" algn="bl" rotWithShape="0">
+            <a:outerShdw sx="100000" sy="100000" kx="0" ky="0" algn="bl" rotWithShape="0" blurRad="76200" dist="25400" dir="5400000">
               <a:srgbClr val="000000">
                 <a:alpha val="28000"/>
               </a:srgbClr>
@@ -21134,7 +20869,7 @@
           <a:bodyPr wrap="square" lIns="0" tIns="0" rIns="0" bIns="0" rtlCol="0" anchor="t"/>
           <a:lstStyle/>
           <a:p>
-            <a:pPr marL="0" indent="0" algn="l">
+            <a:pPr algn="l" indent="0" marL="0">
               <a:buNone/>
             </a:pPr>
             <a:r>
@@ -21251,7 +20986,7 @@
             <a:prstDash val="solid"/>
           </a:ln>
           <a:effectLst>
-            <a:outerShdw blurRad="76200" dist="25400" dir="5400000" algn="bl" rotWithShape="0">
+            <a:outerShdw sx="100000" sy="100000" kx="0" ky="0" algn="bl" rotWithShape="0" blurRad="76200" dist="25400" dir="5400000">
               <a:srgbClr val="000000">
                 <a:alpha val="28000"/>
               </a:srgbClr>
@@ -21280,7 +21015,7 @@
           <a:bodyPr wrap="square" lIns="0" tIns="0" rIns="0" bIns="0" rtlCol="0" anchor="ctr"/>
           <a:lstStyle/>
           <a:p>
-            <a:pPr marL="0" indent="0" algn="l">
+            <a:pPr algn="l" indent="0" marL="0">
               <a:buNone/>
             </a:pPr>
             <a:r>
@@ -21291,6 +21026,9 @@
               </a:rPr>
               <a:t>Что заменит допущения фактами: </a:t>
             </a:r>
+            <a:pPr algn="l" indent="0" marL="0">
+              <a:buNone/>
+            </a:pPr>
             <a:r>
               <a:rPr lang="en-US" sz="1500" dirty="0">
                 <a:solidFill>
@@ -21323,7 +21061,7 @@
           </a:prstGeom>
           <a:extLst>
             <a:ext uri="{C572A759-6A51-4108-AA02-DFA0A04FC94B}">
-              <ma14:wrappingTextBoxFlag xmlns:ma14="http://schemas.microsoft.com/office/mac/drawingml/2011/main" xmlns="" val="0"/>
+              <ma14:wrappingTextBoxFlag xmlns:ma14="http://schemas.microsoft.com/office/mac/drawingml/2011/main" val="0"/>
             </a:ext>
           </a:extLst>
         </p:spPr>
@@ -21341,7 +21079,7 @@
           <a:p>
             <a:pPr algn="r"/>
             <a:fld id="{F7021451-1387-4CA6-816F-3879F97B5CBC}" type="slidenum">
-              <a:rPr lang="en-US" b="0"/>
+              <a:rPr b="0" lang="en-US"/>
               <a:t>23</a:t>
             </a:fld>
             <a:endParaRPr lang="en-US"/>
@@ -21376,11 +21114,9 @@
       <p:sp>
         <p:nvSpPr>
           <p:cNvPr id="2" name="Text 0"/>
-          <p:cNvSpPr>
-            <a:spLocks noGrp="1"/>
-          </p:cNvSpPr>
+          <p:cNvSpPr/>
           <p:nvPr>
-            <p:ph type="title" idx="100" hasCustomPrompt="1"/>
+            <p:ph idx="100" type="title" hasCustomPrompt="1"/>
           </p:nvPr>
         </p:nvSpPr>
         <p:spPr>
@@ -21398,7 +21134,7 @@
           <a:bodyPr wrap="square" lIns="0" tIns="0" rIns="0" bIns="0" rtlCol="0" anchor="ctr"/>
           <a:lstStyle/>
           <a:p>
-            <a:pPr marL="0" indent="0" algn="l">
+            <a:pPr algn="l" indent="0" marL="0">
               <a:buNone/>
             </a:pPr>
             <a:r>
@@ -21416,11 +21152,9 @@
       <p:sp>
         <p:nvSpPr>
           <p:cNvPr id="3" name="Text 0"/>
-          <p:cNvSpPr>
-            <a:spLocks noGrp="1"/>
-          </p:cNvSpPr>
+          <p:cNvSpPr/>
           <p:nvPr>
-            <p:ph type="body" idx="101" hasCustomPrompt="1"/>
+            <p:ph idx="101" type="body" hasCustomPrompt="1"/>
           </p:nvPr>
         </p:nvSpPr>
         <p:spPr>
@@ -21438,7 +21172,7 @@
           <a:bodyPr wrap="square" lIns="0" tIns="0" rIns="0" bIns="0" rtlCol="0" anchor="ctr"/>
           <a:lstStyle/>
           <a:p>
-            <a:pPr marL="0" indent="0" algn="l">
+            <a:pPr algn="l" indent="0" marL="0">
               <a:buNone/>
             </a:pPr>
             <a:r>
@@ -21476,20 +21210,8 @@
             <a:tbl>
               <a:tblPr/>
               <a:tblGrid>
-                <a:gridCol w="3657600">
-                  <a:extLst>
-                    <a:ext uri="{9D8B030D-6E8A-4147-A177-3AD203B41FA5}">
-                      <a16:colId xmlns:a16="http://schemas.microsoft.com/office/drawing/2014/main" val="20000"/>
-                    </a:ext>
-                  </a:extLst>
-                </a:gridCol>
-                <a:gridCol w="7434072">
-                  <a:extLst>
-                    <a:ext uri="{9D8B030D-6E8A-4147-A177-3AD203B41FA5}">
-                      <a16:colId xmlns:a16="http://schemas.microsoft.com/office/drawing/2014/main" val="20001"/>
-                    </a:ext>
-                  </a:extLst>
-                </a:gridCol>
+                <a:gridCol w="3657600"/>
+                <a:gridCol w="7434072"/>
               </a:tblGrid>
               <a:tr h="548640">
                 <a:tc>
@@ -21497,7 +21219,7 @@
                     <a:bodyPr/>
                     <a:lstStyle/>
                     <a:p>
-                      <a:pPr marL="0" indent="0">
+                      <a:pPr indent="0" marL="0">
                         <a:buNone/>
                       </a:pPr>
                       <a:r>
@@ -21565,7 +21287,7 @@
                     <a:bodyPr/>
                     <a:lstStyle/>
                     <a:p>
-                      <a:pPr marL="0" indent="0">
+                      <a:pPr indent="0" marL="0">
                         <a:buNone/>
                       </a:pPr>
                       <a:r>
@@ -21628,11 +21350,6 @@
                     </a:solidFill>
                   </a:tcPr>
                 </a:tc>
-                <a:extLst>
-                  <a:ext uri="{0D108BD9-81ED-4DB2-BD59-A6C34878D82A}">
-                    <a16:rowId xmlns:a16="http://schemas.microsoft.com/office/drawing/2014/main" val="10000"/>
-                  </a:ext>
-                </a:extLst>
               </a:tr>
               <a:tr h="548640">
                 <a:tc>
@@ -21640,7 +21357,7 @@
                     <a:bodyPr/>
                     <a:lstStyle/>
                     <a:p>
-                      <a:pPr marL="0" indent="0">
+                      <a:pPr indent="0" marL="0">
                         <a:buNone/>
                       </a:pPr>
                       <a:r>
@@ -21708,7 +21425,7 @@
                     <a:bodyPr/>
                     <a:lstStyle/>
                     <a:p>
-                      <a:pPr marL="0" indent="0">
+                      <a:pPr indent="0" marL="0">
                         <a:buNone/>
                       </a:pPr>
                       <a:r>
@@ -21771,11 +21488,6 @@
                     </a:solidFill>
                   </a:tcPr>
                 </a:tc>
-                <a:extLst>
-                  <a:ext uri="{0D108BD9-81ED-4DB2-BD59-A6C34878D82A}">
-                    <a16:rowId xmlns:a16="http://schemas.microsoft.com/office/drawing/2014/main" val="10001"/>
-                  </a:ext>
-                </a:extLst>
               </a:tr>
               <a:tr h="548640">
                 <a:tc>
@@ -21783,7 +21495,7 @@
                     <a:bodyPr/>
                     <a:lstStyle/>
                     <a:p>
-                      <a:pPr marL="0" indent="0">
+                      <a:pPr indent="0" marL="0">
                         <a:buNone/>
                       </a:pPr>
                       <a:r>
@@ -21851,7 +21563,7 @@
                     <a:bodyPr/>
                     <a:lstStyle/>
                     <a:p>
-                      <a:pPr marL="0" indent="0">
+                      <a:pPr indent="0" marL="0">
                         <a:buNone/>
                       </a:pPr>
                       <a:r>
@@ -21914,11 +21626,6 @@
                     </a:solidFill>
                   </a:tcPr>
                 </a:tc>
-                <a:extLst>
-                  <a:ext uri="{0D108BD9-81ED-4DB2-BD59-A6C34878D82A}">
-                    <a16:rowId xmlns:a16="http://schemas.microsoft.com/office/drawing/2014/main" val="10002"/>
-                  </a:ext>
-                </a:extLst>
               </a:tr>
               <a:tr h="548640">
                 <a:tc>
@@ -21926,7 +21633,7 @@
                     <a:bodyPr/>
                     <a:lstStyle/>
                     <a:p>
-                      <a:pPr marL="0" indent="0">
+                      <a:pPr indent="0" marL="0">
                         <a:buNone/>
                       </a:pPr>
                       <a:r>
@@ -21994,7 +21701,7 @@
                     <a:bodyPr/>
                     <a:lstStyle/>
                     <a:p>
-                      <a:pPr marL="0" indent="0">
+                      <a:pPr indent="0" marL="0">
                         <a:buNone/>
                       </a:pPr>
                       <a:r>
@@ -22057,11 +21764,6 @@
                     </a:solidFill>
                   </a:tcPr>
                 </a:tc>
-                <a:extLst>
-                  <a:ext uri="{0D108BD9-81ED-4DB2-BD59-A6C34878D82A}">
-                    <a16:rowId xmlns:a16="http://schemas.microsoft.com/office/drawing/2014/main" val="10003"/>
-                  </a:ext>
-                </a:extLst>
               </a:tr>
               <a:tr h="548640">
                 <a:tc>
@@ -22069,7 +21771,7 @@
                     <a:bodyPr/>
                     <a:lstStyle/>
                     <a:p>
-                      <a:pPr marL="0" indent="0">
+                      <a:pPr indent="0" marL="0">
                         <a:buNone/>
                       </a:pPr>
                       <a:r>
@@ -22137,7 +21839,7 @@
                     <a:bodyPr/>
                     <a:lstStyle/>
                     <a:p>
-                      <a:pPr marL="0" indent="0">
+                      <a:pPr indent="0" marL="0">
                         <a:buNone/>
                       </a:pPr>
                       <a:r>
@@ -22200,11 +21902,6 @@
                     </a:solidFill>
                   </a:tcPr>
                 </a:tc>
-                <a:extLst>
-                  <a:ext uri="{0D108BD9-81ED-4DB2-BD59-A6C34878D82A}">
-                    <a16:rowId xmlns:a16="http://schemas.microsoft.com/office/drawing/2014/main" val="10004"/>
-                  </a:ext>
-                </a:extLst>
               </a:tr>
               <a:tr h="548640">
                 <a:tc>
@@ -22212,7 +21909,7 @@
                     <a:bodyPr/>
                     <a:lstStyle/>
                     <a:p>
-                      <a:pPr marL="0" indent="0">
+                      <a:pPr indent="0" marL="0">
                         <a:buNone/>
                       </a:pPr>
                       <a:r>
@@ -22280,7 +21977,7 @@
                     <a:bodyPr/>
                     <a:lstStyle/>
                     <a:p>
-                      <a:pPr marL="0" indent="0">
+                      <a:pPr indent="0" marL="0">
                         <a:buNone/>
                       </a:pPr>
                       <a:r>
@@ -22343,11 +22040,6 @@
                     </a:solidFill>
                   </a:tcPr>
                 </a:tc>
-                <a:extLst>
-                  <a:ext uri="{0D108BD9-81ED-4DB2-BD59-A6C34878D82A}">
-                    <a16:rowId xmlns:a16="http://schemas.microsoft.com/office/drawing/2014/main" val="10005"/>
-                  </a:ext>
-                </a:extLst>
               </a:tr>
               <a:tr h="548640">
                 <a:tc>
@@ -22355,7 +22047,7 @@
                     <a:bodyPr/>
                     <a:lstStyle/>
                     <a:p>
-                      <a:pPr marL="0" indent="0">
+                      <a:pPr indent="0" marL="0">
                         <a:buNone/>
                       </a:pPr>
                       <a:r>
@@ -22423,7 +22115,7 @@
                     <a:bodyPr/>
                     <a:lstStyle/>
                     <a:p>
-                      <a:pPr marL="0" indent="0">
+                      <a:pPr indent="0" marL="0">
                         <a:buNone/>
                       </a:pPr>
                       <a:r>
@@ -22486,11 +22178,6 @@
                     </a:solidFill>
                   </a:tcPr>
                 </a:tc>
-                <a:extLst>
-                  <a:ext uri="{0D108BD9-81ED-4DB2-BD59-A6C34878D82A}">
-                    <a16:rowId xmlns:a16="http://schemas.microsoft.com/office/drawing/2014/main" val="10006"/>
-                  </a:ext>
-                </a:extLst>
               </a:tr>
               <a:tr h="548640">
                 <a:tc>
@@ -22498,7 +22185,7 @@
                     <a:bodyPr/>
                     <a:lstStyle/>
                     <a:p>
-                      <a:pPr marL="0" indent="0">
+                      <a:pPr indent="0" marL="0">
                         <a:buNone/>
                       </a:pPr>
                       <a:r>
@@ -22566,7 +22253,7 @@
                     <a:bodyPr/>
                     <a:lstStyle/>
                     <a:p>
-                      <a:pPr marL="0" indent="0">
+                      <a:pPr indent="0" marL="0">
                         <a:buNone/>
                       </a:pPr>
                       <a:r>
@@ -22629,11 +22316,6 @@
                     </a:solidFill>
                   </a:tcPr>
                 </a:tc>
-                <a:extLst>
-                  <a:ext uri="{0D108BD9-81ED-4DB2-BD59-A6C34878D82A}">
-                    <a16:rowId xmlns:a16="http://schemas.microsoft.com/office/drawing/2014/main" val="10007"/>
-                  </a:ext>
-                </a:extLst>
               </a:tr>
               <a:tr h="548640">
                 <a:tc>
@@ -22641,7 +22323,7 @@
                     <a:bodyPr/>
                     <a:lstStyle/>
                     <a:p>
-                      <a:pPr marL="0" indent="0">
+                      <a:pPr indent="0" marL="0">
                         <a:buNone/>
                       </a:pPr>
                       <a:r>
@@ -22709,7 +22391,7 @@
                     <a:bodyPr/>
                     <a:lstStyle/>
                     <a:p>
-                      <a:pPr marL="0" indent="0">
+                      <a:pPr indent="0" marL="0">
                         <a:buNone/>
                       </a:pPr>
                       <a:r>
@@ -22772,11 +22454,6 @@
                     </a:solidFill>
                   </a:tcPr>
                 </a:tc>
-                <a:extLst>
-                  <a:ext uri="{0D108BD9-81ED-4DB2-BD59-A6C34878D82A}">
-                    <a16:rowId xmlns:a16="http://schemas.microsoft.com/office/drawing/2014/main" val="10008"/>
-                  </a:ext>
-                </a:extLst>
               </a:tr>
             </a:tbl>
           </a:graphicData>
@@ -22784,7 +22461,7 @@
       </p:graphicFrame>
       <p:sp>
         <p:nvSpPr>
-          <p:cNvPr id="4" name="Slide Number Placeholder 0"/>
+          <p:cNvPr id="25" name="Slide Number Placeholder 0"/>
           <p:cNvSpPr>
             <a:spLocks noGrp="1"/>
           </p:cNvSpPr>
@@ -22802,7 +22479,7 @@
           </a:prstGeom>
           <a:extLst>
             <a:ext uri="{C572A759-6A51-4108-AA02-DFA0A04FC94B}">
-              <ma14:wrappingTextBoxFlag xmlns:ma14="http://schemas.microsoft.com/office/mac/drawingml/2011/main" xmlns="" val="0"/>
+              <ma14:wrappingTextBoxFlag xmlns:ma14="http://schemas.microsoft.com/office/mac/drawingml/2011/main" val="0"/>
             </a:ext>
           </a:extLst>
         </p:spPr>
@@ -22820,7 +22497,7 @@
           <a:p>
             <a:pPr algn="r"/>
             <a:fld id="{F7021451-1387-4CA6-816F-3879F97B5CBC}" type="slidenum">
-              <a:rPr lang="en-US" b="0"/>
+              <a:rPr b="0" lang="en-US"/>
               <a:t>24</a:t>
             </a:fld>
             <a:endParaRPr lang="en-US"/>
@@ -22855,11 +22532,9 @@
       <p:sp>
         <p:nvSpPr>
           <p:cNvPr id="2" name="Text 0"/>
-          <p:cNvSpPr>
-            <a:spLocks noGrp="1"/>
-          </p:cNvSpPr>
+          <p:cNvSpPr/>
           <p:nvPr>
-            <p:ph type="title" idx="100" hasCustomPrompt="1"/>
+            <p:ph idx="100" type="title" hasCustomPrompt="1"/>
           </p:nvPr>
         </p:nvSpPr>
         <p:spPr>
@@ -22877,7 +22552,7 @@
           <a:bodyPr wrap="square" lIns="0" tIns="0" rIns="0" bIns="0" rtlCol="0" anchor="ctr"/>
           <a:lstStyle/>
           <a:p>
-            <a:pPr marL="0" indent="0" algn="l">
+            <a:pPr algn="l" indent="0" marL="0">
               <a:buNone/>
             </a:pPr>
             <a:r>
@@ -22895,11 +22570,9 @@
       <p:sp>
         <p:nvSpPr>
           <p:cNvPr id="3" name="Text 0"/>
-          <p:cNvSpPr>
-            <a:spLocks noGrp="1"/>
-          </p:cNvSpPr>
+          <p:cNvSpPr/>
           <p:nvPr>
-            <p:ph type="body" idx="101" hasCustomPrompt="1"/>
+            <p:ph idx="101" type="body" hasCustomPrompt="1"/>
           </p:nvPr>
         </p:nvSpPr>
         <p:spPr>
@@ -22917,7 +22590,7 @@
           <a:bodyPr wrap="square" lIns="0" tIns="0" rIns="0" bIns="0" rtlCol="0" anchor="ctr"/>
           <a:lstStyle/>
           <a:p>
-            <a:pPr marL="0" indent="0" algn="l">
+            <a:pPr algn="l" indent="0" marL="0">
               <a:buNone/>
             </a:pPr>
             <a:r>
@@ -22955,20 +22628,8 @@
             <a:tbl>
               <a:tblPr/>
               <a:tblGrid>
-                <a:gridCol w="3657600">
-                  <a:extLst>
-                    <a:ext uri="{9D8B030D-6E8A-4147-A177-3AD203B41FA5}">
-                      <a16:colId xmlns:a16="http://schemas.microsoft.com/office/drawing/2014/main" val="20000"/>
-                    </a:ext>
-                  </a:extLst>
-                </a:gridCol>
-                <a:gridCol w="7434072">
-                  <a:extLst>
-                    <a:ext uri="{9D8B030D-6E8A-4147-A177-3AD203B41FA5}">
-                      <a16:colId xmlns:a16="http://schemas.microsoft.com/office/drawing/2014/main" val="20001"/>
-                    </a:ext>
-                  </a:extLst>
-                </a:gridCol>
+                <a:gridCol w="3657600"/>
+                <a:gridCol w="7434072"/>
               </a:tblGrid>
               <a:tr h="548640">
                 <a:tc>
@@ -22976,7 +22637,7 @@
                     <a:bodyPr/>
                     <a:lstStyle/>
                     <a:p>
-                      <a:pPr marL="0" indent="0">
+                      <a:pPr indent="0" marL="0">
                         <a:buNone/>
                       </a:pPr>
                       <a:r>
@@ -23044,7 +22705,7 @@
                     <a:bodyPr/>
                     <a:lstStyle/>
                     <a:p>
-                      <a:pPr marL="0" indent="0">
+                      <a:pPr indent="0" marL="0">
                         <a:buNone/>
                       </a:pPr>
                       <a:r>
@@ -23107,11 +22768,6 @@
                     </a:solidFill>
                   </a:tcPr>
                 </a:tc>
-                <a:extLst>
-                  <a:ext uri="{0D108BD9-81ED-4DB2-BD59-A6C34878D82A}">
-                    <a16:rowId xmlns:a16="http://schemas.microsoft.com/office/drawing/2014/main" val="10000"/>
-                  </a:ext>
-                </a:extLst>
               </a:tr>
               <a:tr h="548640">
                 <a:tc>
@@ -23119,7 +22775,7 @@
                     <a:bodyPr/>
                     <a:lstStyle/>
                     <a:p>
-                      <a:pPr marL="0" indent="0">
+                      <a:pPr indent="0" marL="0">
                         <a:buNone/>
                       </a:pPr>
                       <a:r>
@@ -23187,7 +22843,7 @@
                     <a:bodyPr/>
                     <a:lstStyle/>
                     <a:p>
-                      <a:pPr marL="0" indent="0">
+                      <a:pPr indent="0" marL="0">
                         <a:buNone/>
                       </a:pPr>
                       <a:r>
@@ -23250,11 +22906,6 @@
                     </a:solidFill>
                   </a:tcPr>
                 </a:tc>
-                <a:extLst>
-                  <a:ext uri="{0D108BD9-81ED-4DB2-BD59-A6C34878D82A}">
-                    <a16:rowId xmlns:a16="http://schemas.microsoft.com/office/drawing/2014/main" val="10001"/>
-                  </a:ext>
-                </a:extLst>
               </a:tr>
               <a:tr h="548640">
                 <a:tc>
@@ -23262,7 +22913,7 @@
                     <a:bodyPr/>
                     <a:lstStyle/>
                     <a:p>
-                      <a:pPr marL="0" indent="0">
+                      <a:pPr indent="0" marL="0">
                         <a:buNone/>
                       </a:pPr>
                       <a:r>
@@ -23330,7 +22981,7 @@
                     <a:bodyPr/>
                     <a:lstStyle/>
                     <a:p>
-                      <a:pPr marL="0" indent="0">
+                      <a:pPr indent="0" marL="0">
                         <a:buNone/>
                       </a:pPr>
                       <a:r>
@@ -23393,11 +23044,6 @@
                     </a:solidFill>
                   </a:tcPr>
                 </a:tc>
-                <a:extLst>
-                  <a:ext uri="{0D108BD9-81ED-4DB2-BD59-A6C34878D82A}">
-                    <a16:rowId xmlns:a16="http://schemas.microsoft.com/office/drawing/2014/main" val="10002"/>
-                  </a:ext>
-                </a:extLst>
               </a:tr>
               <a:tr h="548640">
                 <a:tc>
@@ -23405,7 +23051,7 @@
                     <a:bodyPr/>
                     <a:lstStyle/>
                     <a:p>
-                      <a:pPr marL="0" indent="0">
+                      <a:pPr indent="0" marL="0">
                         <a:buNone/>
                       </a:pPr>
                       <a:r>
@@ -23473,7 +23119,7 @@
                     <a:bodyPr/>
                     <a:lstStyle/>
                     <a:p>
-                      <a:pPr marL="0" indent="0">
+                      <a:pPr indent="0" marL="0">
                         <a:buNone/>
                       </a:pPr>
                       <a:r>
@@ -23536,11 +23182,6 @@
                     </a:solidFill>
                   </a:tcPr>
                 </a:tc>
-                <a:extLst>
-                  <a:ext uri="{0D108BD9-81ED-4DB2-BD59-A6C34878D82A}">
-                    <a16:rowId xmlns:a16="http://schemas.microsoft.com/office/drawing/2014/main" val="10003"/>
-                  </a:ext>
-                </a:extLst>
               </a:tr>
               <a:tr h="548640">
                 <a:tc>
@@ -23548,7 +23189,7 @@
                     <a:bodyPr/>
                     <a:lstStyle/>
                     <a:p>
-                      <a:pPr marL="0" indent="0">
+                      <a:pPr indent="0" marL="0">
                         <a:buNone/>
                       </a:pPr>
                       <a:r>
@@ -23616,7 +23257,7 @@
                     <a:bodyPr/>
                     <a:lstStyle/>
                     <a:p>
-                      <a:pPr marL="0" indent="0">
+                      <a:pPr indent="0" marL="0">
                         <a:buNone/>
                       </a:pPr>
                       <a:r>
@@ -23679,11 +23320,6 @@
                     </a:solidFill>
                   </a:tcPr>
                 </a:tc>
-                <a:extLst>
-                  <a:ext uri="{0D108BD9-81ED-4DB2-BD59-A6C34878D82A}">
-                    <a16:rowId xmlns:a16="http://schemas.microsoft.com/office/drawing/2014/main" val="10004"/>
-                  </a:ext>
-                </a:extLst>
               </a:tr>
               <a:tr h="548640">
                 <a:tc>
@@ -23691,7 +23327,7 @@
                     <a:bodyPr/>
                     <a:lstStyle/>
                     <a:p>
-                      <a:pPr marL="0" indent="0">
+                      <a:pPr indent="0" marL="0">
                         <a:buNone/>
                       </a:pPr>
                       <a:r>
@@ -23759,7 +23395,7 @@
                     <a:bodyPr/>
                     <a:lstStyle/>
                     <a:p>
-                      <a:pPr marL="0" indent="0">
+                      <a:pPr indent="0" marL="0">
                         <a:buNone/>
                       </a:pPr>
                       <a:r>
@@ -23822,11 +23458,6 @@
                     </a:solidFill>
                   </a:tcPr>
                 </a:tc>
-                <a:extLst>
-                  <a:ext uri="{0D108BD9-81ED-4DB2-BD59-A6C34878D82A}">
-                    <a16:rowId xmlns:a16="http://schemas.microsoft.com/office/drawing/2014/main" val="10005"/>
-                  </a:ext>
-                </a:extLst>
               </a:tr>
               <a:tr h="548640">
                 <a:tc>
@@ -23834,7 +23465,7 @@
                     <a:bodyPr/>
                     <a:lstStyle/>
                     <a:p>
-                      <a:pPr marL="0" indent="0">
+                      <a:pPr indent="0" marL="0">
                         <a:buNone/>
                       </a:pPr>
                       <a:r>
@@ -23902,7 +23533,7 @@
                     <a:bodyPr/>
                     <a:lstStyle/>
                     <a:p>
-                      <a:pPr marL="0" indent="0">
+                      <a:pPr indent="0" marL="0">
                         <a:buNone/>
                       </a:pPr>
                       <a:r>
@@ -23965,11 +23596,6 @@
                     </a:solidFill>
                   </a:tcPr>
                 </a:tc>
-                <a:extLst>
-                  <a:ext uri="{0D108BD9-81ED-4DB2-BD59-A6C34878D82A}">
-                    <a16:rowId xmlns:a16="http://schemas.microsoft.com/office/drawing/2014/main" val="10006"/>
-                  </a:ext>
-                </a:extLst>
               </a:tr>
               <a:tr h="548640">
                 <a:tc>
@@ -23977,7 +23603,7 @@
                     <a:bodyPr/>
                     <a:lstStyle/>
                     <a:p>
-                      <a:pPr marL="0" indent="0">
+                      <a:pPr indent="0" marL="0">
                         <a:buNone/>
                       </a:pPr>
                       <a:r>
@@ -24045,7 +23671,7 @@
                     <a:bodyPr/>
                     <a:lstStyle/>
                     <a:p>
-                      <a:pPr marL="0" indent="0">
+                      <a:pPr indent="0" marL="0">
                         <a:buNone/>
                       </a:pPr>
                       <a:r>
@@ -24108,11 +23734,6 @@
                     </a:solidFill>
                   </a:tcPr>
                 </a:tc>
-                <a:extLst>
-                  <a:ext uri="{0D108BD9-81ED-4DB2-BD59-A6C34878D82A}">
-                    <a16:rowId xmlns:a16="http://schemas.microsoft.com/office/drawing/2014/main" val="10007"/>
-                  </a:ext>
-                </a:extLst>
               </a:tr>
             </a:tbl>
           </a:graphicData>
@@ -24138,7 +23759,7 @@
           </a:prstGeom>
           <a:extLst>
             <a:ext uri="{C572A759-6A51-4108-AA02-DFA0A04FC94B}">
-              <ma14:wrappingTextBoxFlag xmlns:ma14="http://schemas.microsoft.com/office/mac/drawingml/2011/main" xmlns="" val="0"/>
+              <ma14:wrappingTextBoxFlag xmlns:ma14="http://schemas.microsoft.com/office/mac/drawingml/2011/main" val="0"/>
             </a:ext>
           </a:extLst>
         </p:spPr>
@@ -24156,7 +23777,7 @@
           <a:p>
             <a:pPr algn="r"/>
             <a:fld id="{F7021451-1387-4CA6-816F-3879F97B5CBC}" type="slidenum">
-              <a:rPr lang="en-US" b="0"/>
+              <a:rPr b="0" lang="en-US"/>
               <a:t>25</a:t>
             </a:fld>
             <a:endParaRPr lang="en-US"/>
@@ -24191,11 +23812,9 @@
       <p:sp>
         <p:nvSpPr>
           <p:cNvPr id="2" name="Text 0"/>
-          <p:cNvSpPr>
-            <a:spLocks noGrp="1"/>
-          </p:cNvSpPr>
+          <p:cNvSpPr/>
           <p:nvPr>
-            <p:ph type="title" idx="100" hasCustomPrompt="1"/>
+            <p:ph idx="100" type="title" hasCustomPrompt="1"/>
           </p:nvPr>
         </p:nvSpPr>
         <p:spPr>
@@ -24213,7 +23832,7 @@
           <a:bodyPr wrap="square" lIns="0" tIns="0" rIns="0" bIns="0" rtlCol="0" anchor="ctr"/>
           <a:lstStyle/>
           <a:p>
-            <a:pPr marL="0" indent="0" algn="l">
+            <a:pPr algn="l" indent="0" marL="0">
               <a:buNone/>
             </a:pPr>
             <a:r>
@@ -24231,11 +23850,9 @@
       <p:sp>
         <p:nvSpPr>
           <p:cNvPr id="3" name="Text 0"/>
-          <p:cNvSpPr>
-            <a:spLocks noGrp="1"/>
-          </p:cNvSpPr>
+          <p:cNvSpPr/>
           <p:nvPr>
-            <p:ph type="body" idx="101" hasCustomPrompt="1"/>
+            <p:ph idx="101" type="body" hasCustomPrompt="1"/>
           </p:nvPr>
         </p:nvSpPr>
         <p:spPr>
@@ -24253,7 +23870,7 @@
           <a:bodyPr wrap="square" lIns="0" tIns="0" rIns="0" bIns="0" rtlCol="0" anchor="ctr"/>
           <a:lstStyle/>
           <a:p>
-            <a:pPr marL="0" indent="0" algn="l">
+            <a:pPr algn="l" indent="0" marL="0">
               <a:buNone/>
             </a:pPr>
             <a:r>
@@ -24291,27 +23908,9 @@
             <a:tbl>
               <a:tblPr/>
               <a:tblGrid>
-                <a:gridCol w="2926080">
-                  <a:extLst>
-                    <a:ext uri="{9D8B030D-6E8A-4147-A177-3AD203B41FA5}">
-                      <a16:colId xmlns:a16="http://schemas.microsoft.com/office/drawing/2014/main" val="20000"/>
-                    </a:ext>
-                  </a:extLst>
-                </a:gridCol>
-                <a:gridCol w="2377440">
-                  <a:extLst>
-                    <a:ext uri="{9D8B030D-6E8A-4147-A177-3AD203B41FA5}">
-                      <a16:colId xmlns:a16="http://schemas.microsoft.com/office/drawing/2014/main" val="20001"/>
-                    </a:ext>
-                  </a:extLst>
-                </a:gridCol>
-                <a:gridCol w="5788152">
-                  <a:extLst>
-                    <a:ext uri="{9D8B030D-6E8A-4147-A177-3AD203B41FA5}">
-                      <a16:colId xmlns:a16="http://schemas.microsoft.com/office/drawing/2014/main" val="20002"/>
-                    </a:ext>
-                  </a:extLst>
-                </a:gridCol>
+                <a:gridCol w="2926080"/>
+                <a:gridCol w="2377440"/>
+                <a:gridCol w="5788152"/>
               </a:tblGrid>
               <a:tr h="603504">
                 <a:tc>
@@ -24319,7 +23918,7 @@
                     <a:bodyPr/>
                     <a:lstStyle/>
                     <a:p>
-                      <a:pPr marL="0" indent="0">
+                      <a:pPr indent="0" marL="0">
                         <a:buNone/>
                       </a:pPr>
                       <a:r>
@@ -24387,7 +23986,7 @@
                     <a:bodyPr/>
                     <a:lstStyle/>
                     <a:p>
-                      <a:pPr marL="0" indent="0">
+                      <a:pPr indent="0" marL="0">
                         <a:buNone/>
                       </a:pPr>
                       <a:r>
@@ -24455,7 +24054,7 @@
                     <a:bodyPr/>
                     <a:lstStyle/>
                     <a:p>
-                      <a:pPr marL="0" indent="0">
+                      <a:pPr indent="0" marL="0">
                         <a:buNone/>
                       </a:pPr>
                       <a:r>
@@ -24518,11 +24117,6 @@
                     </a:solidFill>
                   </a:tcPr>
                 </a:tc>
-                <a:extLst>
-                  <a:ext uri="{0D108BD9-81ED-4DB2-BD59-A6C34878D82A}">
-                    <a16:rowId xmlns:a16="http://schemas.microsoft.com/office/drawing/2014/main" val="10000"/>
-                  </a:ext>
-                </a:extLst>
               </a:tr>
               <a:tr h="603504">
                 <a:tc>
@@ -24530,7 +24124,7 @@
                     <a:bodyPr/>
                     <a:lstStyle/>
                     <a:p>
-                      <a:pPr marL="0" indent="0">
+                      <a:pPr indent="0" marL="0">
                         <a:buNone/>
                       </a:pPr>
                       <a:r>
@@ -24598,7 +24192,7 @@
                     <a:bodyPr/>
                     <a:lstStyle/>
                     <a:p>
-                      <a:pPr marL="0" indent="0">
+                      <a:pPr indent="0" marL="0">
                         <a:buNone/>
                       </a:pPr>
                       <a:r>
@@ -24666,7 +24260,7 @@
                     <a:bodyPr/>
                     <a:lstStyle/>
                     <a:p>
-                      <a:pPr marL="0" indent="0">
+                      <a:pPr indent="0" marL="0">
                         <a:buNone/>
                       </a:pPr>
                       <a:r>
@@ -24729,11 +24323,6 @@
                     </a:solidFill>
                   </a:tcPr>
                 </a:tc>
-                <a:extLst>
-                  <a:ext uri="{0D108BD9-81ED-4DB2-BD59-A6C34878D82A}">
-                    <a16:rowId xmlns:a16="http://schemas.microsoft.com/office/drawing/2014/main" val="10001"/>
-                  </a:ext>
-                </a:extLst>
               </a:tr>
               <a:tr h="603504">
                 <a:tc>
@@ -24741,7 +24330,7 @@
                     <a:bodyPr/>
                     <a:lstStyle/>
                     <a:p>
-                      <a:pPr marL="0" indent="0">
+                      <a:pPr indent="0" marL="0">
                         <a:buNone/>
                       </a:pPr>
                       <a:r>
@@ -24809,7 +24398,7 @@
                     <a:bodyPr/>
                     <a:lstStyle/>
                     <a:p>
-                      <a:pPr marL="0" indent="0">
+                      <a:pPr indent="0" marL="0">
                         <a:buNone/>
                       </a:pPr>
                       <a:r>
@@ -24877,7 +24466,7 @@
                     <a:bodyPr/>
                     <a:lstStyle/>
                     <a:p>
-                      <a:pPr marL="0" indent="0">
+                      <a:pPr indent="0" marL="0">
                         <a:buNone/>
                       </a:pPr>
                       <a:r>
@@ -24940,11 +24529,6 @@
                     </a:solidFill>
                   </a:tcPr>
                 </a:tc>
-                <a:extLst>
-                  <a:ext uri="{0D108BD9-81ED-4DB2-BD59-A6C34878D82A}">
-                    <a16:rowId xmlns:a16="http://schemas.microsoft.com/office/drawing/2014/main" val="10002"/>
-                  </a:ext>
-                </a:extLst>
               </a:tr>
               <a:tr h="603504">
                 <a:tc>
@@ -24952,7 +24536,7 @@
                     <a:bodyPr/>
                     <a:lstStyle/>
                     <a:p>
-                      <a:pPr marL="0" indent="0">
+                      <a:pPr indent="0" marL="0">
                         <a:buNone/>
                       </a:pPr>
                       <a:r>
@@ -25020,7 +24604,7 @@
                     <a:bodyPr/>
                     <a:lstStyle/>
                     <a:p>
-                      <a:pPr marL="0" indent="0">
+                      <a:pPr indent="0" marL="0">
                         <a:buNone/>
                       </a:pPr>
                       <a:r>
@@ -25088,7 +24672,7 @@
                     <a:bodyPr/>
                     <a:lstStyle/>
                     <a:p>
-                      <a:pPr marL="0" indent="0">
+                      <a:pPr indent="0" marL="0">
                         <a:buNone/>
                       </a:pPr>
                       <a:r>
@@ -25151,11 +24735,6 @@
                     </a:solidFill>
                   </a:tcPr>
                 </a:tc>
-                <a:extLst>
-                  <a:ext uri="{0D108BD9-81ED-4DB2-BD59-A6C34878D82A}">
-                    <a16:rowId xmlns:a16="http://schemas.microsoft.com/office/drawing/2014/main" val="10003"/>
-                  </a:ext>
-                </a:extLst>
               </a:tr>
               <a:tr h="603504">
                 <a:tc>
@@ -25163,7 +24742,7 @@
                     <a:bodyPr/>
                     <a:lstStyle/>
                     <a:p>
-                      <a:pPr marL="0" indent="0">
+                      <a:pPr indent="0" marL="0">
                         <a:buNone/>
                       </a:pPr>
                       <a:r>
@@ -25231,7 +24810,7 @@
                     <a:bodyPr/>
                     <a:lstStyle/>
                     <a:p>
-                      <a:pPr marL="0" indent="0">
+                      <a:pPr indent="0" marL="0">
                         <a:buNone/>
                       </a:pPr>
                       <a:r>
@@ -25299,7 +24878,7 @@
                     <a:bodyPr/>
                     <a:lstStyle/>
                     <a:p>
-                      <a:pPr marL="0" indent="0">
+                      <a:pPr indent="0" marL="0">
                         <a:buNone/>
                       </a:pPr>
                       <a:r>
@@ -25362,11 +24941,6 @@
                     </a:solidFill>
                   </a:tcPr>
                 </a:tc>
-                <a:extLst>
-                  <a:ext uri="{0D108BD9-81ED-4DB2-BD59-A6C34878D82A}">
-                    <a16:rowId xmlns:a16="http://schemas.microsoft.com/office/drawing/2014/main" val="10004"/>
-                  </a:ext>
-                </a:extLst>
               </a:tr>
               <a:tr h="603504">
                 <a:tc>
@@ -25374,7 +24948,7 @@
                     <a:bodyPr/>
                     <a:lstStyle/>
                     <a:p>
-                      <a:pPr marL="0" indent="0">
+                      <a:pPr indent="0" marL="0">
                         <a:buNone/>
                       </a:pPr>
                       <a:r>
@@ -25442,7 +25016,7 @@
                     <a:bodyPr/>
                     <a:lstStyle/>
                     <a:p>
-                      <a:pPr marL="0" indent="0">
+                      <a:pPr indent="0" marL="0">
                         <a:buNone/>
                       </a:pPr>
                       <a:r>
@@ -25510,7 +25084,7 @@
                     <a:bodyPr/>
                     <a:lstStyle/>
                     <a:p>
-                      <a:pPr marL="0" indent="0">
+                      <a:pPr indent="0" marL="0">
                         <a:buNone/>
                       </a:pPr>
                       <a:r>
@@ -25573,11 +25147,6 @@
                     </a:solidFill>
                   </a:tcPr>
                 </a:tc>
-                <a:extLst>
-                  <a:ext uri="{0D108BD9-81ED-4DB2-BD59-A6C34878D82A}">
-                    <a16:rowId xmlns:a16="http://schemas.microsoft.com/office/drawing/2014/main" val="10005"/>
-                  </a:ext>
-                </a:extLst>
               </a:tr>
               <a:tr h="603504">
                 <a:tc>
@@ -25585,7 +25154,7 @@
                     <a:bodyPr/>
                     <a:lstStyle/>
                     <a:p>
-                      <a:pPr marL="0" indent="0">
+                      <a:pPr indent="0" marL="0">
                         <a:buNone/>
                       </a:pPr>
                       <a:r>
@@ -25653,7 +25222,7 @@
                     <a:bodyPr/>
                     <a:lstStyle/>
                     <a:p>
-                      <a:pPr marL="0" indent="0">
+                      <a:pPr indent="0" marL="0">
                         <a:buNone/>
                       </a:pPr>
                       <a:r>
@@ -25721,7 +25290,7 @@
                     <a:bodyPr/>
                     <a:lstStyle/>
                     <a:p>
-                      <a:pPr marL="0" indent="0">
+                      <a:pPr indent="0" marL="0">
                         <a:buNone/>
                       </a:pPr>
                       <a:r>
@@ -25784,11 +25353,6 @@
                     </a:solidFill>
                   </a:tcPr>
                 </a:tc>
-                <a:extLst>
-                  <a:ext uri="{0D108BD9-81ED-4DB2-BD59-A6C34878D82A}">
-                    <a16:rowId xmlns:a16="http://schemas.microsoft.com/office/drawing/2014/main" val="10006"/>
-                  </a:ext>
-                </a:extLst>
               </a:tr>
               <a:tr h="603504">
                 <a:tc>
@@ -25796,7 +25360,7 @@
                     <a:bodyPr/>
                     <a:lstStyle/>
                     <a:p>
-                      <a:pPr marL="0" indent="0">
+                      <a:pPr indent="0" marL="0">
                         <a:buNone/>
                       </a:pPr>
                       <a:r>
@@ -25864,7 +25428,7 @@
                     <a:bodyPr/>
                     <a:lstStyle/>
                     <a:p>
-                      <a:pPr marL="0" indent="0">
+                      <a:pPr indent="0" marL="0">
                         <a:buNone/>
                       </a:pPr>
                       <a:r>
@@ -25932,7 +25496,7 @@
                     <a:bodyPr/>
                     <a:lstStyle/>
                     <a:p>
-                      <a:pPr marL="0" indent="0">
+                      <a:pPr indent="0" marL="0">
                         <a:buNone/>
                       </a:pPr>
                       <a:r>
@@ -25995,11 +25559,6 @@
                     </a:solidFill>
                   </a:tcPr>
                 </a:tc>
-                <a:extLst>
-                  <a:ext uri="{0D108BD9-81ED-4DB2-BD59-A6C34878D82A}">
-                    <a16:rowId xmlns:a16="http://schemas.microsoft.com/office/drawing/2014/main" val="10007"/>
-                  </a:ext>
-                </a:extLst>
               </a:tr>
             </a:tbl>
           </a:graphicData>
@@ -26025,7 +25584,7 @@
           </a:prstGeom>
           <a:extLst>
             <a:ext uri="{C572A759-6A51-4108-AA02-DFA0A04FC94B}">
-              <ma14:wrappingTextBoxFlag xmlns:ma14="http://schemas.microsoft.com/office/mac/drawingml/2011/main" xmlns="" val="0"/>
+              <ma14:wrappingTextBoxFlag xmlns:ma14="http://schemas.microsoft.com/office/mac/drawingml/2011/main" val="0"/>
             </a:ext>
           </a:extLst>
         </p:spPr>
@@ -26043,7 +25602,7 @@
           <a:p>
             <a:pPr algn="r"/>
             <a:fld id="{F7021451-1387-4CA6-816F-3879F97B5CBC}" type="slidenum">
-              <a:rPr lang="en-US" b="0"/>
+              <a:rPr b="0" lang="en-US"/>
               <a:t>26</a:t>
             </a:fld>
             <a:endParaRPr lang="en-US"/>
@@ -26078,11 +25637,9 @@
       <p:sp>
         <p:nvSpPr>
           <p:cNvPr id="2" name="Text 0"/>
-          <p:cNvSpPr>
-            <a:spLocks noGrp="1"/>
-          </p:cNvSpPr>
+          <p:cNvSpPr/>
           <p:nvPr>
-            <p:ph type="title" idx="100" hasCustomPrompt="1"/>
+            <p:ph idx="100" type="title" hasCustomPrompt="1"/>
           </p:nvPr>
         </p:nvSpPr>
         <p:spPr>
@@ -26100,7 +25657,7 @@
           <a:bodyPr wrap="square" lIns="0" tIns="0" rIns="0" bIns="0" rtlCol="0" anchor="ctr"/>
           <a:lstStyle/>
           <a:p>
-            <a:pPr marL="0" indent="0" algn="l">
+            <a:pPr algn="l" indent="0" marL="0">
               <a:buNone/>
             </a:pPr>
             <a:r>
@@ -26118,11 +25675,9 @@
       <p:sp>
         <p:nvSpPr>
           <p:cNvPr id="3" name="Text 0"/>
-          <p:cNvSpPr>
-            <a:spLocks noGrp="1"/>
-          </p:cNvSpPr>
+          <p:cNvSpPr/>
           <p:nvPr>
-            <p:ph type="body" idx="101" hasCustomPrompt="1"/>
+            <p:ph idx="101" type="body" hasCustomPrompt="1"/>
           </p:nvPr>
         </p:nvSpPr>
         <p:spPr>
@@ -26140,7 +25695,7 @@
           <a:bodyPr wrap="square" lIns="0" tIns="0" rIns="0" bIns="0" rtlCol="0" anchor="ctr"/>
           <a:lstStyle/>
           <a:p>
-            <a:pPr marL="0" indent="0" algn="l">
+            <a:pPr algn="l" indent="0" marL="0">
               <a:buNone/>
             </a:pPr>
             <a:r>
@@ -26181,7 +25736,7 @@
             <a:prstDash val="solid"/>
           </a:ln>
           <a:effectLst>
-            <a:outerShdw blurRad="76200" dist="25400" dir="5400000" algn="bl" rotWithShape="0">
+            <a:outerShdw sx="100000" sy="100000" kx="0" ky="0" algn="bl" rotWithShape="0" blurRad="76200" dist="25400" dir="5400000">
               <a:srgbClr val="000000">
                 <a:alpha val="28000"/>
               </a:srgbClr>
@@ -26210,7 +25765,7 @@
           <a:bodyPr wrap="square" lIns="0" tIns="0" rIns="0" bIns="0" rtlCol="0" anchor="t"/>
           <a:lstStyle/>
           <a:p>
-            <a:pPr marL="0" indent="0" algn="l">
+            <a:pPr algn="l" indent="0" marL="0">
               <a:buNone/>
             </a:pPr>
             <a:r>
@@ -26246,7 +25801,7 @@
           <a:bodyPr wrap="square" lIns="0" tIns="0" rIns="0" bIns="0" rtlCol="0" anchor="t"/>
           <a:lstStyle/>
           <a:p>
-            <a:pPr marL="0" indent="0" algn="l">
+            <a:pPr algn="l" indent="0" marL="0">
               <a:buNone/>
             </a:pPr>
             <a:r>
@@ -26363,7 +25918,7 @@
             <a:prstDash val="solid"/>
           </a:ln>
           <a:effectLst>
-            <a:outerShdw blurRad="76200" dist="25400" dir="5400000" algn="bl" rotWithShape="0">
+            <a:outerShdw sx="100000" sy="100000" kx="0" ky="0" algn="bl" rotWithShape="0" blurRad="76200" dist="25400" dir="5400000">
               <a:srgbClr val="000000">
                 <a:alpha val="28000"/>
               </a:srgbClr>
@@ -26392,7 +25947,7 @@
           <a:bodyPr wrap="square" lIns="0" tIns="0" rIns="0" bIns="0" rtlCol="0" anchor="t"/>
           <a:lstStyle/>
           <a:p>
-            <a:pPr marL="0" indent="0" algn="l">
+            <a:pPr algn="l" indent="0" marL="0">
               <a:buNone/>
             </a:pPr>
             <a:r>
@@ -26428,7 +25983,7 @@
           <a:bodyPr wrap="square" lIns="0" tIns="0" rIns="0" bIns="0" rtlCol="0" anchor="t"/>
           <a:lstStyle/>
           <a:p>
-            <a:pPr marL="0" indent="0" algn="l">
+            <a:pPr algn="l" indent="0" marL="0">
               <a:buNone/>
             </a:pPr>
             <a:r>
@@ -26563,7 +26118,7 @@
             <a:prstDash val="solid"/>
           </a:ln>
           <a:effectLst>
-            <a:outerShdw blurRad="76200" dist="25400" dir="5400000" algn="bl" rotWithShape="0">
+            <a:outerShdw sx="100000" sy="100000" kx="0" ky="0" algn="bl" rotWithShape="0" blurRad="76200" dist="25400" dir="5400000">
               <a:srgbClr val="000000">
                 <a:alpha val="28000"/>
               </a:srgbClr>
@@ -26592,7 +26147,7 @@
           <a:bodyPr wrap="square" lIns="0" tIns="0" rIns="0" bIns="0" rtlCol="0" anchor="t"/>
           <a:lstStyle/>
           <a:p>
-            <a:pPr marL="0" indent="0" algn="l">
+            <a:pPr algn="l" indent="0" marL="0">
               <a:buNone/>
             </a:pPr>
             <a:r>
@@ -26628,7 +26183,7 @@
           <a:bodyPr wrap="square" lIns="0" tIns="0" rIns="0" bIns="0" rtlCol="0" anchor="t"/>
           <a:lstStyle/>
           <a:p>
-            <a:pPr marL="0" indent="0" algn="l">
+            <a:pPr algn="l" indent="0" marL="0">
               <a:buNone/>
             </a:pPr>
             <a:r>
@@ -26745,7 +26300,7 @@
             <a:prstDash val="solid"/>
           </a:ln>
           <a:effectLst>
-            <a:outerShdw blurRad="76200" dist="25400" dir="5400000" algn="bl" rotWithShape="0">
+            <a:outerShdw sx="100000" sy="100000" kx="0" ky="0" algn="bl" rotWithShape="0" blurRad="76200" dist="25400" dir="5400000">
               <a:srgbClr val="000000">
                 <a:alpha val="28000"/>
               </a:srgbClr>
@@ -26774,7 +26329,7 @@
           <a:bodyPr wrap="square" lIns="0" tIns="0" rIns="0" bIns="0" rtlCol="0" anchor="t"/>
           <a:lstStyle/>
           <a:p>
-            <a:pPr marL="0" indent="0" algn="l">
+            <a:pPr algn="l" indent="0" marL="0">
               <a:buNone/>
             </a:pPr>
             <a:r>
@@ -26810,7 +26365,7 @@
           <a:bodyPr wrap="square" lIns="0" tIns="0" rIns="0" bIns="0" rtlCol="0" anchor="t"/>
           <a:lstStyle/>
           <a:p>
-            <a:pPr marL="0" indent="0" algn="l">
+            <a:pPr algn="l" indent="0" marL="0">
               <a:buNone/>
             </a:pPr>
             <a:r>
@@ -26927,7 +26482,7 @@
             <a:prstDash val="solid"/>
           </a:ln>
           <a:effectLst>
-            <a:outerShdw blurRad="76200" dist="25400" dir="5400000" algn="bl" rotWithShape="0">
+            <a:outerShdw sx="100000" sy="100000" kx="0" ky="0" algn="bl" rotWithShape="0" blurRad="76200" dist="25400" dir="5400000">
               <a:srgbClr val="000000">
                 <a:alpha val="28000"/>
               </a:srgbClr>
@@ -26956,7 +26511,7 @@
           <a:bodyPr wrap="square" lIns="0" tIns="0" rIns="0" bIns="0" rtlCol="0" anchor="ctr"/>
           <a:lstStyle/>
           <a:p>
-            <a:pPr marL="0" indent="0" algn="l">
+            <a:pPr algn="l" indent="0" marL="0">
               <a:buNone/>
             </a:pPr>
             <a:r>
@@ -26991,7 +26546,7 @@
           </a:prstGeom>
           <a:extLst>
             <a:ext uri="{C572A759-6A51-4108-AA02-DFA0A04FC94B}">
-              <ma14:wrappingTextBoxFlag xmlns:ma14="http://schemas.microsoft.com/office/mac/drawingml/2011/main" xmlns="" val="0"/>
+              <ma14:wrappingTextBoxFlag xmlns:ma14="http://schemas.microsoft.com/office/mac/drawingml/2011/main" val="0"/>
             </a:ext>
           </a:extLst>
         </p:spPr>
@@ -27009,7 +26564,7 @@
           <a:p>
             <a:pPr algn="r"/>
             <a:fld id="{F7021451-1387-4CA6-816F-3879F97B5CBC}" type="slidenum">
-              <a:rPr lang="en-US" b="0"/>
+              <a:rPr b="0" lang="en-US"/>
               <a:t>27</a:t>
             </a:fld>
             <a:endParaRPr lang="en-US"/>
@@ -27044,11 +26599,9 @@
       <p:sp>
         <p:nvSpPr>
           <p:cNvPr id="2" name="Text 0"/>
-          <p:cNvSpPr>
-            <a:spLocks noGrp="1"/>
-          </p:cNvSpPr>
+          <p:cNvSpPr/>
           <p:nvPr>
-            <p:ph type="title" idx="100" hasCustomPrompt="1"/>
+            <p:ph idx="100" type="title" hasCustomPrompt="1"/>
           </p:nvPr>
         </p:nvSpPr>
         <p:spPr>
@@ -27066,7 +26619,7 @@
           <a:bodyPr wrap="square" lIns="0" tIns="0" rIns="0" bIns="0" rtlCol="0" anchor="ctr"/>
           <a:lstStyle/>
           <a:p>
-            <a:pPr marL="0" indent="0" algn="l">
+            <a:pPr algn="l" indent="0" marL="0">
               <a:buNone/>
             </a:pPr>
             <a:r>
@@ -27084,11 +26637,9 @@
       <p:sp>
         <p:nvSpPr>
           <p:cNvPr id="3" name="Text 0"/>
-          <p:cNvSpPr>
-            <a:spLocks noGrp="1"/>
-          </p:cNvSpPr>
+          <p:cNvSpPr/>
           <p:nvPr>
-            <p:ph type="body" idx="101" hasCustomPrompt="1"/>
+            <p:ph idx="101" type="body" hasCustomPrompt="1"/>
           </p:nvPr>
         </p:nvSpPr>
         <p:spPr>
@@ -27106,7 +26657,7 @@
           <a:bodyPr wrap="square" lIns="0" tIns="0" rIns="0" bIns="0" rtlCol="0" anchor="ctr"/>
           <a:lstStyle/>
           <a:p>
-            <a:pPr marL="0" indent="0" algn="l">
+            <a:pPr algn="l" indent="0" marL="0">
               <a:buNone/>
             </a:pPr>
             <a:r>
@@ -27147,7 +26698,7 @@
             <a:prstDash val="solid"/>
           </a:ln>
           <a:effectLst>
-            <a:outerShdw blurRad="76200" dist="25400" dir="5400000" algn="bl" rotWithShape="0">
+            <a:outerShdw sx="100000" sy="100000" kx="0" ky="0" algn="bl" rotWithShape="0" blurRad="76200" dist="25400" dir="5400000">
               <a:srgbClr val="000000">
                 <a:alpha val="28000"/>
               </a:srgbClr>
@@ -27176,7 +26727,7 @@
           <a:bodyPr wrap="square" lIns="0" tIns="0" rIns="0" bIns="0" rtlCol="0" anchor="t"/>
           <a:lstStyle/>
           <a:p>
-            <a:pPr marL="0" indent="0" algn="l">
+            <a:pPr algn="l" indent="0" marL="0">
               <a:buNone/>
             </a:pPr>
             <a:r>
@@ -27212,7 +26763,7 @@
           <a:bodyPr wrap="square" lIns="0" tIns="0" rIns="0" bIns="0" rtlCol="0" anchor="t"/>
           <a:lstStyle/>
           <a:p>
-            <a:pPr marL="0" indent="0" algn="l">
+            <a:pPr algn="l" indent="0" marL="0">
               <a:buNone/>
             </a:pPr>
             <a:r>
@@ -27229,7 +26780,7 @@
       </p:sp>
       <p:pic>
         <p:nvPicPr>
-          <p:cNvPr id="7" name="arrow">
+          <p:cNvPr id="7" name="arrow" descr="">
             <a:extLst>
               <a:ext uri="{C183D7F6-B498-43B3-948B-1728B52AA6E4}">
                 <adec:decorative xmlns:adec="http://schemas.microsoft.com/office/drawing/2017/decorative" val="1"/>
@@ -27242,7 +26793,7 @@
           <p:nvPr/>
         </p:nvPicPr>
         <p:blipFill>
-          <a:blip r:embed="rId3"/>
+          <a:blip r:embed="rId1"/>
           <a:stretch>
             <a:fillRect/>
           </a:stretch>
@@ -27283,7 +26834,7 @@
             <a:prstDash val="solid"/>
           </a:ln>
           <a:effectLst>
-            <a:outerShdw blurRad="76200" dist="25400" dir="5400000" algn="bl" rotWithShape="0">
+            <a:outerShdw sx="100000" sy="100000" kx="0" ky="0" algn="bl" rotWithShape="0" blurRad="76200" dist="25400" dir="5400000">
               <a:srgbClr val="000000">
                 <a:alpha val="28000"/>
               </a:srgbClr>
@@ -27312,7 +26863,7 @@
           <a:bodyPr wrap="square" lIns="0" tIns="0" rIns="0" bIns="0" rtlCol="0" anchor="t"/>
           <a:lstStyle/>
           <a:p>
-            <a:pPr marL="0" indent="0" algn="l">
+            <a:pPr algn="l" indent="0" marL="0">
               <a:buNone/>
             </a:pPr>
             <a:r>
@@ -27348,7 +26899,7 @@
           <a:bodyPr wrap="square" lIns="0" tIns="0" rIns="0" bIns="0" rtlCol="0" anchor="t"/>
           <a:lstStyle/>
           <a:p>
-            <a:pPr marL="0" indent="0" algn="l">
+            <a:pPr algn="l" indent="0" marL="0">
               <a:buNone/>
             </a:pPr>
             <a:r>
@@ -27365,7 +26916,7 @@
       </p:sp>
       <p:pic>
         <p:nvPicPr>
-          <p:cNvPr id="11" name="arrow">
+          <p:cNvPr id="11" name="arrow" descr="">
             <a:extLst>
               <a:ext uri="{C183D7F6-B498-43B3-948B-1728B52AA6E4}">
                 <adec:decorative xmlns:adec="http://schemas.microsoft.com/office/drawing/2017/decorative" val="1"/>
@@ -27378,7 +26929,7 @@
           <p:nvPr/>
         </p:nvPicPr>
         <p:blipFill>
-          <a:blip r:embed="rId3"/>
+          <a:blip r:embed="rId2"/>
           <a:stretch>
             <a:fillRect/>
           </a:stretch>
@@ -27419,7 +26970,7 @@
             <a:prstDash val="solid"/>
           </a:ln>
           <a:effectLst>
-            <a:outerShdw blurRad="76200" dist="25400" dir="5400000" algn="bl" rotWithShape="0">
+            <a:outerShdw sx="100000" sy="100000" kx="0" ky="0" algn="bl" rotWithShape="0" blurRad="76200" dist="25400" dir="5400000">
               <a:srgbClr val="000000">
                 <a:alpha val="28000"/>
               </a:srgbClr>
@@ -27448,7 +26999,7 @@
           <a:bodyPr wrap="square" lIns="0" tIns="0" rIns="0" bIns="0" rtlCol="0" anchor="t"/>
           <a:lstStyle/>
           <a:p>
-            <a:pPr marL="0" indent="0" algn="l">
+            <a:pPr algn="l" indent="0" marL="0">
               <a:buNone/>
             </a:pPr>
             <a:r>
@@ -27484,7 +27035,7 @@
           <a:bodyPr wrap="square" lIns="0" tIns="0" rIns="0" bIns="0" rtlCol="0" anchor="t"/>
           <a:lstStyle/>
           <a:p>
-            <a:pPr marL="0" indent="0" algn="l">
+            <a:pPr algn="l" indent="0" marL="0">
               <a:buNone/>
             </a:pPr>
             <a:r>
@@ -27501,7 +27052,7 @@
       </p:sp>
       <p:pic>
         <p:nvPicPr>
-          <p:cNvPr id="15" name="arrow">
+          <p:cNvPr id="15" name="arrow" descr="">
             <a:extLst>
               <a:ext uri="{C183D7F6-B498-43B3-948B-1728B52AA6E4}">
                 <adec:decorative xmlns:adec="http://schemas.microsoft.com/office/drawing/2017/decorative" val="1"/>
@@ -27555,7 +27106,7 @@
             <a:prstDash val="solid"/>
           </a:ln>
           <a:effectLst>
-            <a:outerShdw blurRad="76200" dist="25400" dir="5400000" algn="bl" rotWithShape="0">
+            <a:outerShdw sx="100000" sy="100000" kx="0" ky="0" algn="bl" rotWithShape="0" blurRad="76200" dist="25400" dir="5400000">
               <a:srgbClr val="000000">
                 <a:alpha val="28000"/>
               </a:srgbClr>
@@ -27584,7 +27135,7 @@
           <a:bodyPr wrap="square" lIns="0" tIns="0" rIns="0" bIns="0" rtlCol="0" anchor="t"/>
           <a:lstStyle/>
           <a:p>
-            <a:pPr marL="0" indent="0" algn="l">
+            <a:pPr algn="l" indent="0" marL="0">
               <a:buNone/>
             </a:pPr>
             <a:r>
@@ -27620,7 +27171,7 @@
           <a:bodyPr wrap="square" lIns="0" tIns="0" rIns="0" bIns="0" rtlCol="0" anchor="t"/>
           <a:lstStyle/>
           <a:p>
-            <a:pPr marL="0" indent="0" algn="l">
+            <a:pPr algn="l" indent="0" marL="0">
               <a:buNone/>
             </a:pPr>
             <a:r>
@@ -27637,7 +27188,7 @@
       </p:sp>
       <p:pic>
         <p:nvPicPr>
-          <p:cNvPr id="19" name="arrow">
+          <p:cNvPr id="19" name="arrow" descr="">
             <a:extLst>
               <a:ext uri="{C183D7F6-B498-43B3-948B-1728B52AA6E4}">
                 <adec:decorative xmlns:adec="http://schemas.microsoft.com/office/drawing/2017/decorative" val="1"/>
@@ -27650,7 +27201,7 @@
           <p:nvPr/>
         </p:nvPicPr>
         <p:blipFill>
-          <a:blip r:embed="rId3"/>
+          <a:blip r:embed="rId4"/>
           <a:stretch>
             <a:fillRect/>
           </a:stretch>
@@ -27691,7 +27242,7 @@
             <a:prstDash val="solid"/>
           </a:ln>
           <a:effectLst>
-            <a:outerShdw blurRad="76200" dist="25400" dir="5400000" algn="bl" rotWithShape="0">
+            <a:outerShdw sx="100000" sy="100000" kx="0" ky="0" algn="bl" rotWithShape="0" blurRad="76200" dist="25400" dir="5400000">
               <a:srgbClr val="000000">
                 <a:alpha val="28000"/>
               </a:srgbClr>
@@ -27720,7 +27271,7 @@
           <a:bodyPr wrap="square" lIns="0" tIns="0" rIns="0" bIns="0" rtlCol="0" anchor="t"/>
           <a:lstStyle/>
           <a:p>
-            <a:pPr marL="0" indent="0" algn="l">
+            <a:pPr algn="l" indent="0" marL="0">
               <a:buNone/>
             </a:pPr>
             <a:r>
@@ -27756,7 +27307,7 @@
           <a:bodyPr wrap="square" lIns="0" tIns="0" rIns="0" bIns="0" rtlCol="0" anchor="t"/>
           <a:lstStyle/>
           <a:p>
-            <a:pPr marL="0" indent="0" algn="l">
+            <a:pPr algn="l" indent="0" marL="0">
               <a:buNone/>
             </a:pPr>
             <a:r>
@@ -27797,7 +27348,7 @@
             <a:prstDash val="solid"/>
           </a:ln>
           <a:effectLst>
-            <a:outerShdw blurRad="76200" dist="25400" dir="5400000" algn="bl" rotWithShape="0">
+            <a:outerShdw sx="100000" sy="100000" kx="0" ky="0" algn="bl" rotWithShape="0" blurRad="76200" dist="25400" dir="5400000">
               <a:srgbClr val="000000">
                 <a:alpha val="28000"/>
               </a:srgbClr>
@@ -27832,7 +27383,7 @@
       </p:sp>
       <p:pic>
         <p:nvPicPr>
-          <p:cNvPr id="25" name="icon">
+          <p:cNvPr id="25" name="icon" descr="">
             <a:extLst>
               <a:ext uri="{C183D7F6-B498-43B3-948B-1728B52AA6E4}">
                 <adec:decorative xmlns:adec="http://schemas.microsoft.com/office/drawing/2017/decorative" val="1"/>
@@ -27845,7 +27396,7 @@
           <p:nvPr/>
         </p:nvPicPr>
         <p:blipFill>
-          <a:blip r:embed="rId4"/>
+          <a:blip r:embed="rId5"/>
           <a:stretch>
             <a:fillRect/>
           </a:stretch>
@@ -27881,7 +27432,7 @@
           <a:bodyPr wrap="square" lIns="0" tIns="0" rIns="0" bIns="0" rtlCol="0" anchor="t"/>
           <a:lstStyle/>
           <a:p>
-            <a:pPr marL="0" indent="0" algn="l">
+            <a:pPr algn="l" indent="0" marL="0">
               <a:buNone/>
             </a:pPr>
             <a:r>
@@ -27998,7 +27549,7 @@
             <a:prstDash val="solid"/>
           </a:ln>
           <a:effectLst>
-            <a:outerShdw blurRad="76200" dist="25400" dir="5400000" algn="bl" rotWithShape="0">
+            <a:outerShdw sx="100000" sy="100000" kx="0" ky="0" algn="bl" rotWithShape="0" blurRad="76200" dist="25400" dir="5400000">
               <a:srgbClr val="000000">
                 <a:alpha val="28000"/>
               </a:srgbClr>
@@ -28033,7 +27584,7 @@
       </p:sp>
       <p:pic>
         <p:nvPicPr>
-          <p:cNvPr id="30" name="icon">
+          <p:cNvPr id="30" name="icon" descr="">
             <a:extLst>
               <a:ext uri="{C183D7F6-B498-43B3-948B-1728B52AA6E4}">
                 <adec:decorative xmlns:adec="http://schemas.microsoft.com/office/drawing/2017/decorative" val="1"/>
@@ -28046,7 +27597,7 @@
           <p:nvPr/>
         </p:nvPicPr>
         <p:blipFill>
-          <a:blip r:embed="rId5"/>
+          <a:blip r:embed="rId6"/>
           <a:stretch>
             <a:fillRect/>
           </a:stretch>
@@ -28082,7 +27633,7 @@
           <a:bodyPr wrap="square" lIns="0" tIns="0" rIns="0" bIns="0" rtlCol="0" anchor="t"/>
           <a:lstStyle/>
           <a:p>
-            <a:pPr marL="0" indent="0" algn="l">
+            <a:pPr algn="l" indent="0" marL="0">
               <a:buNone/>
             </a:pPr>
             <a:r>
@@ -28118,7 +27669,7 @@
           <a:bodyPr wrap="square" lIns="0" tIns="0" rIns="0" bIns="0" rtlCol="0" anchor="t"/>
           <a:lstStyle/>
           <a:p>
-            <a:pPr marL="0" indent="0" algn="l">
+            <a:pPr algn="l" indent="0" marL="0">
               <a:buNone/>
             </a:pPr>
             <a:r>
@@ -28193,7 +27744,7 @@
       </p:sp>
       <p:sp>
         <p:nvSpPr>
-          <p:cNvPr id="34" name="Slide Number Placeholder 0"/>
+          <p:cNvPr id="25" name="Slide Number Placeholder 0"/>
           <p:cNvSpPr>
             <a:spLocks noGrp="1"/>
           </p:cNvSpPr>
@@ -28211,7 +27762,7 @@
           </a:prstGeom>
           <a:extLst>
             <a:ext uri="{C572A759-6A51-4108-AA02-DFA0A04FC94B}">
-              <ma14:wrappingTextBoxFlag xmlns:ma14="http://schemas.microsoft.com/office/mac/drawingml/2011/main" xmlns="" val="0"/>
+              <ma14:wrappingTextBoxFlag xmlns:ma14="http://schemas.microsoft.com/office/mac/drawingml/2011/main" val="0"/>
             </a:ext>
           </a:extLst>
         </p:spPr>
@@ -28229,7 +27780,7 @@
           <a:p>
             <a:pPr algn="r"/>
             <a:fld id="{F7021451-1387-4CA6-816F-3879F97B5CBC}" type="slidenum">
-              <a:rPr lang="en-US" b="0"/>
+              <a:rPr b="0" lang="en-US"/>
               <a:t>3</a:t>
             </a:fld>
             <a:endParaRPr lang="en-US"/>
@@ -28264,11 +27815,9 @@
       <p:sp>
         <p:nvSpPr>
           <p:cNvPr id="2" name="Text 0"/>
-          <p:cNvSpPr>
-            <a:spLocks noGrp="1"/>
-          </p:cNvSpPr>
+          <p:cNvSpPr/>
           <p:nvPr>
-            <p:ph type="title" idx="100" hasCustomPrompt="1"/>
+            <p:ph idx="100" type="title" hasCustomPrompt="1"/>
           </p:nvPr>
         </p:nvSpPr>
         <p:spPr>
@@ -28286,7 +27835,7 @@
           <a:bodyPr wrap="square" lIns="0" tIns="0" rIns="0" bIns="0" rtlCol="0" anchor="ctr"/>
           <a:lstStyle/>
           <a:p>
-            <a:pPr marL="0" indent="0" algn="l">
+            <a:pPr algn="l" indent="0" marL="0">
               <a:buNone/>
             </a:pPr>
             <a:r>
@@ -28304,11 +27853,9 @@
       <p:sp>
         <p:nvSpPr>
           <p:cNvPr id="3" name="Text 0"/>
-          <p:cNvSpPr>
-            <a:spLocks noGrp="1"/>
-          </p:cNvSpPr>
+          <p:cNvSpPr/>
           <p:nvPr>
-            <p:ph type="body" idx="101" hasCustomPrompt="1"/>
+            <p:ph idx="101" type="body" hasCustomPrompt="1"/>
           </p:nvPr>
         </p:nvSpPr>
         <p:spPr>
@@ -28326,7 +27873,7 @@
           <a:bodyPr wrap="square" lIns="0" tIns="0" rIns="0" bIns="0" rtlCol="0" anchor="ctr"/>
           <a:lstStyle/>
           <a:p>
-            <a:pPr marL="0" indent="0" algn="l">
+            <a:pPr algn="l" indent="0" marL="0">
               <a:buNone/>
             </a:pPr>
             <a:r>
@@ -28367,7 +27914,7 @@
             <a:prstDash val="solid"/>
           </a:ln>
           <a:effectLst>
-            <a:outerShdw blurRad="76200" dist="25400" dir="5400000" algn="bl" rotWithShape="0">
+            <a:outerShdw sx="100000" sy="100000" kx="0" ky="0" algn="bl" rotWithShape="0" blurRad="76200" dist="25400" dir="5400000">
               <a:srgbClr val="000000">
                 <a:alpha val="28000"/>
               </a:srgbClr>
@@ -28396,7 +27943,7 @@
           <a:bodyPr wrap="square" lIns="0" tIns="0" rIns="0" bIns="0" rtlCol="0" anchor="ctr"/>
           <a:lstStyle/>
           <a:p>
-            <a:pPr marL="0" indent="0" algn="ctr">
+            <a:pPr algn="ctr" indent="0" marL="0">
               <a:buNone/>
             </a:pPr>
             <a:r>
@@ -28407,6 +27954,9 @@
               </a:rPr>
               <a:t>Вправе ли </a:t>
             </a:r>
+            <a:pPr algn="ctr" indent="0" marL="0">
+              <a:buNone/>
+            </a:pPr>
             <a:r>
               <a:rPr lang="en-US" sz="2400" b="1" dirty="0">
                 <a:solidFill>
@@ -28415,6 +27965,9 @@
               </a:rPr>
               <a:t>X</a:t>
             </a:r>
+            <a:pPr algn="ctr" indent="0" marL="0">
+              <a:buNone/>
+            </a:pPr>
             <a:r>
               <a:rPr lang="en-US" sz="2400" b="1" dirty="0">
                 <a:solidFill>
@@ -28423,6 +27976,9 @@
               </a:rPr>
               <a:t> совершить операцию </a:t>
             </a:r>
+            <a:pPr algn="ctr" indent="0" marL="0">
+              <a:buNone/>
+            </a:pPr>
             <a:r>
               <a:rPr lang="en-US" sz="2400" b="1" dirty="0">
                 <a:solidFill>
@@ -28431,6 +27987,9 @@
               </a:rPr>
               <a:t>O</a:t>
             </a:r>
+            <a:pPr algn="ctr" indent="0" marL="0">
+              <a:buNone/>
+            </a:pPr>
             <a:r>
               <a:rPr lang="en-US" sz="2400" b="1" dirty="0">
                 <a:solidFill>
@@ -28439,6 +27998,9 @@
               </a:rPr>
               <a:t> от имени компании </a:t>
             </a:r>
+            <a:pPr algn="ctr" indent="0" marL="0">
+              <a:buNone/>
+            </a:pPr>
             <a:r>
               <a:rPr lang="en-US" sz="2400" b="1" dirty="0">
                 <a:solidFill>
@@ -28447,6 +28009,9 @@
               </a:rPr>
               <a:t>Y</a:t>
             </a:r>
+            <a:pPr algn="ctr" indent="0" marL="0">
+              <a:buNone/>
+            </a:pPr>
             <a:r>
               <a:rPr lang="en-US" sz="2400" b="1" dirty="0">
                 <a:solidFill>
@@ -28455,6 +28020,9 @@
               </a:rPr>
               <a:t> на дату </a:t>
             </a:r>
+            <a:pPr algn="ctr" indent="0" marL="0">
+              <a:buNone/>
+            </a:pPr>
             <a:r>
               <a:rPr lang="en-US" sz="2400" b="1" dirty="0">
                 <a:solidFill>
@@ -28463,6 +28031,9 @@
               </a:rPr>
               <a:t>t</a:t>
             </a:r>
+            <a:pPr algn="ctr" indent="0" marL="0">
+              <a:buNone/>
+            </a:pPr>
             <a:r>
               <a:rPr lang="en-US" sz="2400" b="1" dirty="0">
                 <a:solidFill>
@@ -28501,7 +28072,7 @@
             <a:prstDash val="solid"/>
           </a:ln>
           <a:effectLst>
-            <a:outerShdw blurRad="76200" dist="25400" dir="5400000" algn="bl" rotWithShape="0">
+            <a:outerShdw sx="100000" sy="100000" kx="0" ky="0" algn="bl" rotWithShape="0" blurRad="76200" dist="25400" dir="5400000">
               <a:srgbClr val="000000">
                 <a:alpha val="28000"/>
               </a:srgbClr>
@@ -28557,7 +28128,7 @@
           <a:bodyPr wrap="square" lIns="0" tIns="0" rIns="0" bIns="0" rtlCol="0" anchor="ctr"/>
           <a:lstStyle/>
           <a:p>
-            <a:pPr marL="0" indent="0" algn="ctr">
+            <a:pPr algn="ctr" indent="0" marL="0">
               <a:buNone/>
             </a:pPr>
             <a:r>
@@ -28599,7 +28170,7 @@
       </p:sp>
       <p:pic>
         <p:nvPicPr>
-          <p:cNvPr id="10" name="icon">
+          <p:cNvPr id="10" name="icon" descr="">
             <a:extLst>
               <a:ext uri="{C183D7F6-B498-43B3-948B-1728B52AA6E4}">
                 <adec:decorative xmlns:adec="http://schemas.microsoft.com/office/drawing/2017/decorative" val="1"/>
@@ -28612,7 +28183,7 @@
           <p:nvPr/>
         </p:nvPicPr>
         <p:blipFill>
-          <a:blip r:embed="rId3"/>
+          <a:blip r:embed="rId1"/>
           <a:stretch>
             <a:fillRect/>
           </a:stretch>
@@ -28648,7 +28219,7 @@
           <a:bodyPr wrap="square" lIns="0" tIns="0" rIns="0" bIns="0" rtlCol="0" anchor="ctr"/>
           <a:lstStyle/>
           <a:p>
-            <a:pPr marL="0" indent="0" algn="l">
+            <a:pPr algn="l" indent="0" marL="0">
               <a:buNone/>
             </a:pPr>
             <a:r>
@@ -28684,7 +28255,7 @@
           <a:bodyPr wrap="square" lIns="0" tIns="0" rIns="0" bIns="0" rtlCol="0" anchor="t"/>
           <a:lstStyle/>
           <a:p>
-            <a:pPr marL="0" indent="0" algn="l">
+            <a:pPr algn="l" indent="0" marL="0">
               <a:buNone/>
             </a:pPr>
             <a:r>
@@ -28725,7 +28296,7 @@
             <a:prstDash val="solid"/>
           </a:ln>
           <a:effectLst>
-            <a:outerShdw blurRad="76200" dist="25400" dir="5400000" algn="bl" rotWithShape="0">
+            <a:outerShdw sx="100000" sy="100000" kx="0" ky="0" algn="bl" rotWithShape="0" blurRad="76200" dist="25400" dir="5400000">
               <a:srgbClr val="000000">
                 <a:alpha val="28000"/>
               </a:srgbClr>
@@ -28781,7 +28352,7 @@
           <a:bodyPr wrap="square" lIns="0" tIns="0" rIns="0" bIns="0" rtlCol="0" anchor="ctr"/>
           <a:lstStyle/>
           <a:p>
-            <a:pPr marL="0" indent="0" algn="ctr">
+            <a:pPr algn="ctr" indent="0" marL="0">
               <a:buNone/>
             </a:pPr>
             <a:r>
@@ -28823,7 +28394,7 @@
       </p:sp>
       <p:pic>
         <p:nvPicPr>
-          <p:cNvPr id="17" name="icon">
+          <p:cNvPr id="17" name="icon" descr="">
             <a:extLst>
               <a:ext uri="{C183D7F6-B498-43B3-948B-1728B52AA6E4}">
                 <adec:decorative xmlns:adec="http://schemas.microsoft.com/office/drawing/2017/decorative" val="1"/>
@@ -28836,7 +28407,7 @@
           <p:nvPr/>
         </p:nvPicPr>
         <p:blipFill>
-          <a:blip r:embed="rId4"/>
+          <a:blip r:embed="rId2"/>
           <a:stretch>
             <a:fillRect/>
           </a:stretch>
@@ -28872,7 +28443,7 @@
           <a:bodyPr wrap="square" lIns="0" tIns="0" rIns="0" bIns="0" rtlCol="0" anchor="ctr"/>
           <a:lstStyle/>
           <a:p>
-            <a:pPr marL="0" indent="0" algn="l">
+            <a:pPr algn="l" indent="0" marL="0">
               <a:buNone/>
             </a:pPr>
             <a:r>
@@ -28908,7 +28479,7 @@
           <a:bodyPr wrap="square" lIns="0" tIns="0" rIns="0" bIns="0" rtlCol="0" anchor="t"/>
           <a:lstStyle/>
           <a:p>
-            <a:pPr marL="0" indent="0" algn="l">
+            <a:pPr algn="l" indent="0" marL="0">
               <a:buNone/>
             </a:pPr>
             <a:r>
@@ -28949,7 +28520,7 @@
             <a:prstDash val="solid"/>
           </a:ln>
           <a:effectLst>
-            <a:outerShdw blurRad="76200" dist="25400" dir="5400000" algn="bl" rotWithShape="0">
+            <a:outerShdw sx="100000" sy="100000" kx="0" ky="0" algn="bl" rotWithShape="0" blurRad="76200" dist="25400" dir="5400000">
               <a:srgbClr val="000000">
                 <a:alpha val="28000"/>
               </a:srgbClr>
@@ -29005,7 +28576,7 @@
           <a:bodyPr wrap="square" lIns="0" tIns="0" rIns="0" bIns="0" rtlCol="0" anchor="ctr"/>
           <a:lstStyle/>
           <a:p>
-            <a:pPr marL="0" indent="0" algn="ctr">
+            <a:pPr algn="ctr" indent="0" marL="0">
               <a:buNone/>
             </a:pPr>
             <a:r>
@@ -29047,7 +28618,7 @@
       </p:sp>
       <p:pic>
         <p:nvPicPr>
-          <p:cNvPr id="24" name="icon">
+          <p:cNvPr id="24" name="icon" descr="">
             <a:extLst>
               <a:ext uri="{C183D7F6-B498-43B3-948B-1728B52AA6E4}">
                 <adec:decorative xmlns:adec="http://schemas.microsoft.com/office/drawing/2017/decorative" val="1"/>
@@ -29060,7 +28631,7 @@
           <p:nvPr/>
         </p:nvPicPr>
         <p:blipFill>
-          <a:blip r:embed="rId5"/>
+          <a:blip r:embed="rId3"/>
           <a:stretch>
             <a:fillRect/>
           </a:stretch>
@@ -29096,7 +28667,7 @@
           <a:bodyPr wrap="square" lIns="0" tIns="0" rIns="0" bIns="0" rtlCol="0" anchor="ctr"/>
           <a:lstStyle/>
           <a:p>
-            <a:pPr marL="0" indent="0" algn="l">
+            <a:pPr algn="l" indent="0" marL="0">
               <a:buNone/>
             </a:pPr>
             <a:r>
@@ -29132,7 +28703,7 @@
           <a:bodyPr wrap="square" lIns="0" tIns="0" rIns="0" bIns="0" rtlCol="0" anchor="t"/>
           <a:lstStyle/>
           <a:p>
-            <a:pPr marL="0" indent="0" algn="l">
+            <a:pPr algn="l" indent="0" marL="0">
               <a:buNone/>
             </a:pPr>
             <a:r>
@@ -29173,7 +28744,7 @@
             <a:prstDash val="solid"/>
           </a:ln>
           <a:effectLst>
-            <a:outerShdw blurRad="76200" dist="25400" dir="5400000" algn="bl" rotWithShape="0">
+            <a:outerShdw sx="100000" sy="100000" kx="0" ky="0" algn="bl" rotWithShape="0" blurRad="76200" dist="25400" dir="5400000">
               <a:srgbClr val="000000">
                 <a:alpha val="28000"/>
               </a:srgbClr>
@@ -29229,7 +28800,7 @@
           <a:bodyPr wrap="square" lIns="0" tIns="0" rIns="0" bIns="0" rtlCol="0" anchor="ctr"/>
           <a:lstStyle/>
           <a:p>
-            <a:pPr marL="0" indent="0" algn="ctr">
+            <a:pPr algn="ctr" indent="0" marL="0">
               <a:buNone/>
             </a:pPr>
             <a:r>
@@ -29271,7 +28842,7 @@
       </p:sp>
       <p:pic>
         <p:nvPicPr>
-          <p:cNvPr id="31" name="icon">
+          <p:cNvPr id="31" name="icon" descr="">
             <a:extLst>
               <a:ext uri="{C183D7F6-B498-43B3-948B-1728B52AA6E4}">
                 <adec:decorative xmlns:adec="http://schemas.microsoft.com/office/drawing/2017/decorative" val="1"/>
@@ -29284,7 +28855,7 @@
           <p:nvPr/>
         </p:nvPicPr>
         <p:blipFill>
-          <a:blip r:embed="rId6"/>
+          <a:blip r:embed="rId4"/>
           <a:stretch>
             <a:fillRect/>
           </a:stretch>
@@ -29320,7 +28891,7 @@
           <a:bodyPr wrap="square" lIns="0" tIns="0" rIns="0" bIns="0" rtlCol="0" anchor="ctr"/>
           <a:lstStyle/>
           <a:p>
-            <a:pPr marL="0" indent="0" algn="l">
+            <a:pPr algn="l" indent="0" marL="0">
               <a:buNone/>
             </a:pPr>
             <a:r>
@@ -29356,7 +28927,7 @@
           <a:bodyPr wrap="square" lIns="0" tIns="0" rIns="0" bIns="0" rtlCol="0" anchor="t"/>
           <a:lstStyle/>
           <a:p>
-            <a:pPr marL="0" indent="0" algn="l">
+            <a:pPr algn="l" indent="0" marL="0">
               <a:buNone/>
             </a:pPr>
             <a:r>
@@ -29392,7 +28963,7 @@
           <a:bodyPr wrap="square" lIns="0" tIns="0" rIns="0" bIns="0" rtlCol="0" anchor="t"/>
           <a:lstStyle/>
           <a:p>
-            <a:pPr marL="0" indent="0" algn="l">
+            <a:pPr algn="l" indent="0" marL="0">
               <a:buNone/>
             </a:pPr>
             <a:r>
@@ -29428,7 +28999,7 @@
           <a:bodyPr wrap="square" lIns="0" tIns="0" rIns="0" bIns="0" rtlCol="0" anchor="t"/>
           <a:lstStyle/>
           <a:p>
-            <a:pPr marL="0" indent="0" algn="l">
+            <a:pPr algn="l" indent="0" marL="0">
               <a:buNone/>
             </a:pPr>
             <a:r>
@@ -29464,7 +29035,7 @@
           <a:bodyPr wrap="square" lIns="0" tIns="0" rIns="0" bIns="0" rtlCol="0" anchor="t"/>
           <a:lstStyle/>
           <a:p>
-            <a:pPr marL="0" indent="0" algn="l">
+            <a:pPr algn="l" indent="0" marL="0">
               <a:buNone/>
             </a:pPr>
             <a:r>
@@ -29500,7 +29071,7 @@
           <a:bodyPr wrap="square" lIns="0" tIns="0" rIns="0" bIns="0" rtlCol="0" anchor="t"/>
           <a:lstStyle/>
           <a:p>
-            <a:pPr marL="0" indent="0" algn="l">
+            <a:pPr algn="l" indent="0" marL="0">
               <a:buNone/>
             </a:pPr>
             <a:r>
@@ -29536,7 +29107,7 @@
           <a:bodyPr wrap="square" lIns="0" tIns="0" rIns="0" bIns="0" rtlCol="0" anchor="t"/>
           <a:lstStyle/>
           <a:p>
-            <a:pPr marL="0" indent="0" algn="l">
+            <a:pPr algn="l" indent="0" marL="0">
               <a:buNone/>
             </a:pPr>
             <a:r>
@@ -29572,7 +29143,7 @@
           <a:bodyPr wrap="square" lIns="0" tIns="0" rIns="0" bIns="0" rtlCol="0" anchor="t"/>
           <a:lstStyle/>
           <a:p>
-            <a:pPr marL="0" indent="0" algn="l">
+            <a:pPr algn="l" indent="0" marL="0">
               <a:buNone/>
             </a:pPr>
             <a:r>
@@ -29608,7 +29179,7 @@
           <a:bodyPr wrap="square" lIns="0" tIns="0" rIns="0" bIns="0" rtlCol="0" anchor="t"/>
           <a:lstStyle/>
           <a:p>
-            <a:pPr marL="0" indent="0" algn="l">
+            <a:pPr algn="l" indent="0" marL="0">
               <a:buNone/>
             </a:pPr>
             <a:r>
@@ -29644,7 +29215,7 @@
           <a:bodyPr wrap="square" lIns="0" tIns="0" rIns="0" bIns="0" rtlCol="0" anchor="t"/>
           <a:lstStyle/>
           <a:p>
-            <a:pPr marL="0" indent="0" algn="l">
+            <a:pPr algn="l" indent="0" marL="0">
               <a:buNone/>
             </a:pPr>
             <a:r>
@@ -29661,7 +29232,7 @@
       </p:sp>
       <p:sp>
         <p:nvSpPr>
-          <p:cNvPr id="42" name="Slide Number Placeholder 0"/>
+          <p:cNvPr id="25" name="Slide Number Placeholder 0"/>
           <p:cNvSpPr>
             <a:spLocks noGrp="1"/>
           </p:cNvSpPr>
@@ -29679,7 +29250,7 @@
           </a:prstGeom>
           <a:extLst>
             <a:ext uri="{C572A759-6A51-4108-AA02-DFA0A04FC94B}">
-              <ma14:wrappingTextBoxFlag xmlns:ma14="http://schemas.microsoft.com/office/mac/drawingml/2011/main" xmlns="" val="0"/>
+              <ma14:wrappingTextBoxFlag xmlns:ma14="http://schemas.microsoft.com/office/mac/drawingml/2011/main" val="0"/>
             </a:ext>
           </a:extLst>
         </p:spPr>
@@ -29697,7 +29268,7 @@
           <a:p>
             <a:pPr algn="r"/>
             <a:fld id="{F7021451-1387-4CA6-816F-3879F97B5CBC}" type="slidenum">
-              <a:rPr lang="en-US" b="0"/>
+              <a:rPr b="0" lang="en-US"/>
               <a:t>4</a:t>
             </a:fld>
             <a:endParaRPr lang="en-US"/>
@@ -29732,11 +29303,9 @@
       <p:sp>
         <p:nvSpPr>
           <p:cNvPr id="2" name="Text 0"/>
-          <p:cNvSpPr>
-            <a:spLocks noGrp="1"/>
-          </p:cNvSpPr>
+          <p:cNvSpPr/>
           <p:nvPr>
-            <p:ph type="title" idx="100" hasCustomPrompt="1"/>
+            <p:ph idx="100" type="title" hasCustomPrompt="1"/>
           </p:nvPr>
         </p:nvSpPr>
         <p:spPr>
@@ -29754,7 +29323,7 @@
           <a:bodyPr wrap="square" lIns="0" tIns="0" rIns="0" bIns="0" rtlCol="0" anchor="ctr"/>
           <a:lstStyle/>
           <a:p>
-            <a:pPr marL="0" indent="0" algn="l">
+            <a:pPr algn="l" indent="0" marL="0">
               <a:buNone/>
             </a:pPr>
             <a:r>
@@ -29772,11 +29341,9 @@
       <p:sp>
         <p:nvSpPr>
           <p:cNvPr id="3" name="Text 0"/>
-          <p:cNvSpPr>
-            <a:spLocks noGrp="1"/>
-          </p:cNvSpPr>
+          <p:cNvSpPr/>
           <p:nvPr>
-            <p:ph type="body" idx="101" hasCustomPrompt="1"/>
+            <p:ph idx="101" type="body" hasCustomPrompt="1"/>
           </p:nvPr>
         </p:nvSpPr>
         <p:spPr>
@@ -29794,7 +29361,7 @@
           <a:bodyPr wrap="square" lIns="0" tIns="0" rIns="0" bIns="0" rtlCol="0" anchor="ctr"/>
           <a:lstStyle/>
           <a:p>
-            <a:pPr marL="0" indent="0" algn="l">
+            <a:pPr algn="l" indent="0" marL="0">
               <a:buNone/>
             </a:pPr>
             <a:r>
@@ -29835,7 +29402,7 @@
             <a:prstDash val="solid"/>
           </a:ln>
           <a:effectLst>
-            <a:outerShdw blurRad="76200" dist="25400" dir="5400000" algn="bl" rotWithShape="0">
+            <a:outerShdw sx="100000" sy="100000" kx="0" ky="0" algn="bl" rotWithShape="0" blurRad="76200" dist="25400" dir="5400000">
               <a:srgbClr val="000000">
                 <a:alpha val="28000"/>
               </a:srgbClr>
@@ -29864,7 +29431,7 @@
           <a:bodyPr wrap="square" lIns="0" tIns="0" rIns="0" bIns="0" rtlCol="0" anchor="t"/>
           <a:lstStyle/>
           <a:p>
-            <a:pPr marL="0" indent="0" algn="l">
+            <a:pPr algn="l" indent="0" marL="0">
               <a:buNone/>
             </a:pPr>
             <a:r>
@@ -29927,7 +29494,7 @@
           <a:bodyPr wrap="square" lIns="0" tIns="0" rIns="0" bIns="0" rtlCol="0" anchor="ctr"/>
           <a:lstStyle/>
           <a:p>
-            <a:pPr marL="0" indent="0" algn="ctr">
+            <a:pPr algn="ctr" indent="0" marL="0">
               <a:buNone/>
             </a:pPr>
             <a:r>
@@ -29963,7 +29530,7 @@
           <a:bodyPr wrap="square" lIns="0" tIns="0" rIns="0" bIns="0" rtlCol="0" anchor="t"/>
           <a:lstStyle/>
           <a:p>
-            <a:pPr marL="0" indent="0" algn="l">
+            <a:pPr algn="l" indent="0" marL="0">
               <a:buNone/>
             </a:pPr>
             <a:r>
@@ -30005,7 +29572,7 @@
       </p:sp>
       <p:pic>
         <p:nvPicPr>
-          <p:cNvPr id="10" name="check-icon">
+          <p:cNvPr id="10" name="check-icon" descr="">
             <a:extLst>
               <a:ext uri="{C183D7F6-B498-43B3-948B-1728B52AA6E4}">
                 <adec:decorative xmlns:adec="http://schemas.microsoft.com/office/drawing/2017/decorative" val="1"/>
@@ -30018,7 +29585,7 @@
           <p:nvPr/>
         </p:nvPicPr>
         <p:blipFill>
-          <a:blip r:embed="rId3"/>
+          <a:blip r:embed="rId1"/>
           <a:stretch>
             <a:fillRect/>
           </a:stretch>
@@ -30054,7 +29621,7 @@
           <a:bodyPr wrap="square" lIns="0" tIns="0" rIns="0" bIns="0" rtlCol="0" anchor="t"/>
           <a:lstStyle/>
           <a:p>
-            <a:pPr marL="0" indent="0" algn="l">
+            <a:pPr algn="l" indent="0" marL="0">
               <a:buNone/>
             </a:pPr>
             <a:r>
@@ -30090,7 +29657,7 @@
           <a:bodyPr wrap="square" lIns="0" tIns="0" rIns="0" bIns="0" rtlCol="0" anchor="t"/>
           <a:lstStyle/>
           <a:p>
-            <a:pPr marL="0" indent="0" algn="l">
+            <a:pPr algn="l" indent="0" marL="0">
               <a:buNone/>
             </a:pPr>
             <a:r>
@@ -30132,7 +29699,7 @@
       </p:sp>
       <p:pic>
         <p:nvPicPr>
-          <p:cNvPr id="14" name="check-icon">
+          <p:cNvPr id="14" name="check-icon" descr="">
             <a:extLst>
               <a:ext uri="{C183D7F6-B498-43B3-948B-1728B52AA6E4}">
                 <adec:decorative xmlns:adec="http://schemas.microsoft.com/office/drawing/2017/decorative" val="1"/>
@@ -30145,7 +29712,7 @@
           <p:nvPr/>
         </p:nvPicPr>
         <p:blipFill>
-          <a:blip r:embed="rId3"/>
+          <a:blip r:embed="rId2"/>
           <a:stretch>
             <a:fillRect/>
           </a:stretch>
@@ -30181,7 +29748,7 @@
           <a:bodyPr wrap="square" lIns="0" tIns="0" rIns="0" bIns="0" rtlCol="0" anchor="t"/>
           <a:lstStyle/>
           <a:p>
-            <a:pPr marL="0" indent="0" algn="l">
+            <a:pPr algn="l" indent="0" marL="0">
               <a:buNone/>
             </a:pPr>
             <a:r>
@@ -30217,7 +29784,7 @@
           <a:bodyPr wrap="square" lIns="0" tIns="0" rIns="0" bIns="0" rtlCol="0" anchor="t"/>
           <a:lstStyle/>
           <a:p>
-            <a:pPr marL="0" indent="0" algn="l">
+            <a:pPr algn="l" indent="0" marL="0">
               <a:buNone/>
             </a:pPr>
             <a:r>
@@ -30259,7 +29826,7 @@
       </p:sp>
       <p:pic>
         <p:nvPicPr>
-          <p:cNvPr id="18" name="check-icon">
+          <p:cNvPr id="18" name="check-icon" descr="">
             <a:extLst>
               <a:ext uri="{C183D7F6-B498-43B3-948B-1728B52AA6E4}">
                 <adec:decorative xmlns:adec="http://schemas.microsoft.com/office/drawing/2017/decorative" val="1"/>
@@ -30308,7 +29875,7 @@
           <a:bodyPr wrap="square" lIns="0" tIns="0" rIns="0" bIns="0" rtlCol="0" anchor="t"/>
           <a:lstStyle/>
           <a:p>
-            <a:pPr marL="0" indent="0" algn="l">
+            <a:pPr algn="l" indent="0" marL="0">
               <a:buNone/>
             </a:pPr>
             <a:r>
@@ -30344,7 +29911,7 @@
           <a:bodyPr wrap="square" lIns="0" tIns="0" rIns="0" bIns="0" rtlCol="0" anchor="t"/>
           <a:lstStyle/>
           <a:p>
-            <a:pPr marL="0" indent="0" algn="l">
+            <a:pPr algn="l" indent="0" marL="0">
               <a:buNone/>
             </a:pPr>
             <a:r>
@@ -30386,7 +29953,7 @@
       </p:sp>
       <p:pic>
         <p:nvPicPr>
-          <p:cNvPr id="22" name="check-icon">
+          <p:cNvPr id="22" name="check-icon" descr="">
             <a:extLst>
               <a:ext uri="{C183D7F6-B498-43B3-948B-1728B52AA6E4}">
                 <adec:decorative xmlns:adec="http://schemas.microsoft.com/office/drawing/2017/decorative" val="1"/>
@@ -30435,7 +30002,7 @@
           <a:bodyPr wrap="square" lIns="0" tIns="0" rIns="0" bIns="0" rtlCol="0" anchor="t"/>
           <a:lstStyle/>
           <a:p>
-            <a:pPr marL="0" indent="0" algn="l">
+            <a:pPr algn="l" indent="0" marL="0">
               <a:buNone/>
             </a:pPr>
             <a:r>
@@ -30471,7 +30038,7 @@
           <a:bodyPr wrap="square" lIns="0" tIns="0" rIns="0" bIns="0" rtlCol="0" anchor="t"/>
           <a:lstStyle/>
           <a:p>
-            <a:pPr marL="0" indent="0" algn="l">
+            <a:pPr algn="l" indent="0" marL="0">
               <a:buNone/>
             </a:pPr>
             <a:r>
@@ -30507,7 +30074,7 @@
           <a:bodyPr wrap="square" lIns="0" tIns="0" rIns="0" bIns="0" rtlCol="0" anchor="t"/>
           <a:lstStyle/>
           <a:p>
-            <a:pPr marL="0" indent="0" algn="l">
+            <a:pPr algn="l" indent="0" marL="0">
               <a:buNone/>
             </a:pPr>
             <a:r>
@@ -30548,7 +30115,7 @@
             <a:prstDash val="solid"/>
           </a:ln>
           <a:effectLst>
-            <a:outerShdw blurRad="76200" dist="25400" dir="5400000" algn="bl" rotWithShape="0">
+            <a:outerShdw sx="100000" sy="100000" kx="0" ky="0" algn="bl" rotWithShape="0" blurRad="76200" dist="25400" dir="5400000">
               <a:srgbClr val="000000">
                 <a:alpha val="28000"/>
               </a:srgbClr>
@@ -30577,7 +30144,7 @@
           <a:bodyPr wrap="square" lIns="0" tIns="0" rIns="0" bIns="0" rtlCol="0" anchor="t"/>
           <a:lstStyle/>
           <a:p>
-            <a:pPr marL="0" indent="0" algn="l">
+            <a:pPr algn="l" indent="0" marL="0">
               <a:buNone/>
             </a:pPr>
             <a:r>
@@ -30640,7 +30207,7 @@
           <a:bodyPr wrap="square" lIns="0" tIns="0" rIns="0" bIns="0" rtlCol="0" anchor="ctr"/>
           <a:lstStyle/>
           <a:p>
-            <a:pPr marL="0" indent="0" algn="ctr">
+            <a:pPr algn="ctr" indent="0" marL="0">
               <a:buNone/>
             </a:pPr>
             <a:r>
@@ -30676,7 +30243,7 @@
           <a:bodyPr wrap="square" lIns="0" tIns="0" rIns="0" bIns="0" rtlCol="0" anchor="t"/>
           <a:lstStyle/>
           <a:p>
-            <a:pPr marL="0" indent="0" algn="l">
+            <a:pPr algn="l" indent="0" marL="0">
               <a:buNone/>
             </a:pPr>
             <a:r>
@@ -30717,7 +30284,7 @@
             <a:prstDash val="solid"/>
           </a:ln>
           <a:effectLst>
-            <a:outerShdw blurRad="76200" dist="25400" dir="5400000" algn="bl" rotWithShape="0">
+            <a:outerShdw sx="100000" sy="100000" kx="0" ky="0" algn="bl" rotWithShape="0" blurRad="76200" dist="25400" dir="5400000">
               <a:srgbClr val="000000">
                 <a:alpha val="28000"/>
               </a:srgbClr>
@@ -30746,7 +30313,7 @@
           <a:bodyPr wrap="square" lIns="0" tIns="0" rIns="0" bIns="0" rtlCol="0" anchor="t"/>
           <a:lstStyle/>
           <a:p>
-            <a:pPr marL="0" indent="0" algn="l">
+            <a:pPr algn="l" indent="0" marL="0">
               <a:buNone/>
             </a:pPr>
             <a:r>
@@ -30809,7 +30376,7 @@
           <a:bodyPr wrap="square" lIns="0" tIns="0" rIns="0" bIns="0" rtlCol="0" anchor="ctr"/>
           <a:lstStyle/>
           <a:p>
-            <a:pPr marL="0" indent="0" algn="ctr">
+            <a:pPr algn="ctr" indent="0" marL="0">
               <a:buNone/>
             </a:pPr>
             <a:r>
@@ -30845,7 +30412,7 @@
           <a:bodyPr wrap="square" lIns="0" tIns="0" rIns="0" bIns="0" rtlCol="0" anchor="t"/>
           <a:lstStyle/>
           <a:p>
-            <a:pPr marL="0" indent="0" algn="l">
+            <a:pPr algn="l" indent="0" marL="0">
               <a:buNone/>
             </a:pPr>
             <a:r>
@@ -30862,7 +30429,7 @@
       </p:sp>
       <p:sp>
         <p:nvSpPr>
-          <p:cNvPr id="36" name="Slide Number Placeholder 0"/>
+          <p:cNvPr id="25" name="Slide Number Placeholder 0"/>
           <p:cNvSpPr>
             <a:spLocks noGrp="1"/>
           </p:cNvSpPr>
@@ -30880,7 +30447,7 @@
           </a:prstGeom>
           <a:extLst>
             <a:ext uri="{C572A759-6A51-4108-AA02-DFA0A04FC94B}">
-              <ma14:wrappingTextBoxFlag xmlns:ma14="http://schemas.microsoft.com/office/mac/drawingml/2011/main" xmlns="" val="0"/>
+              <ma14:wrappingTextBoxFlag xmlns:ma14="http://schemas.microsoft.com/office/mac/drawingml/2011/main" val="0"/>
             </a:ext>
           </a:extLst>
         </p:spPr>
@@ -30898,7 +30465,7 @@
           <a:p>
             <a:pPr algn="r"/>
             <a:fld id="{F7021451-1387-4CA6-816F-3879F97B5CBC}" type="slidenum">
-              <a:rPr lang="en-US" b="0"/>
+              <a:rPr b="0" lang="en-US"/>
               <a:t>5</a:t>
             </a:fld>
             <a:endParaRPr lang="en-US"/>
@@ -30933,11 +30500,9 @@
       <p:sp>
         <p:nvSpPr>
           <p:cNvPr id="2" name="Text 0"/>
-          <p:cNvSpPr>
-            <a:spLocks noGrp="1"/>
-          </p:cNvSpPr>
+          <p:cNvSpPr/>
           <p:nvPr>
-            <p:ph type="title" idx="100" hasCustomPrompt="1"/>
+            <p:ph idx="100" type="title" hasCustomPrompt="1"/>
           </p:nvPr>
         </p:nvSpPr>
         <p:spPr>
@@ -30955,7 +30520,7 @@
           <a:bodyPr wrap="square" lIns="0" tIns="0" rIns="0" bIns="0" rtlCol="0" anchor="ctr"/>
           <a:lstStyle/>
           <a:p>
-            <a:pPr marL="0" indent="0" algn="l">
+            <a:pPr algn="l" indent="0" marL="0">
               <a:buNone/>
             </a:pPr>
             <a:r>
@@ -30973,11 +30538,9 @@
       <p:sp>
         <p:nvSpPr>
           <p:cNvPr id="3" name="Text 0"/>
-          <p:cNvSpPr>
-            <a:spLocks noGrp="1"/>
-          </p:cNvSpPr>
+          <p:cNvSpPr/>
           <p:nvPr>
-            <p:ph type="body" idx="101" hasCustomPrompt="1"/>
+            <p:ph idx="101" type="body" hasCustomPrompt="1"/>
           </p:nvPr>
         </p:nvSpPr>
         <p:spPr>
@@ -30995,7 +30558,7 @@
           <a:bodyPr wrap="square" lIns="0" tIns="0" rIns="0" bIns="0" rtlCol="0" anchor="ctr"/>
           <a:lstStyle/>
           <a:p>
-            <a:pPr marL="0" indent="0" algn="l">
+            <a:pPr algn="l" indent="0" marL="0">
               <a:buNone/>
             </a:pPr>
             <a:r>
@@ -31036,7 +30599,7 @@
             <a:prstDash val="solid"/>
           </a:ln>
           <a:effectLst>
-            <a:outerShdw blurRad="76200" dist="25400" dir="5400000" algn="bl" rotWithShape="0">
+            <a:outerShdw sx="100000" sy="100000" kx="0" ky="0" algn="bl" rotWithShape="0" blurRad="76200" dist="25400" dir="5400000">
               <a:srgbClr val="000000">
                 <a:alpha val="28000"/>
               </a:srgbClr>
@@ -31065,7 +30628,7 @@
           <a:bodyPr wrap="square" lIns="0" tIns="0" rIns="0" bIns="0" rtlCol="0" anchor="t"/>
           <a:lstStyle/>
           <a:p>
-            <a:pPr marL="0" indent="0" algn="l">
+            <a:pPr algn="l" indent="0" marL="0">
               <a:buNone/>
             </a:pPr>
             <a:r>
@@ -31128,7 +30691,7 @@
           <a:bodyPr wrap="square" lIns="0" tIns="0" rIns="0" bIns="0" rtlCol="0" anchor="ctr"/>
           <a:lstStyle/>
           <a:p>
-            <a:pPr marL="0" indent="0" algn="ctr">
+            <a:pPr algn="ctr" indent="0" marL="0">
               <a:buNone/>
             </a:pPr>
             <a:r>
@@ -31164,7 +30727,7 @@
           <a:bodyPr wrap="square" lIns="0" tIns="0" rIns="0" bIns="0" rtlCol="0" anchor="ctr"/>
           <a:lstStyle/>
           <a:p>
-            <a:pPr marL="0" indent="0" algn="l">
+            <a:pPr algn="l" indent="0" marL="0">
               <a:buNone/>
             </a:pPr>
             <a:r>
@@ -31227,7 +30790,7 @@
           <a:bodyPr wrap="square" lIns="0" tIns="0" rIns="0" bIns="0" rtlCol="0" anchor="ctr"/>
           <a:lstStyle/>
           <a:p>
-            <a:pPr marL="0" indent="0" algn="ctr">
+            <a:pPr algn="ctr" indent="0" marL="0">
               <a:buNone/>
             </a:pPr>
             <a:r>
@@ -31263,7 +30826,7 @@
           <a:bodyPr wrap="square" lIns="0" tIns="0" rIns="0" bIns="0" rtlCol="0" anchor="ctr"/>
           <a:lstStyle/>
           <a:p>
-            <a:pPr marL="0" indent="0" algn="l">
+            <a:pPr algn="l" indent="0" marL="0">
               <a:buNone/>
             </a:pPr>
             <a:r>
@@ -31326,7 +30889,7 @@
           <a:bodyPr wrap="square" lIns="0" tIns="0" rIns="0" bIns="0" rtlCol="0" anchor="ctr"/>
           <a:lstStyle/>
           <a:p>
-            <a:pPr marL="0" indent="0" algn="ctr">
+            <a:pPr algn="ctr" indent="0" marL="0">
               <a:buNone/>
             </a:pPr>
             <a:r>
@@ -31362,7 +30925,7 @@
           <a:bodyPr wrap="square" lIns="0" tIns="0" rIns="0" bIns="0" rtlCol="0" anchor="ctr"/>
           <a:lstStyle/>
           <a:p>
-            <a:pPr marL="0" indent="0" algn="l">
+            <a:pPr algn="l" indent="0" marL="0">
               <a:buNone/>
             </a:pPr>
             <a:r>
@@ -31425,7 +30988,7 @@
           <a:bodyPr wrap="square" lIns="0" tIns="0" rIns="0" bIns="0" rtlCol="0" anchor="t"/>
           <a:lstStyle/>
           <a:p>
-            <a:pPr marL="0" indent="0" algn="l">
+            <a:pPr algn="l" indent="0" marL="0">
               <a:buNone/>
             </a:pPr>
             <a:r>
@@ -31542,7 +31105,7 @@
             <a:prstDash val="solid"/>
           </a:ln>
           <a:effectLst>
-            <a:outerShdw blurRad="76200" dist="25400" dir="5400000" algn="bl" rotWithShape="0">
+            <a:outerShdw sx="100000" sy="100000" kx="0" ky="0" algn="bl" rotWithShape="0" blurRad="76200" dist="25400" dir="5400000">
               <a:srgbClr val="000000">
                 <a:alpha val="28000"/>
               </a:srgbClr>
@@ -31577,7 +31140,7 @@
       </p:sp>
       <p:pic>
         <p:nvPicPr>
-          <p:cNvPr id="20" name="icon">
+          <p:cNvPr id="20" name="icon" descr="">
             <a:extLst>
               <a:ext uri="{C183D7F6-B498-43B3-948B-1728B52AA6E4}">
                 <adec:decorative xmlns:adec="http://schemas.microsoft.com/office/drawing/2017/decorative" val="1"/>
@@ -31590,7 +31153,7 @@
           <p:nvPr/>
         </p:nvPicPr>
         <p:blipFill>
-          <a:blip r:embed="rId3"/>
+          <a:blip r:embed="rId1"/>
           <a:stretch>
             <a:fillRect/>
           </a:stretch>
@@ -31626,7 +31189,7 @@
           <a:bodyPr wrap="square" lIns="0" tIns="0" rIns="0" bIns="0" rtlCol="0" anchor="t"/>
           <a:lstStyle/>
           <a:p>
-            <a:pPr marL="0" indent="0" algn="l">
+            <a:pPr algn="l" indent="0" marL="0">
               <a:buNone/>
             </a:pPr>
             <a:r>
@@ -31662,7 +31225,7 @@
           <a:bodyPr wrap="square" lIns="0" tIns="0" rIns="0" bIns="0" rtlCol="0" anchor="t"/>
           <a:lstStyle/>
           <a:p>
-            <a:pPr marL="0" indent="0" algn="l">
+            <a:pPr algn="l" indent="0" marL="0">
               <a:buNone/>
             </a:pPr>
             <a:r>
@@ -31703,7 +31266,7 @@
             <a:prstDash val="solid"/>
           </a:ln>
           <a:effectLst>
-            <a:outerShdw blurRad="76200" dist="25400" dir="5400000" algn="bl" rotWithShape="0">
+            <a:outerShdw sx="100000" sy="100000" kx="0" ky="0" algn="bl" rotWithShape="0" blurRad="76200" dist="25400" dir="5400000">
               <a:srgbClr val="000000">
                 <a:alpha val="28000"/>
               </a:srgbClr>
@@ -31738,7 +31301,7 @@
       </p:sp>
       <p:pic>
         <p:nvPicPr>
-          <p:cNvPr id="25" name="icon">
+          <p:cNvPr id="25" name="icon" descr="">
             <a:extLst>
               <a:ext uri="{C183D7F6-B498-43B3-948B-1728B52AA6E4}">
                 <adec:decorative xmlns:adec="http://schemas.microsoft.com/office/drawing/2017/decorative" val="1"/>
@@ -31751,7 +31314,7 @@
           <p:nvPr/>
         </p:nvPicPr>
         <p:blipFill>
-          <a:blip r:embed="rId4"/>
+          <a:blip r:embed="rId2"/>
           <a:stretch>
             <a:fillRect/>
           </a:stretch>
@@ -31787,7 +31350,7 @@
           <a:bodyPr wrap="square" lIns="0" tIns="0" rIns="0" bIns="0" rtlCol="0" anchor="t"/>
           <a:lstStyle/>
           <a:p>
-            <a:pPr marL="0" indent="0" algn="l">
+            <a:pPr algn="l" indent="0" marL="0">
               <a:buNone/>
             </a:pPr>
             <a:r>
@@ -31823,7 +31386,7 @@
           <a:bodyPr wrap="square" lIns="0" tIns="0" rIns="0" bIns="0" rtlCol="0" anchor="t"/>
           <a:lstStyle/>
           <a:p>
-            <a:pPr marL="0" indent="0" algn="l">
+            <a:pPr algn="l" indent="0" marL="0">
               <a:buNone/>
             </a:pPr>
             <a:r>
@@ -31840,7 +31403,7 @@
       </p:sp>
       <p:sp>
         <p:nvSpPr>
-          <p:cNvPr id="28" name="Slide Number Placeholder 0"/>
+          <p:cNvPr id="25" name="Slide Number Placeholder 0"/>
           <p:cNvSpPr>
             <a:spLocks noGrp="1"/>
           </p:cNvSpPr>
@@ -31858,7 +31421,7 @@
           </a:prstGeom>
           <a:extLst>
             <a:ext uri="{C572A759-6A51-4108-AA02-DFA0A04FC94B}">
-              <ma14:wrappingTextBoxFlag xmlns:ma14="http://schemas.microsoft.com/office/mac/drawingml/2011/main" xmlns="" val="0"/>
+              <ma14:wrappingTextBoxFlag xmlns:ma14="http://schemas.microsoft.com/office/mac/drawingml/2011/main" val="0"/>
             </a:ext>
           </a:extLst>
         </p:spPr>
@@ -31876,7 +31439,7 @@
           <a:p>
             <a:pPr algn="r"/>
             <a:fld id="{F7021451-1387-4CA6-816F-3879F97B5CBC}" type="slidenum">
-              <a:rPr lang="en-US" b="0"/>
+              <a:rPr b="0" lang="en-US"/>
               <a:t>6</a:t>
             </a:fld>
             <a:endParaRPr lang="en-US"/>
@@ -31911,11 +31474,9 @@
       <p:sp>
         <p:nvSpPr>
           <p:cNvPr id="2" name="Text 0"/>
-          <p:cNvSpPr>
-            <a:spLocks noGrp="1"/>
-          </p:cNvSpPr>
+          <p:cNvSpPr/>
           <p:nvPr>
-            <p:ph type="title" idx="100" hasCustomPrompt="1"/>
+            <p:ph idx="100" type="title" hasCustomPrompt="1"/>
           </p:nvPr>
         </p:nvSpPr>
         <p:spPr>
@@ -31933,7 +31494,7 @@
           <a:bodyPr wrap="square" lIns="0" tIns="0" rIns="0" bIns="0" rtlCol="0" anchor="ctr"/>
           <a:lstStyle/>
           <a:p>
-            <a:pPr marL="0" indent="0" algn="l">
+            <a:pPr algn="l" indent="0" marL="0">
               <a:buNone/>
             </a:pPr>
             <a:r>
@@ -31951,11 +31512,9 @@
       <p:sp>
         <p:nvSpPr>
           <p:cNvPr id="3" name="Text 0"/>
-          <p:cNvSpPr>
-            <a:spLocks noGrp="1"/>
-          </p:cNvSpPr>
+          <p:cNvSpPr/>
           <p:nvPr>
-            <p:ph type="body" idx="101" hasCustomPrompt="1"/>
+            <p:ph idx="101" type="body" hasCustomPrompt="1"/>
           </p:nvPr>
         </p:nvSpPr>
         <p:spPr>
@@ -31973,7 +31532,7 @@
           <a:bodyPr wrap="square" lIns="0" tIns="0" rIns="0" bIns="0" rtlCol="0" anchor="ctr"/>
           <a:lstStyle/>
           <a:p>
-            <a:pPr marL="0" indent="0" algn="l">
+            <a:pPr algn="l" indent="0" marL="0">
               <a:buNone/>
             </a:pPr>
             <a:r>
@@ -32014,7 +31573,7 @@
             <a:prstDash val="solid"/>
           </a:ln>
           <a:effectLst>
-            <a:outerShdw blurRad="76200" dist="25400" dir="5400000" algn="bl" rotWithShape="0">
+            <a:outerShdw sx="100000" sy="100000" kx="0" ky="0" algn="bl" rotWithShape="0" blurRad="76200" dist="25400" dir="5400000">
               <a:srgbClr val="000000">
                 <a:alpha val="28000"/>
               </a:srgbClr>
@@ -32043,7 +31602,7 @@
           <a:bodyPr wrap="square" lIns="0" tIns="0" rIns="0" bIns="0" rtlCol="0" anchor="ctr"/>
           <a:lstStyle/>
           <a:p>
-            <a:pPr marL="0" indent="0" algn="l">
+            <a:pPr algn="l" indent="0" marL="0">
               <a:buNone/>
             </a:pPr>
             <a:r>
@@ -32079,7 +31638,7 @@
           <a:bodyPr wrap="square" lIns="0" tIns="0" rIns="0" bIns="0" rtlCol="0" anchor="ctr"/>
           <a:lstStyle/>
           <a:p>
-            <a:pPr marL="0" indent="0" algn="l">
+            <a:pPr algn="l" indent="0" marL="0">
               <a:buNone/>
             </a:pPr>
             <a:r>
@@ -32120,7 +31679,7 @@
             <a:prstDash val="solid"/>
           </a:ln>
           <a:effectLst>
-            <a:outerShdw blurRad="76200" dist="25400" dir="5400000" algn="bl" rotWithShape="0">
+            <a:outerShdw sx="100000" sy="100000" kx="0" ky="0" algn="bl" rotWithShape="0" blurRad="76200" dist="25400" dir="5400000">
               <a:srgbClr val="000000">
                 <a:alpha val="28000"/>
               </a:srgbClr>
@@ -32149,7 +31708,7 @@
           <a:bodyPr wrap="square" lIns="0" tIns="0" rIns="0" bIns="0" rtlCol="0" anchor="ctr"/>
           <a:lstStyle/>
           <a:p>
-            <a:pPr marL="0" indent="0" algn="l">
+            <a:pPr algn="l" indent="0" marL="0">
               <a:buNone/>
             </a:pPr>
             <a:r>
@@ -32185,7 +31744,7 @@
           <a:bodyPr wrap="square" lIns="0" tIns="0" rIns="0" bIns="0" rtlCol="0" anchor="ctr"/>
           <a:lstStyle/>
           <a:p>
-            <a:pPr marL="0" indent="0" algn="l">
+            <a:pPr algn="l" indent="0" marL="0">
               <a:buNone/>
             </a:pPr>
             <a:r>
@@ -32226,7 +31785,7 @@
             <a:prstDash val="solid"/>
           </a:ln>
           <a:effectLst>
-            <a:outerShdw blurRad="76200" dist="25400" dir="5400000" algn="bl" rotWithShape="0">
+            <a:outerShdw sx="100000" sy="100000" kx="0" ky="0" algn="bl" rotWithShape="0" blurRad="76200" dist="25400" dir="5400000">
               <a:srgbClr val="000000">
                 <a:alpha val="28000"/>
               </a:srgbClr>
@@ -32255,7 +31814,7 @@
           <a:bodyPr wrap="square" lIns="0" tIns="0" rIns="0" bIns="0" rtlCol="0" anchor="ctr"/>
           <a:lstStyle/>
           <a:p>
-            <a:pPr marL="0" indent="0" algn="l">
+            <a:pPr algn="l" indent="0" marL="0">
               <a:buNone/>
             </a:pPr>
             <a:r>
@@ -32291,7 +31850,7 @@
           <a:bodyPr wrap="square" lIns="0" tIns="0" rIns="0" bIns="0" rtlCol="0" anchor="ctr"/>
           <a:lstStyle/>
           <a:p>
-            <a:pPr marL="0" indent="0" algn="l">
+            <a:pPr algn="l" indent="0" marL="0">
               <a:buNone/>
             </a:pPr>
             <a:r>
@@ -32332,7 +31891,7 @@
             <a:prstDash val="solid"/>
           </a:ln>
           <a:effectLst>
-            <a:outerShdw blurRad="76200" dist="25400" dir="5400000" algn="bl" rotWithShape="0">
+            <a:outerShdw sx="100000" sy="100000" kx="0" ky="0" algn="bl" rotWithShape="0" blurRad="76200" dist="25400" dir="5400000">
               <a:srgbClr val="000000">
                 <a:alpha val="28000"/>
               </a:srgbClr>
@@ -32361,7 +31920,7 @@
           <a:bodyPr wrap="square" lIns="0" tIns="0" rIns="0" bIns="0" rtlCol="0" anchor="ctr"/>
           <a:lstStyle/>
           <a:p>
-            <a:pPr marL="0" indent="0" algn="l">
+            <a:pPr algn="l" indent="0" marL="0">
               <a:buNone/>
             </a:pPr>
             <a:r>
@@ -32397,7 +31956,7 @@
           <a:bodyPr wrap="square" lIns="0" tIns="0" rIns="0" bIns="0" rtlCol="0" anchor="ctr"/>
           <a:lstStyle/>
           <a:p>
-            <a:pPr marL="0" indent="0" algn="l">
+            <a:pPr algn="l" indent="0" marL="0">
               <a:buNone/>
             </a:pPr>
             <a:r>
@@ -32438,7 +31997,7 @@
             <a:prstDash val="solid"/>
           </a:ln>
           <a:effectLst>
-            <a:outerShdw blurRad="76200" dist="25400" dir="5400000" algn="bl" rotWithShape="0">
+            <a:outerShdw sx="100000" sy="100000" kx="0" ky="0" algn="bl" rotWithShape="0" blurRad="76200" dist="25400" dir="5400000">
               <a:srgbClr val="000000">
                 <a:alpha val="28000"/>
               </a:srgbClr>
@@ -32448,7 +32007,7 @@
       </p:sp>
       <p:graphicFrame>
         <p:nvGraphicFramePr>
-          <p:cNvPr id="17" name="Chart 0"/>
+          <p:cNvPr id="17" name="Chart 0" descr=""/>
           <p:cNvGraphicFramePr/>
           <p:nvPr/>
         </p:nvGraphicFramePr>
@@ -32456,9 +32015,9 @@
           <a:off x="6080760" y="1417320"/>
           <a:ext cx="5376672" cy="3749040"/>
         </p:xfrm>
-        <a:graphic>
+        <a:graphic xmlns:a="http://schemas.openxmlformats.org/drawingml/2006/main">
           <a:graphicData uri="http://schemas.openxmlformats.org/drawingml/2006/chart">
-            <c:chart xmlns:c="http://schemas.openxmlformats.org/drawingml/2006/chart" xmlns:r="http://schemas.openxmlformats.org/officeDocument/2006/relationships" r:id="rId3"/>
+            <c:chart xmlns:c="http://schemas.openxmlformats.org/drawingml/2006/chart" r:id="rId1"/>
           </a:graphicData>
         </a:graphic>
       </p:graphicFrame>
@@ -32488,7 +32047,7 @@
             <a:prstDash val="solid"/>
           </a:ln>
           <a:effectLst>
-            <a:outerShdw blurRad="76200" dist="25400" dir="5400000" algn="bl" rotWithShape="0">
+            <a:outerShdw sx="100000" sy="100000" kx="0" ky="0" algn="bl" rotWithShape="0" blurRad="76200" dist="25400" dir="5400000">
               <a:srgbClr val="000000">
                 <a:alpha val="28000"/>
               </a:srgbClr>
@@ -32517,7 +32076,7 @@
           <a:bodyPr wrap="square" lIns="0" tIns="0" rIns="0" bIns="0" rtlCol="0" anchor="ctr"/>
           <a:lstStyle/>
           <a:p>
-            <a:pPr marL="0" indent="0" algn="l">
+            <a:pPr algn="l" indent="0" marL="0">
               <a:buNone/>
             </a:pPr>
             <a:r>
@@ -32552,7 +32111,7 @@
           </a:prstGeom>
           <a:extLst>
             <a:ext uri="{C572A759-6A51-4108-AA02-DFA0A04FC94B}">
-              <ma14:wrappingTextBoxFlag xmlns:ma14="http://schemas.microsoft.com/office/mac/drawingml/2011/main" xmlns="" val="0"/>
+              <ma14:wrappingTextBoxFlag xmlns:ma14="http://schemas.microsoft.com/office/mac/drawingml/2011/main" val="0"/>
             </a:ext>
           </a:extLst>
         </p:spPr>
@@ -32570,7 +32129,7 @@
           <a:p>
             <a:pPr algn="r"/>
             <a:fld id="{F7021451-1387-4CA6-816F-3879F97B5CBC}" type="slidenum">
-              <a:rPr lang="en-US" b="0"/>
+              <a:rPr b="0" lang="en-US"/>
               <a:t>7</a:t>
             </a:fld>
             <a:endParaRPr lang="en-US"/>
@@ -32605,11 +32164,9 @@
       <p:sp>
         <p:nvSpPr>
           <p:cNvPr id="2" name="Text 0"/>
-          <p:cNvSpPr>
-            <a:spLocks noGrp="1"/>
-          </p:cNvSpPr>
+          <p:cNvSpPr/>
           <p:nvPr>
-            <p:ph type="title" idx="100" hasCustomPrompt="1"/>
+            <p:ph idx="100" type="title" hasCustomPrompt="1"/>
           </p:nvPr>
         </p:nvSpPr>
         <p:spPr>
@@ -32627,7 +32184,7 @@
           <a:bodyPr wrap="square" lIns="0" tIns="0" rIns="0" bIns="0" rtlCol="0" anchor="ctr"/>
           <a:lstStyle/>
           <a:p>
-            <a:pPr marL="0" indent="0" algn="l">
+            <a:pPr algn="l" indent="0" marL="0">
               <a:buNone/>
             </a:pPr>
             <a:r>
@@ -32645,11 +32202,9 @@
       <p:sp>
         <p:nvSpPr>
           <p:cNvPr id="3" name="Text 0"/>
-          <p:cNvSpPr>
-            <a:spLocks noGrp="1"/>
-          </p:cNvSpPr>
+          <p:cNvSpPr/>
           <p:nvPr>
-            <p:ph type="body" idx="101" hasCustomPrompt="1"/>
+            <p:ph idx="101" type="body" hasCustomPrompt="1"/>
           </p:nvPr>
         </p:nvSpPr>
         <p:spPr>
@@ -32667,7 +32222,7 @@
           <a:bodyPr wrap="square" lIns="0" tIns="0" rIns="0" bIns="0" rtlCol="0" anchor="ctr"/>
           <a:lstStyle/>
           <a:p>
-            <a:pPr marL="0" indent="0" algn="l">
+            <a:pPr algn="l" indent="0" marL="0">
               <a:buNone/>
             </a:pPr>
             <a:r>
@@ -32708,7 +32263,7 @@
             <a:prstDash val="solid"/>
           </a:ln>
           <a:effectLst>
-            <a:outerShdw blurRad="76200" dist="25400" dir="5400000" algn="bl" rotWithShape="0">
+            <a:outerShdw sx="100000" sy="100000" kx="0" ky="0" algn="bl" rotWithShape="0" blurRad="76200" dist="25400" dir="5400000">
               <a:srgbClr val="000000">
                 <a:alpha val="28000"/>
               </a:srgbClr>
@@ -32743,7 +32298,7 @@
       </p:sp>
       <p:pic>
         <p:nvPicPr>
-          <p:cNvPr id="6" name="icon">
+          <p:cNvPr id="6" name="icon" descr="">
             <a:extLst>
               <a:ext uri="{C183D7F6-B498-43B3-948B-1728B52AA6E4}">
                 <adec:decorative xmlns:adec="http://schemas.microsoft.com/office/drawing/2017/decorative" val="1"/>
@@ -32756,7 +32311,7 @@
           <p:nvPr/>
         </p:nvPicPr>
         <p:blipFill>
-          <a:blip r:embed="rId3"/>
+          <a:blip r:embed="rId1"/>
           <a:stretch>
             <a:fillRect/>
           </a:stretch>
@@ -32792,7 +32347,7 @@
           <a:bodyPr wrap="square" lIns="0" tIns="0" rIns="0" bIns="0" rtlCol="0" anchor="t"/>
           <a:lstStyle/>
           <a:p>
-            <a:pPr marL="0" indent="0" algn="l">
+            <a:pPr algn="l" indent="0" marL="0">
               <a:buNone/>
             </a:pPr>
             <a:r>
@@ -32828,7 +32383,7 @@
           <a:bodyPr wrap="square" lIns="0" tIns="0" rIns="0" bIns="0" rtlCol="0" anchor="t"/>
           <a:lstStyle/>
           <a:p>
-            <a:pPr marL="0" indent="0" algn="l">
+            <a:pPr algn="l" indent="0" marL="0">
               <a:buNone/>
             </a:pPr>
             <a:r>
@@ -32845,7 +32400,7 @@
       </p:sp>
       <p:pic>
         <p:nvPicPr>
-          <p:cNvPr id="9" name="arrow">
+          <p:cNvPr id="9" name="arrow" descr="">
             <a:extLst>
               <a:ext uri="{C183D7F6-B498-43B3-948B-1728B52AA6E4}">
                 <adec:decorative xmlns:adec="http://schemas.microsoft.com/office/drawing/2017/decorative" val="1"/>
@@ -32858,7 +32413,7 @@
           <p:nvPr/>
         </p:nvPicPr>
         <p:blipFill>
-          <a:blip r:embed="rId4"/>
+          <a:blip r:embed="rId2"/>
           <a:stretch>
             <a:fillRect/>
           </a:stretch>
@@ -32899,7 +32454,7 @@
             <a:prstDash val="solid"/>
           </a:ln>
           <a:effectLst>
-            <a:outerShdw blurRad="76200" dist="25400" dir="5400000" algn="bl" rotWithShape="0">
+            <a:outerShdw sx="100000" sy="100000" kx="0" ky="0" algn="bl" rotWithShape="0" blurRad="76200" dist="25400" dir="5400000">
               <a:srgbClr val="000000">
                 <a:alpha val="28000"/>
               </a:srgbClr>
@@ -32934,7 +32489,7 @@
       </p:sp>
       <p:pic>
         <p:nvPicPr>
-          <p:cNvPr id="12" name="icon">
+          <p:cNvPr id="12" name="icon" descr="">
             <a:extLst>
               <a:ext uri="{C183D7F6-B498-43B3-948B-1728B52AA6E4}">
                 <adec:decorative xmlns:adec="http://schemas.microsoft.com/office/drawing/2017/decorative" val="1"/>
@@ -32947,7 +32502,7 @@
           <p:nvPr/>
         </p:nvPicPr>
         <p:blipFill>
-          <a:blip r:embed="rId5"/>
+          <a:blip r:embed="rId3"/>
           <a:stretch>
             <a:fillRect/>
           </a:stretch>
@@ -32983,7 +32538,7 @@
           <a:bodyPr wrap="square" lIns="0" tIns="0" rIns="0" bIns="0" rtlCol="0" anchor="t"/>
           <a:lstStyle/>
           <a:p>
-            <a:pPr marL="0" indent="0" algn="l">
+            <a:pPr algn="l" indent="0" marL="0">
               <a:buNone/>
             </a:pPr>
             <a:r>
@@ -33019,7 +32574,7 @@
           <a:bodyPr wrap="square" lIns="0" tIns="0" rIns="0" bIns="0" rtlCol="0" anchor="t"/>
           <a:lstStyle/>
           <a:p>
-            <a:pPr marL="0" indent="0" algn="l">
+            <a:pPr algn="l" indent="0" marL="0">
               <a:buNone/>
             </a:pPr>
             <a:r>
@@ -33036,7 +32591,7 @@
       </p:sp>
       <p:pic>
         <p:nvPicPr>
-          <p:cNvPr id="15" name="arrow">
+          <p:cNvPr id="15" name="arrow" descr="">
             <a:extLst>
               <a:ext uri="{C183D7F6-B498-43B3-948B-1728B52AA6E4}">
                 <adec:decorative xmlns:adec="http://schemas.microsoft.com/office/drawing/2017/decorative" val="1"/>
@@ -33090,7 +32645,7 @@
             <a:prstDash val="solid"/>
           </a:ln>
           <a:effectLst>
-            <a:outerShdw blurRad="76200" dist="25400" dir="5400000" algn="bl" rotWithShape="0">
+            <a:outerShdw sx="100000" sy="100000" kx="0" ky="0" algn="bl" rotWithShape="0" blurRad="76200" dist="25400" dir="5400000">
               <a:srgbClr val="000000">
                 <a:alpha val="28000"/>
               </a:srgbClr>
@@ -33125,7 +32680,7 @@
       </p:sp>
       <p:pic>
         <p:nvPicPr>
-          <p:cNvPr id="18" name="icon">
+          <p:cNvPr id="18" name="icon" descr="">
             <a:extLst>
               <a:ext uri="{C183D7F6-B498-43B3-948B-1728B52AA6E4}">
                 <adec:decorative xmlns:adec="http://schemas.microsoft.com/office/drawing/2017/decorative" val="1"/>
@@ -33138,7 +32693,7 @@
           <p:nvPr/>
         </p:nvPicPr>
         <p:blipFill>
-          <a:blip r:embed="rId6"/>
+          <a:blip r:embed="rId5"/>
           <a:stretch>
             <a:fillRect/>
           </a:stretch>
@@ -33174,7 +32729,7 @@
           <a:bodyPr wrap="square" lIns="0" tIns="0" rIns="0" bIns="0" rtlCol="0" anchor="t"/>
           <a:lstStyle/>
           <a:p>
-            <a:pPr marL="0" indent="0" algn="l">
+            <a:pPr algn="l" indent="0" marL="0">
               <a:buNone/>
             </a:pPr>
             <a:r>
@@ -33210,7 +32765,7 @@
           <a:bodyPr wrap="square" lIns="0" tIns="0" rIns="0" bIns="0" rtlCol="0" anchor="t"/>
           <a:lstStyle/>
           <a:p>
-            <a:pPr marL="0" indent="0" algn="l">
+            <a:pPr algn="l" indent="0" marL="0">
               <a:buNone/>
             </a:pPr>
             <a:r>
@@ -33227,7 +32782,7 @@
       </p:sp>
       <p:pic>
         <p:nvPicPr>
-          <p:cNvPr id="21" name="arrow">
+          <p:cNvPr id="21" name="arrow" descr="">
             <a:extLst>
               <a:ext uri="{C183D7F6-B498-43B3-948B-1728B52AA6E4}">
                 <adec:decorative xmlns:adec="http://schemas.microsoft.com/office/drawing/2017/decorative" val="1"/>
@@ -33240,7 +32795,7 @@
           <p:nvPr/>
         </p:nvPicPr>
         <p:blipFill>
-          <a:blip r:embed="rId4"/>
+          <a:blip r:embed="rId6"/>
           <a:stretch>
             <a:fillRect/>
           </a:stretch>
@@ -33281,7 +32836,7 @@
             <a:prstDash val="solid"/>
           </a:ln>
           <a:effectLst>
-            <a:outerShdw blurRad="76200" dist="25400" dir="5400000" algn="bl" rotWithShape="0">
+            <a:outerShdw sx="100000" sy="100000" kx="0" ky="0" algn="bl" rotWithShape="0" blurRad="76200" dist="25400" dir="5400000">
               <a:srgbClr val="000000">
                 <a:alpha val="28000"/>
               </a:srgbClr>
@@ -33316,7 +32871,7 @@
       </p:sp>
       <p:pic>
         <p:nvPicPr>
-          <p:cNvPr id="24" name="icon">
+          <p:cNvPr id="24" name="icon" descr="">
             <a:extLst>
               <a:ext uri="{C183D7F6-B498-43B3-948B-1728B52AA6E4}">
                 <adec:decorative xmlns:adec="http://schemas.microsoft.com/office/drawing/2017/decorative" val="1"/>
@@ -33365,7 +32920,7 @@
           <a:bodyPr wrap="square" lIns="0" tIns="0" rIns="0" bIns="0" rtlCol="0" anchor="t"/>
           <a:lstStyle/>
           <a:p>
-            <a:pPr marL="0" indent="0" algn="l">
+            <a:pPr algn="l" indent="0" marL="0">
               <a:buNone/>
             </a:pPr>
             <a:r>
@@ -33401,7 +32956,7 @@
           <a:bodyPr wrap="square" lIns="0" tIns="0" rIns="0" bIns="0" rtlCol="0" anchor="t"/>
           <a:lstStyle/>
           <a:p>
-            <a:pPr marL="0" indent="0" algn="l">
+            <a:pPr algn="l" indent="0" marL="0">
               <a:buNone/>
             </a:pPr>
             <a:r>
@@ -33418,7 +32973,7 @@
       </p:sp>
       <p:pic>
         <p:nvPicPr>
-          <p:cNvPr id="27" name="arrow">
+          <p:cNvPr id="27" name="arrow" descr="">
             <a:extLst>
               <a:ext uri="{C183D7F6-B498-43B3-948B-1728B52AA6E4}">
                 <adec:decorative xmlns:adec="http://schemas.microsoft.com/office/drawing/2017/decorative" val="1"/>
@@ -33431,7 +32986,7 @@
           <p:nvPr/>
         </p:nvPicPr>
         <p:blipFill>
-          <a:blip r:embed="rId4"/>
+          <a:blip r:embed="rId8"/>
           <a:stretch>
             <a:fillRect/>
           </a:stretch>
@@ -33472,7 +33027,7 @@
             <a:prstDash val="solid"/>
           </a:ln>
           <a:effectLst>
-            <a:outerShdw blurRad="76200" dist="25400" dir="5400000" algn="bl" rotWithShape="0">
+            <a:outerShdw sx="100000" sy="100000" kx="0" ky="0" algn="bl" rotWithShape="0" blurRad="76200" dist="25400" dir="5400000">
               <a:srgbClr val="000000">
                 <a:alpha val="28000"/>
               </a:srgbClr>
@@ -33507,7 +33062,7 @@
       </p:sp>
       <p:pic>
         <p:nvPicPr>
-          <p:cNvPr id="30" name="icon">
+          <p:cNvPr id="30" name="icon" descr="">
             <a:extLst>
               <a:ext uri="{C183D7F6-B498-43B3-948B-1728B52AA6E4}">
                 <adec:decorative xmlns:adec="http://schemas.microsoft.com/office/drawing/2017/decorative" val="1"/>
@@ -33520,7 +33075,7 @@
           <p:nvPr/>
         </p:nvPicPr>
         <p:blipFill>
-          <a:blip r:embed="rId8"/>
+          <a:blip r:embed="rId9"/>
           <a:stretch>
             <a:fillRect/>
           </a:stretch>
@@ -33556,7 +33111,7 @@
           <a:bodyPr wrap="square" lIns="0" tIns="0" rIns="0" bIns="0" rtlCol="0" anchor="t"/>
           <a:lstStyle/>
           <a:p>
-            <a:pPr marL="0" indent="0" algn="l">
+            <a:pPr algn="l" indent="0" marL="0">
               <a:buNone/>
             </a:pPr>
             <a:r>
@@ -33592,7 +33147,7 @@
           <a:bodyPr wrap="square" lIns="0" tIns="0" rIns="0" bIns="0" rtlCol="0" anchor="t"/>
           <a:lstStyle/>
           <a:p>
-            <a:pPr marL="0" indent="0" algn="l">
+            <a:pPr algn="l" indent="0" marL="0">
               <a:buNone/>
             </a:pPr>
             <a:r>
@@ -33633,7 +33188,7 @@
             <a:prstDash val="solid"/>
           </a:ln>
           <a:effectLst>
-            <a:outerShdw blurRad="76200" dist="25400" dir="5400000" algn="bl" rotWithShape="0">
+            <a:outerShdw sx="100000" sy="100000" kx="0" ky="0" algn="bl" rotWithShape="0" blurRad="76200" dist="25400" dir="5400000">
               <a:srgbClr val="000000">
                 <a:alpha val="28000"/>
               </a:srgbClr>
@@ -33662,7 +33217,7 @@
           <a:bodyPr wrap="square" lIns="0" tIns="0" rIns="0" bIns="0" rtlCol="0" anchor="t"/>
           <a:lstStyle/>
           <a:p>
-            <a:pPr marL="0" indent="0" algn="l">
+            <a:pPr algn="l" indent="0" marL="0">
               <a:buNone/>
             </a:pPr>
             <a:r>
@@ -33698,7 +33253,7 @@
           <a:bodyPr wrap="square" lIns="0" tIns="0" rIns="0" bIns="0" rtlCol="0" anchor="t"/>
           <a:lstStyle/>
           <a:p>
-            <a:pPr marL="0" indent="0" algn="l">
+            <a:pPr algn="l" indent="0" marL="0">
               <a:buNone/>
             </a:pPr>
             <a:r>
@@ -33734,7 +33289,7 @@
           <a:bodyPr wrap="square" lIns="0" tIns="0" rIns="0" bIns="0" rtlCol="0" anchor="t"/>
           <a:lstStyle/>
           <a:p>
-            <a:pPr marL="0" indent="0" algn="l">
+            <a:pPr algn="l" indent="0" marL="0">
               <a:buNone/>
             </a:pPr>
             <a:r>
@@ -33770,7 +33325,7 @@
           <a:bodyPr wrap="square" lIns="0" tIns="0" rIns="0" bIns="0" rtlCol="0" anchor="t"/>
           <a:lstStyle/>
           <a:p>
-            <a:pPr marL="0" indent="0" algn="l">
+            <a:pPr algn="l" indent="0" marL="0">
               <a:buNone/>
             </a:pPr>
             <a:r>
@@ -33806,7 +33361,7 @@
           <a:bodyPr wrap="square" lIns="0" tIns="0" rIns="0" bIns="0" rtlCol="0" anchor="t"/>
           <a:lstStyle/>
           <a:p>
-            <a:pPr marL="0" indent="0" algn="l">
+            <a:pPr algn="l" indent="0" marL="0">
               <a:buNone/>
             </a:pPr>
             <a:r>
@@ -33842,7 +33397,7 @@
           <a:bodyPr wrap="square" lIns="0" tIns="0" rIns="0" bIns="0" rtlCol="0" anchor="t"/>
           <a:lstStyle/>
           <a:p>
-            <a:pPr marL="0" indent="0" algn="l">
+            <a:pPr algn="l" indent="0" marL="0">
               <a:buNone/>
             </a:pPr>
             <a:r>
@@ -33878,7 +33433,7 @@
           <a:bodyPr wrap="square" lIns="0" tIns="0" rIns="0" bIns="0" rtlCol="0" anchor="t"/>
           <a:lstStyle/>
           <a:p>
-            <a:pPr marL="0" indent="0" algn="l">
+            <a:pPr algn="l" indent="0" marL="0">
               <a:buNone/>
             </a:pPr>
             <a:r>
@@ -33895,7 +33450,7 @@
       </p:sp>
       <p:sp>
         <p:nvSpPr>
-          <p:cNvPr id="41" name="Slide Number Placeholder 0"/>
+          <p:cNvPr id="25" name="Slide Number Placeholder 0"/>
           <p:cNvSpPr>
             <a:spLocks noGrp="1"/>
           </p:cNvSpPr>
@@ -33913,7 +33468,7 @@
           </a:prstGeom>
           <a:extLst>
             <a:ext uri="{C572A759-6A51-4108-AA02-DFA0A04FC94B}">
-              <ma14:wrappingTextBoxFlag xmlns:ma14="http://schemas.microsoft.com/office/mac/drawingml/2011/main" xmlns="" val="0"/>
+              <ma14:wrappingTextBoxFlag xmlns:ma14="http://schemas.microsoft.com/office/mac/drawingml/2011/main" val="0"/>
             </a:ext>
           </a:extLst>
         </p:spPr>
@@ -33931,7 +33486,7 @@
           <a:p>
             <a:pPr algn="r"/>
             <a:fld id="{F7021451-1387-4CA6-816F-3879F97B5CBC}" type="slidenum">
-              <a:rPr lang="en-US" b="0"/>
+              <a:rPr b="0" lang="en-US"/>
               <a:t>8</a:t>
             </a:fld>
             <a:endParaRPr lang="en-US"/>
@@ -33966,11 +33521,9 @@
       <p:sp>
         <p:nvSpPr>
           <p:cNvPr id="2" name="Text 0"/>
-          <p:cNvSpPr>
-            <a:spLocks noGrp="1"/>
-          </p:cNvSpPr>
+          <p:cNvSpPr/>
           <p:nvPr>
-            <p:ph type="title" idx="100" hasCustomPrompt="1"/>
+            <p:ph idx="100" type="title" hasCustomPrompt="1"/>
           </p:nvPr>
         </p:nvSpPr>
         <p:spPr>
@@ -33988,7 +33541,7 @@
           <a:bodyPr wrap="square" lIns="0" tIns="0" rIns="0" bIns="0" rtlCol="0" anchor="ctr"/>
           <a:lstStyle/>
           <a:p>
-            <a:pPr marL="0" indent="0" algn="l">
+            <a:pPr algn="l" indent="0" marL="0">
               <a:buNone/>
             </a:pPr>
             <a:r>
@@ -34006,11 +33559,9 @@
       <p:sp>
         <p:nvSpPr>
           <p:cNvPr id="3" name="Text 0"/>
-          <p:cNvSpPr>
-            <a:spLocks noGrp="1"/>
-          </p:cNvSpPr>
+          <p:cNvSpPr/>
           <p:nvPr>
-            <p:ph type="body" idx="101" hasCustomPrompt="1"/>
+            <p:ph idx="101" type="body" hasCustomPrompt="1"/>
           </p:nvPr>
         </p:nvSpPr>
         <p:spPr>
@@ -34028,7 +33579,7 @@
           <a:bodyPr wrap="square" lIns="0" tIns="0" rIns="0" bIns="0" rtlCol="0" anchor="ctr"/>
           <a:lstStyle/>
           <a:p>
-            <a:pPr marL="0" indent="0" algn="l">
+            <a:pPr algn="l" indent="0" marL="0">
               <a:buNone/>
             </a:pPr>
             <a:r>
@@ -34069,7 +33620,7 @@
             <a:prstDash val="solid"/>
           </a:ln>
           <a:effectLst>
-            <a:outerShdw blurRad="76200" dist="25400" dir="5400000" algn="bl" rotWithShape="0">
+            <a:outerShdw sx="100000" sy="100000" kx="0" ky="0" algn="bl" rotWithShape="0" blurRad="76200" dist="25400" dir="5400000">
               <a:srgbClr val="000000">
                 <a:alpha val="28000"/>
               </a:srgbClr>
@@ -34079,7 +33630,7 @@
       </p:sp>
       <p:graphicFrame>
         <p:nvGraphicFramePr>
-          <p:cNvPr id="5" name="Chart 0"/>
+          <p:cNvPr id="5" name="Chart 0" descr=""/>
           <p:cNvGraphicFramePr/>
           <p:nvPr/>
         </p:nvGraphicFramePr>
@@ -34087,9 +33638,9 @@
           <a:off x="685800" y="1417320"/>
           <a:ext cx="5157216" cy="2651760"/>
         </p:xfrm>
-        <a:graphic>
+        <a:graphic xmlns:a="http://schemas.openxmlformats.org/drawingml/2006/main">
           <a:graphicData uri="http://schemas.openxmlformats.org/drawingml/2006/chart">
-            <c:chart xmlns:c="http://schemas.openxmlformats.org/drawingml/2006/chart" xmlns:r="http://schemas.openxmlformats.org/officeDocument/2006/relationships" r:id="rId3"/>
+            <c:chart xmlns:c="http://schemas.openxmlformats.org/drawingml/2006/chart" r:id="rId1"/>
           </a:graphicData>
         </a:graphic>
       </p:graphicFrame>
@@ -34114,7 +33665,7 @@
           <a:bodyPr wrap="square" lIns="0" tIns="0" rIns="0" bIns="0" rtlCol="0" anchor="t"/>
           <a:lstStyle/>
           <a:p>
-            <a:pPr marL="0" indent="0" algn="l">
+            <a:pPr algn="l" indent="0" marL="0">
               <a:buNone/>
             </a:pPr>
             <a:r>
@@ -34155,7 +33706,7 @@
             <a:prstDash val="solid"/>
           </a:ln>
           <a:effectLst>
-            <a:outerShdw blurRad="76200" dist="25400" dir="5400000" algn="bl" rotWithShape="0">
+            <a:outerShdw sx="100000" sy="100000" kx="0" ky="0" algn="bl" rotWithShape="0" blurRad="76200" dist="25400" dir="5400000">
               <a:srgbClr val="000000">
                 <a:alpha val="28000"/>
               </a:srgbClr>
@@ -34165,7 +33716,7 @@
       </p:sp>
       <p:graphicFrame>
         <p:nvGraphicFramePr>
-          <p:cNvPr id="8" name="Chart 1"/>
+          <p:cNvPr id="8" name="Chart 1" descr=""/>
           <p:cNvGraphicFramePr/>
           <p:nvPr/>
         </p:nvGraphicFramePr>
@@ -34173,9 +33724,9 @@
           <a:off x="6345936" y="1417320"/>
           <a:ext cx="5157216" cy="2651760"/>
         </p:xfrm>
-        <a:graphic>
+        <a:graphic xmlns:a="http://schemas.openxmlformats.org/drawingml/2006/main">
           <a:graphicData uri="http://schemas.openxmlformats.org/drawingml/2006/chart">
-            <c:chart xmlns:c="http://schemas.openxmlformats.org/drawingml/2006/chart" xmlns:r="http://schemas.openxmlformats.org/officeDocument/2006/relationships" r:id="rId4"/>
+            <c:chart xmlns:c="http://schemas.openxmlformats.org/drawingml/2006/chart" r:id="rId2"/>
           </a:graphicData>
         </a:graphic>
       </p:graphicFrame>
@@ -34200,7 +33751,7 @@
           <a:bodyPr wrap="square" lIns="0" tIns="0" rIns="0" bIns="0" rtlCol="0" anchor="t"/>
           <a:lstStyle/>
           <a:p>
-            <a:pPr marL="0" indent="0" algn="l">
+            <a:pPr algn="l" indent="0" marL="0">
               <a:buNone/>
             </a:pPr>
             <a:r>
@@ -34241,7 +33792,7 @@
             <a:prstDash val="solid"/>
           </a:ln>
           <a:effectLst>
-            <a:outerShdw blurRad="76200" dist="25400" dir="5400000" algn="bl" rotWithShape="0">
+            <a:outerShdw sx="100000" sy="100000" kx="0" ky="0" algn="bl" rotWithShape="0" blurRad="76200" dist="25400" dir="5400000">
               <a:srgbClr val="000000">
                 <a:alpha val="28000"/>
               </a:srgbClr>
@@ -34270,7 +33821,7 @@
           <a:bodyPr wrap="square" lIns="0" tIns="0" rIns="0" bIns="0" rtlCol="0" anchor="ctr"/>
           <a:lstStyle/>
           <a:p>
-            <a:pPr marL="0" indent="0" algn="l">
+            <a:pPr algn="l" indent="0" marL="0">
               <a:buNone/>
             </a:pPr>
             <a:r>
@@ -34281,6 +33832,9 @@
               </a:rPr>
               <a:t>Сценарии, а не прогноз. </a:t>
             </a:r>
+            <a:pPr algn="l" indent="0" marL="0">
+              <a:buNone/>
+            </a:pPr>
             <a:r>
               <a:rPr lang="en-US" sz="1500" dirty="0">
                 <a:solidFill>
@@ -34313,7 +33867,7 @@
           </a:prstGeom>
           <a:extLst>
             <a:ext uri="{C572A759-6A51-4108-AA02-DFA0A04FC94B}">
-              <ma14:wrappingTextBoxFlag xmlns:ma14="http://schemas.microsoft.com/office/mac/drawingml/2011/main" xmlns="" val="0"/>
+              <ma14:wrappingTextBoxFlag xmlns:ma14="http://schemas.microsoft.com/office/mac/drawingml/2011/main" val="0"/>
             </a:ext>
           </a:extLst>
         </p:spPr>
@@ -34331,7 +33885,7 @@
           <a:p>
             <a:pPr algn="r"/>
             <a:fld id="{F7021451-1387-4CA6-816F-3879F97B5CBC}" type="slidenum">
-              <a:rPr lang="en-US" b="0"/>
+              <a:rPr b="0" lang="en-US"/>
               <a:t>9</a:t>
             </a:fld>
             <a:endParaRPr lang="en-US"/>
@@ -34639,299 +34193,4 @@
     </a:ext>
   </a:extLst>
 </a:theme>
-</file>
-
-<file path=ppt/theme/theme2.xml><?xml version="1.0" encoding="utf-8"?>
-<a:theme xmlns:a="http://schemas.openxmlformats.org/drawingml/2006/main" name="Тема Office">
-  <a:themeElements>
-    <a:clrScheme name="Стандартная">
-      <a:dk1>
-        <a:sysClr val="windowText" lastClr="000000"/>
-      </a:dk1>
-      <a:lt1>
-        <a:sysClr val="window" lastClr="FFFFFF"/>
-      </a:lt1>
-      <a:dk2>
-        <a:srgbClr val="44546A"/>
-      </a:dk2>
-      <a:lt2>
-        <a:srgbClr val="E7E6E6"/>
-      </a:lt2>
-      <a:accent1>
-        <a:srgbClr val="4472C4"/>
-      </a:accent1>
-      <a:accent2>
-        <a:srgbClr val="ED7D31"/>
-      </a:accent2>
-      <a:accent3>
-        <a:srgbClr val="A5A5A5"/>
-      </a:accent3>
-      <a:accent4>
-        <a:srgbClr val="FFC000"/>
-      </a:accent4>
-      <a:accent5>
-        <a:srgbClr val="5B9BD5"/>
-      </a:accent5>
-      <a:accent6>
-        <a:srgbClr val="70AD47"/>
-      </a:accent6>
-      <a:hlink>
-        <a:srgbClr val="0563C1"/>
-      </a:hlink>
-      <a:folHlink>
-        <a:srgbClr val="954F72"/>
-      </a:folHlink>
-    </a:clrScheme>
-    <a:fontScheme name="Стандартная">
-      <a:majorFont>
-        <a:latin typeface="Calibri Light" panose="020F0302020204030204"/>
-        <a:ea typeface=""/>
-        <a:cs typeface=""/>
-        <a:font script="Jpan" typeface="游ゴシック Light"/>
-        <a:font script="Hang" typeface="맑은 고딕"/>
-        <a:font script="Hans" typeface="等线 Light"/>
-        <a:font script="Hant" typeface="新細明體"/>
-        <a:font script="Arab" typeface="Times New Roman"/>
-        <a:font script="Hebr" typeface="Times New Roman"/>
-        <a:font script="Thai" typeface="Angsana New"/>
-        <a:font script="Ethi" typeface="Nyala"/>
-        <a:font script="Beng" typeface="Vrinda"/>
-        <a:font script="Gujr" typeface="Shruti"/>
-        <a:font script="Khmr" typeface="MoolBoran"/>
-        <a:font script="Knda" typeface="Tunga"/>
-        <a:font script="Guru" typeface="Raavi"/>
-        <a:font script="Cans" typeface="Euphemia"/>
-        <a:font script="Cher" typeface="Plantagenet Cherokee"/>
-        <a:font script="Yiii" typeface="Microsoft Yi Baiti"/>
-        <a:font script="Tibt" typeface="Microsoft Himalaya"/>
-        <a:font script="Thaa" typeface="MV Boli"/>
-        <a:font script="Deva" typeface="Mangal"/>
-        <a:font script="Telu" typeface="Gautami"/>
-        <a:font script="Taml" typeface="Latha"/>
-        <a:font script="Syrc" typeface="Estrangelo Edessa"/>
-        <a:font script="Orya" typeface="Kalinga"/>
-        <a:font script="Mlym" typeface="Kartika"/>
-        <a:font script="Laoo" typeface="DokChampa"/>
-        <a:font script="Sinh" typeface="Iskoola Pota"/>
-        <a:font script="Mong" typeface="Mongolian Baiti"/>
-        <a:font script="Viet" typeface="Times New Roman"/>
-        <a:font script="Uigh" typeface="Microsoft Uighur"/>
-        <a:font script="Geor" typeface="Sylfaen"/>
-        <a:font script="Armn" typeface="Arial"/>
-        <a:font script="Bugi" typeface="Leelawadee UI"/>
-        <a:font script="Bopo" typeface="Microsoft JhengHei"/>
-        <a:font script="Java" typeface="Javanese Text"/>
-        <a:font script="Lisu" typeface="Segoe UI"/>
-        <a:font script="Mymr" typeface="Myanmar Text"/>
-        <a:font script="Nkoo" typeface="Ebrima"/>
-        <a:font script="Olck" typeface="Nirmala UI"/>
-        <a:font script="Osma" typeface="Ebrima"/>
-        <a:font script="Phag" typeface="Phagspa"/>
-        <a:font script="Syrn" typeface="Estrangelo Edessa"/>
-        <a:font script="Syrj" typeface="Estrangelo Edessa"/>
-        <a:font script="Syre" typeface="Estrangelo Edessa"/>
-        <a:font script="Sora" typeface="Nirmala UI"/>
-        <a:font script="Tale" typeface="Microsoft Tai Le"/>
-        <a:font script="Talu" typeface="Microsoft New Tai Lue"/>
-        <a:font script="Tfng" typeface="Ebrima"/>
-      </a:majorFont>
-      <a:minorFont>
-        <a:latin typeface="Calibri" panose="020F0502020204030204"/>
-        <a:ea typeface=""/>
-        <a:cs typeface=""/>
-        <a:font script="Jpan" typeface="游ゴシック"/>
-        <a:font script="Hang" typeface="맑은 고딕"/>
-        <a:font script="Hans" typeface="等线"/>
-        <a:font script="Hant" typeface="新細明體"/>
-        <a:font script="Arab" typeface="Arial"/>
-        <a:font script="Hebr" typeface="Arial"/>
-        <a:font script="Thai" typeface="Cordia New"/>
-        <a:font script="Ethi" typeface="Nyala"/>
-        <a:font script="Beng" typeface="Vrinda"/>
-        <a:font script="Gujr" typeface="Shruti"/>
-        <a:font script="Khmr" typeface="DaunPenh"/>
-        <a:font script="Knda" typeface="Tunga"/>
-        <a:font script="Guru" typeface="Raavi"/>
-        <a:font script="Cans" typeface="Euphemia"/>
-        <a:font script="Cher" typeface="Plantagenet Cherokee"/>
-        <a:font script="Yiii" typeface="Microsoft Yi Baiti"/>
-        <a:font script="Tibt" typeface="Microsoft Himalaya"/>
-        <a:font script="Thaa" typeface="MV Boli"/>
-        <a:font script="Deva" typeface="Mangal"/>
-        <a:font script="Telu" typeface="Gautami"/>
-        <a:font script="Taml" typeface="Latha"/>
-        <a:font script="Syrc" typeface="Estrangelo Edessa"/>
-        <a:font script="Orya" typeface="Kalinga"/>
-        <a:font script="Mlym" typeface="Kartika"/>
-        <a:font script="Laoo" typeface="DokChampa"/>
-        <a:font script="Sinh" typeface="Iskoola Pota"/>
-        <a:font script="Mong" typeface="Mongolian Baiti"/>
-        <a:font script="Viet" typeface="Arial"/>
-        <a:font script="Uigh" typeface="Microsoft Uighur"/>
-        <a:font script="Geor" typeface="Sylfaen"/>
-        <a:font script="Armn" typeface="Arial"/>
-        <a:font script="Bugi" typeface="Leelawadee UI"/>
-        <a:font script="Bopo" typeface="Microsoft JhengHei"/>
-        <a:font script="Java" typeface="Javanese Text"/>
-        <a:font script="Lisu" typeface="Segoe UI"/>
-        <a:font script="Mymr" typeface="Myanmar Text"/>
-        <a:font script="Nkoo" typeface="Ebrima"/>
-        <a:font script="Olck" typeface="Nirmala UI"/>
-        <a:font script="Osma" typeface="Ebrima"/>
-        <a:font script="Phag" typeface="Phagspa"/>
-        <a:font script="Syrn" typeface="Estrangelo Edessa"/>
-        <a:font script="Syrj" typeface="Estrangelo Edessa"/>
-        <a:font script="Syre" typeface="Estrangelo Edessa"/>
-        <a:font script="Sora" typeface="Nirmala UI"/>
-        <a:font script="Tale" typeface="Microsoft Tai Le"/>
-        <a:font script="Talu" typeface="Microsoft New Tai Lue"/>
-        <a:font script="Tfng" typeface="Ebrima"/>
-      </a:minorFont>
-    </a:fontScheme>
-    <a:fmtScheme name="Стандартная">
-      <a:fillStyleLst>
-        <a:solidFill>
-          <a:schemeClr val="phClr"/>
-        </a:solidFill>
-        <a:gradFill rotWithShape="1">
-          <a:gsLst>
-            <a:gs pos="0">
-              <a:schemeClr val="phClr">
-                <a:lumMod val="110000"/>
-                <a:satMod val="105000"/>
-                <a:tint val="67000"/>
-              </a:schemeClr>
-            </a:gs>
-            <a:gs pos="50000">
-              <a:schemeClr val="phClr">
-                <a:lumMod val="105000"/>
-                <a:satMod val="103000"/>
-                <a:tint val="73000"/>
-              </a:schemeClr>
-            </a:gs>
-            <a:gs pos="100000">
-              <a:schemeClr val="phClr">
-                <a:lumMod val="105000"/>
-                <a:satMod val="109000"/>
-                <a:tint val="81000"/>
-              </a:schemeClr>
-            </a:gs>
-          </a:gsLst>
-          <a:lin ang="5400000" scaled="0"/>
-        </a:gradFill>
-        <a:gradFill rotWithShape="1">
-          <a:gsLst>
-            <a:gs pos="0">
-              <a:schemeClr val="phClr">
-                <a:satMod val="103000"/>
-                <a:lumMod val="102000"/>
-                <a:tint val="94000"/>
-              </a:schemeClr>
-            </a:gs>
-            <a:gs pos="50000">
-              <a:schemeClr val="phClr">
-                <a:satMod val="110000"/>
-                <a:lumMod val="100000"/>
-                <a:shade val="100000"/>
-              </a:schemeClr>
-            </a:gs>
-            <a:gs pos="100000">
-              <a:schemeClr val="phClr">
-                <a:lumMod val="99000"/>
-                <a:satMod val="120000"/>
-                <a:shade val="78000"/>
-              </a:schemeClr>
-            </a:gs>
-          </a:gsLst>
-          <a:lin ang="5400000" scaled="0"/>
-        </a:gradFill>
-      </a:fillStyleLst>
-      <a:lnStyleLst>
-        <a:ln w="6350" cap="flat" cmpd="sng" algn="ctr">
-          <a:solidFill>
-            <a:schemeClr val="phClr"/>
-          </a:solidFill>
-          <a:prstDash val="solid"/>
-          <a:miter lim="800000"/>
-        </a:ln>
-        <a:ln w="12700" cap="flat" cmpd="sng" algn="ctr">
-          <a:solidFill>
-            <a:schemeClr val="phClr"/>
-          </a:solidFill>
-          <a:prstDash val="solid"/>
-          <a:miter lim="800000"/>
-        </a:ln>
-        <a:ln w="19050" cap="flat" cmpd="sng" algn="ctr">
-          <a:solidFill>
-            <a:schemeClr val="phClr"/>
-          </a:solidFill>
-          <a:prstDash val="solid"/>
-          <a:miter lim="800000"/>
-        </a:ln>
-      </a:lnStyleLst>
-      <a:effectStyleLst>
-        <a:effectStyle>
-          <a:effectLst/>
-        </a:effectStyle>
-        <a:effectStyle>
-          <a:effectLst/>
-        </a:effectStyle>
-        <a:effectStyle>
-          <a:effectLst>
-            <a:outerShdw blurRad="57150" dist="19050" dir="5400000" algn="ctr" rotWithShape="0">
-              <a:srgbClr val="000000">
-                <a:alpha val="63000"/>
-              </a:srgbClr>
-            </a:outerShdw>
-          </a:effectLst>
-        </a:effectStyle>
-      </a:effectStyleLst>
-      <a:bgFillStyleLst>
-        <a:solidFill>
-          <a:schemeClr val="phClr"/>
-        </a:solidFill>
-        <a:solidFill>
-          <a:schemeClr val="phClr">
-            <a:tint val="95000"/>
-            <a:satMod val="170000"/>
-          </a:schemeClr>
-        </a:solidFill>
-        <a:gradFill rotWithShape="1">
-          <a:gsLst>
-            <a:gs pos="0">
-              <a:schemeClr val="phClr">
-                <a:tint val="93000"/>
-                <a:satMod val="150000"/>
-                <a:shade val="98000"/>
-                <a:lumMod val="102000"/>
-              </a:schemeClr>
-            </a:gs>
-            <a:gs pos="50000">
-              <a:schemeClr val="phClr">
-                <a:tint val="98000"/>
-                <a:satMod val="130000"/>
-                <a:shade val="90000"/>
-                <a:lumMod val="103000"/>
-              </a:schemeClr>
-            </a:gs>
-            <a:gs pos="100000">
-              <a:schemeClr val="phClr">
-                <a:shade val="63000"/>
-                <a:satMod val="120000"/>
-              </a:schemeClr>
-            </a:gs>
-          </a:gsLst>
-          <a:lin ang="5400000" scaled="0"/>
-        </a:gradFill>
-      </a:bgFillStyleLst>
-    </a:fmtScheme>
-  </a:themeElements>
-  <a:objectDefaults/>
-  <a:extraClrSchemeLst/>
-  <a:extLst>
-    <a:ext uri="{05A4C25C-085E-4340-85A3-A5531E510DB2}">
-      <thm15:themeFamily xmlns:thm15="http://schemas.microsoft.com/office/thememl/2012/main" name="Office Theme" id="{62F939B6-93AF-4DB8-9C6B-D6C7DFDC589F}" vid="{4A3C46E8-61CC-4603-A589-7422A47A8E4A}"/>
-    </a:ext>
-  </a:extLst>
-</a:theme>
 </file>